--- a/docs/plots/carbo/jx_carbo_linsubhr_egfrdisc_grade2.pptx
+++ b/docs/plots/carbo/jx_carbo_linsubhr_egfrdisc_grade2.pptx
@@ -3003,524 +3003,524 @@
           <p:spPr>
             <a:xfrm>
               <a:off x="1172049" y="2073503"/>
-              <a:ext cx="7090630" cy="3215855"/>
+              <a:ext cx="7090630" cy="3214842"/>
             </a:xfrm>
             <a:custGeom>
               <a:avLst/>
               <a:pathLst>
-                <a:path w="7090630" h="3215855">
+                <a:path w="7090630" h="3214842">
                   <a:moveTo>
-                    <a:pt x="2118092" y="0"/>
+                    <a:pt x="2108777" y="0"/>
                   </a:moveTo>
                   <a:lnTo>
-                    <a:pt x="2148675" y="55103"/>
-                  </a:lnTo>
-                  <a:lnTo>
-                    <a:pt x="2220298" y="179470"/>
-                  </a:lnTo>
-                  <a:lnTo>
-                    <a:pt x="2291920" y="299325"/>
-                  </a:lnTo>
-                  <a:lnTo>
-                    <a:pt x="2363543" y="414832"/>
-                  </a:lnTo>
-                  <a:lnTo>
-                    <a:pt x="2435165" y="526150"/>
-                  </a:lnTo>
-                  <a:lnTo>
-                    <a:pt x="2506788" y="633430"/>
-                  </a:lnTo>
-                  <a:lnTo>
-                    <a:pt x="2578410" y="736819"/>
-                  </a:lnTo>
-                  <a:lnTo>
-                    <a:pt x="2650033" y="836457"/>
-                  </a:lnTo>
-                  <a:lnTo>
-                    <a:pt x="2721655" y="932482"/>
-                  </a:lnTo>
-                  <a:lnTo>
-                    <a:pt x="2793278" y="1025023"/>
-                  </a:lnTo>
-                  <a:lnTo>
-                    <a:pt x="2864901" y="1114207"/>
-                  </a:lnTo>
-                  <a:lnTo>
-                    <a:pt x="2936523" y="1200157"/>
-                  </a:lnTo>
-                  <a:lnTo>
-                    <a:pt x="3008146" y="1282989"/>
-                  </a:lnTo>
-                  <a:lnTo>
-                    <a:pt x="3079768" y="1362816"/>
-                  </a:lnTo>
-                  <a:lnTo>
-                    <a:pt x="3151391" y="1439748"/>
-                  </a:lnTo>
-                  <a:lnTo>
-                    <a:pt x="3223013" y="1513890"/>
-                  </a:lnTo>
-                  <a:lnTo>
-                    <a:pt x="3294636" y="1585342"/>
-                  </a:lnTo>
-                  <a:lnTo>
-                    <a:pt x="3366258" y="1654202"/>
-                  </a:lnTo>
-                  <a:lnTo>
-                    <a:pt x="3437881" y="1720564"/>
-                  </a:lnTo>
-                  <a:lnTo>
-                    <a:pt x="3509503" y="1784520"/>
-                  </a:lnTo>
-                  <a:lnTo>
-                    <a:pt x="3581126" y="1846155"/>
-                  </a:lnTo>
-                  <a:lnTo>
-                    <a:pt x="3652748" y="1905555"/>
-                  </a:lnTo>
-                  <a:lnTo>
-                    <a:pt x="3724371" y="1962800"/>
-                  </a:lnTo>
-                  <a:lnTo>
-                    <a:pt x="3795993" y="2017969"/>
-                  </a:lnTo>
-                  <a:lnTo>
-                    <a:pt x="3867616" y="2071137"/>
-                  </a:lnTo>
-                  <a:lnTo>
-                    <a:pt x="3939238" y="2122376"/>
-                  </a:lnTo>
-                  <a:lnTo>
-                    <a:pt x="4010861" y="2171757"/>
-                  </a:lnTo>
-                  <a:lnTo>
-                    <a:pt x="4082483" y="2219346"/>
-                  </a:lnTo>
-                  <a:lnTo>
-                    <a:pt x="4154106" y="2265209"/>
-                  </a:lnTo>
-                  <a:lnTo>
-                    <a:pt x="4225729" y="2309409"/>
-                  </a:lnTo>
-                  <a:lnTo>
-                    <a:pt x="4297351" y="2352005"/>
-                  </a:lnTo>
-                  <a:lnTo>
-                    <a:pt x="4368974" y="2393057"/>
-                  </a:lnTo>
-                  <a:lnTo>
-                    <a:pt x="4440596" y="2432619"/>
-                  </a:lnTo>
-                  <a:lnTo>
-                    <a:pt x="4512219" y="2470746"/>
-                  </a:lnTo>
-                  <a:lnTo>
-                    <a:pt x="4583841" y="2507490"/>
-                  </a:lnTo>
-                  <a:lnTo>
-                    <a:pt x="4655464" y="2542902"/>
-                  </a:lnTo>
-                  <a:lnTo>
-                    <a:pt x="4727086" y="2577029"/>
-                  </a:lnTo>
-                  <a:lnTo>
-                    <a:pt x="4798709" y="2609918"/>
-                  </a:lnTo>
-                  <a:lnTo>
-                    <a:pt x="4870331" y="2641614"/>
-                  </a:lnTo>
-                  <a:lnTo>
-                    <a:pt x="4941954" y="2656057"/>
-                  </a:lnTo>
-                  <a:lnTo>
-                    <a:pt x="5013576" y="2659057"/>
-                  </a:lnTo>
-                  <a:lnTo>
-                    <a:pt x="5085199" y="2662046"/>
-                  </a:lnTo>
-                  <a:lnTo>
-                    <a:pt x="5156821" y="2665024"/>
-                  </a:lnTo>
-                  <a:lnTo>
-                    <a:pt x="5228444" y="2667991"/>
-                  </a:lnTo>
-                  <a:lnTo>
-                    <a:pt x="5300066" y="2670948"/>
-                  </a:lnTo>
-                  <a:lnTo>
-                    <a:pt x="5371689" y="2673893"/>
-                  </a:lnTo>
-                  <a:lnTo>
-                    <a:pt x="5443311" y="2676829"/>
-                  </a:lnTo>
-                  <a:lnTo>
-                    <a:pt x="5514934" y="2679753"/>
-                  </a:lnTo>
-                  <a:lnTo>
-                    <a:pt x="5586557" y="2682667"/>
-                  </a:lnTo>
-                  <a:lnTo>
-                    <a:pt x="5658179" y="2685570"/>
-                  </a:lnTo>
-                  <a:lnTo>
-                    <a:pt x="5729802" y="2688463"/>
-                  </a:lnTo>
-                  <a:lnTo>
-                    <a:pt x="5801424" y="2691346"/>
-                  </a:lnTo>
-                  <a:lnTo>
-                    <a:pt x="5873047" y="2694217"/>
-                  </a:lnTo>
-                  <a:lnTo>
-                    <a:pt x="5944669" y="2697079"/>
-                  </a:lnTo>
-                  <a:lnTo>
-                    <a:pt x="6016292" y="2699930"/>
-                  </a:lnTo>
-                  <a:lnTo>
-                    <a:pt x="6087914" y="2702771"/>
-                  </a:lnTo>
-                  <a:lnTo>
-                    <a:pt x="6159537" y="2705601"/>
-                  </a:lnTo>
-                  <a:lnTo>
-                    <a:pt x="6231159" y="2708422"/>
-                  </a:lnTo>
-                  <a:lnTo>
-                    <a:pt x="6302782" y="2711232"/>
-                  </a:lnTo>
-                  <a:lnTo>
-                    <a:pt x="6374404" y="2714031"/>
-                  </a:lnTo>
-                  <a:lnTo>
-                    <a:pt x="6446027" y="2716821"/>
-                  </a:lnTo>
-                  <a:lnTo>
-                    <a:pt x="6517649" y="2719601"/>
-                  </a:lnTo>
-                  <a:lnTo>
-                    <a:pt x="6589272" y="2722370"/>
-                  </a:lnTo>
-                  <a:lnTo>
-                    <a:pt x="6660894" y="2725130"/>
-                  </a:lnTo>
-                  <a:lnTo>
-                    <a:pt x="6732517" y="2727879"/>
-                  </a:lnTo>
-                  <a:lnTo>
-                    <a:pt x="6804139" y="2730618"/>
-                  </a:lnTo>
-                  <a:lnTo>
-                    <a:pt x="6875762" y="2733348"/>
-                  </a:lnTo>
-                  <a:lnTo>
-                    <a:pt x="6947385" y="2736068"/>
-                  </a:lnTo>
-                  <a:lnTo>
-                    <a:pt x="7019007" y="2738777"/>
-                  </a:lnTo>
-                  <a:lnTo>
-                    <a:pt x="7090630" y="2741477"/>
-                  </a:lnTo>
-                  <a:lnTo>
-                    <a:pt x="7090630" y="3215855"/>
-                  </a:lnTo>
-                  <a:lnTo>
-                    <a:pt x="7019007" y="3205772"/>
-                  </a:lnTo>
-                  <a:lnTo>
-                    <a:pt x="6947385" y="3195309"/>
-                  </a:lnTo>
-                  <a:lnTo>
-                    <a:pt x="6875762" y="3184453"/>
-                  </a:lnTo>
-                  <a:lnTo>
-                    <a:pt x="6804139" y="3173188"/>
-                  </a:lnTo>
-                  <a:lnTo>
-                    <a:pt x="6732517" y="3161500"/>
-                  </a:lnTo>
-                  <a:lnTo>
-                    <a:pt x="6660894" y="3149371"/>
-                  </a:lnTo>
-                  <a:lnTo>
-                    <a:pt x="6589272" y="3136786"/>
-                  </a:lnTo>
-                  <a:lnTo>
-                    <a:pt x="6517649" y="3123727"/>
-                  </a:lnTo>
-                  <a:lnTo>
-                    <a:pt x="6446027" y="3110176"/>
-                  </a:lnTo>
-                  <a:lnTo>
-                    <a:pt x="6374404" y="3096116"/>
-                  </a:lnTo>
-                  <a:lnTo>
-                    <a:pt x="6302782" y="3081526"/>
-                  </a:lnTo>
-                  <a:lnTo>
-                    <a:pt x="6231159" y="3066388"/>
-                  </a:lnTo>
-                  <a:lnTo>
-                    <a:pt x="6159537" y="3050679"/>
-                  </a:lnTo>
-                  <a:lnTo>
-                    <a:pt x="6087914" y="3034379"/>
-                  </a:lnTo>
-                  <a:lnTo>
-                    <a:pt x="6016292" y="3017466"/>
-                  </a:lnTo>
-                  <a:lnTo>
-                    <a:pt x="5944669" y="2999916"/>
-                  </a:lnTo>
-                  <a:lnTo>
-                    <a:pt x="5873047" y="2981706"/>
-                  </a:lnTo>
-                  <a:lnTo>
-                    <a:pt x="5801424" y="2962810"/>
-                  </a:lnTo>
-                  <a:lnTo>
-                    <a:pt x="5729802" y="2943203"/>
-                  </a:lnTo>
-                  <a:lnTo>
-                    <a:pt x="5658179" y="2922858"/>
-                  </a:lnTo>
-                  <a:lnTo>
-                    <a:pt x="5586557" y="2901748"/>
-                  </a:lnTo>
-                  <a:lnTo>
-                    <a:pt x="5514934" y="2879843"/>
-                  </a:lnTo>
-                  <a:lnTo>
-                    <a:pt x="5443311" y="2857113"/>
-                  </a:lnTo>
-                  <a:lnTo>
-                    <a:pt x="5371689" y="2833528"/>
-                  </a:lnTo>
-                  <a:lnTo>
-                    <a:pt x="5300066" y="2809055"/>
-                  </a:lnTo>
-                  <a:lnTo>
-                    <a:pt x="5228444" y="2783661"/>
-                  </a:lnTo>
-                  <a:lnTo>
-                    <a:pt x="5156821" y="2757311"/>
-                  </a:lnTo>
-                  <a:lnTo>
-                    <a:pt x="5085199" y="2729969"/>
-                  </a:lnTo>
-                  <a:lnTo>
-                    <a:pt x="5013576" y="2701599"/>
-                  </a:lnTo>
-                  <a:lnTo>
-                    <a:pt x="4941954" y="2672160"/>
-                  </a:lnTo>
-                  <a:lnTo>
-                    <a:pt x="4870331" y="2653046"/>
-                  </a:lnTo>
-                  <a:lnTo>
-                    <a:pt x="4798709" y="2650025"/>
-                  </a:lnTo>
-                  <a:lnTo>
-                    <a:pt x="4727086" y="2646992"/>
-                  </a:lnTo>
-                  <a:lnTo>
-                    <a:pt x="4655464" y="2643948"/>
-                  </a:lnTo>
-                  <a:lnTo>
-                    <a:pt x="4583841" y="2640894"/>
-                  </a:lnTo>
-                  <a:lnTo>
-                    <a:pt x="4512219" y="2637828"/>
-                  </a:lnTo>
-                  <a:lnTo>
-                    <a:pt x="4440596" y="2634751"/>
-                  </a:lnTo>
-                  <a:lnTo>
-                    <a:pt x="4368974" y="2631663"/>
-                  </a:lnTo>
-                  <a:lnTo>
-                    <a:pt x="4297351" y="2628563"/>
-                  </a:lnTo>
-                  <a:lnTo>
-                    <a:pt x="4225729" y="2625452"/>
-                  </a:lnTo>
-                  <a:lnTo>
-                    <a:pt x="4154106" y="2622330"/>
-                  </a:lnTo>
-                  <a:lnTo>
-                    <a:pt x="4082483" y="2619197"/>
-                  </a:lnTo>
-                  <a:lnTo>
-                    <a:pt x="4010861" y="2616052"/>
-                  </a:lnTo>
-                  <a:lnTo>
-                    <a:pt x="3939238" y="2612896"/>
-                  </a:lnTo>
-                  <a:lnTo>
-                    <a:pt x="3867616" y="2609728"/>
-                  </a:lnTo>
-                  <a:lnTo>
-                    <a:pt x="3795993" y="2606549"/>
-                  </a:lnTo>
-                  <a:lnTo>
-                    <a:pt x="3724371" y="2603358"/>
-                  </a:lnTo>
-                  <a:lnTo>
-                    <a:pt x="3652748" y="2600156"/>
-                  </a:lnTo>
-                  <a:lnTo>
-                    <a:pt x="3581126" y="2596942"/>
-                  </a:lnTo>
-                  <a:lnTo>
-                    <a:pt x="3509503" y="2593716"/>
-                  </a:lnTo>
-                  <a:lnTo>
-                    <a:pt x="3437881" y="2590479"/>
-                  </a:lnTo>
-                  <a:lnTo>
-                    <a:pt x="3366258" y="2587229"/>
-                  </a:lnTo>
-                  <a:lnTo>
-                    <a:pt x="3294636" y="2583968"/>
-                  </a:lnTo>
-                  <a:lnTo>
-                    <a:pt x="3223013" y="2580695"/>
-                  </a:lnTo>
-                  <a:lnTo>
-                    <a:pt x="3151391" y="2577411"/>
-                  </a:lnTo>
-                  <a:lnTo>
-                    <a:pt x="3079768" y="2574114"/>
-                  </a:lnTo>
-                  <a:lnTo>
-                    <a:pt x="3008146" y="2570805"/>
-                  </a:lnTo>
-                  <a:lnTo>
-                    <a:pt x="2936523" y="2567484"/>
-                  </a:lnTo>
-                  <a:lnTo>
-                    <a:pt x="2864901" y="2564151"/>
-                  </a:lnTo>
-                  <a:lnTo>
-                    <a:pt x="2793278" y="2560806"/>
-                  </a:lnTo>
-                  <a:lnTo>
-                    <a:pt x="2721655" y="2557449"/>
-                  </a:lnTo>
-                  <a:lnTo>
-                    <a:pt x="2650033" y="2554080"/>
-                  </a:lnTo>
-                  <a:lnTo>
-                    <a:pt x="2578410" y="2550698"/>
-                  </a:lnTo>
-                  <a:lnTo>
-                    <a:pt x="2506788" y="2547304"/>
-                  </a:lnTo>
-                  <a:lnTo>
-                    <a:pt x="2435165" y="2543898"/>
-                  </a:lnTo>
-                  <a:lnTo>
-                    <a:pt x="2363543" y="2540479"/>
-                  </a:lnTo>
-                  <a:lnTo>
-                    <a:pt x="2291920" y="2537048"/>
-                  </a:lnTo>
-                  <a:lnTo>
-                    <a:pt x="2220298" y="2533605"/>
-                  </a:lnTo>
-                  <a:lnTo>
-                    <a:pt x="2148675" y="2530149"/>
-                  </a:lnTo>
-                  <a:lnTo>
-                    <a:pt x="2077053" y="2526680"/>
-                  </a:lnTo>
-                  <a:lnTo>
-                    <a:pt x="2005430" y="2523199"/>
-                  </a:lnTo>
-                  <a:lnTo>
-                    <a:pt x="1933808" y="2519705"/>
-                  </a:lnTo>
-                  <a:lnTo>
-                    <a:pt x="1862185" y="2516198"/>
-                  </a:lnTo>
-                  <a:lnTo>
-                    <a:pt x="1790563" y="2512678"/>
-                  </a:lnTo>
-                  <a:lnTo>
-                    <a:pt x="1718940" y="2509146"/>
-                  </a:lnTo>
-                  <a:lnTo>
-                    <a:pt x="1647318" y="2505601"/>
-                  </a:lnTo>
-                  <a:lnTo>
-                    <a:pt x="1575695" y="2502043"/>
-                  </a:lnTo>
-                  <a:lnTo>
-                    <a:pt x="1504073" y="2498472"/>
-                  </a:lnTo>
-                  <a:lnTo>
-                    <a:pt x="1432450" y="2494888"/>
-                  </a:lnTo>
-                  <a:lnTo>
-                    <a:pt x="1360827" y="2491291"/>
-                  </a:lnTo>
-                  <a:lnTo>
-                    <a:pt x="1289205" y="2487681"/>
-                  </a:lnTo>
-                  <a:lnTo>
-                    <a:pt x="1217582" y="2484058"/>
-                  </a:lnTo>
-                  <a:lnTo>
-                    <a:pt x="1145960" y="2480422"/>
-                  </a:lnTo>
-                  <a:lnTo>
-                    <a:pt x="1074337" y="2476772"/>
-                  </a:lnTo>
-                  <a:lnTo>
-                    <a:pt x="1002715" y="2473109"/>
-                  </a:lnTo>
-                  <a:lnTo>
-                    <a:pt x="931092" y="2469433"/>
-                  </a:lnTo>
-                  <a:lnTo>
-                    <a:pt x="859470" y="2465744"/>
-                  </a:lnTo>
-                  <a:lnTo>
-                    <a:pt x="787847" y="2462041"/>
-                  </a:lnTo>
-                  <a:lnTo>
-                    <a:pt x="716225" y="2458324"/>
-                  </a:lnTo>
-                  <a:lnTo>
-                    <a:pt x="644602" y="2454594"/>
-                  </a:lnTo>
-                  <a:lnTo>
-                    <a:pt x="572980" y="2450851"/>
-                  </a:lnTo>
-                  <a:lnTo>
-                    <a:pt x="501357" y="2447094"/>
-                  </a:lnTo>
-                  <a:lnTo>
-                    <a:pt x="429735" y="2443323"/>
-                  </a:lnTo>
-                  <a:lnTo>
-                    <a:pt x="358112" y="2439538"/>
-                  </a:lnTo>
-                  <a:lnTo>
-                    <a:pt x="286490" y="2435740"/>
-                  </a:lnTo>
-                  <a:lnTo>
-                    <a:pt x="214867" y="2431928"/>
-                  </a:lnTo>
-                  <a:lnTo>
-                    <a:pt x="143245" y="2428102"/>
-                  </a:lnTo>
-                  <a:lnTo>
-                    <a:pt x="71622" y="2424262"/>
-                  </a:lnTo>
-                  <a:lnTo>
-                    <a:pt x="0" y="2420408"/>
+                    <a:pt x="2148675" y="71304"/>
+                  </a:lnTo>
+                  <a:lnTo>
+                    <a:pt x="2220298" y="194677"/>
+                  </a:lnTo>
+                  <a:lnTo>
+                    <a:pt x="2291920" y="313589"/>
+                  </a:lnTo>
+                  <a:lnTo>
+                    <a:pt x="2363543" y="428203"/>
+                  </a:lnTo>
+                  <a:lnTo>
+                    <a:pt x="2435165" y="538672"/>
+                  </a:lnTo>
+                  <a:lnTo>
+                    <a:pt x="2506788" y="645148"/>
+                  </a:lnTo>
+                  <a:lnTo>
+                    <a:pt x="2578410" y="747774"/>
+                  </a:lnTo>
+                  <a:lnTo>
+                    <a:pt x="2650033" y="846690"/>
+                  </a:lnTo>
+                  <a:lnTo>
+                    <a:pt x="2721655" y="942030"/>
+                  </a:lnTo>
+                  <a:lnTo>
+                    <a:pt x="2793278" y="1033923"/>
+                  </a:lnTo>
+                  <a:lnTo>
+                    <a:pt x="2864901" y="1122494"/>
+                  </a:lnTo>
+                  <a:lnTo>
+                    <a:pt x="2936523" y="1207862"/>
+                  </a:lnTo>
+                  <a:lnTo>
+                    <a:pt x="3008146" y="1290144"/>
+                  </a:lnTo>
+                  <a:lnTo>
+                    <a:pt x="3079768" y="1369451"/>
+                  </a:lnTo>
+                  <a:lnTo>
+                    <a:pt x="3151391" y="1445891"/>
+                  </a:lnTo>
+                  <a:lnTo>
+                    <a:pt x="3223013" y="1519567"/>
+                  </a:lnTo>
+                  <a:lnTo>
+                    <a:pt x="3294636" y="1590580"/>
+                  </a:lnTo>
+                  <a:lnTo>
+                    <a:pt x="3366258" y="1659025"/>
+                  </a:lnTo>
+                  <a:lnTo>
+                    <a:pt x="3437881" y="1724996"/>
+                  </a:lnTo>
+                  <a:lnTo>
+                    <a:pt x="3509503" y="1788582"/>
+                  </a:lnTo>
+                  <a:lnTo>
+                    <a:pt x="3581126" y="1849868"/>
+                  </a:lnTo>
+                  <a:lnTo>
+                    <a:pt x="3652748" y="1908939"/>
+                  </a:lnTo>
+                  <a:lnTo>
+                    <a:pt x="3724371" y="1965875"/>
+                  </a:lnTo>
+                  <a:lnTo>
+                    <a:pt x="3795993" y="2020752"/>
+                  </a:lnTo>
+                  <a:lnTo>
+                    <a:pt x="3867616" y="2073645"/>
+                  </a:lnTo>
+                  <a:lnTo>
+                    <a:pt x="3939238" y="2124625"/>
+                  </a:lnTo>
+                  <a:lnTo>
+                    <a:pt x="4010861" y="2173763"/>
+                  </a:lnTo>
+                  <a:lnTo>
+                    <a:pt x="4082483" y="2221124"/>
+                  </a:lnTo>
+                  <a:lnTo>
+                    <a:pt x="4154106" y="2266772"/>
+                  </a:lnTo>
+                  <a:lnTo>
+                    <a:pt x="4225729" y="2310771"/>
+                  </a:lnTo>
+                  <a:lnTo>
+                    <a:pt x="4297351" y="2353178"/>
+                  </a:lnTo>
+                  <a:lnTo>
+                    <a:pt x="4368974" y="2394053"/>
+                  </a:lnTo>
+                  <a:lnTo>
+                    <a:pt x="4440596" y="2433449"/>
+                  </a:lnTo>
+                  <a:lnTo>
+                    <a:pt x="4512219" y="2471422"/>
+                  </a:lnTo>
+                  <a:lnTo>
+                    <a:pt x="4583841" y="2508021"/>
+                  </a:lnTo>
+                  <a:lnTo>
+                    <a:pt x="4655464" y="2543297"/>
+                  </a:lnTo>
+                  <a:lnTo>
+                    <a:pt x="4727086" y="2577298"/>
+                  </a:lnTo>
+                  <a:lnTo>
+                    <a:pt x="4798709" y="2610070"/>
+                  </a:lnTo>
+                  <a:lnTo>
+                    <a:pt x="4870331" y="2641657"/>
+                  </a:lnTo>
+                  <a:lnTo>
+                    <a:pt x="4941954" y="2654270"/>
+                  </a:lnTo>
+                  <a:lnTo>
+                    <a:pt x="5013576" y="2654249"/>
+                  </a:lnTo>
+                  <a:lnTo>
+                    <a:pt x="5085199" y="2654227"/>
+                  </a:lnTo>
+                  <a:lnTo>
+                    <a:pt x="5156821" y="2654206"/>
+                  </a:lnTo>
+                  <a:lnTo>
+                    <a:pt x="5228444" y="2654184"/>
+                  </a:lnTo>
+                  <a:lnTo>
+                    <a:pt x="5300066" y="2654163"/>
+                  </a:lnTo>
+                  <a:lnTo>
+                    <a:pt x="5371689" y="2654141"/>
+                  </a:lnTo>
+                  <a:lnTo>
+                    <a:pt x="5443311" y="2654120"/>
+                  </a:lnTo>
+                  <a:lnTo>
+                    <a:pt x="5514934" y="2654098"/>
+                  </a:lnTo>
+                  <a:lnTo>
+                    <a:pt x="5586557" y="2654077"/>
+                  </a:lnTo>
+                  <a:lnTo>
+                    <a:pt x="5658179" y="2654055"/>
+                  </a:lnTo>
+                  <a:lnTo>
+                    <a:pt x="5729802" y="2654034"/>
+                  </a:lnTo>
+                  <a:lnTo>
+                    <a:pt x="5801424" y="2654012"/>
+                  </a:lnTo>
+                  <a:lnTo>
+                    <a:pt x="5873047" y="2653991"/>
+                  </a:lnTo>
+                  <a:lnTo>
+                    <a:pt x="5944669" y="2653969"/>
+                  </a:lnTo>
+                  <a:lnTo>
+                    <a:pt x="6016292" y="2653948"/>
+                  </a:lnTo>
+                  <a:lnTo>
+                    <a:pt x="6087914" y="2653926"/>
+                  </a:lnTo>
+                  <a:lnTo>
+                    <a:pt x="6159537" y="2653905"/>
+                  </a:lnTo>
+                  <a:lnTo>
+                    <a:pt x="6231159" y="2653883"/>
+                  </a:lnTo>
+                  <a:lnTo>
+                    <a:pt x="6302782" y="2653862"/>
+                  </a:lnTo>
+                  <a:lnTo>
+                    <a:pt x="6374404" y="2653840"/>
+                  </a:lnTo>
+                  <a:lnTo>
+                    <a:pt x="6446027" y="2653819"/>
+                  </a:lnTo>
+                  <a:lnTo>
+                    <a:pt x="6517649" y="2653797"/>
+                  </a:lnTo>
+                  <a:lnTo>
+                    <a:pt x="6589272" y="2653776"/>
+                  </a:lnTo>
+                  <a:lnTo>
+                    <a:pt x="6660894" y="2653754"/>
+                  </a:lnTo>
+                  <a:lnTo>
+                    <a:pt x="6732517" y="2653733"/>
+                  </a:lnTo>
+                  <a:lnTo>
+                    <a:pt x="6804139" y="2653711"/>
+                  </a:lnTo>
+                  <a:lnTo>
+                    <a:pt x="6875762" y="2653690"/>
+                  </a:lnTo>
+                  <a:lnTo>
+                    <a:pt x="6947385" y="2653668"/>
+                  </a:lnTo>
+                  <a:lnTo>
+                    <a:pt x="7019007" y="2653647"/>
+                  </a:lnTo>
+                  <a:lnTo>
+                    <a:pt x="7090630" y="2653625"/>
+                  </a:lnTo>
+                  <a:lnTo>
+                    <a:pt x="7090630" y="3214842"/>
+                  </a:lnTo>
+                  <a:lnTo>
+                    <a:pt x="7019007" y="3204756"/>
+                  </a:lnTo>
+                  <a:lnTo>
+                    <a:pt x="6947385" y="3194291"/>
+                  </a:lnTo>
+                  <a:lnTo>
+                    <a:pt x="6875762" y="3183433"/>
+                  </a:lnTo>
+                  <a:lnTo>
+                    <a:pt x="6804139" y="3172169"/>
+                  </a:lnTo>
+                  <a:lnTo>
+                    <a:pt x="6732517" y="3160481"/>
+                  </a:lnTo>
+                  <a:lnTo>
+                    <a:pt x="6660894" y="3148356"/>
+                  </a:lnTo>
+                  <a:lnTo>
+                    <a:pt x="6589272" y="3135775"/>
+                  </a:lnTo>
+                  <a:lnTo>
+                    <a:pt x="6517649" y="3122723"/>
+                  </a:lnTo>
+                  <a:lnTo>
+                    <a:pt x="6446027" y="3109181"/>
+                  </a:lnTo>
+                  <a:lnTo>
+                    <a:pt x="6374404" y="3095131"/>
+                  </a:lnTo>
+                  <a:lnTo>
+                    <a:pt x="6302782" y="3080554"/>
+                  </a:lnTo>
+                  <a:lnTo>
+                    <a:pt x="6231159" y="3065430"/>
+                  </a:lnTo>
+                  <a:lnTo>
+                    <a:pt x="6159537" y="3049739"/>
+                  </a:lnTo>
+                  <a:lnTo>
+                    <a:pt x="6087914" y="3033459"/>
+                  </a:lnTo>
+                  <a:lnTo>
+                    <a:pt x="6016292" y="3016569"/>
+                  </a:lnTo>
+                  <a:lnTo>
+                    <a:pt x="5944669" y="2999045"/>
+                  </a:lnTo>
+                  <a:lnTo>
+                    <a:pt x="5873047" y="2980864"/>
+                  </a:lnTo>
+                  <a:lnTo>
+                    <a:pt x="5801424" y="2962001"/>
+                  </a:lnTo>
+                  <a:lnTo>
+                    <a:pt x="5729802" y="2942430"/>
+                  </a:lnTo>
+                  <a:lnTo>
+                    <a:pt x="5658179" y="2922126"/>
+                  </a:lnTo>
+                  <a:lnTo>
+                    <a:pt x="5586557" y="2901059"/>
+                  </a:lnTo>
+                  <a:lnTo>
+                    <a:pt x="5514934" y="2879203"/>
+                  </a:lnTo>
+                  <a:lnTo>
+                    <a:pt x="5443311" y="2856526"/>
+                  </a:lnTo>
+                  <a:lnTo>
+                    <a:pt x="5371689" y="2832999"/>
+                  </a:lnTo>
+                  <a:lnTo>
+                    <a:pt x="5300066" y="2808590"/>
+                  </a:lnTo>
+                  <a:lnTo>
+                    <a:pt x="5228444" y="2783264"/>
+                  </a:lnTo>
+                  <a:lnTo>
+                    <a:pt x="5156821" y="2756989"/>
+                  </a:lnTo>
+                  <a:lnTo>
+                    <a:pt x="5085199" y="2729729"/>
+                  </a:lnTo>
+                  <a:lnTo>
+                    <a:pt x="5013576" y="2701446"/>
+                  </a:lnTo>
+                  <a:lnTo>
+                    <a:pt x="4941954" y="2672101"/>
+                  </a:lnTo>
+                  <a:lnTo>
+                    <a:pt x="4870331" y="2654292"/>
+                  </a:lnTo>
+                  <a:lnTo>
+                    <a:pt x="4798709" y="2654313"/>
+                  </a:lnTo>
+                  <a:lnTo>
+                    <a:pt x="4727086" y="2654335"/>
+                  </a:lnTo>
+                  <a:lnTo>
+                    <a:pt x="4655464" y="2654356"/>
+                  </a:lnTo>
+                  <a:lnTo>
+                    <a:pt x="4583841" y="2654378"/>
+                  </a:lnTo>
+                  <a:lnTo>
+                    <a:pt x="4512219" y="2654399"/>
+                  </a:lnTo>
+                  <a:lnTo>
+                    <a:pt x="4440596" y="2654421"/>
+                  </a:lnTo>
+                  <a:lnTo>
+                    <a:pt x="4368974" y="2654442"/>
+                  </a:lnTo>
+                  <a:lnTo>
+                    <a:pt x="4297351" y="2654464"/>
+                  </a:lnTo>
+                  <a:lnTo>
+                    <a:pt x="4225729" y="2654485"/>
+                  </a:lnTo>
+                  <a:lnTo>
+                    <a:pt x="4154106" y="2654507"/>
+                  </a:lnTo>
+                  <a:lnTo>
+                    <a:pt x="4082483" y="2654528"/>
+                  </a:lnTo>
+                  <a:lnTo>
+                    <a:pt x="4010861" y="2654550"/>
+                  </a:lnTo>
+                  <a:lnTo>
+                    <a:pt x="3939238" y="2654571"/>
+                  </a:lnTo>
+                  <a:lnTo>
+                    <a:pt x="3867616" y="2654593"/>
+                  </a:lnTo>
+                  <a:lnTo>
+                    <a:pt x="3795993" y="2654614"/>
+                  </a:lnTo>
+                  <a:lnTo>
+                    <a:pt x="3724371" y="2654636"/>
+                  </a:lnTo>
+                  <a:lnTo>
+                    <a:pt x="3652748" y="2654657"/>
+                  </a:lnTo>
+                  <a:lnTo>
+                    <a:pt x="3581126" y="2654679"/>
+                  </a:lnTo>
+                  <a:lnTo>
+                    <a:pt x="3509503" y="2654700"/>
+                  </a:lnTo>
+                  <a:lnTo>
+                    <a:pt x="3437881" y="2654722"/>
+                  </a:lnTo>
+                  <a:lnTo>
+                    <a:pt x="3366258" y="2654743"/>
+                  </a:lnTo>
+                  <a:lnTo>
+                    <a:pt x="3294636" y="2654764"/>
+                  </a:lnTo>
+                  <a:lnTo>
+                    <a:pt x="3223013" y="2654786"/>
+                  </a:lnTo>
+                  <a:lnTo>
+                    <a:pt x="3151391" y="2654807"/>
+                  </a:lnTo>
+                  <a:lnTo>
+                    <a:pt x="3079768" y="2654829"/>
+                  </a:lnTo>
+                  <a:lnTo>
+                    <a:pt x="3008146" y="2654850"/>
+                  </a:lnTo>
+                  <a:lnTo>
+                    <a:pt x="2936523" y="2654872"/>
+                  </a:lnTo>
+                  <a:lnTo>
+                    <a:pt x="2864901" y="2654893"/>
+                  </a:lnTo>
+                  <a:lnTo>
+                    <a:pt x="2793278" y="2654915"/>
+                  </a:lnTo>
+                  <a:lnTo>
+                    <a:pt x="2721655" y="2654936"/>
+                  </a:lnTo>
+                  <a:lnTo>
+                    <a:pt x="2650033" y="2654958"/>
+                  </a:lnTo>
+                  <a:lnTo>
+                    <a:pt x="2578410" y="2654979"/>
+                  </a:lnTo>
+                  <a:lnTo>
+                    <a:pt x="2506788" y="2655001"/>
+                  </a:lnTo>
+                  <a:lnTo>
+                    <a:pt x="2435165" y="2655022"/>
+                  </a:lnTo>
+                  <a:lnTo>
+                    <a:pt x="2363543" y="2655044"/>
+                  </a:lnTo>
+                  <a:lnTo>
+                    <a:pt x="2291920" y="2655065"/>
+                  </a:lnTo>
+                  <a:lnTo>
+                    <a:pt x="2220298" y="2655087"/>
+                  </a:lnTo>
+                  <a:lnTo>
+                    <a:pt x="2148675" y="2655108"/>
+                  </a:lnTo>
+                  <a:lnTo>
+                    <a:pt x="2077053" y="2655130"/>
+                  </a:lnTo>
+                  <a:lnTo>
+                    <a:pt x="2005430" y="2655151"/>
+                  </a:lnTo>
+                  <a:lnTo>
+                    <a:pt x="1933808" y="2655173"/>
+                  </a:lnTo>
+                  <a:lnTo>
+                    <a:pt x="1862185" y="2655194"/>
+                  </a:lnTo>
+                  <a:lnTo>
+                    <a:pt x="1790563" y="2655216"/>
+                  </a:lnTo>
+                  <a:lnTo>
+                    <a:pt x="1718940" y="2655237"/>
+                  </a:lnTo>
+                  <a:lnTo>
+                    <a:pt x="1647318" y="2655258"/>
+                  </a:lnTo>
+                  <a:lnTo>
+                    <a:pt x="1575695" y="2655280"/>
+                  </a:lnTo>
+                  <a:lnTo>
+                    <a:pt x="1504073" y="2655301"/>
+                  </a:lnTo>
+                  <a:lnTo>
+                    <a:pt x="1432450" y="2655323"/>
+                  </a:lnTo>
+                  <a:lnTo>
+                    <a:pt x="1360827" y="2655344"/>
+                  </a:lnTo>
+                  <a:lnTo>
+                    <a:pt x="1289205" y="2655366"/>
+                  </a:lnTo>
+                  <a:lnTo>
+                    <a:pt x="1217582" y="2655387"/>
+                  </a:lnTo>
+                  <a:lnTo>
+                    <a:pt x="1145960" y="2655409"/>
+                  </a:lnTo>
+                  <a:lnTo>
+                    <a:pt x="1074337" y="2655430"/>
+                  </a:lnTo>
+                  <a:lnTo>
+                    <a:pt x="1002715" y="2655452"/>
+                  </a:lnTo>
+                  <a:lnTo>
+                    <a:pt x="931092" y="2655473"/>
+                  </a:lnTo>
+                  <a:lnTo>
+                    <a:pt x="859470" y="2655495"/>
+                  </a:lnTo>
+                  <a:lnTo>
+                    <a:pt x="787847" y="2655516"/>
+                  </a:lnTo>
+                  <a:lnTo>
+                    <a:pt x="716225" y="2655538"/>
+                  </a:lnTo>
+                  <a:lnTo>
+                    <a:pt x="644602" y="2655559"/>
+                  </a:lnTo>
+                  <a:lnTo>
+                    <a:pt x="572980" y="2655581"/>
+                  </a:lnTo>
+                  <a:lnTo>
+                    <a:pt x="501357" y="2655602"/>
+                  </a:lnTo>
+                  <a:lnTo>
+                    <a:pt x="429735" y="2655623"/>
+                  </a:lnTo>
+                  <a:lnTo>
+                    <a:pt x="358112" y="2655645"/>
+                  </a:lnTo>
+                  <a:lnTo>
+                    <a:pt x="286490" y="2655666"/>
+                  </a:lnTo>
+                  <a:lnTo>
+                    <a:pt x="214867" y="2655688"/>
+                  </a:lnTo>
+                  <a:lnTo>
+                    <a:pt x="143245" y="2655709"/>
+                  </a:lnTo>
+                  <a:lnTo>
+                    <a:pt x="71622" y="2655731"/>
+                  </a:lnTo>
+                  <a:lnTo>
+                    <a:pt x="0" y="2655752"/>
                   </a:lnTo>
                   <a:close/>
                 </a:path>
@@ -3546,225 +3546,225 @@
           </p:nvSpPr>
           <p:spPr>
             <a:xfrm>
-              <a:off x="3290141" y="2073503"/>
-              <a:ext cx="4972537" cy="2741477"/>
+              <a:off x="3280827" y="2073503"/>
+              <a:ext cx="4981852" cy="2654270"/>
             </a:xfrm>
             <a:custGeom>
               <a:avLst/>
               <a:pathLst>
-                <a:path w="4972537" h="2741477">
+                <a:path w="4981852" h="2654270">
                   <a:moveTo>
                     <a:pt x="0" y="0"/>
                   </a:moveTo>
                   <a:lnTo>
-                    <a:pt x="30583" y="55103"/>
-                  </a:lnTo>
-                  <a:lnTo>
-                    <a:pt x="102205" y="179470"/>
-                  </a:lnTo>
-                  <a:lnTo>
-                    <a:pt x="173828" y="299325"/>
-                  </a:lnTo>
-                  <a:lnTo>
-                    <a:pt x="245450" y="414832"/>
-                  </a:lnTo>
-                  <a:lnTo>
-                    <a:pt x="317073" y="526150"/>
-                  </a:lnTo>
-                  <a:lnTo>
-                    <a:pt x="388695" y="633430"/>
-                  </a:lnTo>
-                  <a:lnTo>
-                    <a:pt x="460318" y="736819"/>
-                  </a:lnTo>
-                  <a:lnTo>
-                    <a:pt x="531940" y="836457"/>
-                  </a:lnTo>
-                  <a:lnTo>
-                    <a:pt x="603563" y="932482"/>
-                  </a:lnTo>
-                  <a:lnTo>
-                    <a:pt x="675186" y="1025023"/>
-                  </a:lnTo>
-                  <a:lnTo>
-                    <a:pt x="746808" y="1114207"/>
-                  </a:lnTo>
-                  <a:lnTo>
-                    <a:pt x="818431" y="1200157"/>
-                  </a:lnTo>
-                  <a:lnTo>
-                    <a:pt x="890053" y="1282989"/>
-                  </a:lnTo>
-                  <a:lnTo>
-                    <a:pt x="961676" y="1362816"/>
-                  </a:lnTo>
-                  <a:lnTo>
-                    <a:pt x="1033298" y="1439748"/>
-                  </a:lnTo>
-                  <a:lnTo>
-                    <a:pt x="1104921" y="1513890"/>
-                  </a:lnTo>
-                  <a:lnTo>
-                    <a:pt x="1176543" y="1585342"/>
-                  </a:lnTo>
-                  <a:lnTo>
-                    <a:pt x="1248166" y="1654202"/>
-                  </a:lnTo>
-                  <a:lnTo>
-                    <a:pt x="1319788" y="1720564"/>
-                  </a:lnTo>
-                  <a:lnTo>
-                    <a:pt x="1391411" y="1784520"/>
-                  </a:lnTo>
-                  <a:lnTo>
-                    <a:pt x="1463033" y="1846155"/>
-                  </a:lnTo>
-                  <a:lnTo>
-                    <a:pt x="1534656" y="1905555"/>
-                  </a:lnTo>
-                  <a:lnTo>
-                    <a:pt x="1606278" y="1962800"/>
-                  </a:lnTo>
-                  <a:lnTo>
-                    <a:pt x="1677901" y="2017969"/>
-                  </a:lnTo>
-                  <a:lnTo>
-                    <a:pt x="1749523" y="2071137"/>
-                  </a:lnTo>
-                  <a:lnTo>
-                    <a:pt x="1821146" y="2122376"/>
-                  </a:lnTo>
-                  <a:lnTo>
-                    <a:pt x="1892768" y="2171757"/>
-                  </a:lnTo>
-                  <a:lnTo>
-                    <a:pt x="1964391" y="2219346"/>
-                  </a:lnTo>
-                  <a:lnTo>
-                    <a:pt x="2036014" y="2265209"/>
-                  </a:lnTo>
-                  <a:lnTo>
-                    <a:pt x="2107636" y="2309409"/>
-                  </a:lnTo>
-                  <a:lnTo>
-                    <a:pt x="2179259" y="2352005"/>
-                  </a:lnTo>
-                  <a:lnTo>
-                    <a:pt x="2250881" y="2393057"/>
-                  </a:lnTo>
-                  <a:lnTo>
-                    <a:pt x="2322504" y="2432619"/>
-                  </a:lnTo>
-                  <a:lnTo>
-                    <a:pt x="2394126" y="2470746"/>
-                  </a:lnTo>
-                  <a:lnTo>
-                    <a:pt x="2465749" y="2507490"/>
-                  </a:lnTo>
-                  <a:lnTo>
-                    <a:pt x="2537371" y="2542902"/>
-                  </a:lnTo>
-                  <a:lnTo>
-                    <a:pt x="2608994" y="2577029"/>
-                  </a:lnTo>
-                  <a:lnTo>
-                    <a:pt x="2680616" y="2609918"/>
-                  </a:lnTo>
-                  <a:lnTo>
-                    <a:pt x="2752239" y="2641614"/>
-                  </a:lnTo>
-                  <a:lnTo>
-                    <a:pt x="2823861" y="2656057"/>
-                  </a:lnTo>
-                  <a:lnTo>
-                    <a:pt x="2895484" y="2659057"/>
-                  </a:lnTo>
-                  <a:lnTo>
-                    <a:pt x="2967106" y="2662046"/>
-                  </a:lnTo>
-                  <a:lnTo>
-                    <a:pt x="3038729" y="2665024"/>
-                  </a:lnTo>
-                  <a:lnTo>
-                    <a:pt x="3110351" y="2667991"/>
-                  </a:lnTo>
-                  <a:lnTo>
-                    <a:pt x="3181974" y="2670948"/>
-                  </a:lnTo>
-                  <a:lnTo>
-                    <a:pt x="3253596" y="2673893"/>
-                  </a:lnTo>
-                  <a:lnTo>
-                    <a:pt x="3325219" y="2676829"/>
-                  </a:lnTo>
-                  <a:lnTo>
-                    <a:pt x="3396842" y="2679753"/>
-                  </a:lnTo>
-                  <a:lnTo>
-                    <a:pt x="3468464" y="2682667"/>
-                  </a:lnTo>
-                  <a:lnTo>
-                    <a:pt x="3540087" y="2685570"/>
-                  </a:lnTo>
-                  <a:lnTo>
-                    <a:pt x="3611709" y="2688463"/>
-                  </a:lnTo>
-                  <a:lnTo>
-                    <a:pt x="3683332" y="2691346"/>
-                  </a:lnTo>
-                  <a:lnTo>
-                    <a:pt x="3754954" y="2694217"/>
-                  </a:lnTo>
-                  <a:lnTo>
-                    <a:pt x="3826577" y="2697079"/>
-                  </a:lnTo>
-                  <a:lnTo>
-                    <a:pt x="3898199" y="2699930"/>
-                  </a:lnTo>
-                  <a:lnTo>
-                    <a:pt x="3969822" y="2702771"/>
-                  </a:lnTo>
-                  <a:lnTo>
-                    <a:pt x="4041444" y="2705601"/>
-                  </a:lnTo>
-                  <a:lnTo>
-                    <a:pt x="4113067" y="2708422"/>
-                  </a:lnTo>
-                  <a:lnTo>
-                    <a:pt x="4184689" y="2711232"/>
-                  </a:lnTo>
-                  <a:lnTo>
-                    <a:pt x="4256312" y="2714031"/>
-                  </a:lnTo>
-                  <a:lnTo>
-                    <a:pt x="4327934" y="2716821"/>
-                  </a:lnTo>
-                  <a:lnTo>
-                    <a:pt x="4399557" y="2719601"/>
-                  </a:lnTo>
-                  <a:lnTo>
-                    <a:pt x="4471179" y="2722370"/>
-                  </a:lnTo>
-                  <a:lnTo>
-                    <a:pt x="4542802" y="2725130"/>
-                  </a:lnTo>
-                  <a:lnTo>
-                    <a:pt x="4614424" y="2727879"/>
-                  </a:lnTo>
-                  <a:lnTo>
-                    <a:pt x="4686047" y="2730618"/>
-                  </a:lnTo>
-                  <a:lnTo>
-                    <a:pt x="4757670" y="2733348"/>
-                  </a:lnTo>
-                  <a:lnTo>
-                    <a:pt x="4829292" y="2736068"/>
-                  </a:lnTo>
-                  <a:lnTo>
-                    <a:pt x="4900915" y="2738777"/>
-                  </a:lnTo>
-                  <a:lnTo>
-                    <a:pt x="4972537" y="2741477"/>
+                    <a:pt x="39898" y="71304"/>
+                  </a:lnTo>
+                  <a:lnTo>
+                    <a:pt x="111520" y="194677"/>
+                  </a:lnTo>
+                  <a:lnTo>
+                    <a:pt x="183143" y="313589"/>
+                  </a:lnTo>
+                  <a:lnTo>
+                    <a:pt x="254765" y="428203"/>
+                  </a:lnTo>
+                  <a:lnTo>
+                    <a:pt x="326388" y="538672"/>
+                  </a:lnTo>
+                  <a:lnTo>
+                    <a:pt x="398010" y="645148"/>
+                  </a:lnTo>
+                  <a:lnTo>
+                    <a:pt x="469633" y="747774"/>
+                  </a:lnTo>
+                  <a:lnTo>
+                    <a:pt x="541255" y="846690"/>
+                  </a:lnTo>
+                  <a:lnTo>
+                    <a:pt x="612878" y="942030"/>
+                  </a:lnTo>
+                  <a:lnTo>
+                    <a:pt x="684500" y="1033923"/>
+                  </a:lnTo>
+                  <a:lnTo>
+                    <a:pt x="756123" y="1122494"/>
+                  </a:lnTo>
+                  <a:lnTo>
+                    <a:pt x="827745" y="1207862"/>
+                  </a:lnTo>
+                  <a:lnTo>
+                    <a:pt x="899368" y="1290144"/>
+                  </a:lnTo>
+                  <a:lnTo>
+                    <a:pt x="970990" y="1369451"/>
+                  </a:lnTo>
+                  <a:lnTo>
+                    <a:pt x="1042613" y="1445891"/>
+                  </a:lnTo>
+                  <a:lnTo>
+                    <a:pt x="1114235" y="1519567"/>
+                  </a:lnTo>
+                  <a:lnTo>
+                    <a:pt x="1185858" y="1590580"/>
+                  </a:lnTo>
+                  <a:lnTo>
+                    <a:pt x="1257480" y="1659025"/>
+                  </a:lnTo>
+                  <a:lnTo>
+                    <a:pt x="1329103" y="1724996"/>
+                  </a:lnTo>
+                  <a:lnTo>
+                    <a:pt x="1400726" y="1788582"/>
+                  </a:lnTo>
+                  <a:lnTo>
+                    <a:pt x="1472348" y="1849868"/>
+                  </a:lnTo>
+                  <a:lnTo>
+                    <a:pt x="1543971" y="1908939"/>
+                  </a:lnTo>
+                  <a:lnTo>
+                    <a:pt x="1615593" y="1965875"/>
+                  </a:lnTo>
+                  <a:lnTo>
+                    <a:pt x="1687216" y="2020752"/>
+                  </a:lnTo>
+                  <a:lnTo>
+                    <a:pt x="1758838" y="2073645"/>
+                  </a:lnTo>
+                  <a:lnTo>
+                    <a:pt x="1830461" y="2124625"/>
+                  </a:lnTo>
+                  <a:lnTo>
+                    <a:pt x="1902083" y="2173763"/>
+                  </a:lnTo>
+                  <a:lnTo>
+                    <a:pt x="1973706" y="2221124"/>
+                  </a:lnTo>
+                  <a:lnTo>
+                    <a:pt x="2045328" y="2266772"/>
+                  </a:lnTo>
+                  <a:lnTo>
+                    <a:pt x="2116951" y="2310771"/>
+                  </a:lnTo>
+                  <a:lnTo>
+                    <a:pt x="2188573" y="2353178"/>
+                  </a:lnTo>
+                  <a:lnTo>
+                    <a:pt x="2260196" y="2394053"/>
+                  </a:lnTo>
+                  <a:lnTo>
+                    <a:pt x="2331818" y="2433449"/>
+                  </a:lnTo>
+                  <a:lnTo>
+                    <a:pt x="2403441" y="2471422"/>
+                  </a:lnTo>
+                  <a:lnTo>
+                    <a:pt x="2475063" y="2508021"/>
+                  </a:lnTo>
+                  <a:lnTo>
+                    <a:pt x="2546686" y="2543297"/>
+                  </a:lnTo>
+                  <a:lnTo>
+                    <a:pt x="2618308" y="2577298"/>
+                  </a:lnTo>
+                  <a:lnTo>
+                    <a:pt x="2689931" y="2610070"/>
+                  </a:lnTo>
+                  <a:lnTo>
+                    <a:pt x="2761554" y="2641657"/>
+                  </a:lnTo>
+                  <a:lnTo>
+                    <a:pt x="2833176" y="2654270"/>
+                  </a:lnTo>
+                  <a:lnTo>
+                    <a:pt x="2904799" y="2654249"/>
+                  </a:lnTo>
+                  <a:lnTo>
+                    <a:pt x="2976421" y="2654227"/>
+                  </a:lnTo>
+                  <a:lnTo>
+                    <a:pt x="3048044" y="2654206"/>
+                  </a:lnTo>
+                  <a:lnTo>
+                    <a:pt x="3119666" y="2654184"/>
+                  </a:lnTo>
+                  <a:lnTo>
+                    <a:pt x="3191289" y="2654163"/>
+                  </a:lnTo>
+                  <a:lnTo>
+                    <a:pt x="3262911" y="2654141"/>
+                  </a:lnTo>
+                  <a:lnTo>
+                    <a:pt x="3334534" y="2654120"/>
+                  </a:lnTo>
+                  <a:lnTo>
+                    <a:pt x="3406156" y="2654098"/>
+                  </a:lnTo>
+                  <a:lnTo>
+                    <a:pt x="3477779" y="2654077"/>
+                  </a:lnTo>
+                  <a:lnTo>
+                    <a:pt x="3549401" y="2654055"/>
+                  </a:lnTo>
+                  <a:lnTo>
+                    <a:pt x="3621024" y="2654034"/>
+                  </a:lnTo>
+                  <a:lnTo>
+                    <a:pt x="3692646" y="2654012"/>
+                  </a:lnTo>
+                  <a:lnTo>
+                    <a:pt x="3764269" y="2653991"/>
+                  </a:lnTo>
+                  <a:lnTo>
+                    <a:pt x="3835891" y="2653969"/>
+                  </a:lnTo>
+                  <a:lnTo>
+                    <a:pt x="3907514" y="2653948"/>
+                  </a:lnTo>
+                  <a:lnTo>
+                    <a:pt x="3979136" y="2653926"/>
+                  </a:lnTo>
+                  <a:lnTo>
+                    <a:pt x="4050759" y="2653905"/>
+                  </a:lnTo>
+                  <a:lnTo>
+                    <a:pt x="4122382" y="2653883"/>
+                  </a:lnTo>
+                  <a:lnTo>
+                    <a:pt x="4194004" y="2653862"/>
+                  </a:lnTo>
+                  <a:lnTo>
+                    <a:pt x="4265627" y="2653840"/>
+                  </a:lnTo>
+                  <a:lnTo>
+                    <a:pt x="4337249" y="2653819"/>
+                  </a:lnTo>
+                  <a:lnTo>
+                    <a:pt x="4408872" y="2653797"/>
+                  </a:lnTo>
+                  <a:lnTo>
+                    <a:pt x="4480494" y="2653776"/>
+                  </a:lnTo>
+                  <a:lnTo>
+                    <a:pt x="4552117" y="2653754"/>
+                  </a:lnTo>
+                  <a:lnTo>
+                    <a:pt x="4623739" y="2653733"/>
+                  </a:lnTo>
+                  <a:lnTo>
+                    <a:pt x="4695362" y="2653711"/>
+                  </a:lnTo>
+                  <a:lnTo>
+                    <a:pt x="4766984" y="2653690"/>
+                  </a:lnTo>
+                  <a:lnTo>
+                    <a:pt x="4838607" y="2653668"/>
+                  </a:lnTo>
+                  <a:lnTo>
+                    <a:pt x="4910229" y="2653647"/>
+                  </a:lnTo>
+                  <a:lnTo>
+                    <a:pt x="4981852" y="2653625"/>
                   </a:lnTo>
                 </a:path>
               </a:pathLst>
@@ -3784,312 +3784,312 @@
           </p:nvSpPr>
           <p:spPr>
             <a:xfrm>
-              <a:off x="1172049" y="4493911"/>
-              <a:ext cx="7090630" cy="795446"/>
+              <a:off x="1172049" y="4727795"/>
+              <a:ext cx="7090630" cy="560550"/>
             </a:xfrm>
             <a:custGeom>
               <a:avLst/>
               <a:pathLst>
-                <a:path w="7090630" h="795446">
+                <a:path w="7090630" h="560550">
                   <a:moveTo>
-                    <a:pt x="7090630" y="795446"/>
+                    <a:pt x="7090630" y="560550"/>
                   </a:moveTo>
                   <a:lnTo>
-                    <a:pt x="7019007" y="785363"/>
-                  </a:lnTo>
-                  <a:lnTo>
-                    <a:pt x="6947385" y="774901"/>
-                  </a:lnTo>
-                  <a:lnTo>
-                    <a:pt x="6875762" y="764044"/>
-                  </a:lnTo>
-                  <a:lnTo>
-                    <a:pt x="6804139" y="752780"/>
-                  </a:lnTo>
-                  <a:lnTo>
-                    <a:pt x="6732517" y="741091"/>
-                  </a:lnTo>
-                  <a:lnTo>
-                    <a:pt x="6660894" y="728962"/>
-                  </a:lnTo>
-                  <a:lnTo>
-                    <a:pt x="6589272" y="716377"/>
-                  </a:lnTo>
-                  <a:lnTo>
-                    <a:pt x="6517649" y="703318"/>
-                  </a:lnTo>
-                  <a:lnTo>
-                    <a:pt x="6446027" y="689768"/>
-                  </a:lnTo>
-                  <a:lnTo>
-                    <a:pt x="6374404" y="675707"/>
-                  </a:lnTo>
-                  <a:lnTo>
-                    <a:pt x="6302782" y="661118"/>
-                  </a:lnTo>
-                  <a:lnTo>
-                    <a:pt x="6231159" y="645979"/>
-                  </a:lnTo>
-                  <a:lnTo>
-                    <a:pt x="6159537" y="630270"/>
-                  </a:lnTo>
-                  <a:lnTo>
-                    <a:pt x="6087914" y="613971"/>
-                  </a:lnTo>
-                  <a:lnTo>
-                    <a:pt x="6016292" y="597057"/>
-                  </a:lnTo>
-                  <a:lnTo>
-                    <a:pt x="5944669" y="579508"/>
-                  </a:lnTo>
-                  <a:lnTo>
-                    <a:pt x="5873047" y="561297"/>
-                  </a:lnTo>
-                  <a:lnTo>
-                    <a:pt x="5801424" y="542401"/>
-                  </a:lnTo>
-                  <a:lnTo>
-                    <a:pt x="5729802" y="522795"/>
-                  </a:lnTo>
-                  <a:lnTo>
-                    <a:pt x="5658179" y="502450"/>
-                  </a:lnTo>
-                  <a:lnTo>
-                    <a:pt x="5586557" y="481339"/>
-                  </a:lnTo>
-                  <a:lnTo>
-                    <a:pt x="5514934" y="459434"/>
-                  </a:lnTo>
-                  <a:lnTo>
-                    <a:pt x="5443311" y="436704"/>
-                  </a:lnTo>
-                  <a:lnTo>
-                    <a:pt x="5371689" y="413119"/>
-                  </a:lnTo>
-                  <a:lnTo>
-                    <a:pt x="5300066" y="388646"/>
-                  </a:lnTo>
-                  <a:lnTo>
-                    <a:pt x="5228444" y="363252"/>
-                  </a:lnTo>
-                  <a:lnTo>
-                    <a:pt x="5156821" y="336902"/>
-                  </a:lnTo>
-                  <a:lnTo>
-                    <a:pt x="5085199" y="309561"/>
-                  </a:lnTo>
-                  <a:lnTo>
-                    <a:pt x="5013576" y="281190"/>
-                  </a:lnTo>
-                  <a:lnTo>
-                    <a:pt x="4941954" y="251752"/>
-                  </a:lnTo>
-                  <a:lnTo>
-                    <a:pt x="4870331" y="232638"/>
-                  </a:lnTo>
-                  <a:lnTo>
-                    <a:pt x="4798709" y="229616"/>
-                  </a:lnTo>
-                  <a:lnTo>
-                    <a:pt x="4727086" y="226583"/>
-                  </a:lnTo>
-                  <a:lnTo>
-                    <a:pt x="4655464" y="223540"/>
-                  </a:lnTo>
-                  <a:lnTo>
-                    <a:pt x="4583841" y="220485"/>
-                  </a:lnTo>
-                  <a:lnTo>
-                    <a:pt x="4512219" y="217419"/>
-                  </a:lnTo>
-                  <a:lnTo>
-                    <a:pt x="4440596" y="214342"/>
-                  </a:lnTo>
-                  <a:lnTo>
-                    <a:pt x="4368974" y="211254"/>
-                  </a:lnTo>
-                  <a:lnTo>
-                    <a:pt x="4297351" y="208154"/>
-                  </a:lnTo>
-                  <a:lnTo>
-                    <a:pt x="4225729" y="205044"/>
-                  </a:lnTo>
-                  <a:lnTo>
-                    <a:pt x="4154106" y="201922"/>
-                  </a:lnTo>
-                  <a:lnTo>
-                    <a:pt x="4082483" y="198788"/>
-                  </a:lnTo>
-                  <a:lnTo>
-                    <a:pt x="4010861" y="195643"/>
-                  </a:lnTo>
-                  <a:lnTo>
-                    <a:pt x="3939238" y="192487"/>
-                  </a:lnTo>
-                  <a:lnTo>
-                    <a:pt x="3867616" y="189320"/>
-                  </a:lnTo>
-                  <a:lnTo>
-                    <a:pt x="3795993" y="186140"/>
-                  </a:lnTo>
-                  <a:lnTo>
-                    <a:pt x="3724371" y="182950"/>
-                  </a:lnTo>
-                  <a:lnTo>
-                    <a:pt x="3652748" y="179747"/>
-                  </a:lnTo>
-                  <a:lnTo>
-                    <a:pt x="3581126" y="176533"/>
-                  </a:lnTo>
-                  <a:lnTo>
-                    <a:pt x="3509503" y="173307"/>
-                  </a:lnTo>
-                  <a:lnTo>
-                    <a:pt x="3437881" y="170070"/>
-                  </a:lnTo>
-                  <a:lnTo>
-                    <a:pt x="3366258" y="166821"/>
-                  </a:lnTo>
-                  <a:lnTo>
-                    <a:pt x="3294636" y="163560"/>
-                  </a:lnTo>
-                  <a:lnTo>
-                    <a:pt x="3223013" y="160287"/>
-                  </a:lnTo>
-                  <a:lnTo>
-                    <a:pt x="3151391" y="157002"/>
-                  </a:lnTo>
-                  <a:lnTo>
-                    <a:pt x="3079768" y="153705"/>
-                  </a:lnTo>
-                  <a:lnTo>
-                    <a:pt x="3008146" y="150396"/>
-                  </a:lnTo>
-                  <a:lnTo>
-                    <a:pt x="2936523" y="147075"/>
-                  </a:lnTo>
-                  <a:lnTo>
-                    <a:pt x="2864901" y="143743"/>
-                  </a:lnTo>
-                  <a:lnTo>
-                    <a:pt x="2793278" y="140398"/>
-                  </a:lnTo>
-                  <a:lnTo>
-                    <a:pt x="2721655" y="137040"/>
-                  </a:lnTo>
-                  <a:lnTo>
-                    <a:pt x="2650033" y="133671"/>
-                  </a:lnTo>
-                  <a:lnTo>
-                    <a:pt x="2578410" y="130289"/>
-                  </a:lnTo>
-                  <a:lnTo>
-                    <a:pt x="2506788" y="126895"/>
-                  </a:lnTo>
-                  <a:lnTo>
-                    <a:pt x="2435165" y="123489"/>
-                  </a:lnTo>
-                  <a:lnTo>
-                    <a:pt x="2363543" y="120071"/>
-                  </a:lnTo>
-                  <a:lnTo>
-                    <a:pt x="2291920" y="116639"/>
-                  </a:lnTo>
-                  <a:lnTo>
-                    <a:pt x="2220298" y="113196"/>
-                  </a:lnTo>
-                  <a:lnTo>
-                    <a:pt x="2148675" y="109740"/>
-                  </a:lnTo>
-                  <a:lnTo>
-                    <a:pt x="2077053" y="106271"/>
-                  </a:lnTo>
-                  <a:lnTo>
-                    <a:pt x="2005430" y="102790"/>
-                  </a:lnTo>
-                  <a:lnTo>
-                    <a:pt x="1933808" y="99296"/>
-                  </a:lnTo>
-                  <a:lnTo>
-                    <a:pt x="1862185" y="95789"/>
-                  </a:lnTo>
-                  <a:lnTo>
-                    <a:pt x="1790563" y="92270"/>
-                  </a:lnTo>
-                  <a:lnTo>
-                    <a:pt x="1718940" y="88737"/>
-                  </a:lnTo>
-                  <a:lnTo>
-                    <a:pt x="1647318" y="85192"/>
-                  </a:lnTo>
-                  <a:lnTo>
-                    <a:pt x="1575695" y="81634"/>
-                  </a:lnTo>
-                  <a:lnTo>
-                    <a:pt x="1504073" y="78063"/>
-                  </a:lnTo>
-                  <a:lnTo>
-                    <a:pt x="1432450" y="74479"/>
-                  </a:lnTo>
-                  <a:lnTo>
-                    <a:pt x="1360827" y="70883"/>
-                  </a:lnTo>
-                  <a:lnTo>
-                    <a:pt x="1289205" y="67272"/>
-                  </a:lnTo>
-                  <a:lnTo>
-                    <a:pt x="1217582" y="63649"/>
-                  </a:lnTo>
-                  <a:lnTo>
-                    <a:pt x="1145960" y="60013"/>
-                  </a:lnTo>
-                  <a:lnTo>
-                    <a:pt x="1074337" y="56363"/>
-                  </a:lnTo>
-                  <a:lnTo>
-                    <a:pt x="1002715" y="52701"/>
-                  </a:lnTo>
-                  <a:lnTo>
-                    <a:pt x="931092" y="49024"/>
-                  </a:lnTo>
-                  <a:lnTo>
-                    <a:pt x="859470" y="45335"/>
-                  </a:lnTo>
-                  <a:lnTo>
-                    <a:pt x="787847" y="41632"/>
-                  </a:lnTo>
-                  <a:lnTo>
-                    <a:pt x="716225" y="37915"/>
-                  </a:lnTo>
-                  <a:lnTo>
-                    <a:pt x="644602" y="34186"/>
-                  </a:lnTo>
-                  <a:lnTo>
-                    <a:pt x="572980" y="30442"/>
-                  </a:lnTo>
-                  <a:lnTo>
-                    <a:pt x="501357" y="26685"/>
-                  </a:lnTo>
-                  <a:lnTo>
-                    <a:pt x="429735" y="22914"/>
-                  </a:lnTo>
-                  <a:lnTo>
-                    <a:pt x="358112" y="19130"/>
-                  </a:lnTo>
-                  <a:lnTo>
-                    <a:pt x="286490" y="15331"/>
-                  </a:lnTo>
-                  <a:lnTo>
-                    <a:pt x="214867" y="11519"/>
-                  </a:lnTo>
-                  <a:lnTo>
-                    <a:pt x="143245" y="7693"/>
-                  </a:lnTo>
-                  <a:lnTo>
-                    <a:pt x="71622" y="3853"/>
-                  </a:lnTo>
-                  <a:lnTo>
-                    <a:pt x="0" y="0"/>
+                    <a:pt x="7019007" y="550464"/>
+                  </a:lnTo>
+                  <a:lnTo>
+                    <a:pt x="6947385" y="539999"/>
+                  </a:lnTo>
+                  <a:lnTo>
+                    <a:pt x="6875762" y="529141"/>
+                  </a:lnTo>
+                  <a:lnTo>
+                    <a:pt x="6804139" y="517876"/>
+                  </a:lnTo>
+                  <a:lnTo>
+                    <a:pt x="6732517" y="506189"/>
+                  </a:lnTo>
+                  <a:lnTo>
+                    <a:pt x="6660894" y="494063"/>
+                  </a:lnTo>
+                  <a:lnTo>
+                    <a:pt x="6589272" y="481483"/>
+                  </a:lnTo>
+                  <a:lnTo>
+                    <a:pt x="6517649" y="468430"/>
+                  </a:lnTo>
+                  <a:lnTo>
+                    <a:pt x="6446027" y="454888"/>
+                  </a:lnTo>
+                  <a:lnTo>
+                    <a:pt x="6374404" y="440839"/>
+                  </a:lnTo>
+                  <a:lnTo>
+                    <a:pt x="6302782" y="426262"/>
+                  </a:lnTo>
+                  <a:lnTo>
+                    <a:pt x="6231159" y="411138"/>
+                  </a:lnTo>
+                  <a:lnTo>
+                    <a:pt x="6159537" y="395447"/>
+                  </a:lnTo>
+                  <a:lnTo>
+                    <a:pt x="6087914" y="379167"/>
+                  </a:lnTo>
+                  <a:lnTo>
+                    <a:pt x="6016292" y="362277"/>
+                  </a:lnTo>
+                  <a:lnTo>
+                    <a:pt x="5944669" y="344753"/>
+                  </a:lnTo>
+                  <a:lnTo>
+                    <a:pt x="5873047" y="326572"/>
+                  </a:lnTo>
+                  <a:lnTo>
+                    <a:pt x="5801424" y="307709"/>
+                  </a:lnTo>
+                  <a:lnTo>
+                    <a:pt x="5729802" y="288138"/>
+                  </a:lnTo>
+                  <a:lnTo>
+                    <a:pt x="5658179" y="267833"/>
+                  </a:lnTo>
+                  <a:lnTo>
+                    <a:pt x="5586557" y="246767"/>
+                  </a:lnTo>
+                  <a:lnTo>
+                    <a:pt x="5514934" y="224910"/>
+                  </a:lnTo>
+                  <a:lnTo>
+                    <a:pt x="5443311" y="202234"/>
+                  </a:lnTo>
+                  <a:lnTo>
+                    <a:pt x="5371689" y="178707"/>
+                  </a:lnTo>
+                  <a:lnTo>
+                    <a:pt x="5300066" y="154297"/>
+                  </a:lnTo>
+                  <a:lnTo>
+                    <a:pt x="5228444" y="128972"/>
+                  </a:lnTo>
+                  <a:lnTo>
+                    <a:pt x="5156821" y="102697"/>
+                  </a:lnTo>
+                  <a:lnTo>
+                    <a:pt x="5085199" y="75437"/>
+                  </a:lnTo>
+                  <a:lnTo>
+                    <a:pt x="5013576" y="47153"/>
+                  </a:lnTo>
+                  <a:lnTo>
+                    <a:pt x="4941954" y="17809"/>
+                  </a:lnTo>
+                  <a:lnTo>
+                    <a:pt x="4870331" y="0"/>
+                  </a:lnTo>
+                  <a:lnTo>
+                    <a:pt x="4798709" y="21"/>
+                  </a:lnTo>
+                  <a:lnTo>
+                    <a:pt x="4727086" y="42"/>
+                  </a:lnTo>
+                  <a:lnTo>
+                    <a:pt x="4655464" y="64"/>
+                  </a:lnTo>
+                  <a:lnTo>
+                    <a:pt x="4583841" y="85"/>
+                  </a:lnTo>
+                  <a:lnTo>
+                    <a:pt x="4512219" y="107"/>
+                  </a:lnTo>
+                  <a:lnTo>
+                    <a:pt x="4440596" y="128"/>
+                  </a:lnTo>
+                  <a:lnTo>
+                    <a:pt x="4368974" y="150"/>
+                  </a:lnTo>
+                  <a:lnTo>
+                    <a:pt x="4297351" y="171"/>
+                  </a:lnTo>
+                  <a:lnTo>
+                    <a:pt x="4225729" y="193"/>
+                  </a:lnTo>
+                  <a:lnTo>
+                    <a:pt x="4154106" y="214"/>
+                  </a:lnTo>
+                  <a:lnTo>
+                    <a:pt x="4082483" y="236"/>
+                  </a:lnTo>
+                  <a:lnTo>
+                    <a:pt x="4010861" y="257"/>
+                  </a:lnTo>
+                  <a:lnTo>
+                    <a:pt x="3939238" y="279"/>
+                  </a:lnTo>
+                  <a:lnTo>
+                    <a:pt x="3867616" y="300"/>
+                  </a:lnTo>
+                  <a:lnTo>
+                    <a:pt x="3795993" y="322"/>
+                  </a:lnTo>
+                  <a:lnTo>
+                    <a:pt x="3724371" y="343"/>
+                  </a:lnTo>
+                  <a:lnTo>
+                    <a:pt x="3652748" y="365"/>
+                  </a:lnTo>
+                  <a:lnTo>
+                    <a:pt x="3581126" y="386"/>
+                  </a:lnTo>
+                  <a:lnTo>
+                    <a:pt x="3509503" y="408"/>
+                  </a:lnTo>
+                  <a:lnTo>
+                    <a:pt x="3437881" y="429"/>
+                  </a:lnTo>
+                  <a:lnTo>
+                    <a:pt x="3366258" y="451"/>
+                  </a:lnTo>
+                  <a:lnTo>
+                    <a:pt x="3294636" y="472"/>
+                  </a:lnTo>
+                  <a:lnTo>
+                    <a:pt x="3223013" y="494"/>
+                  </a:lnTo>
+                  <a:lnTo>
+                    <a:pt x="3151391" y="515"/>
+                  </a:lnTo>
+                  <a:lnTo>
+                    <a:pt x="3079768" y="537"/>
+                  </a:lnTo>
+                  <a:lnTo>
+                    <a:pt x="3008146" y="558"/>
+                  </a:lnTo>
+                  <a:lnTo>
+                    <a:pt x="2936523" y="580"/>
+                  </a:lnTo>
+                  <a:lnTo>
+                    <a:pt x="2864901" y="601"/>
+                  </a:lnTo>
+                  <a:lnTo>
+                    <a:pt x="2793278" y="623"/>
+                  </a:lnTo>
+                  <a:lnTo>
+                    <a:pt x="2721655" y="644"/>
+                  </a:lnTo>
+                  <a:lnTo>
+                    <a:pt x="2650033" y="666"/>
+                  </a:lnTo>
+                  <a:lnTo>
+                    <a:pt x="2578410" y="687"/>
+                  </a:lnTo>
+                  <a:lnTo>
+                    <a:pt x="2506788" y="709"/>
+                  </a:lnTo>
+                  <a:lnTo>
+                    <a:pt x="2435165" y="730"/>
+                  </a:lnTo>
+                  <a:lnTo>
+                    <a:pt x="2363543" y="752"/>
+                  </a:lnTo>
+                  <a:lnTo>
+                    <a:pt x="2291920" y="773"/>
+                  </a:lnTo>
+                  <a:lnTo>
+                    <a:pt x="2220298" y="795"/>
+                  </a:lnTo>
+                  <a:lnTo>
+                    <a:pt x="2148675" y="816"/>
+                  </a:lnTo>
+                  <a:lnTo>
+                    <a:pt x="2077053" y="837"/>
+                  </a:lnTo>
+                  <a:lnTo>
+                    <a:pt x="2005430" y="859"/>
+                  </a:lnTo>
+                  <a:lnTo>
+                    <a:pt x="1933808" y="880"/>
+                  </a:lnTo>
+                  <a:lnTo>
+                    <a:pt x="1862185" y="902"/>
+                  </a:lnTo>
+                  <a:lnTo>
+                    <a:pt x="1790563" y="923"/>
+                  </a:lnTo>
+                  <a:lnTo>
+                    <a:pt x="1718940" y="945"/>
+                  </a:lnTo>
+                  <a:lnTo>
+                    <a:pt x="1647318" y="966"/>
+                  </a:lnTo>
+                  <a:lnTo>
+                    <a:pt x="1575695" y="988"/>
+                  </a:lnTo>
+                  <a:lnTo>
+                    <a:pt x="1504073" y="1009"/>
+                  </a:lnTo>
+                  <a:lnTo>
+                    <a:pt x="1432450" y="1031"/>
+                  </a:lnTo>
+                  <a:lnTo>
+                    <a:pt x="1360827" y="1052"/>
+                  </a:lnTo>
+                  <a:lnTo>
+                    <a:pt x="1289205" y="1074"/>
+                  </a:lnTo>
+                  <a:lnTo>
+                    <a:pt x="1217582" y="1095"/>
+                  </a:lnTo>
+                  <a:lnTo>
+                    <a:pt x="1145960" y="1117"/>
+                  </a:lnTo>
+                  <a:lnTo>
+                    <a:pt x="1074337" y="1138"/>
+                  </a:lnTo>
+                  <a:lnTo>
+                    <a:pt x="1002715" y="1160"/>
+                  </a:lnTo>
+                  <a:lnTo>
+                    <a:pt x="931092" y="1181"/>
+                  </a:lnTo>
+                  <a:lnTo>
+                    <a:pt x="859470" y="1202"/>
+                  </a:lnTo>
+                  <a:lnTo>
+                    <a:pt x="787847" y="1224"/>
+                  </a:lnTo>
+                  <a:lnTo>
+                    <a:pt x="716225" y="1245"/>
+                  </a:lnTo>
+                  <a:lnTo>
+                    <a:pt x="644602" y="1267"/>
+                  </a:lnTo>
+                  <a:lnTo>
+                    <a:pt x="572980" y="1288"/>
+                  </a:lnTo>
+                  <a:lnTo>
+                    <a:pt x="501357" y="1310"/>
+                  </a:lnTo>
+                  <a:lnTo>
+                    <a:pt x="429735" y="1331"/>
+                  </a:lnTo>
+                  <a:lnTo>
+                    <a:pt x="358112" y="1353"/>
+                  </a:lnTo>
+                  <a:lnTo>
+                    <a:pt x="286490" y="1374"/>
+                  </a:lnTo>
+                  <a:lnTo>
+                    <a:pt x="214867" y="1396"/>
+                  </a:lnTo>
+                  <a:lnTo>
+                    <a:pt x="143245" y="1417"/>
+                  </a:lnTo>
+                  <a:lnTo>
+                    <a:pt x="71622" y="1439"/>
+                  </a:lnTo>
+                  <a:lnTo>
+                    <a:pt x="0" y="1460"/>
                   </a:lnTo>
                 </a:path>
               </a:pathLst>
@@ -4109,312 +4109,312 @@
           </p:nvSpPr>
           <p:spPr>
             <a:xfrm>
-              <a:off x="1172049" y="2233836"/>
-              <a:ext cx="7090630" cy="2877490"/>
+              <a:off x="1172049" y="2636928"/>
+              <a:ext cx="7090630" cy="2447856"/>
             </a:xfrm>
             <a:custGeom>
               <a:avLst/>
               <a:pathLst>
-                <a:path w="7090630" h="2877490">
+                <a:path w="7090630" h="2447856">
                   <a:moveTo>
                     <a:pt x="0" y="0"/>
                   </a:moveTo>
                   <a:lnTo>
-                    <a:pt x="71622" y="66748"/>
-                  </a:lnTo>
-                  <a:lnTo>
-                    <a:pt x="143245" y="132157"/>
-                  </a:lnTo>
-                  <a:lnTo>
-                    <a:pt x="214867" y="196251"/>
-                  </a:lnTo>
-                  <a:lnTo>
-                    <a:pt x="286490" y="259059"/>
-                  </a:lnTo>
-                  <a:lnTo>
-                    <a:pt x="358112" y="320605"/>
-                  </a:lnTo>
-                  <a:lnTo>
-                    <a:pt x="429735" y="380914"/>
-                  </a:lnTo>
-                  <a:lnTo>
-                    <a:pt x="501357" y="440013"/>
-                  </a:lnTo>
-                  <a:lnTo>
-                    <a:pt x="572980" y="497925"/>
-                  </a:lnTo>
-                  <a:lnTo>
-                    <a:pt x="644602" y="554673"/>
-                  </a:lnTo>
-                  <a:lnTo>
-                    <a:pt x="716225" y="610282"/>
-                  </a:lnTo>
-                  <a:lnTo>
-                    <a:pt x="787847" y="664773"/>
-                  </a:lnTo>
-                  <a:lnTo>
-                    <a:pt x="859470" y="718171"/>
-                  </a:lnTo>
-                  <a:lnTo>
-                    <a:pt x="931092" y="770496"/>
-                  </a:lnTo>
-                  <a:lnTo>
-                    <a:pt x="1002715" y="821770"/>
-                  </a:lnTo>
-                  <a:lnTo>
-                    <a:pt x="1074337" y="872014"/>
-                  </a:lnTo>
-                  <a:lnTo>
-                    <a:pt x="1145960" y="921249"/>
-                  </a:lnTo>
-                  <a:lnTo>
-                    <a:pt x="1217582" y="969495"/>
-                  </a:lnTo>
-                  <a:lnTo>
-                    <a:pt x="1289205" y="1016772"/>
-                  </a:lnTo>
-                  <a:lnTo>
-                    <a:pt x="1360827" y="1063100"/>
-                  </a:lnTo>
-                  <a:lnTo>
-                    <a:pt x="1432450" y="1108497"/>
-                  </a:lnTo>
-                  <a:lnTo>
-                    <a:pt x="1504073" y="1152982"/>
-                  </a:lnTo>
-                  <a:lnTo>
-                    <a:pt x="1575695" y="1196574"/>
-                  </a:lnTo>
-                  <a:lnTo>
-                    <a:pt x="1647318" y="1239291"/>
-                  </a:lnTo>
-                  <a:lnTo>
-                    <a:pt x="1718940" y="1281149"/>
-                  </a:lnTo>
-                  <a:lnTo>
-                    <a:pt x="1790563" y="1322167"/>
-                  </a:lnTo>
-                  <a:lnTo>
-                    <a:pt x="1862185" y="1362361"/>
-                  </a:lnTo>
-                  <a:lnTo>
-                    <a:pt x="1933808" y="1401747"/>
-                  </a:lnTo>
-                  <a:lnTo>
-                    <a:pt x="2005430" y="1440343"/>
-                  </a:lnTo>
-                  <a:lnTo>
-                    <a:pt x="2077053" y="1478164"/>
-                  </a:lnTo>
-                  <a:lnTo>
-                    <a:pt x="2148675" y="1515224"/>
-                  </a:lnTo>
-                  <a:lnTo>
-                    <a:pt x="2220298" y="1551541"/>
-                  </a:lnTo>
-                  <a:lnTo>
-                    <a:pt x="2291920" y="1587128"/>
-                  </a:lnTo>
-                  <a:lnTo>
-                    <a:pt x="2363543" y="1622000"/>
-                  </a:lnTo>
-                  <a:lnTo>
-                    <a:pt x="2435165" y="1656172"/>
-                  </a:lnTo>
-                  <a:lnTo>
-                    <a:pt x="2506788" y="1689658"/>
-                  </a:lnTo>
-                  <a:lnTo>
-                    <a:pt x="2578410" y="1722471"/>
-                  </a:lnTo>
-                  <a:lnTo>
-                    <a:pt x="2650033" y="1754625"/>
-                  </a:lnTo>
-                  <a:lnTo>
-                    <a:pt x="2721655" y="1786133"/>
-                  </a:lnTo>
-                  <a:lnTo>
-                    <a:pt x="2793278" y="1817009"/>
-                  </a:lnTo>
-                  <a:lnTo>
-                    <a:pt x="2864901" y="1847264"/>
-                  </a:lnTo>
-                  <a:lnTo>
-                    <a:pt x="2936523" y="1876912"/>
-                  </a:lnTo>
-                  <a:lnTo>
-                    <a:pt x="3008146" y="1905964"/>
-                  </a:lnTo>
-                  <a:lnTo>
-                    <a:pt x="3079768" y="1934433"/>
-                  </a:lnTo>
-                  <a:lnTo>
-                    <a:pt x="3151391" y="1962330"/>
-                  </a:lnTo>
-                  <a:lnTo>
-                    <a:pt x="3223013" y="1989666"/>
-                  </a:lnTo>
-                  <a:lnTo>
-                    <a:pt x="3294636" y="2016454"/>
-                  </a:lnTo>
-                  <a:lnTo>
-                    <a:pt x="3366258" y="2042703"/>
-                  </a:lnTo>
-                  <a:lnTo>
-                    <a:pt x="3437881" y="2068426"/>
-                  </a:lnTo>
-                  <a:lnTo>
-                    <a:pt x="3509503" y="2093631"/>
-                  </a:lnTo>
-                  <a:lnTo>
-                    <a:pt x="3581126" y="2118331"/>
-                  </a:lnTo>
-                  <a:lnTo>
-                    <a:pt x="3652748" y="2142534"/>
-                  </a:lnTo>
-                  <a:lnTo>
-                    <a:pt x="3724371" y="2166252"/>
-                  </a:lnTo>
-                  <a:lnTo>
-                    <a:pt x="3795993" y="2189493"/>
-                  </a:lnTo>
-                  <a:lnTo>
-                    <a:pt x="3867616" y="2212267"/>
-                  </a:lnTo>
-                  <a:lnTo>
-                    <a:pt x="3939238" y="2234584"/>
-                  </a:lnTo>
-                  <a:lnTo>
-                    <a:pt x="4010861" y="2256452"/>
-                  </a:lnTo>
-                  <a:lnTo>
-                    <a:pt x="4082483" y="2277881"/>
-                  </a:lnTo>
-                  <a:lnTo>
-                    <a:pt x="4154106" y="2298880"/>
-                  </a:lnTo>
-                  <a:lnTo>
-                    <a:pt x="4225729" y="2319458"/>
-                  </a:lnTo>
-                  <a:lnTo>
-                    <a:pt x="4297351" y="2339621"/>
-                  </a:lnTo>
-                  <a:lnTo>
-                    <a:pt x="4368974" y="2359380"/>
-                  </a:lnTo>
-                  <a:lnTo>
-                    <a:pt x="4440596" y="2378742"/>
-                  </a:lnTo>
-                  <a:lnTo>
-                    <a:pt x="4512219" y="2397716"/>
-                  </a:lnTo>
-                  <a:lnTo>
-                    <a:pt x="4583841" y="2416308"/>
-                  </a:lnTo>
-                  <a:lnTo>
-                    <a:pt x="4655464" y="2434527"/>
-                  </a:lnTo>
-                  <a:lnTo>
-                    <a:pt x="4727086" y="2452379"/>
-                  </a:lnTo>
-                  <a:lnTo>
-                    <a:pt x="4798709" y="2469874"/>
-                  </a:lnTo>
-                  <a:lnTo>
-                    <a:pt x="4870331" y="2487016"/>
-                  </a:lnTo>
-                  <a:lnTo>
-                    <a:pt x="4941954" y="2503815"/>
-                  </a:lnTo>
-                  <a:lnTo>
-                    <a:pt x="5013576" y="2520276"/>
-                  </a:lnTo>
-                  <a:lnTo>
-                    <a:pt x="5085199" y="2536407"/>
-                  </a:lnTo>
-                  <a:lnTo>
-                    <a:pt x="5156821" y="2552213"/>
-                  </a:lnTo>
-                  <a:lnTo>
-                    <a:pt x="5228444" y="2567703"/>
-                  </a:lnTo>
-                  <a:lnTo>
-                    <a:pt x="5300066" y="2582881"/>
-                  </a:lnTo>
-                  <a:lnTo>
-                    <a:pt x="5371689" y="2597754"/>
-                  </a:lnTo>
-                  <a:lnTo>
-                    <a:pt x="5443311" y="2612328"/>
-                  </a:lnTo>
-                  <a:lnTo>
-                    <a:pt x="5514934" y="2626610"/>
-                  </a:lnTo>
-                  <a:lnTo>
-                    <a:pt x="5586557" y="2640605"/>
-                  </a:lnTo>
-                  <a:lnTo>
-                    <a:pt x="5658179" y="2654319"/>
-                  </a:lnTo>
-                  <a:lnTo>
-                    <a:pt x="5729802" y="2667757"/>
-                  </a:lnTo>
-                  <a:lnTo>
-                    <a:pt x="5801424" y="2680926"/>
-                  </a:lnTo>
-                  <a:lnTo>
-                    <a:pt x="5873047" y="2693830"/>
-                  </a:lnTo>
-                  <a:lnTo>
-                    <a:pt x="5944669" y="2706475"/>
-                  </a:lnTo>
-                  <a:lnTo>
-                    <a:pt x="6016292" y="2718865"/>
-                  </a:lnTo>
-                  <a:lnTo>
-                    <a:pt x="6087914" y="2731007"/>
-                  </a:lnTo>
-                  <a:lnTo>
-                    <a:pt x="6159537" y="2742906"/>
-                  </a:lnTo>
-                  <a:lnTo>
-                    <a:pt x="6231159" y="2754565"/>
-                  </a:lnTo>
-                  <a:lnTo>
-                    <a:pt x="6302782" y="2765990"/>
-                  </a:lnTo>
-                  <a:lnTo>
-                    <a:pt x="6374404" y="2777185"/>
-                  </a:lnTo>
-                  <a:lnTo>
-                    <a:pt x="6446027" y="2788156"/>
-                  </a:lnTo>
-                  <a:lnTo>
-                    <a:pt x="6517649" y="2798906"/>
-                  </a:lnTo>
-                  <a:lnTo>
-                    <a:pt x="6589272" y="2809441"/>
-                  </a:lnTo>
-                  <a:lnTo>
-                    <a:pt x="6660894" y="2819764"/>
-                  </a:lnTo>
-                  <a:lnTo>
-                    <a:pt x="6732517" y="2829879"/>
-                  </a:lnTo>
-                  <a:lnTo>
-                    <a:pt x="6804139" y="2839792"/>
-                  </a:lnTo>
-                  <a:lnTo>
-                    <a:pt x="6875762" y="2849505"/>
-                  </a:lnTo>
-                  <a:lnTo>
-                    <a:pt x="6947385" y="2859023"/>
-                  </a:lnTo>
-                  <a:lnTo>
-                    <a:pt x="7019007" y="2868350"/>
-                  </a:lnTo>
-                  <a:lnTo>
-                    <a:pt x="7090630" y="2877490"/>
+                    <a:pt x="71622" y="53239"/>
+                  </a:lnTo>
+                  <a:lnTo>
+                    <a:pt x="143245" y="105507"/>
+                  </a:lnTo>
+                  <a:lnTo>
+                    <a:pt x="214867" y="156823"/>
+                  </a:lnTo>
+                  <a:lnTo>
+                    <a:pt x="286490" y="207204"/>
+                  </a:lnTo>
+                  <a:lnTo>
+                    <a:pt x="358112" y="256665"/>
+                  </a:lnTo>
+                  <a:lnTo>
+                    <a:pt x="429735" y="305225"/>
+                  </a:lnTo>
+                  <a:lnTo>
+                    <a:pt x="501357" y="352900"/>
+                  </a:lnTo>
+                  <a:lnTo>
+                    <a:pt x="572980" y="399706"/>
+                  </a:lnTo>
+                  <a:lnTo>
+                    <a:pt x="644602" y="445658"/>
+                  </a:lnTo>
+                  <a:lnTo>
+                    <a:pt x="716225" y="490773"/>
+                  </a:lnTo>
+                  <a:lnTo>
+                    <a:pt x="787847" y="535065"/>
+                  </a:lnTo>
+                  <a:lnTo>
+                    <a:pt x="859470" y="578550"/>
+                  </a:lnTo>
+                  <a:lnTo>
+                    <a:pt x="931092" y="621242"/>
+                  </a:lnTo>
+                  <a:lnTo>
+                    <a:pt x="1002715" y="663155"/>
+                  </a:lnTo>
+                  <a:lnTo>
+                    <a:pt x="1074337" y="704305"/>
+                  </a:lnTo>
+                  <a:lnTo>
+                    <a:pt x="1145960" y="744704"/>
+                  </a:lnTo>
+                  <a:lnTo>
+                    <a:pt x="1217582" y="784367"/>
+                  </a:lnTo>
+                  <a:lnTo>
+                    <a:pt x="1289205" y="823307"/>
+                  </a:lnTo>
+                  <a:lnTo>
+                    <a:pt x="1360827" y="861537"/>
+                  </a:lnTo>
+                  <a:lnTo>
+                    <a:pt x="1432450" y="899070"/>
+                  </a:lnTo>
+                  <a:lnTo>
+                    <a:pt x="1504073" y="935918"/>
+                  </a:lnTo>
+                  <a:lnTo>
+                    <a:pt x="1575695" y="972095"/>
+                  </a:lnTo>
+                  <a:lnTo>
+                    <a:pt x="1647318" y="1007613"/>
+                  </a:lnTo>
+                  <a:lnTo>
+                    <a:pt x="1718940" y="1042482"/>
+                  </a:lnTo>
+                  <a:lnTo>
+                    <a:pt x="1790563" y="1076717"/>
+                  </a:lnTo>
+                  <a:lnTo>
+                    <a:pt x="1862185" y="1110327"/>
+                  </a:lnTo>
+                  <a:lnTo>
+                    <a:pt x="1933808" y="1143324"/>
+                  </a:lnTo>
+                  <a:lnTo>
+                    <a:pt x="2005430" y="1175720"/>
+                  </a:lnTo>
+                  <a:lnTo>
+                    <a:pt x="2077053" y="1207525"/>
+                  </a:lnTo>
+                  <a:lnTo>
+                    <a:pt x="2148675" y="1238750"/>
+                  </a:lnTo>
+                  <a:lnTo>
+                    <a:pt x="2220298" y="1269406"/>
+                  </a:lnTo>
+                  <a:lnTo>
+                    <a:pt x="2291920" y="1299503"/>
+                  </a:lnTo>
+                  <a:lnTo>
+                    <a:pt x="2363543" y="1329052"/>
+                  </a:lnTo>
+                  <a:lnTo>
+                    <a:pt x="2435165" y="1358062"/>
+                  </a:lnTo>
+                  <a:lnTo>
+                    <a:pt x="2506788" y="1386543"/>
+                  </a:lnTo>
+                  <a:lnTo>
+                    <a:pt x="2578410" y="1414504"/>
+                  </a:lnTo>
+                  <a:lnTo>
+                    <a:pt x="2650033" y="1441956"/>
+                  </a:lnTo>
+                  <a:lnTo>
+                    <a:pt x="2721655" y="1468908"/>
+                  </a:lnTo>
+                  <a:lnTo>
+                    <a:pt x="2793278" y="1495368"/>
+                  </a:lnTo>
+                  <a:lnTo>
+                    <a:pt x="2864901" y="1521346"/>
+                  </a:lnTo>
+                  <a:lnTo>
+                    <a:pt x="2936523" y="1546850"/>
+                  </a:lnTo>
+                  <a:lnTo>
+                    <a:pt x="3008146" y="1571889"/>
+                  </a:lnTo>
+                  <a:lnTo>
+                    <a:pt x="3079768" y="1596472"/>
+                  </a:lnTo>
+                  <a:lnTo>
+                    <a:pt x="3151391" y="1620607"/>
+                  </a:lnTo>
+                  <a:lnTo>
+                    <a:pt x="3223013" y="1644301"/>
+                  </a:lnTo>
+                  <a:lnTo>
+                    <a:pt x="3294636" y="1667564"/>
+                  </a:lnTo>
+                  <a:lnTo>
+                    <a:pt x="3366258" y="1690402"/>
+                  </a:lnTo>
+                  <a:lnTo>
+                    <a:pt x="3437881" y="1712825"/>
+                  </a:lnTo>
+                  <a:lnTo>
+                    <a:pt x="3509503" y="1734838"/>
+                  </a:lnTo>
+                  <a:lnTo>
+                    <a:pt x="3581126" y="1756450"/>
+                  </a:lnTo>
+                  <a:lnTo>
+                    <a:pt x="3652748" y="1777668"/>
+                  </a:lnTo>
+                  <a:lnTo>
+                    <a:pt x="3724371" y="1798499"/>
+                  </a:lnTo>
+                  <a:lnTo>
+                    <a:pt x="3795993" y="1818951"/>
+                  </a:lnTo>
+                  <a:lnTo>
+                    <a:pt x="3867616" y="1839030"/>
+                  </a:lnTo>
+                  <a:lnTo>
+                    <a:pt x="3939238" y="1858742"/>
+                  </a:lnTo>
+                  <a:lnTo>
+                    <a:pt x="4010861" y="1878095"/>
+                  </a:lnTo>
+                  <a:lnTo>
+                    <a:pt x="4082483" y="1897096"/>
+                  </a:lnTo>
+                  <a:lnTo>
+                    <a:pt x="4154106" y="1915750"/>
+                  </a:lnTo>
+                  <a:lnTo>
+                    <a:pt x="4225729" y="1934064"/>
+                  </a:lnTo>
+                  <a:lnTo>
+                    <a:pt x="4297351" y="1952044"/>
+                  </a:lnTo>
+                  <a:lnTo>
+                    <a:pt x="4368974" y="1969696"/>
+                  </a:lnTo>
+                  <a:lnTo>
+                    <a:pt x="4440596" y="1987027"/>
+                  </a:lnTo>
+                  <a:lnTo>
+                    <a:pt x="4512219" y="2004041"/>
+                  </a:lnTo>
+                  <a:lnTo>
+                    <a:pt x="4583841" y="2020746"/>
+                  </a:lnTo>
+                  <a:lnTo>
+                    <a:pt x="4655464" y="2037145"/>
+                  </a:lnTo>
+                  <a:lnTo>
+                    <a:pt x="4727086" y="2053246"/>
+                  </a:lnTo>
+                  <a:lnTo>
+                    <a:pt x="4798709" y="2069054"/>
+                  </a:lnTo>
+                  <a:lnTo>
+                    <a:pt x="4870331" y="2084573"/>
+                  </a:lnTo>
+                  <a:lnTo>
+                    <a:pt x="4941954" y="2099809"/>
+                  </a:lnTo>
+                  <a:lnTo>
+                    <a:pt x="5013576" y="2114767"/>
+                  </a:lnTo>
+                  <a:lnTo>
+                    <a:pt x="5085199" y="2129453"/>
+                  </a:lnTo>
+                  <a:lnTo>
+                    <a:pt x="5156821" y="2143871"/>
+                  </a:lnTo>
+                  <a:lnTo>
+                    <a:pt x="5228444" y="2158026"/>
+                  </a:lnTo>
+                  <a:lnTo>
+                    <a:pt x="5300066" y="2171923"/>
+                  </a:lnTo>
+                  <a:lnTo>
+                    <a:pt x="5371689" y="2185567"/>
+                  </a:lnTo>
+                  <a:lnTo>
+                    <a:pt x="5443311" y="2198962"/>
+                  </a:lnTo>
+                  <a:lnTo>
+                    <a:pt x="5514934" y="2212113"/>
+                  </a:lnTo>
+                  <a:lnTo>
+                    <a:pt x="5586557" y="2225024"/>
+                  </a:lnTo>
+                  <a:lnTo>
+                    <a:pt x="5658179" y="2237700"/>
+                  </a:lnTo>
+                  <a:lnTo>
+                    <a:pt x="5729802" y="2250144"/>
+                  </a:lnTo>
+                  <a:lnTo>
+                    <a:pt x="5801424" y="2262362"/>
+                  </a:lnTo>
+                  <a:lnTo>
+                    <a:pt x="5873047" y="2274357"/>
+                  </a:lnTo>
+                  <a:lnTo>
+                    <a:pt x="5944669" y="2286133"/>
+                  </a:lnTo>
+                  <a:lnTo>
+                    <a:pt x="6016292" y="2297695"/>
+                  </a:lnTo>
+                  <a:lnTo>
+                    <a:pt x="6087914" y="2309046"/>
+                  </a:lnTo>
+                  <a:lnTo>
+                    <a:pt x="6159537" y="2320190"/>
+                  </a:lnTo>
+                  <a:lnTo>
+                    <a:pt x="6231159" y="2331131"/>
+                  </a:lnTo>
+                  <a:lnTo>
+                    <a:pt x="6302782" y="2341872"/>
+                  </a:lnTo>
+                  <a:lnTo>
+                    <a:pt x="6374404" y="2352417"/>
+                  </a:lnTo>
+                  <a:lnTo>
+                    <a:pt x="6446027" y="2362771"/>
+                  </a:lnTo>
+                  <a:lnTo>
+                    <a:pt x="6517649" y="2372935"/>
+                  </a:lnTo>
+                  <a:lnTo>
+                    <a:pt x="6589272" y="2382914"/>
+                  </a:lnTo>
+                  <a:lnTo>
+                    <a:pt x="6660894" y="2392712"/>
+                  </a:lnTo>
+                  <a:lnTo>
+                    <a:pt x="6732517" y="2402330"/>
+                  </a:lnTo>
+                  <a:lnTo>
+                    <a:pt x="6804139" y="2411773"/>
+                  </a:lnTo>
+                  <a:lnTo>
+                    <a:pt x="6875762" y="2421045"/>
+                  </a:lnTo>
+                  <a:lnTo>
+                    <a:pt x="6947385" y="2430147"/>
+                  </a:lnTo>
+                  <a:lnTo>
+                    <a:pt x="7019007" y="2439083"/>
+                  </a:lnTo>
+                  <a:lnTo>
+                    <a:pt x="7090630" y="2447856"/>
                   </a:lnTo>
                 </a:path>
               </a:pathLst>
@@ -5154,7 +5154,7 @@
                   <a:latin typeface="Helvetica"/>
                   <a:cs typeface="Helvetica"/>
                 </a:rPr>
-                <a:t>subHR per 1 mL/min: 0.97 (0.95-1.00)  |  per IQR (Δ = 18.2): 0.62 (0.42-0.92)  |  IQR: [-11.5, 6.7]</a:t>
+                <a:t>subHR per 1 mL/min: 0.98 (0.95-1.00)  |  per IQR (Δ = 18.2): 0.65 (0.42-1.00)  |  IQR: [-11.5, 6.7]</a:t>
               </a:r>
             </a:p>
           </p:txBody>

--- a/docs/plots/carbo/jx_carbo_linsubhr_egfrdisc_grade2.pptx
+++ b/docs/plots/carbo/jx_carbo_linsubhr_egfrdisc_grade2.pptx
@@ -3003,524 +3003,527 @@
           <p:spPr>
             <a:xfrm>
               <a:off x="1172049" y="2073503"/>
-              <a:ext cx="7090630" cy="3214842"/>
+              <a:ext cx="7090630" cy="3206557"/>
             </a:xfrm>
             <a:custGeom>
               <a:avLst/>
               <a:pathLst>
-                <a:path w="7090630" h="3214842">
+                <a:path w="7090630" h="3206557">
                   <a:moveTo>
-                    <a:pt x="2108777" y="0"/>
+                    <a:pt x="2031473" y="0"/>
                   </a:moveTo>
                   <a:lnTo>
-                    <a:pt x="2148675" y="71304"/>
-                  </a:lnTo>
-                  <a:lnTo>
-                    <a:pt x="2220298" y="194677"/>
-                  </a:lnTo>
-                  <a:lnTo>
-                    <a:pt x="2291920" y="313589"/>
-                  </a:lnTo>
-                  <a:lnTo>
-                    <a:pt x="2363543" y="428203"/>
-                  </a:lnTo>
-                  <a:lnTo>
-                    <a:pt x="2435165" y="538672"/>
-                  </a:lnTo>
-                  <a:lnTo>
-                    <a:pt x="2506788" y="645148"/>
-                  </a:lnTo>
-                  <a:lnTo>
-                    <a:pt x="2578410" y="747774"/>
-                  </a:lnTo>
-                  <a:lnTo>
-                    <a:pt x="2650033" y="846690"/>
-                  </a:lnTo>
-                  <a:lnTo>
-                    <a:pt x="2721655" y="942030"/>
-                  </a:lnTo>
-                  <a:lnTo>
-                    <a:pt x="2793278" y="1033923"/>
-                  </a:lnTo>
-                  <a:lnTo>
-                    <a:pt x="2864901" y="1122494"/>
-                  </a:lnTo>
-                  <a:lnTo>
-                    <a:pt x="2936523" y="1207862"/>
-                  </a:lnTo>
-                  <a:lnTo>
-                    <a:pt x="3008146" y="1290144"/>
-                  </a:lnTo>
-                  <a:lnTo>
-                    <a:pt x="3079768" y="1369451"/>
-                  </a:lnTo>
-                  <a:lnTo>
-                    <a:pt x="3151391" y="1445891"/>
-                  </a:lnTo>
-                  <a:lnTo>
-                    <a:pt x="3223013" y="1519567"/>
-                  </a:lnTo>
-                  <a:lnTo>
-                    <a:pt x="3294636" y="1590580"/>
-                  </a:lnTo>
-                  <a:lnTo>
-                    <a:pt x="3366258" y="1659025"/>
-                  </a:lnTo>
-                  <a:lnTo>
-                    <a:pt x="3437881" y="1724996"/>
-                  </a:lnTo>
-                  <a:lnTo>
-                    <a:pt x="3509503" y="1788582"/>
-                  </a:lnTo>
-                  <a:lnTo>
-                    <a:pt x="3581126" y="1849868"/>
-                  </a:lnTo>
-                  <a:lnTo>
-                    <a:pt x="3652748" y="1908939"/>
-                  </a:lnTo>
-                  <a:lnTo>
-                    <a:pt x="3724371" y="1965875"/>
-                  </a:lnTo>
-                  <a:lnTo>
-                    <a:pt x="3795993" y="2020752"/>
-                  </a:lnTo>
-                  <a:lnTo>
-                    <a:pt x="3867616" y="2073645"/>
-                  </a:lnTo>
-                  <a:lnTo>
-                    <a:pt x="3939238" y="2124625"/>
-                  </a:lnTo>
-                  <a:lnTo>
-                    <a:pt x="4010861" y="2173763"/>
-                  </a:lnTo>
-                  <a:lnTo>
-                    <a:pt x="4082483" y="2221124"/>
-                  </a:lnTo>
-                  <a:lnTo>
-                    <a:pt x="4154106" y="2266772"/>
-                  </a:lnTo>
-                  <a:lnTo>
-                    <a:pt x="4225729" y="2310771"/>
-                  </a:lnTo>
-                  <a:lnTo>
-                    <a:pt x="4297351" y="2353178"/>
-                  </a:lnTo>
-                  <a:lnTo>
-                    <a:pt x="4368974" y="2394053"/>
-                  </a:lnTo>
-                  <a:lnTo>
-                    <a:pt x="4440596" y="2433449"/>
-                  </a:lnTo>
-                  <a:lnTo>
-                    <a:pt x="4512219" y="2471422"/>
-                  </a:lnTo>
-                  <a:lnTo>
-                    <a:pt x="4583841" y="2508021"/>
-                  </a:lnTo>
-                  <a:lnTo>
-                    <a:pt x="4655464" y="2543297"/>
-                  </a:lnTo>
-                  <a:lnTo>
-                    <a:pt x="4727086" y="2577298"/>
-                  </a:lnTo>
-                  <a:lnTo>
-                    <a:pt x="4798709" y="2610070"/>
-                  </a:lnTo>
-                  <a:lnTo>
-                    <a:pt x="4870331" y="2641657"/>
-                  </a:lnTo>
-                  <a:lnTo>
-                    <a:pt x="4941954" y="2654270"/>
-                  </a:lnTo>
-                  <a:lnTo>
-                    <a:pt x="5013576" y="2654249"/>
-                  </a:lnTo>
-                  <a:lnTo>
-                    <a:pt x="5085199" y="2654227"/>
-                  </a:lnTo>
-                  <a:lnTo>
-                    <a:pt x="5156821" y="2654206"/>
-                  </a:lnTo>
-                  <a:lnTo>
-                    <a:pt x="5228444" y="2654184"/>
-                  </a:lnTo>
-                  <a:lnTo>
-                    <a:pt x="5300066" y="2654163"/>
-                  </a:lnTo>
-                  <a:lnTo>
-                    <a:pt x="5371689" y="2654141"/>
-                  </a:lnTo>
-                  <a:lnTo>
-                    <a:pt x="5443311" y="2654120"/>
-                  </a:lnTo>
-                  <a:lnTo>
-                    <a:pt x="5514934" y="2654098"/>
-                  </a:lnTo>
-                  <a:lnTo>
-                    <a:pt x="5586557" y="2654077"/>
-                  </a:lnTo>
-                  <a:lnTo>
-                    <a:pt x="5658179" y="2654055"/>
-                  </a:lnTo>
-                  <a:lnTo>
-                    <a:pt x="5729802" y="2654034"/>
-                  </a:lnTo>
-                  <a:lnTo>
-                    <a:pt x="5801424" y="2654012"/>
-                  </a:lnTo>
-                  <a:lnTo>
-                    <a:pt x="5873047" y="2653991"/>
-                  </a:lnTo>
-                  <a:lnTo>
-                    <a:pt x="5944669" y="2653969"/>
-                  </a:lnTo>
-                  <a:lnTo>
-                    <a:pt x="6016292" y="2653948"/>
-                  </a:lnTo>
-                  <a:lnTo>
-                    <a:pt x="6087914" y="2653926"/>
-                  </a:lnTo>
-                  <a:lnTo>
-                    <a:pt x="6159537" y="2653905"/>
-                  </a:lnTo>
-                  <a:lnTo>
-                    <a:pt x="6231159" y="2653883"/>
-                  </a:lnTo>
-                  <a:lnTo>
-                    <a:pt x="6302782" y="2653862"/>
-                  </a:lnTo>
-                  <a:lnTo>
-                    <a:pt x="6374404" y="2653840"/>
-                  </a:lnTo>
-                  <a:lnTo>
-                    <a:pt x="6446027" y="2653819"/>
-                  </a:lnTo>
-                  <a:lnTo>
-                    <a:pt x="6517649" y="2653797"/>
-                  </a:lnTo>
-                  <a:lnTo>
-                    <a:pt x="6589272" y="2653776"/>
-                  </a:lnTo>
-                  <a:lnTo>
-                    <a:pt x="6660894" y="2653754"/>
-                  </a:lnTo>
-                  <a:lnTo>
-                    <a:pt x="6732517" y="2653733"/>
-                  </a:lnTo>
-                  <a:lnTo>
-                    <a:pt x="6804139" y="2653711"/>
-                  </a:lnTo>
-                  <a:lnTo>
-                    <a:pt x="6875762" y="2653690"/>
-                  </a:lnTo>
-                  <a:lnTo>
-                    <a:pt x="6947385" y="2653668"/>
-                  </a:lnTo>
-                  <a:lnTo>
-                    <a:pt x="7019007" y="2653647"/>
-                  </a:lnTo>
-                  <a:lnTo>
-                    <a:pt x="7090630" y="2653625"/>
-                  </a:lnTo>
-                  <a:lnTo>
-                    <a:pt x="7090630" y="3214842"/>
-                  </a:lnTo>
-                  <a:lnTo>
-                    <a:pt x="7019007" y="3204756"/>
-                  </a:lnTo>
-                  <a:lnTo>
-                    <a:pt x="6947385" y="3194291"/>
-                  </a:lnTo>
-                  <a:lnTo>
-                    <a:pt x="6875762" y="3183433"/>
-                  </a:lnTo>
-                  <a:lnTo>
-                    <a:pt x="6804139" y="3172169"/>
-                  </a:lnTo>
-                  <a:lnTo>
-                    <a:pt x="6732517" y="3160481"/>
-                  </a:lnTo>
-                  <a:lnTo>
-                    <a:pt x="6660894" y="3148356"/>
-                  </a:lnTo>
-                  <a:lnTo>
-                    <a:pt x="6589272" y="3135775"/>
-                  </a:lnTo>
-                  <a:lnTo>
-                    <a:pt x="6517649" y="3122723"/>
-                  </a:lnTo>
-                  <a:lnTo>
-                    <a:pt x="6446027" y="3109181"/>
-                  </a:lnTo>
-                  <a:lnTo>
-                    <a:pt x="6374404" y="3095131"/>
-                  </a:lnTo>
-                  <a:lnTo>
-                    <a:pt x="6302782" y="3080554"/>
-                  </a:lnTo>
-                  <a:lnTo>
-                    <a:pt x="6231159" y="3065430"/>
-                  </a:lnTo>
-                  <a:lnTo>
-                    <a:pt x="6159537" y="3049739"/>
-                  </a:lnTo>
-                  <a:lnTo>
-                    <a:pt x="6087914" y="3033459"/>
-                  </a:lnTo>
-                  <a:lnTo>
-                    <a:pt x="6016292" y="3016569"/>
-                  </a:lnTo>
-                  <a:lnTo>
-                    <a:pt x="5944669" y="2999045"/>
-                  </a:lnTo>
-                  <a:lnTo>
-                    <a:pt x="5873047" y="2980864"/>
-                  </a:lnTo>
-                  <a:lnTo>
-                    <a:pt x="5801424" y="2962001"/>
-                  </a:lnTo>
-                  <a:lnTo>
-                    <a:pt x="5729802" y="2942430"/>
-                  </a:lnTo>
-                  <a:lnTo>
-                    <a:pt x="5658179" y="2922126"/>
-                  </a:lnTo>
-                  <a:lnTo>
-                    <a:pt x="5586557" y="2901059"/>
-                  </a:lnTo>
-                  <a:lnTo>
-                    <a:pt x="5514934" y="2879203"/>
-                  </a:lnTo>
-                  <a:lnTo>
-                    <a:pt x="5443311" y="2856526"/>
-                  </a:lnTo>
-                  <a:lnTo>
-                    <a:pt x="5371689" y="2832999"/>
-                  </a:lnTo>
-                  <a:lnTo>
-                    <a:pt x="5300066" y="2808590"/>
-                  </a:lnTo>
-                  <a:lnTo>
-                    <a:pt x="5228444" y="2783264"/>
-                  </a:lnTo>
-                  <a:lnTo>
-                    <a:pt x="5156821" y="2756989"/>
-                  </a:lnTo>
-                  <a:lnTo>
-                    <a:pt x="5085199" y="2729729"/>
-                  </a:lnTo>
-                  <a:lnTo>
-                    <a:pt x="5013576" y="2701446"/>
-                  </a:lnTo>
-                  <a:lnTo>
-                    <a:pt x="4941954" y="2672101"/>
-                  </a:lnTo>
-                  <a:lnTo>
-                    <a:pt x="4870331" y="2654292"/>
-                  </a:lnTo>
-                  <a:lnTo>
-                    <a:pt x="4798709" y="2654313"/>
-                  </a:lnTo>
-                  <a:lnTo>
-                    <a:pt x="4727086" y="2654335"/>
-                  </a:lnTo>
-                  <a:lnTo>
-                    <a:pt x="4655464" y="2654356"/>
-                  </a:lnTo>
-                  <a:lnTo>
-                    <a:pt x="4583841" y="2654378"/>
-                  </a:lnTo>
-                  <a:lnTo>
-                    <a:pt x="4512219" y="2654399"/>
-                  </a:lnTo>
-                  <a:lnTo>
-                    <a:pt x="4440596" y="2654421"/>
-                  </a:lnTo>
-                  <a:lnTo>
-                    <a:pt x="4368974" y="2654442"/>
-                  </a:lnTo>
-                  <a:lnTo>
-                    <a:pt x="4297351" y="2654464"/>
-                  </a:lnTo>
-                  <a:lnTo>
-                    <a:pt x="4225729" y="2654485"/>
-                  </a:lnTo>
-                  <a:lnTo>
-                    <a:pt x="4154106" y="2654507"/>
-                  </a:lnTo>
-                  <a:lnTo>
-                    <a:pt x="4082483" y="2654528"/>
-                  </a:lnTo>
-                  <a:lnTo>
-                    <a:pt x="4010861" y="2654550"/>
-                  </a:lnTo>
-                  <a:lnTo>
-                    <a:pt x="3939238" y="2654571"/>
-                  </a:lnTo>
-                  <a:lnTo>
-                    <a:pt x="3867616" y="2654593"/>
-                  </a:lnTo>
-                  <a:lnTo>
-                    <a:pt x="3795993" y="2654614"/>
-                  </a:lnTo>
-                  <a:lnTo>
-                    <a:pt x="3724371" y="2654636"/>
-                  </a:lnTo>
-                  <a:lnTo>
-                    <a:pt x="3652748" y="2654657"/>
-                  </a:lnTo>
-                  <a:lnTo>
-                    <a:pt x="3581126" y="2654679"/>
-                  </a:lnTo>
-                  <a:lnTo>
-                    <a:pt x="3509503" y="2654700"/>
-                  </a:lnTo>
-                  <a:lnTo>
-                    <a:pt x="3437881" y="2654722"/>
-                  </a:lnTo>
-                  <a:lnTo>
-                    <a:pt x="3366258" y="2654743"/>
-                  </a:lnTo>
-                  <a:lnTo>
-                    <a:pt x="3294636" y="2654764"/>
-                  </a:lnTo>
-                  <a:lnTo>
-                    <a:pt x="3223013" y="2654786"/>
-                  </a:lnTo>
-                  <a:lnTo>
-                    <a:pt x="3151391" y="2654807"/>
-                  </a:lnTo>
-                  <a:lnTo>
-                    <a:pt x="3079768" y="2654829"/>
-                  </a:lnTo>
-                  <a:lnTo>
-                    <a:pt x="3008146" y="2654850"/>
-                  </a:lnTo>
-                  <a:lnTo>
-                    <a:pt x="2936523" y="2654872"/>
-                  </a:lnTo>
-                  <a:lnTo>
-                    <a:pt x="2864901" y="2654893"/>
-                  </a:lnTo>
-                  <a:lnTo>
-                    <a:pt x="2793278" y="2654915"/>
-                  </a:lnTo>
-                  <a:lnTo>
-                    <a:pt x="2721655" y="2654936"/>
-                  </a:lnTo>
-                  <a:lnTo>
-                    <a:pt x="2650033" y="2654958"/>
-                  </a:lnTo>
-                  <a:lnTo>
-                    <a:pt x="2578410" y="2654979"/>
-                  </a:lnTo>
-                  <a:lnTo>
-                    <a:pt x="2506788" y="2655001"/>
-                  </a:lnTo>
-                  <a:lnTo>
-                    <a:pt x="2435165" y="2655022"/>
-                  </a:lnTo>
-                  <a:lnTo>
-                    <a:pt x="2363543" y="2655044"/>
-                  </a:lnTo>
-                  <a:lnTo>
-                    <a:pt x="2291920" y="2655065"/>
-                  </a:lnTo>
-                  <a:lnTo>
-                    <a:pt x="2220298" y="2655087"/>
-                  </a:lnTo>
-                  <a:lnTo>
-                    <a:pt x="2148675" y="2655108"/>
-                  </a:lnTo>
-                  <a:lnTo>
-                    <a:pt x="2077053" y="2655130"/>
-                  </a:lnTo>
-                  <a:lnTo>
-                    <a:pt x="2005430" y="2655151"/>
-                  </a:lnTo>
-                  <a:lnTo>
-                    <a:pt x="1933808" y="2655173"/>
-                  </a:lnTo>
-                  <a:lnTo>
-                    <a:pt x="1862185" y="2655194"/>
-                  </a:lnTo>
-                  <a:lnTo>
-                    <a:pt x="1790563" y="2655216"/>
-                  </a:lnTo>
-                  <a:lnTo>
-                    <a:pt x="1718940" y="2655237"/>
-                  </a:lnTo>
-                  <a:lnTo>
-                    <a:pt x="1647318" y="2655258"/>
-                  </a:lnTo>
-                  <a:lnTo>
-                    <a:pt x="1575695" y="2655280"/>
-                  </a:lnTo>
-                  <a:lnTo>
-                    <a:pt x="1504073" y="2655301"/>
-                  </a:lnTo>
-                  <a:lnTo>
-                    <a:pt x="1432450" y="2655323"/>
-                  </a:lnTo>
-                  <a:lnTo>
-                    <a:pt x="1360827" y="2655344"/>
-                  </a:lnTo>
-                  <a:lnTo>
-                    <a:pt x="1289205" y="2655366"/>
-                  </a:lnTo>
-                  <a:lnTo>
-                    <a:pt x="1217582" y="2655387"/>
-                  </a:lnTo>
-                  <a:lnTo>
-                    <a:pt x="1145960" y="2655409"/>
-                  </a:lnTo>
-                  <a:lnTo>
-                    <a:pt x="1074337" y="2655430"/>
-                  </a:lnTo>
-                  <a:lnTo>
-                    <a:pt x="1002715" y="2655452"/>
-                  </a:lnTo>
-                  <a:lnTo>
-                    <a:pt x="931092" y="2655473"/>
-                  </a:lnTo>
-                  <a:lnTo>
-                    <a:pt x="859470" y="2655495"/>
-                  </a:lnTo>
-                  <a:lnTo>
-                    <a:pt x="787847" y="2655516"/>
-                  </a:lnTo>
-                  <a:lnTo>
-                    <a:pt x="716225" y="2655538"/>
-                  </a:lnTo>
-                  <a:lnTo>
-                    <a:pt x="644602" y="2655559"/>
-                  </a:lnTo>
-                  <a:lnTo>
-                    <a:pt x="572980" y="2655581"/>
-                  </a:lnTo>
-                  <a:lnTo>
-                    <a:pt x="501357" y="2655602"/>
-                  </a:lnTo>
-                  <a:lnTo>
-                    <a:pt x="429735" y="2655623"/>
-                  </a:lnTo>
-                  <a:lnTo>
-                    <a:pt x="358112" y="2655645"/>
-                  </a:lnTo>
-                  <a:lnTo>
-                    <a:pt x="286490" y="2655666"/>
-                  </a:lnTo>
-                  <a:lnTo>
-                    <a:pt x="214867" y="2655688"/>
-                  </a:lnTo>
-                  <a:lnTo>
-                    <a:pt x="143245" y="2655709"/>
-                  </a:lnTo>
-                  <a:lnTo>
-                    <a:pt x="71622" y="2655731"/>
-                  </a:lnTo>
-                  <a:lnTo>
-                    <a:pt x="0" y="2655752"/>
+                    <a:pt x="2077053" y="79044"/>
+                  </a:lnTo>
+                  <a:lnTo>
+                    <a:pt x="2148675" y="198880"/>
+                  </a:lnTo>
+                  <a:lnTo>
+                    <a:pt x="2220298" y="314498"/>
+                  </a:lnTo>
+                  <a:lnTo>
+                    <a:pt x="2291920" y="426047"/>
+                  </a:lnTo>
+                  <a:lnTo>
+                    <a:pt x="2363543" y="533670"/>
+                  </a:lnTo>
+                  <a:lnTo>
+                    <a:pt x="2435165" y="637505"/>
+                  </a:lnTo>
+                  <a:lnTo>
+                    <a:pt x="2506788" y="737684"/>
+                  </a:lnTo>
+                  <a:lnTo>
+                    <a:pt x="2578410" y="834338"/>
+                  </a:lnTo>
+                  <a:lnTo>
+                    <a:pt x="2650033" y="927590"/>
+                  </a:lnTo>
+                  <a:lnTo>
+                    <a:pt x="2721655" y="1017560"/>
+                  </a:lnTo>
+                  <a:lnTo>
+                    <a:pt x="2793278" y="1104363"/>
+                  </a:lnTo>
+                  <a:lnTo>
+                    <a:pt x="2864901" y="1188111"/>
+                  </a:lnTo>
+                  <a:lnTo>
+                    <a:pt x="2936523" y="1268911"/>
+                  </a:lnTo>
+                  <a:lnTo>
+                    <a:pt x="3008146" y="1346867"/>
+                  </a:lnTo>
+                  <a:lnTo>
+                    <a:pt x="3079768" y="1422079"/>
+                  </a:lnTo>
+                  <a:lnTo>
+                    <a:pt x="3151391" y="1494644"/>
+                  </a:lnTo>
+                  <a:lnTo>
+                    <a:pt x="3223013" y="1564655"/>
+                  </a:lnTo>
+                  <a:lnTo>
+                    <a:pt x="3294636" y="1632202"/>
+                  </a:lnTo>
+                  <a:lnTo>
+                    <a:pt x="3366258" y="1697371"/>
+                  </a:lnTo>
+                  <a:lnTo>
+                    <a:pt x="3437881" y="1760247"/>
+                  </a:lnTo>
+                  <a:lnTo>
+                    <a:pt x="3509503" y="1820909"/>
+                  </a:lnTo>
+                  <a:lnTo>
+                    <a:pt x="3581126" y="1879437"/>
+                  </a:lnTo>
+                  <a:lnTo>
+                    <a:pt x="3652748" y="1935904"/>
+                  </a:lnTo>
+                  <a:lnTo>
+                    <a:pt x="3724371" y="1990384"/>
+                  </a:lnTo>
+                  <a:lnTo>
+                    <a:pt x="3795993" y="2042946"/>
+                  </a:lnTo>
+                  <a:lnTo>
+                    <a:pt x="3867616" y="2093658"/>
+                  </a:lnTo>
+                  <a:lnTo>
+                    <a:pt x="3939238" y="2142586"/>
+                  </a:lnTo>
+                  <a:lnTo>
+                    <a:pt x="4010861" y="2189791"/>
+                  </a:lnTo>
+                  <a:lnTo>
+                    <a:pt x="4082483" y="2235335"/>
+                  </a:lnTo>
+                  <a:lnTo>
+                    <a:pt x="4154106" y="2279275"/>
+                  </a:lnTo>
+                  <a:lnTo>
+                    <a:pt x="4225729" y="2321669"/>
+                  </a:lnTo>
+                  <a:lnTo>
+                    <a:pt x="4297351" y="2362571"/>
+                  </a:lnTo>
+                  <a:lnTo>
+                    <a:pt x="4368974" y="2402034"/>
+                  </a:lnTo>
+                  <a:lnTo>
+                    <a:pt x="4440596" y="2440107"/>
+                  </a:lnTo>
+                  <a:lnTo>
+                    <a:pt x="4512219" y="2476840"/>
+                  </a:lnTo>
+                  <a:lnTo>
+                    <a:pt x="4583841" y="2512281"/>
+                  </a:lnTo>
+                  <a:lnTo>
+                    <a:pt x="4655464" y="2546473"/>
+                  </a:lnTo>
+                  <a:lnTo>
+                    <a:pt x="4727086" y="2579463"/>
+                  </a:lnTo>
+                  <a:lnTo>
+                    <a:pt x="4798709" y="2611291"/>
+                  </a:lnTo>
+                  <a:lnTo>
+                    <a:pt x="4870331" y="2641999"/>
+                  </a:lnTo>
+                  <a:lnTo>
+                    <a:pt x="4941954" y="2655113"/>
+                  </a:lnTo>
+                  <a:lnTo>
+                    <a:pt x="5013576" y="2656519"/>
+                  </a:lnTo>
+                  <a:lnTo>
+                    <a:pt x="5085199" y="2657922"/>
+                  </a:lnTo>
+                  <a:lnTo>
+                    <a:pt x="5156821" y="2659324"/>
+                  </a:lnTo>
+                  <a:lnTo>
+                    <a:pt x="5228444" y="2660722"/>
+                  </a:lnTo>
+                  <a:lnTo>
+                    <a:pt x="5300066" y="2662119"/>
+                  </a:lnTo>
+                  <a:lnTo>
+                    <a:pt x="5371689" y="2663513"/>
+                  </a:lnTo>
+                  <a:lnTo>
+                    <a:pt x="5443311" y="2664904"/>
+                  </a:lnTo>
+                  <a:lnTo>
+                    <a:pt x="5514934" y="2666294"/>
+                  </a:lnTo>
+                  <a:lnTo>
+                    <a:pt x="5586557" y="2667680"/>
+                  </a:lnTo>
+                  <a:lnTo>
+                    <a:pt x="5658179" y="2669065"/>
+                  </a:lnTo>
+                  <a:lnTo>
+                    <a:pt x="5729802" y="2670447"/>
+                  </a:lnTo>
+                  <a:lnTo>
+                    <a:pt x="5801424" y="2671827"/>
+                  </a:lnTo>
+                  <a:lnTo>
+                    <a:pt x="5873047" y="2673205"/>
+                  </a:lnTo>
+                  <a:lnTo>
+                    <a:pt x="5944669" y="2674580"/>
+                  </a:lnTo>
+                  <a:lnTo>
+                    <a:pt x="6016292" y="2675953"/>
+                  </a:lnTo>
+                  <a:lnTo>
+                    <a:pt x="6087914" y="2677323"/>
+                  </a:lnTo>
+                  <a:lnTo>
+                    <a:pt x="6159537" y="2678691"/>
+                  </a:lnTo>
+                  <a:lnTo>
+                    <a:pt x="6231159" y="2680057"/>
+                  </a:lnTo>
+                  <a:lnTo>
+                    <a:pt x="6302782" y="2681421"/>
+                  </a:lnTo>
+                  <a:lnTo>
+                    <a:pt x="6374404" y="2682782"/>
+                  </a:lnTo>
+                  <a:lnTo>
+                    <a:pt x="6446027" y="2684141"/>
+                  </a:lnTo>
+                  <a:lnTo>
+                    <a:pt x="6517649" y="2685498"/>
+                  </a:lnTo>
+                  <a:lnTo>
+                    <a:pt x="6589272" y="2686852"/>
+                  </a:lnTo>
+                  <a:lnTo>
+                    <a:pt x="6660894" y="2688204"/>
+                  </a:lnTo>
+                  <a:lnTo>
+                    <a:pt x="6732517" y="2689554"/>
+                  </a:lnTo>
+                  <a:lnTo>
+                    <a:pt x="6804139" y="2690901"/>
+                  </a:lnTo>
+                  <a:lnTo>
+                    <a:pt x="6875762" y="2692246"/>
+                  </a:lnTo>
+                  <a:lnTo>
+                    <a:pt x="6947385" y="2693589"/>
+                  </a:lnTo>
+                  <a:lnTo>
+                    <a:pt x="7019007" y="2694930"/>
+                  </a:lnTo>
+                  <a:lnTo>
+                    <a:pt x="7090630" y="2696268"/>
+                  </a:lnTo>
+                  <a:lnTo>
+                    <a:pt x="7090630" y="3206557"/>
+                  </a:lnTo>
+                  <a:lnTo>
+                    <a:pt x="7019007" y="3196445"/>
+                  </a:lnTo>
+                  <a:lnTo>
+                    <a:pt x="6947385" y="3185964"/>
+                  </a:lnTo>
+                  <a:lnTo>
+                    <a:pt x="6875762" y="3175101"/>
+                  </a:lnTo>
+                  <a:lnTo>
+                    <a:pt x="6804139" y="3163841"/>
+                  </a:lnTo>
+                  <a:lnTo>
+                    <a:pt x="6732517" y="3152170"/>
+                  </a:lnTo>
+                  <a:lnTo>
+                    <a:pt x="6660894" y="3140074"/>
+                  </a:lnTo>
+                  <a:lnTo>
+                    <a:pt x="6589272" y="3127536"/>
+                  </a:lnTo>
+                  <a:lnTo>
+                    <a:pt x="6517649" y="3114541"/>
+                  </a:lnTo>
+                  <a:lnTo>
+                    <a:pt x="6446027" y="3101072"/>
+                  </a:lnTo>
+                  <a:lnTo>
+                    <a:pt x="6374404" y="3087112"/>
+                  </a:lnTo>
+                  <a:lnTo>
+                    <a:pt x="6302782" y="3072642"/>
+                  </a:lnTo>
+                  <a:lnTo>
+                    <a:pt x="6231159" y="3057644"/>
+                  </a:lnTo>
+                  <a:lnTo>
+                    <a:pt x="6159537" y="3042100"/>
+                  </a:lnTo>
+                  <a:lnTo>
+                    <a:pt x="6087914" y="3025988"/>
+                  </a:lnTo>
+                  <a:lnTo>
+                    <a:pt x="6016292" y="3009288"/>
+                  </a:lnTo>
+                  <a:lnTo>
+                    <a:pt x="5944669" y="2991979"/>
+                  </a:lnTo>
+                  <a:lnTo>
+                    <a:pt x="5873047" y="2974039"/>
+                  </a:lnTo>
+                  <a:lnTo>
+                    <a:pt x="5801424" y="2955444"/>
+                  </a:lnTo>
+                  <a:lnTo>
+                    <a:pt x="5729802" y="2936171"/>
+                  </a:lnTo>
+                  <a:lnTo>
+                    <a:pt x="5658179" y="2916195"/>
+                  </a:lnTo>
+                  <a:lnTo>
+                    <a:pt x="5586557" y="2895490"/>
+                  </a:lnTo>
+                  <a:lnTo>
+                    <a:pt x="5514934" y="2874029"/>
+                  </a:lnTo>
+                  <a:lnTo>
+                    <a:pt x="5443311" y="2851786"/>
+                  </a:lnTo>
+                  <a:lnTo>
+                    <a:pt x="5371689" y="2828731"/>
+                  </a:lnTo>
+                  <a:lnTo>
+                    <a:pt x="5300066" y="2804835"/>
+                  </a:lnTo>
+                  <a:lnTo>
+                    <a:pt x="5228444" y="2780068"/>
+                  </a:lnTo>
+                  <a:lnTo>
+                    <a:pt x="5156821" y="2754397"/>
+                  </a:lnTo>
+                  <a:lnTo>
+                    <a:pt x="5085199" y="2727789"/>
+                  </a:lnTo>
+                  <a:lnTo>
+                    <a:pt x="5013576" y="2700211"/>
+                  </a:lnTo>
+                  <a:lnTo>
+                    <a:pt x="4941954" y="2671626"/>
+                  </a:lnTo>
+                  <a:lnTo>
+                    <a:pt x="4870331" y="2653705"/>
+                  </a:lnTo>
+                  <a:lnTo>
+                    <a:pt x="4798709" y="2652294"/>
+                  </a:lnTo>
+                  <a:lnTo>
+                    <a:pt x="4727086" y="2650881"/>
+                  </a:lnTo>
+                  <a:lnTo>
+                    <a:pt x="4655464" y="2649466"/>
+                  </a:lnTo>
+                  <a:lnTo>
+                    <a:pt x="4583841" y="2648048"/>
+                  </a:lnTo>
+                  <a:lnTo>
+                    <a:pt x="4512219" y="2646627"/>
+                  </a:lnTo>
+                  <a:lnTo>
+                    <a:pt x="4440596" y="2645205"/>
+                  </a:lnTo>
+                  <a:lnTo>
+                    <a:pt x="4368974" y="2643780"/>
+                  </a:lnTo>
+                  <a:lnTo>
+                    <a:pt x="4297351" y="2642352"/>
+                  </a:lnTo>
+                  <a:lnTo>
+                    <a:pt x="4225729" y="2640922"/>
+                  </a:lnTo>
+                  <a:lnTo>
+                    <a:pt x="4154106" y="2639490"/>
+                  </a:lnTo>
+                  <a:lnTo>
+                    <a:pt x="4082483" y="2638055"/>
+                  </a:lnTo>
+                  <a:lnTo>
+                    <a:pt x="4010861" y="2636618"/>
+                  </a:lnTo>
+                  <a:lnTo>
+                    <a:pt x="3939238" y="2635178"/>
+                  </a:lnTo>
+                  <a:lnTo>
+                    <a:pt x="3867616" y="2633736"/>
+                  </a:lnTo>
+                  <a:lnTo>
+                    <a:pt x="3795993" y="2632291"/>
+                  </a:lnTo>
+                  <a:lnTo>
+                    <a:pt x="3724371" y="2630844"/>
+                  </a:lnTo>
+                  <a:lnTo>
+                    <a:pt x="3652748" y="2629395"/>
+                  </a:lnTo>
+                  <a:lnTo>
+                    <a:pt x="3581126" y="2627943"/>
+                  </a:lnTo>
+                  <a:lnTo>
+                    <a:pt x="3509503" y="2626488"/>
+                  </a:lnTo>
+                  <a:lnTo>
+                    <a:pt x="3437881" y="2625031"/>
+                  </a:lnTo>
+                  <a:lnTo>
+                    <a:pt x="3366258" y="2623572"/>
+                  </a:lnTo>
+                  <a:lnTo>
+                    <a:pt x="3294636" y="2622110"/>
+                  </a:lnTo>
+                  <a:lnTo>
+                    <a:pt x="3223013" y="2620646"/>
+                  </a:lnTo>
+                  <a:lnTo>
+                    <a:pt x="3151391" y="2619179"/>
+                  </a:lnTo>
+                  <a:lnTo>
+                    <a:pt x="3079768" y="2617710"/>
+                  </a:lnTo>
+                  <a:lnTo>
+                    <a:pt x="3008146" y="2616238"/>
+                  </a:lnTo>
+                  <a:lnTo>
+                    <a:pt x="2936523" y="2614763"/>
+                  </a:lnTo>
+                  <a:lnTo>
+                    <a:pt x="2864901" y="2613287"/>
+                  </a:lnTo>
+                  <a:lnTo>
+                    <a:pt x="2793278" y="2611807"/>
+                  </a:lnTo>
+                  <a:lnTo>
+                    <a:pt x="2721655" y="2610325"/>
+                  </a:lnTo>
+                  <a:lnTo>
+                    <a:pt x="2650033" y="2608841"/>
+                  </a:lnTo>
+                  <a:lnTo>
+                    <a:pt x="2578410" y="2607354"/>
+                  </a:lnTo>
+                  <a:lnTo>
+                    <a:pt x="2506788" y="2605865"/>
+                  </a:lnTo>
+                  <a:lnTo>
+                    <a:pt x="2435165" y="2604373"/>
+                  </a:lnTo>
+                  <a:lnTo>
+                    <a:pt x="2363543" y="2602878"/>
+                  </a:lnTo>
+                  <a:lnTo>
+                    <a:pt x="2291920" y="2601381"/>
+                  </a:lnTo>
+                  <a:lnTo>
+                    <a:pt x="2220298" y="2599882"/>
+                  </a:lnTo>
+                  <a:lnTo>
+                    <a:pt x="2148675" y="2598379"/>
+                  </a:lnTo>
+                  <a:lnTo>
+                    <a:pt x="2077053" y="2596875"/>
+                  </a:lnTo>
+                  <a:lnTo>
+                    <a:pt x="2005430" y="2595367"/>
+                  </a:lnTo>
+                  <a:lnTo>
+                    <a:pt x="1933808" y="2593858"/>
+                  </a:lnTo>
+                  <a:lnTo>
+                    <a:pt x="1862185" y="2592345"/>
+                  </a:lnTo>
+                  <a:lnTo>
+                    <a:pt x="1790563" y="2590830"/>
+                  </a:lnTo>
+                  <a:lnTo>
+                    <a:pt x="1718940" y="2589313"/>
+                  </a:lnTo>
+                  <a:lnTo>
+                    <a:pt x="1647318" y="2587793"/>
+                  </a:lnTo>
+                  <a:lnTo>
+                    <a:pt x="1575695" y="2586270"/>
+                  </a:lnTo>
+                  <a:lnTo>
+                    <a:pt x="1504073" y="2584745"/>
+                  </a:lnTo>
+                  <a:lnTo>
+                    <a:pt x="1432450" y="2583217"/>
+                  </a:lnTo>
+                  <a:lnTo>
+                    <a:pt x="1360827" y="2581686"/>
+                  </a:lnTo>
+                  <a:lnTo>
+                    <a:pt x="1289205" y="2580153"/>
+                  </a:lnTo>
+                  <a:lnTo>
+                    <a:pt x="1217582" y="2578618"/>
+                  </a:lnTo>
+                  <a:lnTo>
+                    <a:pt x="1145960" y="2577079"/>
+                  </a:lnTo>
+                  <a:lnTo>
+                    <a:pt x="1074337" y="2575539"/>
+                  </a:lnTo>
+                  <a:lnTo>
+                    <a:pt x="1002715" y="2573995"/>
+                  </a:lnTo>
+                  <a:lnTo>
+                    <a:pt x="931092" y="2572449"/>
+                  </a:lnTo>
+                  <a:lnTo>
+                    <a:pt x="859470" y="2570900"/>
+                  </a:lnTo>
+                  <a:lnTo>
+                    <a:pt x="787847" y="2569349"/>
+                  </a:lnTo>
+                  <a:lnTo>
+                    <a:pt x="716225" y="2567795"/>
+                  </a:lnTo>
+                  <a:lnTo>
+                    <a:pt x="644602" y="2566238"/>
+                  </a:lnTo>
+                  <a:lnTo>
+                    <a:pt x="572980" y="2564679"/>
+                  </a:lnTo>
+                  <a:lnTo>
+                    <a:pt x="501357" y="2563117"/>
+                  </a:lnTo>
+                  <a:lnTo>
+                    <a:pt x="429735" y="2561552"/>
+                  </a:lnTo>
+                  <a:lnTo>
+                    <a:pt x="358112" y="2559985"/>
+                  </a:lnTo>
+                  <a:lnTo>
+                    <a:pt x="286490" y="2558415"/>
+                  </a:lnTo>
+                  <a:lnTo>
+                    <a:pt x="214867" y="2556842"/>
+                  </a:lnTo>
+                  <a:lnTo>
+                    <a:pt x="143245" y="2555267"/>
+                  </a:lnTo>
+                  <a:lnTo>
+                    <a:pt x="71622" y="2553689"/>
+                  </a:lnTo>
+                  <a:lnTo>
+                    <a:pt x="0" y="2552109"/>
                   </a:lnTo>
                   <a:close/>
                 </a:path>
@@ -3546,225 +3549,228 @@
           </p:nvSpPr>
           <p:spPr>
             <a:xfrm>
-              <a:off x="3280827" y="2073503"/>
-              <a:ext cx="4981852" cy="2654270"/>
+              <a:off x="3203523" y="2073503"/>
+              <a:ext cx="5059156" cy="2696268"/>
             </a:xfrm>
             <a:custGeom>
               <a:avLst/>
               <a:pathLst>
-                <a:path w="4981852" h="2654270">
+                <a:path w="5059156" h="2696268">
                   <a:moveTo>
                     <a:pt x="0" y="0"/>
                   </a:moveTo>
                   <a:lnTo>
-                    <a:pt x="39898" y="71304"/>
-                  </a:lnTo>
-                  <a:lnTo>
-                    <a:pt x="111520" y="194677"/>
-                  </a:lnTo>
-                  <a:lnTo>
-                    <a:pt x="183143" y="313589"/>
-                  </a:lnTo>
-                  <a:lnTo>
-                    <a:pt x="254765" y="428203"/>
-                  </a:lnTo>
-                  <a:lnTo>
-                    <a:pt x="326388" y="538672"/>
-                  </a:lnTo>
-                  <a:lnTo>
-                    <a:pt x="398010" y="645148"/>
-                  </a:lnTo>
-                  <a:lnTo>
-                    <a:pt x="469633" y="747774"/>
-                  </a:lnTo>
-                  <a:lnTo>
-                    <a:pt x="541255" y="846690"/>
-                  </a:lnTo>
-                  <a:lnTo>
-                    <a:pt x="612878" y="942030"/>
-                  </a:lnTo>
-                  <a:lnTo>
-                    <a:pt x="684500" y="1033923"/>
-                  </a:lnTo>
-                  <a:lnTo>
-                    <a:pt x="756123" y="1122494"/>
-                  </a:lnTo>
-                  <a:lnTo>
-                    <a:pt x="827745" y="1207862"/>
-                  </a:lnTo>
-                  <a:lnTo>
-                    <a:pt x="899368" y="1290144"/>
-                  </a:lnTo>
-                  <a:lnTo>
-                    <a:pt x="970990" y="1369451"/>
-                  </a:lnTo>
-                  <a:lnTo>
-                    <a:pt x="1042613" y="1445891"/>
-                  </a:lnTo>
-                  <a:lnTo>
-                    <a:pt x="1114235" y="1519567"/>
-                  </a:lnTo>
-                  <a:lnTo>
-                    <a:pt x="1185858" y="1590580"/>
-                  </a:lnTo>
-                  <a:lnTo>
-                    <a:pt x="1257480" y="1659025"/>
-                  </a:lnTo>
-                  <a:lnTo>
-                    <a:pt x="1329103" y="1724996"/>
-                  </a:lnTo>
-                  <a:lnTo>
-                    <a:pt x="1400726" y="1788582"/>
-                  </a:lnTo>
-                  <a:lnTo>
-                    <a:pt x="1472348" y="1849868"/>
-                  </a:lnTo>
-                  <a:lnTo>
-                    <a:pt x="1543971" y="1908939"/>
-                  </a:lnTo>
-                  <a:lnTo>
-                    <a:pt x="1615593" y="1965875"/>
-                  </a:lnTo>
-                  <a:lnTo>
-                    <a:pt x="1687216" y="2020752"/>
-                  </a:lnTo>
-                  <a:lnTo>
-                    <a:pt x="1758838" y="2073645"/>
-                  </a:lnTo>
-                  <a:lnTo>
-                    <a:pt x="1830461" y="2124625"/>
-                  </a:lnTo>
-                  <a:lnTo>
-                    <a:pt x="1902083" y="2173763"/>
-                  </a:lnTo>
-                  <a:lnTo>
-                    <a:pt x="1973706" y="2221124"/>
-                  </a:lnTo>
-                  <a:lnTo>
-                    <a:pt x="2045328" y="2266772"/>
-                  </a:lnTo>
-                  <a:lnTo>
-                    <a:pt x="2116951" y="2310771"/>
-                  </a:lnTo>
-                  <a:lnTo>
-                    <a:pt x="2188573" y="2353178"/>
-                  </a:lnTo>
-                  <a:lnTo>
-                    <a:pt x="2260196" y="2394053"/>
-                  </a:lnTo>
-                  <a:lnTo>
-                    <a:pt x="2331818" y="2433449"/>
-                  </a:lnTo>
-                  <a:lnTo>
-                    <a:pt x="2403441" y="2471422"/>
-                  </a:lnTo>
-                  <a:lnTo>
-                    <a:pt x="2475063" y="2508021"/>
-                  </a:lnTo>
-                  <a:lnTo>
-                    <a:pt x="2546686" y="2543297"/>
-                  </a:lnTo>
-                  <a:lnTo>
-                    <a:pt x="2618308" y="2577298"/>
-                  </a:lnTo>
-                  <a:lnTo>
-                    <a:pt x="2689931" y="2610070"/>
-                  </a:lnTo>
-                  <a:lnTo>
-                    <a:pt x="2761554" y="2641657"/>
-                  </a:lnTo>
-                  <a:lnTo>
-                    <a:pt x="2833176" y="2654270"/>
-                  </a:lnTo>
-                  <a:lnTo>
-                    <a:pt x="2904799" y="2654249"/>
-                  </a:lnTo>
-                  <a:lnTo>
-                    <a:pt x="2976421" y="2654227"/>
-                  </a:lnTo>
-                  <a:lnTo>
-                    <a:pt x="3048044" y="2654206"/>
-                  </a:lnTo>
-                  <a:lnTo>
-                    <a:pt x="3119666" y="2654184"/>
-                  </a:lnTo>
-                  <a:lnTo>
-                    <a:pt x="3191289" y="2654163"/>
-                  </a:lnTo>
-                  <a:lnTo>
-                    <a:pt x="3262911" y="2654141"/>
-                  </a:lnTo>
-                  <a:lnTo>
-                    <a:pt x="3334534" y="2654120"/>
-                  </a:lnTo>
-                  <a:lnTo>
-                    <a:pt x="3406156" y="2654098"/>
-                  </a:lnTo>
-                  <a:lnTo>
-                    <a:pt x="3477779" y="2654077"/>
-                  </a:lnTo>
-                  <a:lnTo>
-                    <a:pt x="3549401" y="2654055"/>
-                  </a:lnTo>
-                  <a:lnTo>
-                    <a:pt x="3621024" y="2654034"/>
-                  </a:lnTo>
-                  <a:lnTo>
-                    <a:pt x="3692646" y="2654012"/>
-                  </a:lnTo>
-                  <a:lnTo>
-                    <a:pt x="3764269" y="2653991"/>
-                  </a:lnTo>
-                  <a:lnTo>
-                    <a:pt x="3835891" y="2653969"/>
-                  </a:lnTo>
-                  <a:lnTo>
-                    <a:pt x="3907514" y="2653948"/>
-                  </a:lnTo>
-                  <a:lnTo>
-                    <a:pt x="3979136" y="2653926"/>
-                  </a:lnTo>
-                  <a:lnTo>
-                    <a:pt x="4050759" y="2653905"/>
-                  </a:lnTo>
-                  <a:lnTo>
-                    <a:pt x="4122382" y="2653883"/>
-                  </a:lnTo>
-                  <a:lnTo>
-                    <a:pt x="4194004" y="2653862"/>
-                  </a:lnTo>
-                  <a:lnTo>
-                    <a:pt x="4265627" y="2653840"/>
-                  </a:lnTo>
-                  <a:lnTo>
-                    <a:pt x="4337249" y="2653819"/>
-                  </a:lnTo>
-                  <a:lnTo>
-                    <a:pt x="4408872" y="2653797"/>
-                  </a:lnTo>
-                  <a:lnTo>
-                    <a:pt x="4480494" y="2653776"/>
-                  </a:lnTo>
-                  <a:lnTo>
-                    <a:pt x="4552117" y="2653754"/>
-                  </a:lnTo>
-                  <a:lnTo>
-                    <a:pt x="4623739" y="2653733"/>
-                  </a:lnTo>
-                  <a:lnTo>
-                    <a:pt x="4695362" y="2653711"/>
-                  </a:lnTo>
-                  <a:lnTo>
-                    <a:pt x="4766984" y="2653690"/>
-                  </a:lnTo>
-                  <a:lnTo>
-                    <a:pt x="4838607" y="2653668"/>
-                  </a:lnTo>
-                  <a:lnTo>
-                    <a:pt x="4910229" y="2653647"/>
-                  </a:lnTo>
-                  <a:lnTo>
-                    <a:pt x="4981852" y="2653625"/>
+                    <a:pt x="45579" y="79044"/>
+                  </a:lnTo>
+                  <a:lnTo>
+                    <a:pt x="117202" y="198880"/>
+                  </a:lnTo>
+                  <a:lnTo>
+                    <a:pt x="188824" y="314498"/>
+                  </a:lnTo>
+                  <a:lnTo>
+                    <a:pt x="260447" y="426047"/>
+                  </a:lnTo>
+                  <a:lnTo>
+                    <a:pt x="332069" y="533670"/>
+                  </a:lnTo>
+                  <a:lnTo>
+                    <a:pt x="403692" y="637505"/>
+                  </a:lnTo>
+                  <a:lnTo>
+                    <a:pt x="475314" y="737684"/>
+                  </a:lnTo>
+                  <a:lnTo>
+                    <a:pt x="546937" y="834338"/>
+                  </a:lnTo>
+                  <a:lnTo>
+                    <a:pt x="618559" y="927590"/>
+                  </a:lnTo>
+                  <a:lnTo>
+                    <a:pt x="690182" y="1017560"/>
+                  </a:lnTo>
+                  <a:lnTo>
+                    <a:pt x="761804" y="1104363"/>
+                  </a:lnTo>
+                  <a:lnTo>
+                    <a:pt x="833427" y="1188111"/>
+                  </a:lnTo>
+                  <a:lnTo>
+                    <a:pt x="905049" y="1268911"/>
+                  </a:lnTo>
+                  <a:lnTo>
+                    <a:pt x="976672" y="1346867"/>
+                  </a:lnTo>
+                  <a:lnTo>
+                    <a:pt x="1048294" y="1422079"/>
+                  </a:lnTo>
+                  <a:lnTo>
+                    <a:pt x="1119917" y="1494644"/>
+                  </a:lnTo>
+                  <a:lnTo>
+                    <a:pt x="1191540" y="1564655"/>
+                  </a:lnTo>
+                  <a:lnTo>
+                    <a:pt x="1263162" y="1632202"/>
+                  </a:lnTo>
+                  <a:lnTo>
+                    <a:pt x="1334785" y="1697371"/>
+                  </a:lnTo>
+                  <a:lnTo>
+                    <a:pt x="1406407" y="1760247"/>
+                  </a:lnTo>
+                  <a:lnTo>
+                    <a:pt x="1478030" y="1820909"/>
+                  </a:lnTo>
+                  <a:lnTo>
+                    <a:pt x="1549652" y="1879437"/>
+                  </a:lnTo>
+                  <a:lnTo>
+                    <a:pt x="1621275" y="1935904"/>
+                  </a:lnTo>
+                  <a:lnTo>
+                    <a:pt x="1692897" y="1990384"/>
+                  </a:lnTo>
+                  <a:lnTo>
+                    <a:pt x="1764520" y="2042946"/>
+                  </a:lnTo>
+                  <a:lnTo>
+                    <a:pt x="1836142" y="2093658"/>
+                  </a:lnTo>
+                  <a:lnTo>
+                    <a:pt x="1907765" y="2142586"/>
+                  </a:lnTo>
+                  <a:lnTo>
+                    <a:pt x="1979387" y="2189791"/>
+                  </a:lnTo>
+                  <a:lnTo>
+                    <a:pt x="2051010" y="2235335"/>
+                  </a:lnTo>
+                  <a:lnTo>
+                    <a:pt x="2122632" y="2279275"/>
+                  </a:lnTo>
+                  <a:lnTo>
+                    <a:pt x="2194255" y="2321669"/>
+                  </a:lnTo>
+                  <a:lnTo>
+                    <a:pt x="2265877" y="2362571"/>
+                  </a:lnTo>
+                  <a:lnTo>
+                    <a:pt x="2337500" y="2402034"/>
+                  </a:lnTo>
+                  <a:lnTo>
+                    <a:pt x="2409122" y="2440107"/>
+                  </a:lnTo>
+                  <a:lnTo>
+                    <a:pt x="2480745" y="2476840"/>
+                  </a:lnTo>
+                  <a:lnTo>
+                    <a:pt x="2552368" y="2512281"/>
+                  </a:lnTo>
+                  <a:lnTo>
+                    <a:pt x="2623990" y="2546473"/>
+                  </a:lnTo>
+                  <a:lnTo>
+                    <a:pt x="2695613" y="2579463"/>
+                  </a:lnTo>
+                  <a:lnTo>
+                    <a:pt x="2767235" y="2611291"/>
+                  </a:lnTo>
+                  <a:lnTo>
+                    <a:pt x="2838858" y="2641999"/>
+                  </a:lnTo>
+                  <a:lnTo>
+                    <a:pt x="2910480" y="2655113"/>
+                  </a:lnTo>
+                  <a:lnTo>
+                    <a:pt x="2982103" y="2656519"/>
+                  </a:lnTo>
+                  <a:lnTo>
+                    <a:pt x="3053725" y="2657922"/>
+                  </a:lnTo>
+                  <a:lnTo>
+                    <a:pt x="3125348" y="2659324"/>
+                  </a:lnTo>
+                  <a:lnTo>
+                    <a:pt x="3196970" y="2660722"/>
+                  </a:lnTo>
+                  <a:lnTo>
+                    <a:pt x="3268593" y="2662119"/>
+                  </a:lnTo>
+                  <a:lnTo>
+                    <a:pt x="3340215" y="2663513"/>
+                  </a:lnTo>
+                  <a:lnTo>
+                    <a:pt x="3411838" y="2664904"/>
+                  </a:lnTo>
+                  <a:lnTo>
+                    <a:pt x="3483460" y="2666294"/>
+                  </a:lnTo>
+                  <a:lnTo>
+                    <a:pt x="3555083" y="2667680"/>
+                  </a:lnTo>
+                  <a:lnTo>
+                    <a:pt x="3626705" y="2669065"/>
+                  </a:lnTo>
+                  <a:lnTo>
+                    <a:pt x="3698328" y="2670447"/>
+                  </a:lnTo>
+                  <a:lnTo>
+                    <a:pt x="3769950" y="2671827"/>
+                  </a:lnTo>
+                  <a:lnTo>
+                    <a:pt x="3841573" y="2673205"/>
+                  </a:lnTo>
+                  <a:lnTo>
+                    <a:pt x="3913196" y="2674580"/>
+                  </a:lnTo>
+                  <a:lnTo>
+                    <a:pt x="3984818" y="2675953"/>
+                  </a:lnTo>
+                  <a:lnTo>
+                    <a:pt x="4056441" y="2677323"/>
+                  </a:lnTo>
+                  <a:lnTo>
+                    <a:pt x="4128063" y="2678691"/>
+                  </a:lnTo>
+                  <a:lnTo>
+                    <a:pt x="4199686" y="2680057"/>
+                  </a:lnTo>
+                  <a:lnTo>
+                    <a:pt x="4271308" y="2681421"/>
+                  </a:lnTo>
+                  <a:lnTo>
+                    <a:pt x="4342931" y="2682782"/>
+                  </a:lnTo>
+                  <a:lnTo>
+                    <a:pt x="4414553" y="2684141"/>
+                  </a:lnTo>
+                  <a:lnTo>
+                    <a:pt x="4486176" y="2685498"/>
+                  </a:lnTo>
+                  <a:lnTo>
+                    <a:pt x="4557798" y="2686852"/>
+                  </a:lnTo>
+                  <a:lnTo>
+                    <a:pt x="4629421" y="2688204"/>
+                  </a:lnTo>
+                  <a:lnTo>
+                    <a:pt x="4701043" y="2689554"/>
+                  </a:lnTo>
+                  <a:lnTo>
+                    <a:pt x="4772666" y="2690901"/>
+                  </a:lnTo>
+                  <a:lnTo>
+                    <a:pt x="4844288" y="2692246"/>
+                  </a:lnTo>
+                  <a:lnTo>
+                    <a:pt x="4915911" y="2693589"/>
+                  </a:lnTo>
+                  <a:lnTo>
+                    <a:pt x="4987533" y="2694930"/>
+                  </a:lnTo>
+                  <a:lnTo>
+                    <a:pt x="5059156" y="2696268"/>
                   </a:lnTo>
                 </a:path>
               </a:pathLst>
@@ -3784,312 +3790,312 @@
           </p:nvSpPr>
           <p:spPr>
             <a:xfrm>
-              <a:off x="1172049" y="4727795"/>
-              <a:ext cx="7090630" cy="560550"/>
+              <a:off x="1172049" y="4625612"/>
+              <a:ext cx="7090630" cy="654448"/>
             </a:xfrm>
             <a:custGeom>
               <a:avLst/>
               <a:pathLst>
-                <a:path w="7090630" h="560550">
+                <a:path w="7090630" h="654448">
                   <a:moveTo>
-                    <a:pt x="7090630" y="560550"/>
+                    <a:pt x="7090630" y="654448"/>
                   </a:moveTo>
                   <a:lnTo>
-                    <a:pt x="7019007" y="550464"/>
-                  </a:lnTo>
-                  <a:lnTo>
-                    <a:pt x="6947385" y="539999"/>
-                  </a:lnTo>
-                  <a:lnTo>
-                    <a:pt x="6875762" y="529141"/>
-                  </a:lnTo>
-                  <a:lnTo>
-                    <a:pt x="6804139" y="517876"/>
-                  </a:lnTo>
-                  <a:lnTo>
-                    <a:pt x="6732517" y="506189"/>
-                  </a:lnTo>
-                  <a:lnTo>
-                    <a:pt x="6660894" y="494063"/>
-                  </a:lnTo>
-                  <a:lnTo>
-                    <a:pt x="6589272" y="481483"/>
-                  </a:lnTo>
-                  <a:lnTo>
-                    <a:pt x="6517649" y="468430"/>
-                  </a:lnTo>
-                  <a:lnTo>
-                    <a:pt x="6446027" y="454888"/>
-                  </a:lnTo>
-                  <a:lnTo>
-                    <a:pt x="6374404" y="440839"/>
-                  </a:lnTo>
-                  <a:lnTo>
-                    <a:pt x="6302782" y="426262"/>
-                  </a:lnTo>
-                  <a:lnTo>
-                    <a:pt x="6231159" y="411138"/>
-                  </a:lnTo>
-                  <a:lnTo>
-                    <a:pt x="6159537" y="395447"/>
-                  </a:lnTo>
-                  <a:lnTo>
-                    <a:pt x="6087914" y="379167"/>
-                  </a:lnTo>
-                  <a:lnTo>
-                    <a:pt x="6016292" y="362277"/>
-                  </a:lnTo>
-                  <a:lnTo>
-                    <a:pt x="5944669" y="344753"/>
-                  </a:lnTo>
-                  <a:lnTo>
-                    <a:pt x="5873047" y="326572"/>
-                  </a:lnTo>
-                  <a:lnTo>
-                    <a:pt x="5801424" y="307709"/>
-                  </a:lnTo>
-                  <a:lnTo>
-                    <a:pt x="5729802" y="288138"/>
-                  </a:lnTo>
-                  <a:lnTo>
-                    <a:pt x="5658179" y="267833"/>
-                  </a:lnTo>
-                  <a:lnTo>
-                    <a:pt x="5586557" y="246767"/>
-                  </a:lnTo>
-                  <a:lnTo>
-                    <a:pt x="5514934" y="224910"/>
-                  </a:lnTo>
-                  <a:lnTo>
-                    <a:pt x="5443311" y="202234"/>
-                  </a:lnTo>
-                  <a:lnTo>
-                    <a:pt x="5371689" y="178707"/>
-                  </a:lnTo>
-                  <a:lnTo>
-                    <a:pt x="5300066" y="154297"/>
-                  </a:lnTo>
-                  <a:lnTo>
-                    <a:pt x="5228444" y="128972"/>
-                  </a:lnTo>
-                  <a:lnTo>
-                    <a:pt x="5156821" y="102697"/>
-                  </a:lnTo>
-                  <a:lnTo>
-                    <a:pt x="5085199" y="75437"/>
-                  </a:lnTo>
-                  <a:lnTo>
-                    <a:pt x="5013576" y="47153"/>
-                  </a:lnTo>
-                  <a:lnTo>
-                    <a:pt x="4941954" y="17809"/>
-                  </a:lnTo>
-                  <a:lnTo>
-                    <a:pt x="4870331" y="0"/>
-                  </a:lnTo>
-                  <a:lnTo>
-                    <a:pt x="4798709" y="21"/>
-                  </a:lnTo>
-                  <a:lnTo>
-                    <a:pt x="4727086" y="42"/>
-                  </a:lnTo>
-                  <a:lnTo>
-                    <a:pt x="4655464" y="64"/>
-                  </a:lnTo>
-                  <a:lnTo>
-                    <a:pt x="4583841" y="85"/>
-                  </a:lnTo>
-                  <a:lnTo>
-                    <a:pt x="4512219" y="107"/>
-                  </a:lnTo>
-                  <a:lnTo>
-                    <a:pt x="4440596" y="128"/>
-                  </a:lnTo>
-                  <a:lnTo>
-                    <a:pt x="4368974" y="150"/>
-                  </a:lnTo>
-                  <a:lnTo>
-                    <a:pt x="4297351" y="171"/>
-                  </a:lnTo>
-                  <a:lnTo>
-                    <a:pt x="4225729" y="193"/>
-                  </a:lnTo>
-                  <a:lnTo>
-                    <a:pt x="4154106" y="214"/>
-                  </a:lnTo>
-                  <a:lnTo>
-                    <a:pt x="4082483" y="236"/>
-                  </a:lnTo>
-                  <a:lnTo>
-                    <a:pt x="4010861" y="257"/>
-                  </a:lnTo>
-                  <a:lnTo>
-                    <a:pt x="3939238" y="279"/>
-                  </a:lnTo>
-                  <a:lnTo>
-                    <a:pt x="3867616" y="300"/>
-                  </a:lnTo>
-                  <a:lnTo>
-                    <a:pt x="3795993" y="322"/>
-                  </a:lnTo>
-                  <a:lnTo>
-                    <a:pt x="3724371" y="343"/>
-                  </a:lnTo>
-                  <a:lnTo>
-                    <a:pt x="3652748" y="365"/>
-                  </a:lnTo>
-                  <a:lnTo>
-                    <a:pt x="3581126" y="386"/>
-                  </a:lnTo>
-                  <a:lnTo>
-                    <a:pt x="3509503" y="408"/>
-                  </a:lnTo>
-                  <a:lnTo>
-                    <a:pt x="3437881" y="429"/>
-                  </a:lnTo>
-                  <a:lnTo>
-                    <a:pt x="3366258" y="451"/>
-                  </a:lnTo>
-                  <a:lnTo>
-                    <a:pt x="3294636" y="472"/>
-                  </a:lnTo>
-                  <a:lnTo>
-                    <a:pt x="3223013" y="494"/>
-                  </a:lnTo>
-                  <a:lnTo>
-                    <a:pt x="3151391" y="515"/>
-                  </a:lnTo>
-                  <a:lnTo>
-                    <a:pt x="3079768" y="537"/>
-                  </a:lnTo>
-                  <a:lnTo>
-                    <a:pt x="3008146" y="558"/>
-                  </a:lnTo>
-                  <a:lnTo>
-                    <a:pt x="2936523" y="580"/>
-                  </a:lnTo>
-                  <a:lnTo>
-                    <a:pt x="2864901" y="601"/>
-                  </a:lnTo>
-                  <a:lnTo>
-                    <a:pt x="2793278" y="623"/>
-                  </a:lnTo>
-                  <a:lnTo>
-                    <a:pt x="2721655" y="644"/>
-                  </a:lnTo>
-                  <a:lnTo>
-                    <a:pt x="2650033" y="666"/>
-                  </a:lnTo>
-                  <a:lnTo>
-                    <a:pt x="2578410" y="687"/>
-                  </a:lnTo>
-                  <a:lnTo>
-                    <a:pt x="2506788" y="709"/>
-                  </a:lnTo>
-                  <a:lnTo>
-                    <a:pt x="2435165" y="730"/>
-                  </a:lnTo>
-                  <a:lnTo>
-                    <a:pt x="2363543" y="752"/>
-                  </a:lnTo>
-                  <a:lnTo>
-                    <a:pt x="2291920" y="773"/>
-                  </a:lnTo>
-                  <a:lnTo>
-                    <a:pt x="2220298" y="795"/>
-                  </a:lnTo>
-                  <a:lnTo>
-                    <a:pt x="2148675" y="816"/>
-                  </a:lnTo>
-                  <a:lnTo>
-                    <a:pt x="2077053" y="837"/>
-                  </a:lnTo>
-                  <a:lnTo>
-                    <a:pt x="2005430" y="859"/>
-                  </a:lnTo>
-                  <a:lnTo>
-                    <a:pt x="1933808" y="880"/>
-                  </a:lnTo>
-                  <a:lnTo>
-                    <a:pt x="1862185" y="902"/>
-                  </a:lnTo>
-                  <a:lnTo>
-                    <a:pt x="1790563" y="923"/>
-                  </a:lnTo>
-                  <a:lnTo>
-                    <a:pt x="1718940" y="945"/>
-                  </a:lnTo>
-                  <a:lnTo>
-                    <a:pt x="1647318" y="966"/>
-                  </a:lnTo>
-                  <a:lnTo>
-                    <a:pt x="1575695" y="988"/>
-                  </a:lnTo>
-                  <a:lnTo>
-                    <a:pt x="1504073" y="1009"/>
-                  </a:lnTo>
-                  <a:lnTo>
-                    <a:pt x="1432450" y="1031"/>
-                  </a:lnTo>
-                  <a:lnTo>
-                    <a:pt x="1360827" y="1052"/>
-                  </a:lnTo>
-                  <a:lnTo>
-                    <a:pt x="1289205" y="1074"/>
-                  </a:lnTo>
-                  <a:lnTo>
-                    <a:pt x="1217582" y="1095"/>
-                  </a:lnTo>
-                  <a:lnTo>
-                    <a:pt x="1145960" y="1117"/>
-                  </a:lnTo>
-                  <a:lnTo>
-                    <a:pt x="1074337" y="1138"/>
-                  </a:lnTo>
-                  <a:lnTo>
-                    <a:pt x="1002715" y="1160"/>
-                  </a:lnTo>
-                  <a:lnTo>
-                    <a:pt x="931092" y="1181"/>
-                  </a:lnTo>
-                  <a:lnTo>
-                    <a:pt x="859470" y="1202"/>
-                  </a:lnTo>
-                  <a:lnTo>
-                    <a:pt x="787847" y="1224"/>
-                  </a:lnTo>
-                  <a:lnTo>
-                    <a:pt x="716225" y="1245"/>
-                  </a:lnTo>
-                  <a:lnTo>
-                    <a:pt x="644602" y="1267"/>
-                  </a:lnTo>
-                  <a:lnTo>
-                    <a:pt x="572980" y="1288"/>
-                  </a:lnTo>
-                  <a:lnTo>
-                    <a:pt x="501357" y="1310"/>
-                  </a:lnTo>
-                  <a:lnTo>
-                    <a:pt x="429735" y="1331"/>
-                  </a:lnTo>
-                  <a:lnTo>
-                    <a:pt x="358112" y="1353"/>
-                  </a:lnTo>
-                  <a:lnTo>
-                    <a:pt x="286490" y="1374"/>
-                  </a:lnTo>
-                  <a:lnTo>
-                    <a:pt x="214867" y="1396"/>
-                  </a:lnTo>
-                  <a:lnTo>
-                    <a:pt x="143245" y="1417"/>
-                  </a:lnTo>
-                  <a:lnTo>
-                    <a:pt x="71622" y="1439"/>
-                  </a:lnTo>
-                  <a:lnTo>
-                    <a:pt x="0" y="1460"/>
+                    <a:pt x="7019007" y="644336"/>
+                  </a:lnTo>
+                  <a:lnTo>
+                    <a:pt x="6947385" y="633855"/>
+                  </a:lnTo>
+                  <a:lnTo>
+                    <a:pt x="6875762" y="622992"/>
+                  </a:lnTo>
+                  <a:lnTo>
+                    <a:pt x="6804139" y="611732"/>
+                  </a:lnTo>
+                  <a:lnTo>
+                    <a:pt x="6732517" y="600061"/>
+                  </a:lnTo>
+                  <a:lnTo>
+                    <a:pt x="6660894" y="587965"/>
+                  </a:lnTo>
+                  <a:lnTo>
+                    <a:pt x="6589272" y="575427"/>
+                  </a:lnTo>
+                  <a:lnTo>
+                    <a:pt x="6517649" y="562432"/>
+                  </a:lnTo>
+                  <a:lnTo>
+                    <a:pt x="6446027" y="548963"/>
+                  </a:lnTo>
+                  <a:lnTo>
+                    <a:pt x="6374404" y="535003"/>
+                  </a:lnTo>
+                  <a:lnTo>
+                    <a:pt x="6302782" y="520533"/>
+                  </a:lnTo>
+                  <a:lnTo>
+                    <a:pt x="6231159" y="505535"/>
+                  </a:lnTo>
+                  <a:lnTo>
+                    <a:pt x="6159537" y="489991"/>
+                  </a:lnTo>
+                  <a:lnTo>
+                    <a:pt x="6087914" y="473879"/>
+                  </a:lnTo>
+                  <a:lnTo>
+                    <a:pt x="6016292" y="457179"/>
+                  </a:lnTo>
+                  <a:lnTo>
+                    <a:pt x="5944669" y="439870"/>
+                  </a:lnTo>
+                  <a:lnTo>
+                    <a:pt x="5873047" y="421930"/>
+                  </a:lnTo>
+                  <a:lnTo>
+                    <a:pt x="5801424" y="403335"/>
+                  </a:lnTo>
+                  <a:lnTo>
+                    <a:pt x="5729802" y="384062"/>
+                  </a:lnTo>
+                  <a:lnTo>
+                    <a:pt x="5658179" y="364086"/>
+                  </a:lnTo>
+                  <a:lnTo>
+                    <a:pt x="5586557" y="343381"/>
+                  </a:lnTo>
+                  <a:lnTo>
+                    <a:pt x="5514934" y="321920"/>
+                  </a:lnTo>
+                  <a:lnTo>
+                    <a:pt x="5443311" y="299677"/>
+                  </a:lnTo>
+                  <a:lnTo>
+                    <a:pt x="5371689" y="276622"/>
+                  </a:lnTo>
+                  <a:lnTo>
+                    <a:pt x="5300066" y="252726"/>
+                  </a:lnTo>
+                  <a:lnTo>
+                    <a:pt x="5228444" y="227959"/>
+                  </a:lnTo>
+                  <a:lnTo>
+                    <a:pt x="5156821" y="202288"/>
+                  </a:lnTo>
+                  <a:lnTo>
+                    <a:pt x="5085199" y="175680"/>
+                  </a:lnTo>
+                  <a:lnTo>
+                    <a:pt x="5013576" y="148102"/>
+                  </a:lnTo>
+                  <a:lnTo>
+                    <a:pt x="4941954" y="119517"/>
+                  </a:lnTo>
+                  <a:lnTo>
+                    <a:pt x="4870331" y="101596"/>
+                  </a:lnTo>
+                  <a:lnTo>
+                    <a:pt x="4798709" y="100185"/>
+                  </a:lnTo>
+                  <a:lnTo>
+                    <a:pt x="4727086" y="98772"/>
+                  </a:lnTo>
+                  <a:lnTo>
+                    <a:pt x="4655464" y="97357"/>
+                  </a:lnTo>
+                  <a:lnTo>
+                    <a:pt x="4583841" y="95939"/>
+                  </a:lnTo>
+                  <a:lnTo>
+                    <a:pt x="4512219" y="94518"/>
+                  </a:lnTo>
+                  <a:lnTo>
+                    <a:pt x="4440596" y="93096"/>
+                  </a:lnTo>
+                  <a:lnTo>
+                    <a:pt x="4368974" y="91671"/>
+                  </a:lnTo>
+                  <a:lnTo>
+                    <a:pt x="4297351" y="90243"/>
+                  </a:lnTo>
+                  <a:lnTo>
+                    <a:pt x="4225729" y="88813"/>
+                  </a:lnTo>
+                  <a:lnTo>
+                    <a:pt x="4154106" y="87381"/>
+                  </a:lnTo>
+                  <a:lnTo>
+                    <a:pt x="4082483" y="85946"/>
+                  </a:lnTo>
+                  <a:lnTo>
+                    <a:pt x="4010861" y="84509"/>
+                  </a:lnTo>
+                  <a:lnTo>
+                    <a:pt x="3939238" y="83069"/>
+                  </a:lnTo>
+                  <a:lnTo>
+                    <a:pt x="3867616" y="81627"/>
+                  </a:lnTo>
+                  <a:lnTo>
+                    <a:pt x="3795993" y="80182"/>
+                  </a:lnTo>
+                  <a:lnTo>
+                    <a:pt x="3724371" y="78735"/>
+                  </a:lnTo>
+                  <a:lnTo>
+                    <a:pt x="3652748" y="77286"/>
+                  </a:lnTo>
+                  <a:lnTo>
+                    <a:pt x="3581126" y="75834"/>
+                  </a:lnTo>
+                  <a:lnTo>
+                    <a:pt x="3509503" y="74379"/>
+                  </a:lnTo>
+                  <a:lnTo>
+                    <a:pt x="3437881" y="72922"/>
+                  </a:lnTo>
+                  <a:lnTo>
+                    <a:pt x="3366258" y="71463"/>
+                  </a:lnTo>
+                  <a:lnTo>
+                    <a:pt x="3294636" y="70001"/>
+                  </a:lnTo>
+                  <a:lnTo>
+                    <a:pt x="3223013" y="68537"/>
+                  </a:lnTo>
+                  <a:lnTo>
+                    <a:pt x="3151391" y="67070"/>
+                  </a:lnTo>
+                  <a:lnTo>
+                    <a:pt x="3079768" y="65601"/>
+                  </a:lnTo>
+                  <a:lnTo>
+                    <a:pt x="3008146" y="64129"/>
+                  </a:lnTo>
+                  <a:lnTo>
+                    <a:pt x="2936523" y="62654"/>
+                  </a:lnTo>
+                  <a:lnTo>
+                    <a:pt x="2864901" y="61178"/>
+                  </a:lnTo>
+                  <a:lnTo>
+                    <a:pt x="2793278" y="59698"/>
+                  </a:lnTo>
+                  <a:lnTo>
+                    <a:pt x="2721655" y="58216"/>
+                  </a:lnTo>
+                  <a:lnTo>
+                    <a:pt x="2650033" y="56732"/>
+                  </a:lnTo>
+                  <a:lnTo>
+                    <a:pt x="2578410" y="55245"/>
+                  </a:lnTo>
+                  <a:lnTo>
+                    <a:pt x="2506788" y="53756"/>
+                  </a:lnTo>
+                  <a:lnTo>
+                    <a:pt x="2435165" y="52264"/>
+                  </a:lnTo>
+                  <a:lnTo>
+                    <a:pt x="2363543" y="50769"/>
+                  </a:lnTo>
+                  <a:lnTo>
+                    <a:pt x="2291920" y="49272"/>
+                  </a:lnTo>
+                  <a:lnTo>
+                    <a:pt x="2220298" y="47772"/>
+                  </a:lnTo>
+                  <a:lnTo>
+                    <a:pt x="2148675" y="46270"/>
+                  </a:lnTo>
+                  <a:lnTo>
+                    <a:pt x="2077053" y="44766"/>
+                  </a:lnTo>
+                  <a:lnTo>
+                    <a:pt x="2005430" y="43258"/>
+                  </a:lnTo>
+                  <a:lnTo>
+                    <a:pt x="1933808" y="41749"/>
+                  </a:lnTo>
+                  <a:lnTo>
+                    <a:pt x="1862185" y="40236"/>
+                  </a:lnTo>
+                  <a:lnTo>
+                    <a:pt x="1790563" y="38721"/>
+                  </a:lnTo>
+                  <a:lnTo>
+                    <a:pt x="1718940" y="37204"/>
+                  </a:lnTo>
+                  <a:lnTo>
+                    <a:pt x="1647318" y="35684"/>
+                  </a:lnTo>
+                  <a:lnTo>
+                    <a:pt x="1575695" y="34161"/>
+                  </a:lnTo>
+                  <a:lnTo>
+                    <a:pt x="1504073" y="32636"/>
+                  </a:lnTo>
+                  <a:lnTo>
+                    <a:pt x="1432450" y="31108"/>
+                  </a:lnTo>
+                  <a:lnTo>
+                    <a:pt x="1360827" y="29577"/>
+                  </a:lnTo>
+                  <a:lnTo>
+                    <a:pt x="1289205" y="28044"/>
+                  </a:lnTo>
+                  <a:lnTo>
+                    <a:pt x="1217582" y="26509"/>
+                  </a:lnTo>
+                  <a:lnTo>
+                    <a:pt x="1145960" y="24970"/>
+                  </a:lnTo>
+                  <a:lnTo>
+                    <a:pt x="1074337" y="23430"/>
+                  </a:lnTo>
+                  <a:lnTo>
+                    <a:pt x="1002715" y="21886"/>
+                  </a:lnTo>
+                  <a:lnTo>
+                    <a:pt x="931092" y="20340"/>
+                  </a:lnTo>
+                  <a:lnTo>
+                    <a:pt x="859470" y="18791"/>
+                  </a:lnTo>
+                  <a:lnTo>
+                    <a:pt x="787847" y="17240"/>
+                  </a:lnTo>
+                  <a:lnTo>
+                    <a:pt x="716225" y="15686"/>
+                  </a:lnTo>
+                  <a:lnTo>
+                    <a:pt x="644602" y="14129"/>
+                  </a:lnTo>
+                  <a:lnTo>
+                    <a:pt x="572980" y="12570"/>
+                  </a:lnTo>
+                  <a:lnTo>
+                    <a:pt x="501357" y="11008"/>
+                  </a:lnTo>
+                  <a:lnTo>
+                    <a:pt x="429735" y="9443"/>
+                  </a:lnTo>
+                  <a:lnTo>
+                    <a:pt x="358112" y="7876"/>
+                  </a:lnTo>
+                  <a:lnTo>
+                    <a:pt x="286490" y="6306"/>
+                  </a:lnTo>
+                  <a:lnTo>
+                    <a:pt x="214867" y="4733"/>
+                  </a:lnTo>
+                  <a:lnTo>
+                    <a:pt x="143245" y="3158"/>
+                  </a:lnTo>
+                  <a:lnTo>
+                    <a:pt x="71622" y="1580"/>
+                  </a:lnTo>
+                  <a:lnTo>
+                    <a:pt x="0" y="0"/>
                   </a:lnTo>
                 </a:path>
               </a:pathLst>
@@ -4109,312 +4115,312 @@
           </p:nvSpPr>
           <p:spPr>
             <a:xfrm>
-              <a:off x="1172049" y="2636928"/>
-              <a:ext cx="7090630" cy="2447856"/>
+              <a:off x="1172049" y="2562886"/>
+              <a:ext cx="7090630" cy="2527158"/>
             </a:xfrm>
             <a:custGeom>
               <a:avLst/>
               <a:pathLst>
-                <a:path w="7090630" h="2447856">
+                <a:path w="7090630" h="2527158">
                   <a:moveTo>
                     <a:pt x="0" y="0"/>
                   </a:moveTo>
                   <a:lnTo>
-                    <a:pt x="71622" y="53239"/>
-                  </a:lnTo>
-                  <a:lnTo>
-                    <a:pt x="143245" y="105507"/>
-                  </a:lnTo>
-                  <a:lnTo>
-                    <a:pt x="214867" y="156823"/>
-                  </a:lnTo>
-                  <a:lnTo>
-                    <a:pt x="286490" y="207204"/>
-                  </a:lnTo>
-                  <a:lnTo>
-                    <a:pt x="358112" y="256665"/>
-                  </a:lnTo>
-                  <a:lnTo>
-                    <a:pt x="429735" y="305225"/>
-                  </a:lnTo>
-                  <a:lnTo>
-                    <a:pt x="501357" y="352900"/>
-                  </a:lnTo>
-                  <a:lnTo>
-                    <a:pt x="572980" y="399706"/>
-                  </a:lnTo>
-                  <a:lnTo>
-                    <a:pt x="644602" y="445658"/>
-                  </a:lnTo>
-                  <a:lnTo>
-                    <a:pt x="716225" y="490773"/>
-                  </a:lnTo>
-                  <a:lnTo>
-                    <a:pt x="787847" y="535065"/>
-                  </a:lnTo>
-                  <a:lnTo>
-                    <a:pt x="859470" y="578550"/>
-                  </a:lnTo>
-                  <a:lnTo>
-                    <a:pt x="931092" y="621242"/>
-                  </a:lnTo>
-                  <a:lnTo>
-                    <a:pt x="1002715" y="663155"/>
-                  </a:lnTo>
-                  <a:lnTo>
-                    <a:pt x="1074337" y="704305"/>
-                  </a:lnTo>
-                  <a:lnTo>
-                    <a:pt x="1145960" y="744704"/>
-                  </a:lnTo>
-                  <a:lnTo>
-                    <a:pt x="1217582" y="784367"/>
-                  </a:lnTo>
-                  <a:lnTo>
-                    <a:pt x="1289205" y="823307"/>
-                  </a:lnTo>
-                  <a:lnTo>
-                    <a:pt x="1360827" y="861537"/>
-                  </a:lnTo>
-                  <a:lnTo>
-                    <a:pt x="1432450" y="899070"/>
-                  </a:lnTo>
-                  <a:lnTo>
-                    <a:pt x="1504073" y="935918"/>
-                  </a:lnTo>
-                  <a:lnTo>
-                    <a:pt x="1575695" y="972095"/>
-                  </a:lnTo>
-                  <a:lnTo>
-                    <a:pt x="1647318" y="1007613"/>
-                  </a:lnTo>
-                  <a:lnTo>
-                    <a:pt x="1718940" y="1042482"/>
-                  </a:lnTo>
-                  <a:lnTo>
-                    <a:pt x="1790563" y="1076717"/>
-                  </a:lnTo>
-                  <a:lnTo>
-                    <a:pt x="1862185" y="1110327"/>
-                  </a:lnTo>
-                  <a:lnTo>
-                    <a:pt x="1933808" y="1143324"/>
-                  </a:lnTo>
-                  <a:lnTo>
-                    <a:pt x="2005430" y="1175720"/>
-                  </a:lnTo>
-                  <a:lnTo>
-                    <a:pt x="2077053" y="1207525"/>
-                  </a:lnTo>
-                  <a:lnTo>
-                    <a:pt x="2148675" y="1238750"/>
-                  </a:lnTo>
-                  <a:lnTo>
-                    <a:pt x="2220298" y="1269406"/>
-                  </a:lnTo>
-                  <a:lnTo>
-                    <a:pt x="2291920" y="1299503"/>
-                  </a:lnTo>
-                  <a:lnTo>
-                    <a:pt x="2363543" y="1329052"/>
-                  </a:lnTo>
-                  <a:lnTo>
-                    <a:pt x="2435165" y="1358062"/>
-                  </a:lnTo>
-                  <a:lnTo>
-                    <a:pt x="2506788" y="1386543"/>
-                  </a:lnTo>
-                  <a:lnTo>
-                    <a:pt x="2578410" y="1414504"/>
-                  </a:lnTo>
-                  <a:lnTo>
-                    <a:pt x="2650033" y="1441956"/>
-                  </a:lnTo>
-                  <a:lnTo>
-                    <a:pt x="2721655" y="1468908"/>
-                  </a:lnTo>
-                  <a:lnTo>
-                    <a:pt x="2793278" y="1495368"/>
-                  </a:lnTo>
-                  <a:lnTo>
-                    <a:pt x="2864901" y="1521346"/>
-                  </a:lnTo>
-                  <a:lnTo>
-                    <a:pt x="2936523" y="1546850"/>
-                  </a:lnTo>
-                  <a:lnTo>
-                    <a:pt x="3008146" y="1571889"/>
-                  </a:lnTo>
-                  <a:lnTo>
-                    <a:pt x="3079768" y="1596472"/>
-                  </a:lnTo>
-                  <a:lnTo>
-                    <a:pt x="3151391" y="1620607"/>
-                  </a:lnTo>
-                  <a:lnTo>
-                    <a:pt x="3223013" y="1644301"/>
-                  </a:lnTo>
-                  <a:lnTo>
-                    <a:pt x="3294636" y="1667564"/>
-                  </a:lnTo>
-                  <a:lnTo>
-                    <a:pt x="3366258" y="1690402"/>
-                  </a:lnTo>
-                  <a:lnTo>
-                    <a:pt x="3437881" y="1712825"/>
-                  </a:lnTo>
-                  <a:lnTo>
-                    <a:pt x="3509503" y="1734838"/>
-                  </a:lnTo>
-                  <a:lnTo>
-                    <a:pt x="3581126" y="1756450"/>
-                  </a:lnTo>
-                  <a:lnTo>
-                    <a:pt x="3652748" y="1777668"/>
-                  </a:lnTo>
-                  <a:lnTo>
-                    <a:pt x="3724371" y="1798499"/>
-                  </a:lnTo>
-                  <a:lnTo>
-                    <a:pt x="3795993" y="1818951"/>
-                  </a:lnTo>
-                  <a:lnTo>
-                    <a:pt x="3867616" y="1839030"/>
-                  </a:lnTo>
-                  <a:lnTo>
-                    <a:pt x="3939238" y="1858742"/>
-                  </a:lnTo>
-                  <a:lnTo>
-                    <a:pt x="4010861" y="1878095"/>
-                  </a:lnTo>
-                  <a:lnTo>
-                    <a:pt x="4082483" y="1897096"/>
-                  </a:lnTo>
-                  <a:lnTo>
-                    <a:pt x="4154106" y="1915750"/>
-                  </a:lnTo>
-                  <a:lnTo>
-                    <a:pt x="4225729" y="1934064"/>
-                  </a:lnTo>
-                  <a:lnTo>
-                    <a:pt x="4297351" y="1952044"/>
-                  </a:lnTo>
-                  <a:lnTo>
-                    <a:pt x="4368974" y="1969696"/>
-                  </a:lnTo>
-                  <a:lnTo>
-                    <a:pt x="4440596" y="1987027"/>
-                  </a:lnTo>
-                  <a:lnTo>
-                    <a:pt x="4512219" y="2004041"/>
-                  </a:lnTo>
-                  <a:lnTo>
-                    <a:pt x="4583841" y="2020746"/>
-                  </a:lnTo>
-                  <a:lnTo>
-                    <a:pt x="4655464" y="2037145"/>
-                  </a:lnTo>
-                  <a:lnTo>
-                    <a:pt x="4727086" y="2053246"/>
-                  </a:lnTo>
-                  <a:lnTo>
-                    <a:pt x="4798709" y="2069054"/>
-                  </a:lnTo>
-                  <a:lnTo>
-                    <a:pt x="4870331" y="2084573"/>
-                  </a:lnTo>
-                  <a:lnTo>
-                    <a:pt x="4941954" y="2099809"/>
-                  </a:lnTo>
-                  <a:lnTo>
-                    <a:pt x="5013576" y="2114767"/>
-                  </a:lnTo>
-                  <a:lnTo>
-                    <a:pt x="5085199" y="2129453"/>
-                  </a:lnTo>
-                  <a:lnTo>
-                    <a:pt x="5156821" y="2143871"/>
-                  </a:lnTo>
-                  <a:lnTo>
-                    <a:pt x="5228444" y="2158026"/>
-                  </a:lnTo>
-                  <a:lnTo>
-                    <a:pt x="5300066" y="2171923"/>
-                  </a:lnTo>
-                  <a:lnTo>
-                    <a:pt x="5371689" y="2185567"/>
-                  </a:lnTo>
-                  <a:lnTo>
-                    <a:pt x="5443311" y="2198962"/>
-                  </a:lnTo>
-                  <a:lnTo>
-                    <a:pt x="5514934" y="2212113"/>
-                  </a:lnTo>
-                  <a:lnTo>
-                    <a:pt x="5586557" y="2225024"/>
-                  </a:lnTo>
-                  <a:lnTo>
-                    <a:pt x="5658179" y="2237700"/>
-                  </a:lnTo>
-                  <a:lnTo>
-                    <a:pt x="5729802" y="2250144"/>
-                  </a:lnTo>
-                  <a:lnTo>
-                    <a:pt x="5801424" y="2262362"/>
-                  </a:lnTo>
-                  <a:lnTo>
-                    <a:pt x="5873047" y="2274357"/>
-                  </a:lnTo>
-                  <a:lnTo>
-                    <a:pt x="5944669" y="2286133"/>
-                  </a:lnTo>
-                  <a:lnTo>
-                    <a:pt x="6016292" y="2297695"/>
-                  </a:lnTo>
-                  <a:lnTo>
-                    <a:pt x="6087914" y="2309046"/>
-                  </a:lnTo>
-                  <a:lnTo>
-                    <a:pt x="6159537" y="2320190"/>
-                  </a:lnTo>
-                  <a:lnTo>
-                    <a:pt x="6231159" y="2331131"/>
-                  </a:lnTo>
-                  <a:lnTo>
-                    <a:pt x="6302782" y="2341872"/>
-                  </a:lnTo>
-                  <a:lnTo>
-                    <a:pt x="6374404" y="2352417"/>
-                  </a:lnTo>
-                  <a:lnTo>
-                    <a:pt x="6446027" y="2362771"/>
-                  </a:lnTo>
-                  <a:lnTo>
-                    <a:pt x="6517649" y="2372935"/>
-                  </a:lnTo>
-                  <a:lnTo>
-                    <a:pt x="6589272" y="2382914"/>
-                  </a:lnTo>
-                  <a:lnTo>
-                    <a:pt x="6660894" y="2392712"/>
-                  </a:lnTo>
-                  <a:lnTo>
-                    <a:pt x="6732517" y="2402330"/>
-                  </a:lnTo>
-                  <a:lnTo>
-                    <a:pt x="6804139" y="2411773"/>
-                  </a:lnTo>
-                  <a:lnTo>
-                    <a:pt x="6875762" y="2421045"/>
-                  </a:lnTo>
-                  <a:lnTo>
-                    <a:pt x="6947385" y="2430147"/>
-                  </a:lnTo>
-                  <a:lnTo>
-                    <a:pt x="7019007" y="2439083"/>
-                  </a:lnTo>
-                  <a:lnTo>
-                    <a:pt x="7090630" y="2447856"/>
+                    <a:pt x="71622" y="55664"/>
+                  </a:lnTo>
+                  <a:lnTo>
+                    <a:pt x="143245" y="110294"/>
+                  </a:lnTo>
+                  <a:lnTo>
+                    <a:pt x="214867" y="163909"/>
+                  </a:lnTo>
+                  <a:lnTo>
+                    <a:pt x="286490" y="216527"/>
+                  </a:lnTo>
+                  <a:lnTo>
+                    <a:pt x="358112" y="268166"/>
+                  </a:lnTo>
+                  <a:lnTo>
+                    <a:pt x="429735" y="318846"/>
+                  </a:lnTo>
+                  <a:lnTo>
+                    <a:pt x="501357" y="368584"/>
+                  </a:lnTo>
+                  <a:lnTo>
+                    <a:pt x="572980" y="417396"/>
+                  </a:lnTo>
+                  <a:lnTo>
+                    <a:pt x="644602" y="465302"/>
+                  </a:lnTo>
+                  <a:lnTo>
+                    <a:pt x="716225" y="512317"/>
+                  </a:lnTo>
+                  <a:lnTo>
+                    <a:pt x="787847" y="558458"/>
+                  </a:lnTo>
+                  <a:lnTo>
+                    <a:pt x="859470" y="603741"/>
+                  </a:lnTo>
+                  <a:lnTo>
+                    <a:pt x="931092" y="648182"/>
+                  </a:lnTo>
+                  <a:lnTo>
+                    <a:pt x="1002715" y="691798"/>
+                  </a:lnTo>
+                  <a:lnTo>
+                    <a:pt x="1074337" y="734602"/>
+                  </a:lnTo>
+                  <a:lnTo>
+                    <a:pt x="1145960" y="776611"/>
+                  </a:lnTo>
+                  <a:lnTo>
+                    <a:pt x="1217582" y="817838"/>
+                  </a:lnTo>
+                  <a:lnTo>
+                    <a:pt x="1289205" y="858300"/>
+                  </a:lnTo>
+                  <a:lnTo>
+                    <a:pt x="1360827" y="898009"/>
+                  </a:lnTo>
+                  <a:lnTo>
+                    <a:pt x="1432450" y="936980"/>
+                  </a:lnTo>
+                  <a:lnTo>
+                    <a:pt x="1504073" y="975226"/>
+                  </a:lnTo>
+                  <a:lnTo>
+                    <a:pt x="1575695" y="1012762"/>
+                  </a:lnTo>
+                  <a:lnTo>
+                    <a:pt x="1647318" y="1049600"/>
+                  </a:lnTo>
+                  <a:lnTo>
+                    <a:pt x="1718940" y="1085753"/>
+                  </a:lnTo>
+                  <a:lnTo>
+                    <a:pt x="1790563" y="1121233"/>
+                  </a:lnTo>
+                  <a:lnTo>
+                    <a:pt x="1862185" y="1156055"/>
+                  </a:lnTo>
+                  <a:lnTo>
+                    <a:pt x="1933808" y="1190229"/>
+                  </a:lnTo>
+                  <a:lnTo>
+                    <a:pt x="2005430" y="1223767"/>
+                  </a:lnTo>
+                  <a:lnTo>
+                    <a:pt x="2077053" y="1256682"/>
+                  </a:lnTo>
+                  <a:lnTo>
+                    <a:pt x="2148675" y="1288986"/>
+                  </a:lnTo>
+                  <a:lnTo>
+                    <a:pt x="2220298" y="1320688"/>
+                  </a:lnTo>
+                  <a:lnTo>
+                    <a:pt x="2291920" y="1351802"/>
+                  </a:lnTo>
+                  <a:lnTo>
+                    <a:pt x="2363543" y="1382337"/>
+                  </a:lnTo>
+                  <a:lnTo>
+                    <a:pt x="2435165" y="1412304"/>
+                  </a:lnTo>
+                  <a:lnTo>
+                    <a:pt x="2506788" y="1441715"/>
+                  </a:lnTo>
+                  <a:lnTo>
+                    <a:pt x="2578410" y="1470578"/>
+                  </a:lnTo>
+                  <a:lnTo>
+                    <a:pt x="2650033" y="1498905"/>
+                  </a:lnTo>
+                  <a:lnTo>
+                    <a:pt x="2721655" y="1526705"/>
+                  </a:lnTo>
+                  <a:lnTo>
+                    <a:pt x="2793278" y="1553989"/>
+                  </a:lnTo>
+                  <a:lnTo>
+                    <a:pt x="2864901" y="1580765"/>
+                  </a:lnTo>
+                  <a:lnTo>
+                    <a:pt x="2936523" y="1607044"/>
+                  </a:lnTo>
+                  <a:lnTo>
+                    <a:pt x="3008146" y="1632834"/>
+                  </a:lnTo>
+                  <a:lnTo>
+                    <a:pt x="3079768" y="1658145"/>
+                  </a:lnTo>
+                  <a:lnTo>
+                    <a:pt x="3151391" y="1682985"/>
+                  </a:lnTo>
+                  <a:lnTo>
+                    <a:pt x="3223013" y="1707363"/>
+                  </a:lnTo>
+                  <a:lnTo>
+                    <a:pt x="3294636" y="1731288"/>
+                  </a:lnTo>
+                  <a:lnTo>
+                    <a:pt x="3366258" y="1754769"/>
+                  </a:lnTo>
+                  <a:lnTo>
+                    <a:pt x="3437881" y="1777813"/>
+                  </a:lnTo>
+                  <a:lnTo>
+                    <a:pt x="3509503" y="1800428"/>
+                  </a:lnTo>
+                  <a:lnTo>
+                    <a:pt x="3581126" y="1822623"/>
+                  </a:lnTo>
+                  <a:lnTo>
+                    <a:pt x="3652748" y="1844406"/>
+                  </a:lnTo>
+                  <a:lnTo>
+                    <a:pt x="3724371" y="1865783"/>
+                  </a:lnTo>
+                  <a:lnTo>
+                    <a:pt x="3795993" y="1886764"/>
+                  </a:lnTo>
+                  <a:lnTo>
+                    <a:pt x="3867616" y="1907354"/>
+                  </a:lnTo>
+                  <a:lnTo>
+                    <a:pt x="3939238" y="1927561"/>
+                  </a:lnTo>
+                  <a:lnTo>
+                    <a:pt x="4010861" y="1947393"/>
+                  </a:lnTo>
+                  <a:lnTo>
+                    <a:pt x="4082483" y="1966856"/>
+                  </a:lnTo>
+                  <a:lnTo>
+                    <a:pt x="4154106" y="1985957"/>
+                  </a:lnTo>
+                  <a:lnTo>
+                    <a:pt x="4225729" y="2004703"/>
+                  </a:lnTo>
+                  <a:lnTo>
+                    <a:pt x="4297351" y="2023101"/>
+                  </a:lnTo>
+                  <a:lnTo>
+                    <a:pt x="4368974" y="2041157"/>
+                  </a:lnTo>
+                  <a:lnTo>
+                    <a:pt x="4440596" y="2058877"/>
+                  </a:lnTo>
+                  <a:lnTo>
+                    <a:pt x="4512219" y="2076267"/>
+                  </a:lnTo>
+                  <a:lnTo>
+                    <a:pt x="4583841" y="2093334"/>
+                  </a:lnTo>
+                  <a:lnTo>
+                    <a:pt x="4655464" y="2110084"/>
+                  </a:lnTo>
+                  <a:lnTo>
+                    <a:pt x="4727086" y="2126523"/>
+                  </a:lnTo>
+                  <a:lnTo>
+                    <a:pt x="4798709" y="2142656"/>
+                  </a:lnTo>
+                  <a:lnTo>
+                    <a:pt x="4870331" y="2158489"/>
+                  </a:lnTo>
+                  <a:lnTo>
+                    <a:pt x="4941954" y="2174028"/>
+                  </a:lnTo>
+                  <a:lnTo>
+                    <a:pt x="5013576" y="2189278"/>
+                  </a:lnTo>
+                  <a:lnTo>
+                    <a:pt x="5085199" y="2204244"/>
+                  </a:lnTo>
+                  <a:lnTo>
+                    <a:pt x="5156821" y="2218933"/>
+                  </a:lnTo>
+                  <a:lnTo>
+                    <a:pt x="5228444" y="2233348"/>
+                  </a:lnTo>
+                  <a:lnTo>
+                    <a:pt x="5300066" y="2247495"/>
+                  </a:lnTo>
+                  <a:lnTo>
+                    <a:pt x="5371689" y="2261379"/>
+                  </a:lnTo>
+                  <a:lnTo>
+                    <a:pt x="5443311" y="2275005"/>
+                  </a:lnTo>
+                  <a:lnTo>
+                    <a:pt x="5514934" y="2288378"/>
+                  </a:lnTo>
+                  <a:lnTo>
+                    <a:pt x="5586557" y="2301502"/>
+                  </a:lnTo>
+                  <a:lnTo>
+                    <a:pt x="5658179" y="2314382"/>
+                  </a:lnTo>
+                  <a:lnTo>
+                    <a:pt x="5729802" y="2327023"/>
+                  </a:lnTo>
+                  <a:lnTo>
+                    <a:pt x="5801424" y="2339429"/>
+                  </a:lnTo>
+                  <a:lnTo>
+                    <a:pt x="5873047" y="2351604"/>
+                  </a:lnTo>
+                  <a:lnTo>
+                    <a:pt x="5944669" y="2363553"/>
+                  </a:lnTo>
+                  <a:lnTo>
+                    <a:pt x="6016292" y="2375280"/>
+                  </a:lnTo>
+                  <a:lnTo>
+                    <a:pt x="6087914" y="2386788"/>
+                  </a:lnTo>
+                  <a:lnTo>
+                    <a:pt x="6159537" y="2398083"/>
+                  </a:lnTo>
+                  <a:lnTo>
+                    <a:pt x="6231159" y="2409168"/>
+                  </a:lnTo>
+                  <a:lnTo>
+                    <a:pt x="6302782" y="2420046"/>
+                  </a:lnTo>
+                  <a:lnTo>
+                    <a:pt x="6374404" y="2430723"/>
+                  </a:lnTo>
+                  <a:lnTo>
+                    <a:pt x="6446027" y="2441201"/>
+                  </a:lnTo>
+                  <a:lnTo>
+                    <a:pt x="6517649" y="2451484"/>
+                  </a:lnTo>
+                  <a:lnTo>
+                    <a:pt x="6589272" y="2461576"/>
+                  </a:lnTo>
+                  <a:lnTo>
+                    <a:pt x="6660894" y="2471481"/>
+                  </a:lnTo>
+                  <a:lnTo>
+                    <a:pt x="6732517" y="2481201"/>
+                  </a:lnTo>
+                  <a:lnTo>
+                    <a:pt x="6804139" y="2490741"/>
+                  </a:lnTo>
+                  <a:lnTo>
+                    <a:pt x="6875762" y="2500103"/>
+                  </a:lnTo>
+                  <a:lnTo>
+                    <a:pt x="6947385" y="2509291"/>
+                  </a:lnTo>
+                  <a:lnTo>
+                    <a:pt x="7019007" y="2518309"/>
+                  </a:lnTo>
+                  <a:lnTo>
+                    <a:pt x="7090630" y="2527158"/>
                   </a:lnTo>
                 </a:path>
               </a:pathLst>
@@ -5154,7 +5160,7 @@
                   <a:latin typeface="Helvetica"/>
                   <a:cs typeface="Helvetica"/>
                 </a:rPr>
-                <a:t>subHR per 1 mL/min: 0.98 (0.95-1.00)  |  per IQR (Δ = 18.2): 0.65 (0.42-1.00)  |  IQR: [-11.5, 6.7]</a:t>
+                <a:t>subHR per 1 mL/min: 0.98 (0.95-1.00)  |  per IQR (Δ = 18.2): 0.64 (0.43-0.96)  |  IQR: [-11.5, 6.7]</a:t>
               </a:r>
             </a:p>
           </p:txBody>

--- a/docs/plots/carbo/jx_carbo_linsubhr_egfrdisc_grade2.pptx
+++ b/docs/plots/carbo/jx_carbo_linsubhr_egfrdisc_grade2.pptx
@@ -3003,527 +3003,524 @@
           <p:spPr>
             <a:xfrm>
               <a:off x="1172049" y="2073503"/>
-              <a:ext cx="7090630" cy="3206557"/>
+              <a:ext cx="7090630" cy="3214842"/>
             </a:xfrm>
             <a:custGeom>
               <a:avLst/>
               <a:pathLst>
-                <a:path w="7090630" h="3206557">
+                <a:path w="7090630" h="3214842">
                   <a:moveTo>
-                    <a:pt x="2031473" y="0"/>
+                    <a:pt x="2108777" y="0"/>
                   </a:moveTo>
                   <a:lnTo>
-                    <a:pt x="2077053" y="79044"/>
-                  </a:lnTo>
-                  <a:lnTo>
-                    <a:pt x="2148675" y="198880"/>
-                  </a:lnTo>
-                  <a:lnTo>
-                    <a:pt x="2220298" y="314498"/>
-                  </a:lnTo>
-                  <a:lnTo>
-                    <a:pt x="2291920" y="426047"/>
-                  </a:lnTo>
-                  <a:lnTo>
-                    <a:pt x="2363543" y="533670"/>
-                  </a:lnTo>
-                  <a:lnTo>
-                    <a:pt x="2435165" y="637505"/>
-                  </a:lnTo>
-                  <a:lnTo>
-                    <a:pt x="2506788" y="737684"/>
-                  </a:lnTo>
-                  <a:lnTo>
-                    <a:pt x="2578410" y="834338"/>
-                  </a:lnTo>
-                  <a:lnTo>
-                    <a:pt x="2650033" y="927590"/>
-                  </a:lnTo>
-                  <a:lnTo>
-                    <a:pt x="2721655" y="1017560"/>
-                  </a:lnTo>
-                  <a:lnTo>
-                    <a:pt x="2793278" y="1104363"/>
-                  </a:lnTo>
-                  <a:lnTo>
-                    <a:pt x="2864901" y="1188111"/>
-                  </a:lnTo>
-                  <a:lnTo>
-                    <a:pt x="2936523" y="1268911"/>
-                  </a:lnTo>
-                  <a:lnTo>
-                    <a:pt x="3008146" y="1346867"/>
-                  </a:lnTo>
-                  <a:lnTo>
-                    <a:pt x="3079768" y="1422079"/>
-                  </a:lnTo>
-                  <a:lnTo>
-                    <a:pt x="3151391" y="1494644"/>
-                  </a:lnTo>
-                  <a:lnTo>
-                    <a:pt x="3223013" y="1564655"/>
-                  </a:lnTo>
-                  <a:lnTo>
-                    <a:pt x="3294636" y="1632202"/>
-                  </a:lnTo>
-                  <a:lnTo>
-                    <a:pt x="3366258" y="1697371"/>
-                  </a:lnTo>
-                  <a:lnTo>
-                    <a:pt x="3437881" y="1760247"/>
-                  </a:lnTo>
-                  <a:lnTo>
-                    <a:pt x="3509503" y="1820909"/>
-                  </a:lnTo>
-                  <a:lnTo>
-                    <a:pt x="3581126" y="1879437"/>
-                  </a:lnTo>
-                  <a:lnTo>
-                    <a:pt x="3652748" y="1935904"/>
-                  </a:lnTo>
-                  <a:lnTo>
-                    <a:pt x="3724371" y="1990384"/>
-                  </a:lnTo>
-                  <a:lnTo>
-                    <a:pt x="3795993" y="2042946"/>
-                  </a:lnTo>
-                  <a:lnTo>
-                    <a:pt x="3867616" y="2093658"/>
-                  </a:lnTo>
-                  <a:lnTo>
-                    <a:pt x="3939238" y="2142586"/>
-                  </a:lnTo>
-                  <a:lnTo>
-                    <a:pt x="4010861" y="2189791"/>
-                  </a:lnTo>
-                  <a:lnTo>
-                    <a:pt x="4082483" y="2235335"/>
-                  </a:lnTo>
-                  <a:lnTo>
-                    <a:pt x="4154106" y="2279275"/>
-                  </a:lnTo>
-                  <a:lnTo>
-                    <a:pt x="4225729" y="2321669"/>
-                  </a:lnTo>
-                  <a:lnTo>
-                    <a:pt x="4297351" y="2362571"/>
-                  </a:lnTo>
-                  <a:lnTo>
-                    <a:pt x="4368974" y="2402034"/>
-                  </a:lnTo>
-                  <a:lnTo>
-                    <a:pt x="4440596" y="2440107"/>
-                  </a:lnTo>
-                  <a:lnTo>
-                    <a:pt x="4512219" y="2476840"/>
-                  </a:lnTo>
-                  <a:lnTo>
-                    <a:pt x="4583841" y="2512281"/>
-                  </a:lnTo>
-                  <a:lnTo>
-                    <a:pt x="4655464" y="2546473"/>
-                  </a:lnTo>
-                  <a:lnTo>
-                    <a:pt x="4727086" y="2579463"/>
-                  </a:lnTo>
-                  <a:lnTo>
-                    <a:pt x="4798709" y="2611291"/>
-                  </a:lnTo>
-                  <a:lnTo>
-                    <a:pt x="4870331" y="2641999"/>
-                  </a:lnTo>
-                  <a:lnTo>
-                    <a:pt x="4941954" y="2655113"/>
-                  </a:lnTo>
-                  <a:lnTo>
-                    <a:pt x="5013576" y="2656519"/>
-                  </a:lnTo>
-                  <a:lnTo>
-                    <a:pt x="5085199" y="2657922"/>
-                  </a:lnTo>
-                  <a:lnTo>
-                    <a:pt x="5156821" y="2659324"/>
-                  </a:lnTo>
-                  <a:lnTo>
-                    <a:pt x="5228444" y="2660722"/>
-                  </a:lnTo>
-                  <a:lnTo>
-                    <a:pt x="5300066" y="2662119"/>
-                  </a:lnTo>
-                  <a:lnTo>
-                    <a:pt x="5371689" y="2663513"/>
-                  </a:lnTo>
-                  <a:lnTo>
-                    <a:pt x="5443311" y="2664904"/>
-                  </a:lnTo>
-                  <a:lnTo>
-                    <a:pt x="5514934" y="2666294"/>
-                  </a:lnTo>
-                  <a:lnTo>
-                    <a:pt x="5586557" y="2667680"/>
-                  </a:lnTo>
-                  <a:lnTo>
-                    <a:pt x="5658179" y="2669065"/>
-                  </a:lnTo>
-                  <a:lnTo>
-                    <a:pt x="5729802" y="2670447"/>
-                  </a:lnTo>
-                  <a:lnTo>
-                    <a:pt x="5801424" y="2671827"/>
-                  </a:lnTo>
-                  <a:lnTo>
-                    <a:pt x="5873047" y="2673205"/>
-                  </a:lnTo>
-                  <a:lnTo>
-                    <a:pt x="5944669" y="2674580"/>
-                  </a:lnTo>
-                  <a:lnTo>
-                    <a:pt x="6016292" y="2675953"/>
-                  </a:lnTo>
-                  <a:lnTo>
-                    <a:pt x="6087914" y="2677323"/>
-                  </a:lnTo>
-                  <a:lnTo>
-                    <a:pt x="6159537" y="2678691"/>
-                  </a:lnTo>
-                  <a:lnTo>
-                    <a:pt x="6231159" y="2680057"/>
-                  </a:lnTo>
-                  <a:lnTo>
-                    <a:pt x="6302782" y="2681421"/>
-                  </a:lnTo>
-                  <a:lnTo>
-                    <a:pt x="6374404" y="2682782"/>
-                  </a:lnTo>
-                  <a:lnTo>
-                    <a:pt x="6446027" y="2684141"/>
-                  </a:lnTo>
-                  <a:lnTo>
-                    <a:pt x="6517649" y="2685498"/>
-                  </a:lnTo>
-                  <a:lnTo>
-                    <a:pt x="6589272" y="2686852"/>
-                  </a:lnTo>
-                  <a:lnTo>
-                    <a:pt x="6660894" y="2688204"/>
-                  </a:lnTo>
-                  <a:lnTo>
-                    <a:pt x="6732517" y="2689554"/>
-                  </a:lnTo>
-                  <a:lnTo>
-                    <a:pt x="6804139" y="2690901"/>
-                  </a:lnTo>
-                  <a:lnTo>
-                    <a:pt x="6875762" y="2692246"/>
-                  </a:lnTo>
-                  <a:lnTo>
-                    <a:pt x="6947385" y="2693589"/>
-                  </a:lnTo>
-                  <a:lnTo>
-                    <a:pt x="7019007" y="2694930"/>
-                  </a:lnTo>
-                  <a:lnTo>
-                    <a:pt x="7090630" y="2696268"/>
-                  </a:lnTo>
-                  <a:lnTo>
-                    <a:pt x="7090630" y="3206557"/>
-                  </a:lnTo>
-                  <a:lnTo>
-                    <a:pt x="7019007" y="3196445"/>
-                  </a:lnTo>
-                  <a:lnTo>
-                    <a:pt x="6947385" y="3185964"/>
-                  </a:lnTo>
-                  <a:lnTo>
-                    <a:pt x="6875762" y="3175101"/>
-                  </a:lnTo>
-                  <a:lnTo>
-                    <a:pt x="6804139" y="3163841"/>
-                  </a:lnTo>
-                  <a:lnTo>
-                    <a:pt x="6732517" y="3152170"/>
-                  </a:lnTo>
-                  <a:lnTo>
-                    <a:pt x="6660894" y="3140074"/>
-                  </a:lnTo>
-                  <a:lnTo>
-                    <a:pt x="6589272" y="3127536"/>
-                  </a:lnTo>
-                  <a:lnTo>
-                    <a:pt x="6517649" y="3114541"/>
-                  </a:lnTo>
-                  <a:lnTo>
-                    <a:pt x="6446027" y="3101072"/>
-                  </a:lnTo>
-                  <a:lnTo>
-                    <a:pt x="6374404" y="3087112"/>
-                  </a:lnTo>
-                  <a:lnTo>
-                    <a:pt x="6302782" y="3072642"/>
-                  </a:lnTo>
-                  <a:lnTo>
-                    <a:pt x="6231159" y="3057644"/>
-                  </a:lnTo>
-                  <a:lnTo>
-                    <a:pt x="6159537" y="3042100"/>
-                  </a:lnTo>
-                  <a:lnTo>
-                    <a:pt x="6087914" y="3025988"/>
-                  </a:lnTo>
-                  <a:lnTo>
-                    <a:pt x="6016292" y="3009288"/>
-                  </a:lnTo>
-                  <a:lnTo>
-                    <a:pt x="5944669" y="2991979"/>
-                  </a:lnTo>
-                  <a:lnTo>
-                    <a:pt x="5873047" y="2974039"/>
-                  </a:lnTo>
-                  <a:lnTo>
-                    <a:pt x="5801424" y="2955444"/>
-                  </a:lnTo>
-                  <a:lnTo>
-                    <a:pt x="5729802" y="2936171"/>
-                  </a:lnTo>
-                  <a:lnTo>
-                    <a:pt x="5658179" y="2916195"/>
-                  </a:lnTo>
-                  <a:lnTo>
-                    <a:pt x="5586557" y="2895490"/>
-                  </a:lnTo>
-                  <a:lnTo>
-                    <a:pt x="5514934" y="2874029"/>
-                  </a:lnTo>
-                  <a:lnTo>
-                    <a:pt x="5443311" y="2851786"/>
-                  </a:lnTo>
-                  <a:lnTo>
-                    <a:pt x="5371689" y="2828731"/>
-                  </a:lnTo>
-                  <a:lnTo>
-                    <a:pt x="5300066" y="2804835"/>
-                  </a:lnTo>
-                  <a:lnTo>
-                    <a:pt x="5228444" y="2780068"/>
-                  </a:lnTo>
-                  <a:lnTo>
-                    <a:pt x="5156821" y="2754397"/>
-                  </a:lnTo>
-                  <a:lnTo>
-                    <a:pt x="5085199" y="2727789"/>
-                  </a:lnTo>
-                  <a:lnTo>
-                    <a:pt x="5013576" y="2700211"/>
-                  </a:lnTo>
-                  <a:lnTo>
-                    <a:pt x="4941954" y="2671626"/>
-                  </a:lnTo>
-                  <a:lnTo>
-                    <a:pt x="4870331" y="2653705"/>
-                  </a:lnTo>
-                  <a:lnTo>
-                    <a:pt x="4798709" y="2652294"/>
-                  </a:lnTo>
-                  <a:lnTo>
-                    <a:pt x="4727086" y="2650881"/>
-                  </a:lnTo>
-                  <a:lnTo>
-                    <a:pt x="4655464" y="2649466"/>
-                  </a:lnTo>
-                  <a:lnTo>
-                    <a:pt x="4583841" y="2648048"/>
-                  </a:lnTo>
-                  <a:lnTo>
-                    <a:pt x="4512219" y="2646627"/>
-                  </a:lnTo>
-                  <a:lnTo>
-                    <a:pt x="4440596" y="2645205"/>
-                  </a:lnTo>
-                  <a:lnTo>
-                    <a:pt x="4368974" y="2643780"/>
-                  </a:lnTo>
-                  <a:lnTo>
-                    <a:pt x="4297351" y="2642352"/>
-                  </a:lnTo>
-                  <a:lnTo>
-                    <a:pt x="4225729" y="2640922"/>
-                  </a:lnTo>
-                  <a:lnTo>
-                    <a:pt x="4154106" y="2639490"/>
-                  </a:lnTo>
-                  <a:lnTo>
-                    <a:pt x="4082483" y="2638055"/>
-                  </a:lnTo>
-                  <a:lnTo>
-                    <a:pt x="4010861" y="2636618"/>
-                  </a:lnTo>
-                  <a:lnTo>
-                    <a:pt x="3939238" y="2635178"/>
-                  </a:lnTo>
-                  <a:lnTo>
-                    <a:pt x="3867616" y="2633736"/>
-                  </a:lnTo>
-                  <a:lnTo>
-                    <a:pt x="3795993" y="2632291"/>
-                  </a:lnTo>
-                  <a:lnTo>
-                    <a:pt x="3724371" y="2630844"/>
-                  </a:lnTo>
-                  <a:lnTo>
-                    <a:pt x="3652748" y="2629395"/>
-                  </a:lnTo>
-                  <a:lnTo>
-                    <a:pt x="3581126" y="2627943"/>
-                  </a:lnTo>
-                  <a:lnTo>
-                    <a:pt x="3509503" y="2626488"/>
-                  </a:lnTo>
-                  <a:lnTo>
-                    <a:pt x="3437881" y="2625031"/>
-                  </a:lnTo>
-                  <a:lnTo>
-                    <a:pt x="3366258" y="2623572"/>
-                  </a:lnTo>
-                  <a:lnTo>
-                    <a:pt x="3294636" y="2622110"/>
-                  </a:lnTo>
-                  <a:lnTo>
-                    <a:pt x="3223013" y="2620646"/>
-                  </a:lnTo>
-                  <a:lnTo>
-                    <a:pt x="3151391" y="2619179"/>
-                  </a:lnTo>
-                  <a:lnTo>
-                    <a:pt x="3079768" y="2617710"/>
-                  </a:lnTo>
-                  <a:lnTo>
-                    <a:pt x="3008146" y="2616238"/>
-                  </a:lnTo>
-                  <a:lnTo>
-                    <a:pt x="2936523" y="2614763"/>
-                  </a:lnTo>
-                  <a:lnTo>
-                    <a:pt x="2864901" y="2613287"/>
-                  </a:lnTo>
-                  <a:lnTo>
-                    <a:pt x="2793278" y="2611807"/>
-                  </a:lnTo>
-                  <a:lnTo>
-                    <a:pt x="2721655" y="2610325"/>
-                  </a:lnTo>
-                  <a:lnTo>
-                    <a:pt x="2650033" y="2608841"/>
-                  </a:lnTo>
-                  <a:lnTo>
-                    <a:pt x="2578410" y="2607354"/>
-                  </a:lnTo>
-                  <a:lnTo>
-                    <a:pt x="2506788" y="2605865"/>
-                  </a:lnTo>
-                  <a:lnTo>
-                    <a:pt x="2435165" y="2604373"/>
-                  </a:lnTo>
-                  <a:lnTo>
-                    <a:pt x="2363543" y="2602878"/>
-                  </a:lnTo>
-                  <a:lnTo>
-                    <a:pt x="2291920" y="2601381"/>
-                  </a:lnTo>
-                  <a:lnTo>
-                    <a:pt x="2220298" y="2599882"/>
-                  </a:lnTo>
-                  <a:lnTo>
-                    <a:pt x="2148675" y="2598379"/>
-                  </a:lnTo>
-                  <a:lnTo>
-                    <a:pt x="2077053" y="2596875"/>
-                  </a:lnTo>
-                  <a:lnTo>
-                    <a:pt x="2005430" y="2595367"/>
-                  </a:lnTo>
-                  <a:lnTo>
-                    <a:pt x="1933808" y="2593858"/>
-                  </a:lnTo>
-                  <a:lnTo>
-                    <a:pt x="1862185" y="2592345"/>
-                  </a:lnTo>
-                  <a:lnTo>
-                    <a:pt x="1790563" y="2590830"/>
-                  </a:lnTo>
-                  <a:lnTo>
-                    <a:pt x="1718940" y="2589313"/>
-                  </a:lnTo>
-                  <a:lnTo>
-                    <a:pt x="1647318" y="2587793"/>
-                  </a:lnTo>
-                  <a:lnTo>
-                    <a:pt x="1575695" y="2586270"/>
-                  </a:lnTo>
-                  <a:lnTo>
-                    <a:pt x="1504073" y="2584745"/>
-                  </a:lnTo>
-                  <a:lnTo>
-                    <a:pt x="1432450" y="2583217"/>
-                  </a:lnTo>
-                  <a:lnTo>
-                    <a:pt x="1360827" y="2581686"/>
-                  </a:lnTo>
-                  <a:lnTo>
-                    <a:pt x="1289205" y="2580153"/>
-                  </a:lnTo>
-                  <a:lnTo>
-                    <a:pt x="1217582" y="2578618"/>
-                  </a:lnTo>
-                  <a:lnTo>
-                    <a:pt x="1145960" y="2577079"/>
-                  </a:lnTo>
-                  <a:lnTo>
-                    <a:pt x="1074337" y="2575539"/>
-                  </a:lnTo>
-                  <a:lnTo>
-                    <a:pt x="1002715" y="2573995"/>
-                  </a:lnTo>
-                  <a:lnTo>
-                    <a:pt x="931092" y="2572449"/>
-                  </a:lnTo>
-                  <a:lnTo>
-                    <a:pt x="859470" y="2570900"/>
-                  </a:lnTo>
-                  <a:lnTo>
-                    <a:pt x="787847" y="2569349"/>
-                  </a:lnTo>
-                  <a:lnTo>
-                    <a:pt x="716225" y="2567795"/>
-                  </a:lnTo>
-                  <a:lnTo>
-                    <a:pt x="644602" y="2566238"/>
-                  </a:lnTo>
-                  <a:lnTo>
-                    <a:pt x="572980" y="2564679"/>
-                  </a:lnTo>
-                  <a:lnTo>
-                    <a:pt x="501357" y="2563117"/>
-                  </a:lnTo>
-                  <a:lnTo>
-                    <a:pt x="429735" y="2561552"/>
-                  </a:lnTo>
-                  <a:lnTo>
-                    <a:pt x="358112" y="2559985"/>
-                  </a:lnTo>
-                  <a:lnTo>
-                    <a:pt x="286490" y="2558415"/>
-                  </a:lnTo>
-                  <a:lnTo>
-                    <a:pt x="214867" y="2556842"/>
-                  </a:lnTo>
-                  <a:lnTo>
-                    <a:pt x="143245" y="2555267"/>
-                  </a:lnTo>
-                  <a:lnTo>
-                    <a:pt x="71622" y="2553689"/>
-                  </a:lnTo>
-                  <a:lnTo>
-                    <a:pt x="0" y="2552109"/>
+                    <a:pt x="2148675" y="71304"/>
+                  </a:lnTo>
+                  <a:lnTo>
+                    <a:pt x="2220298" y="194677"/>
+                  </a:lnTo>
+                  <a:lnTo>
+                    <a:pt x="2291920" y="313589"/>
+                  </a:lnTo>
+                  <a:lnTo>
+                    <a:pt x="2363543" y="428203"/>
+                  </a:lnTo>
+                  <a:lnTo>
+                    <a:pt x="2435165" y="538672"/>
+                  </a:lnTo>
+                  <a:lnTo>
+                    <a:pt x="2506788" y="645148"/>
+                  </a:lnTo>
+                  <a:lnTo>
+                    <a:pt x="2578410" y="747774"/>
+                  </a:lnTo>
+                  <a:lnTo>
+                    <a:pt x="2650033" y="846690"/>
+                  </a:lnTo>
+                  <a:lnTo>
+                    <a:pt x="2721655" y="942030"/>
+                  </a:lnTo>
+                  <a:lnTo>
+                    <a:pt x="2793278" y="1033923"/>
+                  </a:lnTo>
+                  <a:lnTo>
+                    <a:pt x="2864901" y="1122494"/>
+                  </a:lnTo>
+                  <a:lnTo>
+                    <a:pt x="2936523" y="1207862"/>
+                  </a:lnTo>
+                  <a:lnTo>
+                    <a:pt x="3008146" y="1290144"/>
+                  </a:lnTo>
+                  <a:lnTo>
+                    <a:pt x="3079768" y="1369451"/>
+                  </a:lnTo>
+                  <a:lnTo>
+                    <a:pt x="3151391" y="1445891"/>
+                  </a:lnTo>
+                  <a:lnTo>
+                    <a:pt x="3223013" y="1519567"/>
+                  </a:lnTo>
+                  <a:lnTo>
+                    <a:pt x="3294636" y="1590580"/>
+                  </a:lnTo>
+                  <a:lnTo>
+                    <a:pt x="3366258" y="1659025"/>
+                  </a:lnTo>
+                  <a:lnTo>
+                    <a:pt x="3437881" y="1724996"/>
+                  </a:lnTo>
+                  <a:lnTo>
+                    <a:pt x="3509503" y="1788582"/>
+                  </a:lnTo>
+                  <a:lnTo>
+                    <a:pt x="3581126" y="1849868"/>
+                  </a:lnTo>
+                  <a:lnTo>
+                    <a:pt x="3652748" y="1908939"/>
+                  </a:lnTo>
+                  <a:lnTo>
+                    <a:pt x="3724371" y="1965875"/>
+                  </a:lnTo>
+                  <a:lnTo>
+                    <a:pt x="3795993" y="2020752"/>
+                  </a:lnTo>
+                  <a:lnTo>
+                    <a:pt x="3867616" y="2073645"/>
+                  </a:lnTo>
+                  <a:lnTo>
+                    <a:pt x="3939238" y="2124625"/>
+                  </a:lnTo>
+                  <a:lnTo>
+                    <a:pt x="4010861" y="2173763"/>
+                  </a:lnTo>
+                  <a:lnTo>
+                    <a:pt x="4082483" y="2221124"/>
+                  </a:lnTo>
+                  <a:lnTo>
+                    <a:pt x="4154106" y="2266772"/>
+                  </a:lnTo>
+                  <a:lnTo>
+                    <a:pt x="4225729" y="2310771"/>
+                  </a:lnTo>
+                  <a:lnTo>
+                    <a:pt x="4297351" y="2353178"/>
+                  </a:lnTo>
+                  <a:lnTo>
+                    <a:pt x="4368974" y="2394053"/>
+                  </a:lnTo>
+                  <a:lnTo>
+                    <a:pt x="4440596" y="2433449"/>
+                  </a:lnTo>
+                  <a:lnTo>
+                    <a:pt x="4512219" y="2471422"/>
+                  </a:lnTo>
+                  <a:lnTo>
+                    <a:pt x="4583841" y="2508021"/>
+                  </a:lnTo>
+                  <a:lnTo>
+                    <a:pt x="4655464" y="2543297"/>
+                  </a:lnTo>
+                  <a:lnTo>
+                    <a:pt x="4727086" y="2577298"/>
+                  </a:lnTo>
+                  <a:lnTo>
+                    <a:pt x="4798709" y="2610070"/>
+                  </a:lnTo>
+                  <a:lnTo>
+                    <a:pt x="4870331" y="2641657"/>
+                  </a:lnTo>
+                  <a:lnTo>
+                    <a:pt x="4941954" y="2654270"/>
+                  </a:lnTo>
+                  <a:lnTo>
+                    <a:pt x="5013576" y="2654249"/>
+                  </a:lnTo>
+                  <a:lnTo>
+                    <a:pt x="5085199" y="2654227"/>
+                  </a:lnTo>
+                  <a:lnTo>
+                    <a:pt x="5156821" y="2654206"/>
+                  </a:lnTo>
+                  <a:lnTo>
+                    <a:pt x="5228444" y="2654184"/>
+                  </a:lnTo>
+                  <a:lnTo>
+                    <a:pt x="5300066" y="2654163"/>
+                  </a:lnTo>
+                  <a:lnTo>
+                    <a:pt x="5371689" y="2654141"/>
+                  </a:lnTo>
+                  <a:lnTo>
+                    <a:pt x="5443311" y="2654120"/>
+                  </a:lnTo>
+                  <a:lnTo>
+                    <a:pt x="5514934" y="2654098"/>
+                  </a:lnTo>
+                  <a:lnTo>
+                    <a:pt x="5586557" y="2654077"/>
+                  </a:lnTo>
+                  <a:lnTo>
+                    <a:pt x="5658179" y="2654055"/>
+                  </a:lnTo>
+                  <a:lnTo>
+                    <a:pt x="5729802" y="2654034"/>
+                  </a:lnTo>
+                  <a:lnTo>
+                    <a:pt x="5801424" y="2654012"/>
+                  </a:lnTo>
+                  <a:lnTo>
+                    <a:pt x="5873047" y="2653991"/>
+                  </a:lnTo>
+                  <a:lnTo>
+                    <a:pt x="5944669" y="2653969"/>
+                  </a:lnTo>
+                  <a:lnTo>
+                    <a:pt x="6016292" y="2653948"/>
+                  </a:lnTo>
+                  <a:lnTo>
+                    <a:pt x="6087914" y="2653926"/>
+                  </a:lnTo>
+                  <a:lnTo>
+                    <a:pt x="6159537" y="2653905"/>
+                  </a:lnTo>
+                  <a:lnTo>
+                    <a:pt x="6231159" y="2653883"/>
+                  </a:lnTo>
+                  <a:lnTo>
+                    <a:pt x="6302782" y="2653862"/>
+                  </a:lnTo>
+                  <a:lnTo>
+                    <a:pt x="6374404" y="2653840"/>
+                  </a:lnTo>
+                  <a:lnTo>
+                    <a:pt x="6446027" y="2653819"/>
+                  </a:lnTo>
+                  <a:lnTo>
+                    <a:pt x="6517649" y="2653797"/>
+                  </a:lnTo>
+                  <a:lnTo>
+                    <a:pt x="6589272" y="2653776"/>
+                  </a:lnTo>
+                  <a:lnTo>
+                    <a:pt x="6660894" y="2653754"/>
+                  </a:lnTo>
+                  <a:lnTo>
+                    <a:pt x="6732517" y="2653733"/>
+                  </a:lnTo>
+                  <a:lnTo>
+                    <a:pt x="6804139" y="2653711"/>
+                  </a:lnTo>
+                  <a:lnTo>
+                    <a:pt x="6875762" y="2653690"/>
+                  </a:lnTo>
+                  <a:lnTo>
+                    <a:pt x="6947385" y="2653668"/>
+                  </a:lnTo>
+                  <a:lnTo>
+                    <a:pt x="7019007" y="2653647"/>
+                  </a:lnTo>
+                  <a:lnTo>
+                    <a:pt x="7090630" y="2653625"/>
+                  </a:lnTo>
+                  <a:lnTo>
+                    <a:pt x="7090630" y="3214842"/>
+                  </a:lnTo>
+                  <a:lnTo>
+                    <a:pt x="7019007" y="3204756"/>
+                  </a:lnTo>
+                  <a:lnTo>
+                    <a:pt x="6947385" y="3194291"/>
+                  </a:lnTo>
+                  <a:lnTo>
+                    <a:pt x="6875762" y="3183433"/>
+                  </a:lnTo>
+                  <a:lnTo>
+                    <a:pt x="6804139" y="3172169"/>
+                  </a:lnTo>
+                  <a:lnTo>
+                    <a:pt x="6732517" y="3160481"/>
+                  </a:lnTo>
+                  <a:lnTo>
+                    <a:pt x="6660894" y="3148356"/>
+                  </a:lnTo>
+                  <a:lnTo>
+                    <a:pt x="6589272" y="3135775"/>
+                  </a:lnTo>
+                  <a:lnTo>
+                    <a:pt x="6517649" y="3122723"/>
+                  </a:lnTo>
+                  <a:lnTo>
+                    <a:pt x="6446027" y="3109181"/>
+                  </a:lnTo>
+                  <a:lnTo>
+                    <a:pt x="6374404" y="3095131"/>
+                  </a:lnTo>
+                  <a:lnTo>
+                    <a:pt x="6302782" y="3080554"/>
+                  </a:lnTo>
+                  <a:lnTo>
+                    <a:pt x="6231159" y="3065430"/>
+                  </a:lnTo>
+                  <a:lnTo>
+                    <a:pt x="6159537" y="3049739"/>
+                  </a:lnTo>
+                  <a:lnTo>
+                    <a:pt x="6087914" y="3033459"/>
+                  </a:lnTo>
+                  <a:lnTo>
+                    <a:pt x="6016292" y="3016569"/>
+                  </a:lnTo>
+                  <a:lnTo>
+                    <a:pt x="5944669" y="2999045"/>
+                  </a:lnTo>
+                  <a:lnTo>
+                    <a:pt x="5873047" y="2980864"/>
+                  </a:lnTo>
+                  <a:lnTo>
+                    <a:pt x="5801424" y="2962001"/>
+                  </a:lnTo>
+                  <a:lnTo>
+                    <a:pt x="5729802" y="2942430"/>
+                  </a:lnTo>
+                  <a:lnTo>
+                    <a:pt x="5658179" y="2922126"/>
+                  </a:lnTo>
+                  <a:lnTo>
+                    <a:pt x="5586557" y="2901059"/>
+                  </a:lnTo>
+                  <a:lnTo>
+                    <a:pt x="5514934" y="2879203"/>
+                  </a:lnTo>
+                  <a:lnTo>
+                    <a:pt x="5443311" y="2856526"/>
+                  </a:lnTo>
+                  <a:lnTo>
+                    <a:pt x="5371689" y="2832999"/>
+                  </a:lnTo>
+                  <a:lnTo>
+                    <a:pt x="5300066" y="2808590"/>
+                  </a:lnTo>
+                  <a:lnTo>
+                    <a:pt x="5228444" y="2783264"/>
+                  </a:lnTo>
+                  <a:lnTo>
+                    <a:pt x="5156821" y="2756989"/>
+                  </a:lnTo>
+                  <a:lnTo>
+                    <a:pt x="5085199" y="2729729"/>
+                  </a:lnTo>
+                  <a:lnTo>
+                    <a:pt x="5013576" y="2701446"/>
+                  </a:lnTo>
+                  <a:lnTo>
+                    <a:pt x="4941954" y="2672101"/>
+                  </a:lnTo>
+                  <a:lnTo>
+                    <a:pt x="4870331" y="2654292"/>
+                  </a:lnTo>
+                  <a:lnTo>
+                    <a:pt x="4798709" y="2654313"/>
+                  </a:lnTo>
+                  <a:lnTo>
+                    <a:pt x="4727086" y="2654335"/>
+                  </a:lnTo>
+                  <a:lnTo>
+                    <a:pt x="4655464" y="2654356"/>
+                  </a:lnTo>
+                  <a:lnTo>
+                    <a:pt x="4583841" y="2654378"/>
+                  </a:lnTo>
+                  <a:lnTo>
+                    <a:pt x="4512219" y="2654399"/>
+                  </a:lnTo>
+                  <a:lnTo>
+                    <a:pt x="4440596" y="2654421"/>
+                  </a:lnTo>
+                  <a:lnTo>
+                    <a:pt x="4368974" y="2654442"/>
+                  </a:lnTo>
+                  <a:lnTo>
+                    <a:pt x="4297351" y="2654464"/>
+                  </a:lnTo>
+                  <a:lnTo>
+                    <a:pt x="4225729" y="2654485"/>
+                  </a:lnTo>
+                  <a:lnTo>
+                    <a:pt x="4154106" y="2654507"/>
+                  </a:lnTo>
+                  <a:lnTo>
+                    <a:pt x="4082483" y="2654528"/>
+                  </a:lnTo>
+                  <a:lnTo>
+                    <a:pt x="4010861" y="2654550"/>
+                  </a:lnTo>
+                  <a:lnTo>
+                    <a:pt x="3939238" y="2654571"/>
+                  </a:lnTo>
+                  <a:lnTo>
+                    <a:pt x="3867616" y="2654593"/>
+                  </a:lnTo>
+                  <a:lnTo>
+                    <a:pt x="3795993" y="2654614"/>
+                  </a:lnTo>
+                  <a:lnTo>
+                    <a:pt x="3724371" y="2654636"/>
+                  </a:lnTo>
+                  <a:lnTo>
+                    <a:pt x="3652748" y="2654657"/>
+                  </a:lnTo>
+                  <a:lnTo>
+                    <a:pt x="3581126" y="2654679"/>
+                  </a:lnTo>
+                  <a:lnTo>
+                    <a:pt x="3509503" y="2654700"/>
+                  </a:lnTo>
+                  <a:lnTo>
+                    <a:pt x="3437881" y="2654722"/>
+                  </a:lnTo>
+                  <a:lnTo>
+                    <a:pt x="3366258" y="2654743"/>
+                  </a:lnTo>
+                  <a:lnTo>
+                    <a:pt x="3294636" y="2654764"/>
+                  </a:lnTo>
+                  <a:lnTo>
+                    <a:pt x="3223013" y="2654786"/>
+                  </a:lnTo>
+                  <a:lnTo>
+                    <a:pt x="3151391" y="2654807"/>
+                  </a:lnTo>
+                  <a:lnTo>
+                    <a:pt x="3079768" y="2654829"/>
+                  </a:lnTo>
+                  <a:lnTo>
+                    <a:pt x="3008146" y="2654850"/>
+                  </a:lnTo>
+                  <a:lnTo>
+                    <a:pt x="2936523" y="2654872"/>
+                  </a:lnTo>
+                  <a:lnTo>
+                    <a:pt x="2864901" y="2654893"/>
+                  </a:lnTo>
+                  <a:lnTo>
+                    <a:pt x="2793278" y="2654915"/>
+                  </a:lnTo>
+                  <a:lnTo>
+                    <a:pt x="2721655" y="2654936"/>
+                  </a:lnTo>
+                  <a:lnTo>
+                    <a:pt x="2650033" y="2654958"/>
+                  </a:lnTo>
+                  <a:lnTo>
+                    <a:pt x="2578410" y="2654979"/>
+                  </a:lnTo>
+                  <a:lnTo>
+                    <a:pt x="2506788" y="2655001"/>
+                  </a:lnTo>
+                  <a:lnTo>
+                    <a:pt x="2435165" y="2655022"/>
+                  </a:lnTo>
+                  <a:lnTo>
+                    <a:pt x="2363543" y="2655044"/>
+                  </a:lnTo>
+                  <a:lnTo>
+                    <a:pt x="2291920" y="2655065"/>
+                  </a:lnTo>
+                  <a:lnTo>
+                    <a:pt x="2220298" y="2655087"/>
+                  </a:lnTo>
+                  <a:lnTo>
+                    <a:pt x="2148675" y="2655108"/>
+                  </a:lnTo>
+                  <a:lnTo>
+                    <a:pt x="2077053" y="2655130"/>
+                  </a:lnTo>
+                  <a:lnTo>
+                    <a:pt x="2005430" y="2655151"/>
+                  </a:lnTo>
+                  <a:lnTo>
+                    <a:pt x="1933808" y="2655173"/>
+                  </a:lnTo>
+                  <a:lnTo>
+                    <a:pt x="1862185" y="2655194"/>
+                  </a:lnTo>
+                  <a:lnTo>
+                    <a:pt x="1790563" y="2655216"/>
+                  </a:lnTo>
+                  <a:lnTo>
+                    <a:pt x="1718940" y="2655237"/>
+                  </a:lnTo>
+                  <a:lnTo>
+                    <a:pt x="1647318" y="2655258"/>
+                  </a:lnTo>
+                  <a:lnTo>
+                    <a:pt x="1575695" y="2655280"/>
+                  </a:lnTo>
+                  <a:lnTo>
+                    <a:pt x="1504073" y="2655301"/>
+                  </a:lnTo>
+                  <a:lnTo>
+                    <a:pt x="1432450" y="2655323"/>
+                  </a:lnTo>
+                  <a:lnTo>
+                    <a:pt x="1360827" y="2655344"/>
+                  </a:lnTo>
+                  <a:lnTo>
+                    <a:pt x="1289205" y="2655366"/>
+                  </a:lnTo>
+                  <a:lnTo>
+                    <a:pt x="1217582" y="2655387"/>
+                  </a:lnTo>
+                  <a:lnTo>
+                    <a:pt x="1145960" y="2655409"/>
+                  </a:lnTo>
+                  <a:lnTo>
+                    <a:pt x="1074337" y="2655430"/>
+                  </a:lnTo>
+                  <a:lnTo>
+                    <a:pt x="1002715" y="2655452"/>
+                  </a:lnTo>
+                  <a:lnTo>
+                    <a:pt x="931092" y="2655473"/>
+                  </a:lnTo>
+                  <a:lnTo>
+                    <a:pt x="859470" y="2655495"/>
+                  </a:lnTo>
+                  <a:lnTo>
+                    <a:pt x="787847" y="2655516"/>
+                  </a:lnTo>
+                  <a:lnTo>
+                    <a:pt x="716225" y="2655538"/>
+                  </a:lnTo>
+                  <a:lnTo>
+                    <a:pt x="644602" y="2655559"/>
+                  </a:lnTo>
+                  <a:lnTo>
+                    <a:pt x="572980" y="2655581"/>
+                  </a:lnTo>
+                  <a:lnTo>
+                    <a:pt x="501357" y="2655602"/>
+                  </a:lnTo>
+                  <a:lnTo>
+                    <a:pt x="429735" y="2655623"/>
+                  </a:lnTo>
+                  <a:lnTo>
+                    <a:pt x="358112" y="2655645"/>
+                  </a:lnTo>
+                  <a:lnTo>
+                    <a:pt x="286490" y="2655666"/>
+                  </a:lnTo>
+                  <a:lnTo>
+                    <a:pt x="214867" y="2655688"/>
+                  </a:lnTo>
+                  <a:lnTo>
+                    <a:pt x="143245" y="2655709"/>
+                  </a:lnTo>
+                  <a:lnTo>
+                    <a:pt x="71622" y="2655731"/>
+                  </a:lnTo>
+                  <a:lnTo>
+                    <a:pt x="0" y="2655752"/>
                   </a:lnTo>
                   <a:close/>
                 </a:path>
@@ -3549,228 +3546,225 @@
           </p:nvSpPr>
           <p:spPr>
             <a:xfrm>
-              <a:off x="3203523" y="2073503"/>
-              <a:ext cx="5059156" cy="2696268"/>
+              <a:off x="3280827" y="2073503"/>
+              <a:ext cx="4981852" cy="2654270"/>
             </a:xfrm>
             <a:custGeom>
               <a:avLst/>
               <a:pathLst>
-                <a:path w="5059156" h="2696268">
+                <a:path w="4981852" h="2654270">
                   <a:moveTo>
                     <a:pt x="0" y="0"/>
                   </a:moveTo>
                   <a:lnTo>
-                    <a:pt x="45579" y="79044"/>
-                  </a:lnTo>
-                  <a:lnTo>
-                    <a:pt x="117202" y="198880"/>
-                  </a:lnTo>
-                  <a:lnTo>
-                    <a:pt x="188824" y="314498"/>
-                  </a:lnTo>
-                  <a:lnTo>
-                    <a:pt x="260447" y="426047"/>
-                  </a:lnTo>
-                  <a:lnTo>
-                    <a:pt x="332069" y="533670"/>
-                  </a:lnTo>
-                  <a:lnTo>
-                    <a:pt x="403692" y="637505"/>
-                  </a:lnTo>
-                  <a:lnTo>
-                    <a:pt x="475314" y="737684"/>
-                  </a:lnTo>
-                  <a:lnTo>
-                    <a:pt x="546937" y="834338"/>
-                  </a:lnTo>
-                  <a:lnTo>
-                    <a:pt x="618559" y="927590"/>
-                  </a:lnTo>
-                  <a:lnTo>
-                    <a:pt x="690182" y="1017560"/>
-                  </a:lnTo>
-                  <a:lnTo>
-                    <a:pt x="761804" y="1104363"/>
-                  </a:lnTo>
-                  <a:lnTo>
-                    <a:pt x="833427" y="1188111"/>
-                  </a:lnTo>
-                  <a:lnTo>
-                    <a:pt x="905049" y="1268911"/>
-                  </a:lnTo>
-                  <a:lnTo>
-                    <a:pt x="976672" y="1346867"/>
-                  </a:lnTo>
-                  <a:lnTo>
-                    <a:pt x="1048294" y="1422079"/>
-                  </a:lnTo>
-                  <a:lnTo>
-                    <a:pt x="1119917" y="1494644"/>
-                  </a:lnTo>
-                  <a:lnTo>
-                    <a:pt x="1191540" y="1564655"/>
-                  </a:lnTo>
-                  <a:lnTo>
-                    <a:pt x="1263162" y="1632202"/>
-                  </a:lnTo>
-                  <a:lnTo>
-                    <a:pt x="1334785" y="1697371"/>
-                  </a:lnTo>
-                  <a:lnTo>
-                    <a:pt x="1406407" y="1760247"/>
-                  </a:lnTo>
-                  <a:lnTo>
-                    <a:pt x="1478030" y="1820909"/>
-                  </a:lnTo>
-                  <a:lnTo>
-                    <a:pt x="1549652" y="1879437"/>
-                  </a:lnTo>
-                  <a:lnTo>
-                    <a:pt x="1621275" y="1935904"/>
-                  </a:lnTo>
-                  <a:lnTo>
-                    <a:pt x="1692897" y="1990384"/>
-                  </a:lnTo>
-                  <a:lnTo>
-                    <a:pt x="1764520" y="2042946"/>
-                  </a:lnTo>
-                  <a:lnTo>
-                    <a:pt x="1836142" y="2093658"/>
-                  </a:lnTo>
-                  <a:lnTo>
-                    <a:pt x="1907765" y="2142586"/>
-                  </a:lnTo>
-                  <a:lnTo>
-                    <a:pt x="1979387" y="2189791"/>
-                  </a:lnTo>
-                  <a:lnTo>
-                    <a:pt x="2051010" y="2235335"/>
-                  </a:lnTo>
-                  <a:lnTo>
-                    <a:pt x="2122632" y="2279275"/>
-                  </a:lnTo>
-                  <a:lnTo>
-                    <a:pt x="2194255" y="2321669"/>
-                  </a:lnTo>
-                  <a:lnTo>
-                    <a:pt x="2265877" y="2362571"/>
-                  </a:lnTo>
-                  <a:lnTo>
-                    <a:pt x="2337500" y="2402034"/>
-                  </a:lnTo>
-                  <a:lnTo>
-                    <a:pt x="2409122" y="2440107"/>
-                  </a:lnTo>
-                  <a:lnTo>
-                    <a:pt x="2480745" y="2476840"/>
-                  </a:lnTo>
-                  <a:lnTo>
-                    <a:pt x="2552368" y="2512281"/>
-                  </a:lnTo>
-                  <a:lnTo>
-                    <a:pt x="2623990" y="2546473"/>
-                  </a:lnTo>
-                  <a:lnTo>
-                    <a:pt x="2695613" y="2579463"/>
-                  </a:lnTo>
-                  <a:lnTo>
-                    <a:pt x="2767235" y="2611291"/>
-                  </a:lnTo>
-                  <a:lnTo>
-                    <a:pt x="2838858" y="2641999"/>
-                  </a:lnTo>
-                  <a:lnTo>
-                    <a:pt x="2910480" y="2655113"/>
-                  </a:lnTo>
-                  <a:lnTo>
-                    <a:pt x="2982103" y="2656519"/>
-                  </a:lnTo>
-                  <a:lnTo>
-                    <a:pt x="3053725" y="2657922"/>
-                  </a:lnTo>
-                  <a:lnTo>
-                    <a:pt x="3125348" y="2659324"/>
-                  </a:lnTo>
-                  <a:lnTo>
-                    <a:pt x="3196970" y="2660722"/>
-                  </a:lnTo>
-                  <a:lnTo>
-                    <a:pt x="3268593" y="2662119"/>
-                  </a:lnTo>
-                  <a:lnTo>
-                    <a:pt x="3340215" y="2663513"/>
-                  </a:lnTo>
-                  <a:lnTo>
-                    <a:pt x="3411838" y="2664904"/>
-                  </a:lnTo>
-                  <a:lnTo>
-                    <a:pt x="3483460" y="2666294"/>
-                  </a:lnTo>
-                  <a:lnTo>
-                    <a:pt x="3555083" y="2667680"/>
-                  </a:lnTo>
-                  <a:lnTo>
-                    <a:pt x="3626705" y="2669065"/>
-                  </a:lnTo>
-                  <a:lnTo>
-                    <a:pt x="3698328" y="2670447"/>
-                  </a:lnTo>
-                  <a:lnTo>
-                    <a:pt x="3769950" y="2671827"/>
-                  </a:lnTo>
-                  <a:lnTo>
-                    <a:pt x="3841573" y="2673205"/>
-                  </a:lnTo>
-                  <a:lnTo>
-                    <a:pt x="3913196" y="2674580"/>
-                  </a:lnTo>
-                  <a:lnTo>
-                    <a:pt x="3984818" y="2675953"/>
-                  </a:lnTo>
-                  <a:lnTo>
-                    <a:pt x="4056441" y="2677323"/>
-                  </a:lnTo>
-                  <a:lnTo>
-                    <a:pt x="4128063" y="2678691"/>
-                  </a:lnTo>
-                  <a:lnTo>
-                    <a:pt x="4199686" y="2680057"/>
-                  </a:lnTo>
-                  <a:lnTo>
-                    <a:pt x="4271308" y="2681421"/>
-                  </a:lnTo>
-                  <a:lnTo>
-                    <a:pt x="4342931" y="2682782"/>
-                  </a:lnTo>
-                  <a:lnTo>
-                    <a:pt x="4414553" y="2684141"/>
-                  </a:lnTo>
-                  <a:lnTo>
-                    <a:pt x="4486176" y="2685498"/>
-                  </a:lnTo>
-                  <a:lnTo>
-                    <a:pt x="4557798" y="2686852"/>
-                  </a:lnTo>
-                  <a:lnTo>
-                    <a:pt x="4629421" y="2688204"/>
-                  </a:lnTo>
-                  <a:lnTo>
-                    <a:pt x="4701043" y="2689554"/>
-                  </a:lnTo>
-                  <a:lnTo>
-                    <a:pt x="4772666" y="2690901"/>
-                  </a:lnTo>
-                  <a:lnTo>
-                    <a:pt x="4844288" y="2692246"/>
-                  </a:lnTo>
-                  <a:lnTo>
-                    <a:pt x="4915911" y="2693589"/>
-                  </a:lnTo>
-                  <a:lnTo>
-                    <a:pt x="4987533" y="2694930"/>
-                  </a:lnTo>
-                  <a:lnTo>
-                    <a:pt x="5059156" y="2696268"/>
+                    <a:pt x="39898" y="71304"/>
+                  </a:lnTo>
+                  <a:lnTo>
+                    <a:pt x="111520" y="194677"/>
+                  </a:lnTo>
+                  <a:lnTo>
+                    <a:pt x="183143" y="313589"/>
+                  </a:lnTo>
+                  <a:lnTo>
+                    <a:pt x="254765" y="428203"/>
+                  </a:lnTo>
+                  <a:lnTo>
+                    <a:pt x="326388" y="538672"/>
+                  </a:lnTo>
+                  <a:lnTo>
+                    <a:pt x="398010" y="645148"/>
+                  </a:lnTo>
+                  <a:lnTo>
+                    <a:pt x="469633" y="747774"/>
+                  </a:lnTo>
+                  <a:lnTo>
+                    <a:pt x="541255" y="846690"/>
+                  </a:lnTo>
+                  <a:lnTo>
+                    <a:pt x="612878" y="942030"/>
+                  </a:lnTo>
+                  <a:lnTo>
+                    <a:pt x="684500" y="1033923"/>
+                  </a:lnTo>
+                  <a:lnTo>
+                    <a:pt x="756123" y="1122494"/>
+                  </a:lnTo>
+                  <a:lnTo>
+                    <a:pt x="827745" y="1207862"/>
+                  </a:lnTo>
+                  <a:lnTo>
+                    <a:pt x="899368" y="1290144"/>
+                  </a:lnTo>
+                  <a:lnTo>
+                    <a:pt x="970990" y="1369451"/>
+                  </a:lnTo>
+                  <a:lnTo>
+                    <a:pt x="1042613" y="1445891"/>
+                  </a:lnTo>
+                  <a:lnTo>
+                    <a:pt x="1114235" y="1519567"/>
+                  </a:lnTo>
+                  <a:lnTo>
+                    <a:pt x="1185858" y="1590580"/>
+                  </a:lnTo>
+                  <a:lnTo>
+                    <a:pt x="1257480" y="1659025"/>
+                  </a:lnTo>
+                  <a:lnTo>
+                    <a:pt x="1329103" y="1724996"/>
+                  </a:lnTo>
+                  <a:lnTo>
+                    <a:pt x="1400726" y="1788582"/>
+                  </a:lnTo>
+                  <a:lnTo>
+                    <a:pt x="1472348" y="1849868"/>
+                  </a:lnTo>
+                  <a:lnTo>
+                    <a:pt x="1543971" y="1908939"/>
+                  </a:lnTo>
+                  <a:lnTo>
+                    <a:pt x="1615593" y="1965875"/>
+                  </a:lnTo>
+                  <a:lnTo>
+                    <a:pt x="1687216" y="2020752"/>
+                  </a:lnTo>
+                  <a:lnTo>
+                    <a:pt x="1758838" y="2073645"/>
+                  </a:lnTo>
+                  <a:lnTo>
+                    <a:pt x="1830461" y="2124625"/>
+                  </a:lnTo>
+                  <a:lnTo>
+                    <a:pt x="1902083" y="2173763"/>
+                  </a:lnTo>
+                  <a:lnTo>
+                    <a:pt x="1973706" y="2221124"/>
+                  </a:lnTo>
+                  <a:lnTo>
+                    <a:pt x="2045328" y="2266772"/>
+                  </a:lnTo>
+                  <a:lnTo>
+                    <a:pt x="2116951" y="2310771"/>
+                  </a:lnTo>
+                  <a:lnTo>
+                    <a:pt x="2188573" y="2353178"/>
+                  </a:lnTo>
+                  <a:lnTo>
+                    <a:pt x="2260196" y="2394053"/>
+                  </a:lnTo>
+                  <a:lnTo>
+                    <a:pt x="2331818" y="2433449"/>
+                  </a:lnTo>
+                  <a:lnTo>
+                    <a:pt x="2403441" y="2471422"/>
+                  </a:lnTo>
+                  <a:lnTo>
+                    <a:pt x="2475063" y="2508021"/>
+                  </a:lnTo>
+                  <a:lnTo>
+                    <a:pt x="2546686" y="2543297"/>
+                  </a:lnTo>
+                  <a:lnTo>
+                    <a:pt x="2618308" y="2577298"/>
+                  </a:lnTo>
+                  <a:lnTo>
+                    <a:pt x="2689931" y="2610070"/>
+                  </a:lnTo>
+                  <a:lnTo>
+                    <a:pt x="2761554" y="2641657"/>
+                  </a:lnTo>
+                  <a:lnTo>
+                    <a:pt x="2833176" y="2654270"/>
+                  </a:lnTo>
+                  <a:lnTo>
+                    <a:pt x="2904799" y="2654249"/>
+                  </a:lnTo>
+                  <a:lnTo>
+                    <a:pt x="2976421" y="2654227"/>
+                  </a:lnTo>
+                  <a:lnTo>
+                    <a:pt x="3048044" y="2654206"/>
+                  </a:lnTo>
+                  <a:lnTo>
+                    <a:pt x="3119666" y="2654184"/>
+                  </a:lnTo>
+                  <a:lnTo>
+                    <a:pt x="3191289" y="2654163"/>
+                  </a:lnTo>
+                  <a:lnTo>
+                    <a:pt x="3262911" y="2654141"/>
+                  </a:lnTo>
+                  <a:lnTo>
+                    <a:pt x="3334534" y="2654120"/>
+                  </a:lnTo>
+                  <a:lnTo>
+                    <a:pt x="3406156" y="2654098"/>
+                  </a:lnTo>
+                  <a:lnTo>
+                    <a:pt x="3477779" y="2654077"/>
+                  </a:lnTo>
+                  <a:lnTo>
+                    <a:pt x="3549401" y="2654055"/>
+                  </a:lnTo>
+                  <a:lnTo>
+                    <a:pt x="3621024" y="2654034"/>
+                  </a:lnTo>
+                  <a:lnTo>
+                    <a:pt x="3692646" y="2654012"/>
+                  </a:lnTo>
+                  <a:lnTo>
+                    <a:pt x="3764269" y="2653991"/>
+                  </a:lnTo>
+                  <a:lnTo>
+                    <a:pt x="3835891" y="2653969"/>
+                  </a:lnTo>
+                  <a:lnTo>
+                    <a:pt x="3907514" y="2653948"/>
+                  </a:lnTo>
+                  <a:lnTo>
+                    <a:pt x="3979136" y="2653926"/>
+                  </a:lnTo>
+                  <a:lnTo>
+                    <a:pt x="4050759" y="2653905"/>
+                  </a:lnTo>
+                  <a:lnTo>
+                    <a:pt x="4122382" y="2653883"/>
+                  </a:lnTo>
+                  <a:lnTo>
+                    <a:pt x="4194004" y="2653862"/>
+                  </a:lnTo>
+                  <a:lnTo>
+                    <a:pt x="4265627" y="2653840"/>
+                  </a:lnTo>
+                  <a:lnTo>
+                    <a:pt x="4337249" y="2653819"/>
+                  </a:lnTo>
+                  <a:lnTo>
+                    <a:pt x="4408872" y="2653797"/>
+                  </a:lnTo>
+                  <a:lnTo>
+                    <a:pt x="4480494" y="2653776"/>
+                  </a:lnTo>
+                  <a:lnTo>
+                    <a:pt x="4552117" y="2653754"/>
+                  </a:lnTo>
+                  <a:lnTo>
+                    <a:pt x="4623739" y="2653733"/>
+                  </a:lnTo>
+                  <a:lnTo>
+                    <a:pt x="4695362" y="2653711"/>
+                  </a:lnTo>
+                  <a:lnTo>
+                    <a:pt x="4766984" y="2653690"/>
+                  </a:lnTo>
+                  <a:lnTo>
+                    <a:pt x="4838607" y="2653668"/>
+                  </a:lnTo>
+                  <a:lnTo>
+                    <a:pt x="4910229" y="2653647"/>
+                  </a:lnTo>
+                  <a:lnTo>
+                    <a:pt x="4981852" y="2653625"/>
                   </a:lnTo>
                 </a:path>
               </a:pathLst>
@@ -3790,312 +3784,312 @@
           </p:nvSpPr>
           <p:spPr>
             <a:xfrm>
-              <a:off x="1172049" y="4625612"/>
-              <a:ext cx="7090630" cy="654448"/>
+              <a:off x="1172049" y="4727795"/>
+              <a:ext cx="7090630" cy="560550"/>
             </a:xfrm>
             <a:custGeom>
               <a:avLst/>
               <a:pathLst>
-                <a:path w="7090630" h="654448">
+                <a:path w="7090630" h="560550">
                   <a:moveTo>
-                    <a:pt x="7090630" y="654448"/>
+                    <a:pt x="7090630" y="560550"/>
                   </a:moveTo>
                   <a:lnTo>
-                    <a:pt x="7019007" y="644336"/>
-                  </a:lnTo>
-                  <a:lnTo>
-                    <a:pt x="6947385" y="633855"/>
-                  </a:lnTo>
-                  <a:lnTo>
-                    <a:pt x="6875762" y="622992"/>
-                  </a:lnTo>
-                  <a:lnTo>
-                    <a:pt x="6804139" y="611732"/>
-                  </a:lnTo>
-                  <a:lnTo>
-                    <a:pt x="6732517" y="600061"/>
-                  </a:lnTo>
-                  <a:lnTo>
-                    <a:pt x="6660894" y="587965"/>
-                  </a:lnTo>
-                  <a:lnTo>
-                    <a:pt x="6589272" y="575427"/>
-                  </a:lnTo>
-                  <a:lnTo>
-                    <a:pt x="6517649" y="562432"/>
-                  </a:lnTo>
-                  <a:lnTo>
-                    <a:pt x="6446027" y="548963"/>
-                  </a:lnTo>
-                  <a:lnTo>
-                    <a:pt x="6374404" y="535003"/>
-                  </a:lnTo>
-                  <a:lnTo>
-                    <a:pt x="6302782" y="520533"/>
-                  </a:lnTo>
-                  <a:lnTo>
-                    <a:pt x="6231159" y="505535"/>
-                  </a:lnTo>
-                  <a:lnTo>
-                    <a:pt x="6159537" y="489991"/>
-                  </a:lnTo>
-                  <a:lnTo>
-                    <a:pt x="6087914" y="473879"/>
-                  </a:lnTo>
-                  <a:lnTo>
-                    <a:pt x="6016292" y="457179"/>
-                  </a:lnTo>
-                  <a:lnTo>
-                    <a:pt x="5944669" y="439870"/>
-                  </a:lnTo>
-                  <a:lnTo>
-                    <a:pt x="5873047" y="421930"/>
-                  </a:lnTo>
-                  <a:lnTo>
-                    <a:pt x="5801424" y="403335"/>
-                  </a:lnTo>
-                  <a:lnTo>
-                    <a:pt x="5729802" y="384062"/>
-                  </a:lnTo>
-                  <a:lnTo>
-                    <a:pt x="5658179" y="364086"/>
-                  </a:lnTo>
-                  <a:lnTo>
-                    <a:pt x="5586557" y="343381"/>
-                  </a:lnTo>
-                  <a:lnTo>
-                    <a:pt x="5514934" y="321920"/>
-                  </a:lnTo>
-                  <a:lnTo>
-                    <a:pt x="5443311" y="299677"/>
-                  </a:lnTo>
-                  <a:lnTo>
-                    <a:pt x="5371689" y="276622"/>
-                  </a:lnTo>
-                  <a:lnTo>
-                    <a:pt x="5300066" y="252726"/>
-                  </a:lnTo>
-                  <a:lnTo>
-                    <a:pt x="5228444" y="227959"/>
-                  </a:lnTo>
-                  <a:lnTo>
-                    <a:pt x="5156821" y="202288"/>
-                  </a:lnTo>
-                  <a:lnTo>
-                    <a:pt x="5085199" y="175680"/>
-                  </a:lnTo>
-                  <a:lnTo>
-                    <a:pt x="5013576" y="148102"/>
-                  </a:lnTo>
-                  <a:lnTo>
-                    <a:pt x="4941954" y="119517"/>
-                  </a:lnTo>
-                  <a:lnTo>
-                    <a:pt x="4870331" y="101596"/>
-                  </a:lnTo>
-                  <a:lnTo>
-                    <a:pt x="4798709" y="100185"/>
-                  </a:lnTo>
-                  <a:lnTo>
-                    <a:pt x="4727086" y="98772"/>
-                  </a:lnTo>
-                  <a:lnTo>
-                    <a:pt x="4655464" y="97357"/>
-                  </a:lnTo>
-                  <a:lnTo>
-                    <a:pt x="4583841" y="95939"/>
-                  </a:lnTo>
-                  <a:lnTo>
-                    <a:pt x="4512219" y="94518"/>
-                  </a:lnTo>
-                  <a:lnTo>
-                    <a:pt x="4440596" y="93096"/>
-                  </a:lnTo>
-                  <a:lnTo>
-                    <a:pt x="4368974" y="91671"/>
-                  </a:lnTo>
-                  <a:lnTo>
-                    <a:pt x="4297351" y="90243"/>
-                  </a:lnTo>
-                  <a:lnTo>
-                    <a:pt x="4225729" y="88813"/>
-                  </a:lnTo>
-                  <a:lnTo>
-                    <a:pt x="4154106" y="87381"/>
-                  </a:lnTo>
-                  <a:lnTo>
-                    <a:pt x="4082483" y="85946"/>
-                  </a:lnTo>
-                  <a:lnTo>
-                    <a:pt x="4010861" y="84509"/>
-                  </a:lnTo>
-                  <a:lnTo>
-                    <a:pt x="3939238" y="83069"/>
-                  </a:lnTo>
-                  <a:lnTo>
-                    <a:pt x="3867616" y="81627"/>
-                  </a:lnTo>
-                  <a:lnTo>
-                    <a:pt x="3795993" y="80182"/>
-                  </a:lnTo>
-                  <a:lnTo>
-                    <a:pt x="3724371" y="78735"/>
-                  </a:lnTo>
-                  <a:lnTo>
-                    <a:pt x="3652748" y="77286"/>
-                  </a:lnTo>
-                  <a:lnTo>
-                    <a:pt x="3581126" y="75834"/>
-                  </a:lnTo>
-                  <a:lnTo>
-                    <a:pt x="3509503" y="74379"/>
-                  </a:lnTo>
-                  <a:lnTo>
-                    <a:pt x="3437881" y="72922"/>
-                  </a:lnTo>
-                  <a:lnTo>
-                    <a:pt x="3366258" y="71463"/>
-                  </a:lnTo>
-                  <a:lnTo>
-                    <a:pt x="3294636" y="70001"/>
-                  </a:lnTo>
-                  <a:lnTo>
-                    <a:pt x="3223013" y="68537"/>
-                  </a:lnTo>
-                  <a:lnTo>
-                    <a:pt x="3151391" y="67070"/>
-                  </a:lnTo>
-                  <a:lnTo>
-                    <a:pt x="3079768" y="65601"/>
-                  </a:lnTo>
-                  <a:lnTo>
-                    <a:pt x="3008146" y="64129"/>
-                  </a:lnTo>
-                  <a:lnTo>
-                    <a:pt x="2936523" y="62654"/>
-                  </a:lnTo>
-                  <a:lnTo>
-                    <a:pt x="2864901" y="61178"/>
-                  </a:lnTo>
-                  <a:lnTo>
-                    <a:pt x="2793278" y="59698"/>
-                  </a:lnTo>
-                  <a:lnTo>
-                    <a:pt x="2721655" y="58216"/>
-                  </a:lnTo>
-                  <a:lnTo>
-                    <a:pt x="2650033" y="56732"/>
-                  </a:lnTo>
-                  <a:lnTo>
-                    <a:pt x="2578410" y="55245"/>
-                  </a:lnTo>
-                  <a:lnTo>
-                    <a:pt x="2506788" y="53756"/>
-                  </a:lnTo>
-                  <a:lnTo>
-                    <a:pt x="2435165" y="52264"/>
-                  </a:lnTo>
-                  <a:lnTo>
-                    <a:pt x="2363543" y="50769"/>
-                  </a:lnTo>
-                  <a:lnTo>
-                    <a:pt x="2291920" y="49272"/>
-                  </a:lnTo>
-                  <a:lnTo>
-                    <a:pt x="2220298" y="47772"/>
-                  </a:lnTo>
-                  <a:lnTo>
-                    <a:pt x="2148675" y="46270"/>
-                  </a:lnTo>
-                  <a:lnTo>
-                    <a:pt x="2077053" y="44766"/>
-                  </a:lnTo>
-                  <a:lnTo>
-                    <a:pt x="2005430" y="43258"/>
-                  </a:lnTo>
-                  <a:lnTo>
-                    <a:pt x="1933808" y="41749"/>
-                  </a:lnTo>
-                  <a:lnTo>
-                    <a:pt x="1862185" y="40236"/>
-                  </a:lnTo>
-                  <a:lnTo>
-                    <a:pt x="1790563" y="38721"/>
-                  </a:lnTo>
-                  <a:lnTo>
-                    <a:pt x="1718940" y="37204"/>
-                  </a:lnTo>
-                  <a:lnTo>
-                    <a:pt x="1647318" y="35684"/>
-                  </a:lnTo>
-                  <a:lnTo>
-                    <a:pt x="1575695" y="34161"/>
-                  </a:lnTo>
-                  <a:lnTo>
-                    <a:pt x="1504073" y="32636"/>
-                  </a:lnTo>
-                  <a:lnTo>
-                    <a:pt x="1432450" y="31108"/>
-                  </a:lnTo>
-                  <a:lnTo>
-                    <a:pt x="1360827" y="29577"/>
-                  </a:lnTo>
-                  <a:lnTo>
-                    <a:pt x="1289205" y="28044"/>
-                  </a:lnTo>
-                  <a:lnTo>
-                    <a:pt x="1217582" y="26509"/>
-                  </a:lnTo>
-                  <a:lnTo>
-                    <a:pt x="1145960" y="24970"/>
-                  </a:lnTo>
-                  <a:lnTo>
-                    <a:pt x="1074337" y="23430"/>
-                  </a:lnTo>
-                  <a:lnTo>
-                    <a:pt x="1002715" y="21886"/>
-                  </a:lnTo>
-                  <a:lnTo>
-                    <a:pt x="931092" y="20340"/>
-                  </a:lnTo>
-                  <a:lnTo>
-                    <a:pt x="859470" y="18791"/>
-                  </a:lnTo>
-                  <a:lnTo>
-                    <a:pt x="787847" y="17240"/>
-                  </a:lnTo>
-                  <a:lnTo>
-                    <a:pt x="716225" y="15686"/>
-                  </a:lnTo>
-                  <a:lnTo>
-                    <a:pt x="644602" y="14129"/>
-                  </a:lnTo>
-                  <a:lnTo>
-                    <a:pt x="572980" y="12570"/>
-                  </a:lnTo>
-                  <a:lnTo>
-                    <a:pt x="501357" y="11008"/>
-                  </a:lnTo>
-                  <a:lnTo>
-                    <a:pt x="429735" y="9443"/>
-                  </a:lnTo>
-                  <a:lnTo>
-                    <a:pt x="358112" y="7876"/>
-                  </a:lnTo>
-                  <a:lnTo>
-                    <a:pt x="286490" y="6306"/>
-                  </a:lnTo>
-                  <a:lnTo>
-                    <a:pt x="214867" y="4733"/>
-                  </a:lnTo>
-                  <a:lnTo>
-                    <a:pt x="143245" y="3158"/>
-                  </a:lnTo>
-                  <a:lnTo>
-                    <a:pt x="71622" y="1580"/>
-                  </a:lnTo>
-                  <a:lnTo>
-                    <a:pt x="0" y="0"/>
+                    <a:pt x="7019007" y="550464"/>
+                  </a:lnTo>
+                  <a:lnTo>
+                    <a:pt x="6947385" y="539999"/>
+                  </a:lnTo>
+                  <a:lnTo>
+                    <a:pt x="6875762" y="529141"/>
+                  </a:lnTo>
+                  <a:lnTo>
+                    <a:pt x="6804139" y="517876"/>
+                  </a:lnTo>
+                  <a:lnTo>
+                    <a:pt x="6732517" y="506189"/>
+                  </a:lnTo>
+                  <a:lnTo>
+                    <a:pt x="6660894" y="494063"/>
+                  </a:lnTo>
+                  <a:lnTo>
+                    <a:pt x="6589272" y="481483"/>
+                  </a:lnTo>
+                  <a:lnTo>
+                    <a:pt x="6517649" y="468430"/>
+                  </a:lnTo>
+                  <a:lnTo>
+                    <a:pt x="6446027" y="454888"/>
+                  </a:lnTo>
+                  <a:lnTo>
+                    <a:pt x="6374404" y="440839"/>
+                  </a:lnTo>
+                  <a:lnTo>
+                    <a:pt x="6302782" y="426262"/>
+                  </a:lnTo>
+                  <a:lnTo>
+                    <a:pt x="6231159" y="411138"/>
+                  </a:lnTo>
+                  <a:lnTo>
+                    <a:pt x="6159537" y="395447"/>
+                  </a:lnTo>
+                  <a:lnTo>
+                    <a:pt x="6087914" y="379167"/>
+                  </a:lnTo>
+                  <a:lnTo>
+                    <a:pt x="6016292" y="362277"/>
+                  </a:lnTo>
+                  <a:lnTo>
+                    <a:pt x="5944669" y="344753"/>
+                  </a:lnTo>
+                  <a:lnTo>
+                    <a:pt x="5873047" y="326572"/>
+                  </a:lnTo>
+                  <a:lnTo>
+                    <a:pt x="5801424" y="307709"/>
+                  </a:lnTo>
+                  <a:lnTo>
+                    <a:pt x="5729802" y="288138"/>
+                  </a:lnTo>
+                  <a:lnTo>
+                    <a:pt x="5658179" y="267833"/>
+                  </a:lnTo>
+                  <a:lnTo>
+                    <a:pt x="5586557" y="246767"/>
+                  </a:lnTo>
+                  <a:lnTo>
+                    <a:pt x="5514934" y="224910"/>
+                  </a:lnTo>
+                  <a:lnTo>
+                    <a:pt x="5443311" y="202234"/>
+                  </a:lnTo>
+                  <a:lnTo>
+                    <a:pt x="5371689" y="178707"/>
+                  </a:lnTo>
+                  <a:lnTo>
+                    <a:pt x="5300066" y="154297"/>
+                  </a:lnTo>
+                  <a:lnTo>
+                    <a:pt x="5228444" y="128972"/>
+                  </a:lnTo>
+                  <a:lnTo>
+                    <a:pt x="5156821" y="102697"/>
+                  </a:lnTo>
+                  <a:lnTo>
+                    <a:pt x="5085199" y="75437"/>
+                  </a:lnTo>
+                  <a:lnTo>
+                    <a:pt x="5013576" y="47153"/>
+                  </a:lnTo>
+                  <a:lnTo>
+                    <a:pt x="4941954" y="17809"/>
+                  </a:lnTo>
+                  <a:lnTo>
+                    <a:pt x="4870331" y="0"/>
+                  </a:lnTo>
+                  <a:lnTo>
+                    <a:pt x="4798709" y="21"/>
+                  </a:lnTo>
+                  <a:lnTo>
+                    <a:pt x="4727086" y="42"/>
+                  </a:lnTo>
+                  <a:lnTo>
+                    <a:pt x="4655464" y="64"/>
+                  </a:lnTo>
+                  <a:lnTo>
+                    <a:pt x="4583841" y="85"/>
+                  </a:lnTo>
+                  <a:lnTo>
+                    <a:pt x="4512219" y="107"/>
+                  </a:lnTo>
+                  <a:lnTo>
+                    <a:pt x="4440596" y="128"/>
+                  </a:lnTo>
+                  <a:lnTo>
+                    <a:pt x="4368974" y="150"/>
+                  </a:lnTo>
+                  <a:lnTo>
+                    <a:pt x="4297351" y="171"/>
+                  </a:lnTo>
+                  <a:lnTo>
+                    <a:pt x="4225729" y="193"/>
+                  </a:lnTo>
+                  <a:lnTo>
+                    <a:pt x="4154106" y="214"/>
+                  </a:lnTo>
+                  <a:lnTo>
+                    <a:pt x="4082483" y="236"/>
+                  </a:lnTo>
+                  <a:lnTo>
+                    <a:pt x="4010861" y="257"/>
+                  </a:lnTo>
+                  <a:lnTo>
+                    <a:pt x="3939238" y="279"/>
+                  </a:lnTo>
+                  <a:lnTo>
+                    <a:pt x="3867616" y="300"/>
+                  </a:lnTo>
+                  <a:lnTo>
+                    <a:pt x="3795993" y="322"/>
+                  </a:lnTo>
+                  <a:lnTo>
+                    <a:pt x="3724371" y="343"/>
+                  </a:lnTo>
+                  <a:lnTo>
+                    <a:pt x="3652748" y="365"/>
+                  </a:lnTo>
+                  <a:lnTo>
+                    <a:pt x="3581126" y="386"/>
+                  </a:lnTo>
+                  <a:lnTo>
+                    <a:pt x="3509503" y="408"/>
+                  </a:lnTo>
+                  <a:lnTo>
+                    <a:pt x="3437881" y="429"/>
+                  </a:lnTo>
+                  <a:lnTo>
+                    <a:pt x="3366258" y="451"/>
+                  </a:lnTo>
+                  <a:lnTo>
+                    <a:pt x="3294636" y="472"/>
+                  </a:lnTo>
+                  <a:lnTo>
+                    <a:pt x="3223013" y="494"/>
+                  </a:lnTo>
+                  <a:lnTo>
+                    <a:pt x="3151391" y="515"/>
+                  </a:lnTo>
+                  <a:lnTo>
+                    <a:pt x="3079768" y="537"/>
+                  </a:lnTo>
+                  <a:lnTo>
+                    <a:pt x="3008146" y="558"/>
+                  </a:lnTo>
+                  <a:lnTo>
+                    <a:pt x="2936523" y="580"/>
+                  </a:lnTo>
+                  <a:lnTo>
+                    <a:pt x="2864901" y="601"/>
+                  </a:lnTo>
+                  <a:lnTo>
+                    <a:pt x="2793278" y="623"/>
+                  </a:lnTo>
+                  <a:lnTo>
+                    <a:pt x="2721655" y="644"/>
+                  </a:lnTo>
+                  <a:lnTo>
+                    <a:pt x="2650033" y="666"/>
+                  </a:lnTo>
+                  <a:lnTo>
+                    <a:pt x="2578410" y="687"/>
+                  </a:lnTo>
+                  <a:lnTo>
+                    <a:pt x="2506788" y="709"/>
+                  </a:lnTo>
+                  <a:lnTo>
+                    <a:pt x="2435165" y="730"/>
+                  </a:lnTo>
+                  <a:lnTo>
+                    <a:pt x="2363543" y="752"/>
+                  </a:lnTo>
+                  <a:lnTo>
+                    <a:pt x="2291920" y="773"/>
+                  </a:lnTo>
+                  <a:lnTo>
+                    <a:pt x="2220298" y="795"/>
+                  </a:lnTo>
+                  <a:lnTo>
+                    <a:pt x="2148675" y="816"/>
+                  </a:lnTo>
+                  <a:lnTo>
+                    <a:pt x="2077053" y="837"/>
+                  </a:lnTo>
+                  <a:lnTo>
+                    <a:pt x="2005430" y="859"/>
+                  </a:lnTo>
+                  <a:lnTo>
+                    <a:pt x="1933808" y="880"/>
+                  </a:lnTo>
+                  <a:lnTo>
+                    <a:pt x="1862185" y="902"/>
+                  </a:lnTo>
+                  <a:lnTo>
+                    <a:pt x="1790563" y="923"/>
+                  </a:lnTo>
+                  <a:lnTo>
+                    <a:pt x="1718940" y="945"/>
+                  </a:lnTo>
+                  <a:lnTo>
+                    <a:pt x="1647318" y="966"/>
+                  </a:lnTo>
+                  <a:lnTo>
+                    <a:pt x="1575695" y="988"/>
+                  </a:lnTo>
+                  <a:lnTo>
+                    <a:pt x="1504073" y="1009"/>
+                  </a:lnTo>
+                  <a:lnTo>
+                    <a:pt x="1432450" y="1031"/>
+                  </a:lnTo>
+                  <a:lnTo>
+                    <a:pt x="1360827" y="1052"/>
+                  </a:lnTo>
+                  <a:lnTo>
+                    <a:pt x="1289205" y="1074"/>
+                  </a:lnTo>
+                  <a:lnTo>
+                    <a:pt x="1217582" y="1095"/>
+                  </a:lnTo>
+                  <a:lnTo>
+                    <a:pt x="1145960" y="1117"/>
+                  </a:lnTo>
+                  <a:lnTo>
+                    <a:pt x="1074337" y="1138"/>
+                  </a:lnTo>
+                  <a:lnTo>
+                    <a:pt x="1002715" y="1160"/>
+                  </a:lnTo>
+                  <a:lnTo>
+                    <a:pt x="931092" y="1181"/>
+                  </a:lnTo>
+                  <a:lnTo>
+                    <a:pt x="859470" y="1202"/>
+                  </a:lnTo>
+                  <a:lnTo>
+                    <a:pt x="787847" y="1224"/>
+                  </a:lnTo>
+                  <a:lnTo>
+                    <a:pt x="716225" y="1245"/>
+                  </a:lnTo>
+                  <a:lnTo>
+                    <a:pt x="644602" y="1267"/>
+                  </a:lnTo>
+                  <a:lnTo>
+                    <a:pt x="572980" y="1288"/>
+                  </a:lnTo>
+                  <a:lnTo>
+                    <a:pt x="501357" y="1310"/>
+                  </a:lnTo>
+                  <a:lnTo>
+                    <a:pt x="429735" y="1331"/>
+                  </a:lnTo>
+                  <a:lnTo>
+                    <a:pt x="358112" y="1353"/>
+                  </a:lnTo>
+                  <a:lnTo>
+                    <a:pt x="286490" y="1374"/>
+                  </a:lnTo>
+                  <a:lnTo>
+                    <a:pt x="214867" y="1396"/>
+                  </a:lnTo>
+                  <a:lnTo>
+                    <a:pt x="143245" y="1417"/>
+                  </a:lnTo>
+                  <a:lnTo>
+                    <a:pt x="71622" y="1439"/>
+                  </a:lnTo>
+                  <a:lnTo>
+                    <a:pt x="0" y="1460"/>
                   </a:lnTo>
                 </a:path>
               </a:pathLst>
@@ -4115,312 +4109,312 @@
           </p:nvSpPr>
           <p:spPr>
             <a:xfrm>
-              <a:off x="1172049" y="2562886"/>
-              <a:ext cx="7090630" cy="2527158"/>
+              <a:off x="1172049" y="2636928"/>
+              <a:ext cx="7090630" cy="2447856"/>
             </a:xfrm>
             <a:custGeom>
               <a:avLst/>
               <a:pathLst>
-                <a:path w="7090630" h="2527158">
+                <a:path w="7090630" h="2447856">
                   <a:moveTo>
                     <a:pt x="0" y="0"/>
                   </a:moveTo>
                   <a:lnTo>
-                    <a:pt x="71622" y="55664"/>
-                  </a:lnTo>
-                  <a:lnTo>
-                    <a:pt x="143245" y="110294"/>
-                  </a:lnTo>
-                  <a:lnTo>
-                    <a:pt x="214867" y="163909"/>
-                  </a:lnTo>
-                  <a:lnTo>
-                    <a:pt x="286490" y="216527"/>
-                  </a:lnTo>
-                  <a:lnTo>
-                    <a:pt x="358112" y="268166"/>
-                  </a:lnTo>
-                  <a:lnTo>
-                    <a:pt x="429735" y="318846"/>
-                  </a:lnTo>
-                  <a:lnTo>
-                    <a:pt x="501357" y="368584"/>
-                  </a:lnTo>
-                  <a:lnTo>
-                    <a:pt x="572980" y="417396"/>
-                  </a:lnTo>
-                  <a:lnTo>
-                    <a:pt x="644602" y="465302"/>
-                  </a:lnTo>
-                  <a:lnTo>
-                    <a:pt x="716225" y="512317"/>
-                  </a:lnTo>
-                  <a:lnTo>
-                    <a:pt x="787847" y="558458"/>
-                  </a:lnTo>
-                  <a:lnTo>
-                    <a:pt x="859470" y="603741"/>
-                  </a:lnTo>
-                  <a:lnTo>
-                    <a:pt x="931092" y="648182"/>
-                  </a:lnTo>
-                  <a:lnTo>
-                    <a:pt x="1002715" y="691798"/>
-                  </a:lnTo>
-                  <a:lnTo>
-                    <a:pt x="1074337" y="734602"/>
-                  </a:lnTo>
-                  <a:lnTo>
-                    <a:pt x="1145960" y="776611"/>
-                  </a:lnTo>
-                  <a:lnTo>
-                    <a:pt x="1217582" y="817838"/>
-                  </a:lnTo>
-                  <a:lnTo>
-                    <a:pt x="1289205" y="858300"/>
-                  </a:lnTo>
-                  <a:lnTo>
-                    <a:pt x="1360827" y="898009"/>
-                  </a:lnTo>
-                  <a:lnTo>
-                    <a:pt x="1432450" y="936980"/>
-                  </a:lnTo>
-                  <a:lnTo>
-                    <a:pt x="1504073" y="975226"/>
-                  </a:lnTo>
-                  <a:lnTo>
-                    <a:pt x="1575695" y="1012762"/>
-                  </a:lnTo>
-                  <a:lnTo>
-                    <a:pt x="1647318" y="1049600"/>
-                  </a:lnTo>
-                  <a:lnTo>
-                    <a:pt x="1718940" y="1085753"/>
-                  </a:lnTo>
-                  <a:lnTo>
-                    <a:pt x="1790563" y="1121233"/>
-                  </a:lnTo>
-                  <a:lnTo>
-                    <a:pt x="1862185" y="1156055"/>
-                  </a:lnTo>
-                  <a:lnTo>
-                    <a:pt x="1933808" y="1190229"/>
-                  </a:lnTo>
-                  <a:lnTo>
-                    <a:pt x="2005430" y="1223767"/>
-                  </a:lnTo>
-                  <a:lnTo>
-                    <a:pt x="2077053" y="1256682"/>
-                  </a:lnTo>
-                  <a:lnTo>
-                    <a:pt x="2148675" y="1288986"/>
-                  </a:lnTo>
-                  <a:lnTo>
-                    <a:pt x="2220298" y="1320688"/>
-                  </a:lnTo>
-                  <a:lnTo>
-                    <a:pt x="2291920" y="1351802"/>
-                  </a:lnTo>
-                  <a:lnTo>
-                    <a:pt x="2363543" y="1382337"/>
-                  </a:lnTo>
-                  <a:lnTo>
-                    <a:pt x="2435165" y="1412304"/>
-                  </a:lnTo>
-                  <a:lnTo>
-                    <a:pt x="2506788" y="1441715"/>
-                  </a:lnTo>
-                  <a:lnTo>
-                    <a:pt x="2578410" y="1470578"/>
-                  </a:lnTo>
-                  <a:lnTo>
-                    <a:pt x="2650033" y="1498905"/>
-                  </a:lnTo>
-                  <a:lnTo>
-                    <a:pt x="2721655" y="1526705"/>
-                  </a:lnTo>
-                  <a:lnTo>
-                    <a:pt x="2793278" y="1553989"/>
-                  </a:lnTo>
-                  <a:lnTo>
-                    <a:pt x="2864901" y="1580765"/>
-                  </a:lnTo>
-                  <a:lnTo>
-                    <a:pt x="2936523" y="1607044"/>
-                  </a:lnTo>
-                  <a:lnTo>
-                    <a:pt x="3008146" y="1632834"/>
-                  </a:lnTo>
-                  <a:lnTo>
-                    <a:pt x="3079768" y="1658145"/>
-                  </a:lnTo>
-                  <a:lnTo>
-                    <a:pt x="3151391" y="1682985"/>
-                  </a:lnTo>
-                  <a:lnTo>
-                    <a:pt x="3223013" y="1707363"/>
-                  </a:lnTo>
-                  <a:lnTo>
-                    <a:pt x="3294636" y="1731288"/>
-                  </a:lnTo>
-                  <a:lnTo>
-                    <a:pt x="3366258" y="1754769"/>
-                  </a:lnTo>
-                  <a:lnTo>
-                    <a:pt x="3437881" y="1777813"/>
-                  </a:lnTo>
-                  <a:lnTo>
-                    <a:pt x="3509503" y="1800428"/>
-                  </a:lnTo>
-                  <a:lnTo>
-                    <a:pt x="3581126" y="1822623"/>
-                  </a:lnTo>
-                  <a:lnTo>
-                    <a:pt x="3652748" y="1844406"/>
-                  </a:lnTo>
-                  <a:lnTo>
-                    <a:pt x="3724371" y="1865783"/>
-                  </a:lnTo>
-                  <a:lnTo>
-                    <a:pt x="3795993" y="1886764"/>
-                  </a:lnTo>
-                  <a:lnTo>
-                    <a:pt x="3867616" y="1907354"/>
-                  </a:lnTo>
-                  <a:lnTo>
-                    <a:pt x="3939238" y="1927561"/>
-                  </a:lnTo>
-                  <a:lnTo>
-                    <a:pt x="4010861" y="1947393"/>
-                  </a:lnTo>
-                  <a:lnTo>
-                    <a:pt x="4082483" y="1966856"/>
-                  </a:lnTo>
-                  <a:lnTo>
-                    <a:pt x="4154106" y="1985957"/>
-                  </a:lnTo>
-                  <a:lnTo>
-                    <a:pt x="4225729" y="2004703"/>
-                  </a:lnTo>
-                  <a:lnTo>
-                    <a:pt x="4297351" y="2023101"/>
-                  </a:lnTo>
-                  <a:lnTo>
-                    <a:pt x="4368974" y="2041157"/>
-                  </a:lnTo>
-                  <a:lnTo>
-                    <a:pt x="4440596" y="2058877"/>
-                  </a:lnTo>
-                  <a:lnTo>
-                    <a:pt x="4512219" y="2076267"/>
-                  </a:lnTo>
-                  <a:lnTo>
-                    <a:pt x="4583841" y="2093334"/>
-                  </a:lnTo>
-                  <a:lnTo>
-                    <a:pt x="4655464" y="2110084"/>
-                  </a:lnTo>
-                  <a:lnTo>
-                    <a:pt x="4727086" y="2126523"/>
-                  </a:lnTo>
-                  <a:lnTo>
-                    <a:pt x="4798709" y="2142656"/>
-                  </a:lnTo>
-                  <a:lnTo>
-                    <a:pt x="4870331" y="2158489"/>
-                  </a:lnTo>
-                  <a:lnTo>
-                    <a:pt x="4941954" y="2174028"/>
-                  </a:lnTo>
-                  <a:lnTo>
-                    <a:pt x="5013576" y="2189278"/>
-                  </a:lnTo>
-                  <a:lnTo>
-                    <a:pt x="5085199" y="2204244"/>
-                  </a:lnTo>
-                  <a:lnTo>
-                    <a:pt x="5156821" y="2218933"/>
-                  </a:lnTo>
-                  <a:lnTo>
-                    <a:pt x="5228444" y="2233348"/>
-                  </a:lnTo>
-                  <a:lnTo>
-                    <a:pt x="5300066" y="2247495"/>
-                  </a:lnTo>
-                  <a:lnTo>
-                    <a:pt x="5371689" y="2261379"/>
-                  </a:lnTo>
-                  <a:lnTo>
-                    <a:pt x="5443311" y="2275005"/>
-                  </a:lnTo>
-                  <a:lnTo>
-                    <a:pt x="5514934" y="2288378"/>
-                  </a:lnTo>
-                  <a:lnTo>
-                    <a:pt x="5586557" y="2301502"/>
-                  </a:lnTo>
-                  <a:lnTo>
-                    <a:pt x="5658179" y="2314382"/>
-                  </a:lnTo>
-                  <a:lnTo>
-                    <a:pt x="5729802" y="2327023"/>
-                  </a:lnTo>
-                  <a:lnTo>
-                    <a:pt x="5801424" y="2339429"/>
-                  </a:lnTo>
-                  <a:lnTo>
-                    <a:pt x="5873047" y="2351604"/>
-                  </a:lnTo>
-                  <a:lnTo>
-                    <a:pt x="5944669" y="2363553"/>
-                  </a:lnTo>
-                  <a:lnTo>
-                    <a:pt x="6016292" y="2375280"/>
-                  </a:lnTo>
-                  <a:lnTo>
-                    <a:pt x="6087914" y="2386788"/>
-                  </a:lnTo>
-                  <a:lnTo>
-                    <a:pt x="6159537" y="2398083"/>
-                  </a:lnTo>
-                  <a:lnTo>
-                    <a:pt x="6231159" y="2409168"/>
-                  </a:lnTo>
-                  <a:lnTo>
-                    <a:pt x="6302782" y="2420046"/>
-                  </a:lnTo>
-                  <a:lnTo>
-                    <a:pt x="6374404" y="2430723"/>
-                  </a:lnTo>
-                  <a:lnTo>
-                    <a:pt x="6446027" y="2441201"/>
-                  </a:lnTo>
-                  <a:lnTo>
-                    <a:pt x="6517649" y="2451484"/>
-                  </a:lnTo>
-                  <a:lnTo>
-                    <a:pt x="6589272" y="2461576"/>
-                  </a:lnTo>
-                  <a:lnTo>
-                    <a:pt x="6660894" y="2471481"/>
-                  </a:lnTo>
-                  <a:lnTo>
-                    <a:pt x="6732517" y="2481201"/>
-                  </a:lnTo>
-                  <a:lnTo>
-                    <a:pt x="6804139" y="2490741"/>
-                  </a:lnTo>
-                  <a:lnTo>
-                    <a:pt x="6875762" y="2500103"/>
-                  </a:lnTo>
-                  <a:lnTo>
-                    <a:pt x="6947385" y="2509291"/>
-                  </a:lnTo>
-                  <a:lnTo>
-                    <a:pt x="7019007" y="2518309"/>
-                  </a:lnTo>
-                  <a:lnTo>
-                    <a:pt x="7090630" y="2527158"/>
+                    <a:pt x="71622" y="53239"/>
+                  </a:lnTo>
+                  <a:lnTo>
+                    <a:pt x="143245" y="105507"/>
+                  </a:lnTo>
+                  <a:lnTo>
+                    <a:pt x="214867" y="156823"/>
+                  </a:lnTo>
+                  <a:lnTo>
+                    <a:pt x="286490" y="207204"/>
+                  </a:lnTo>
+                  <a:lnTo>
+                    <a:pt x="358112" y="256665"/>
+                  </a:lnTo>
+                  <a:lnTo>
+                    <a:pt x="429735" y="305225"/>
+                  </a:lnTo>
+                  <a:lnTo>
+                    <a:pt x="501357" y="352900"/>
+                  </a:lnTo>
+                  <a:lnTo>
+                    <a:pt x="572980" y="399706"/>
+                  </a:lnTo>
+                  <a:lnTo>
+                    <a:pt x="644602" y="445658"/>
+                  </a:lnTo>
+                  <a:lnTo>
+                    <a:pt x="716225" y="490773"/>
+                  </a:lnTo>
+                  <a:lnTo>
+                    <a:pt x="787847" y="535065"/>
+                  </a:lnTo>
+                  <a:lnTo>
+                    <a:pt x="859470" y="578550"/>
+                  </a:lnTo>
+                  <a:lnTo>
+                    <a:pt x="931092" y="621242"/>
+                  </a:lnTo>
+                  <a:lnTo>
+                    <a:pt x="1002715" y="663155"/>
+                  </a:lnTo>
+                  <a:lnTo>
+                    <a:pt x="1074337" y="704305"/>
+                  </a:lnTo>
+                  <a:lnTo>
+                    <a:pt x="1145960" y="744704"/>
+                  </a:lnTo>
+                  <a:lnTo>
+                    <a:pt x="1217582" y="784367"/>
+                  </a:lnTo>
+                  <a:lnTo>
+                    <a:pt x="1289205" y="823307"/>
+                  </a:lnTo>
+                  <a:lnTo>
+                    <a:pt x="1360827" y="861537"/>
+                  </a:lnTo>
+                  <a:lnTo>
+                    <a:pt x="1432450" y="899070"/>
+                  </a:lnTo>
+                  <a:lnTo>
+                    <a:pt x="1504073" y="935918"/>
+                  </a:lnTo>
+                  <a:lnTo>
+                    <a:pt x="1575695" y="972095"/>
+                  </a:lnTo>
+                  <a:lnTo>
+                    <a:pt x="1647318" y="1007613"/>
+                  </a:lnTo>
+                  <a:lnTo>
+                    <a:pt x="1718940" y="1042482"/>
+                  </a:lnTo>
+                  <a:lnTo>
+                    <a:pt x="1790563" y="1076717"/>
+                  </a:lnTo>
+                  <a:lnTo>
+                    <a:pt x="1862185" y="1110327"/>
+                  </a:lnTo>
+                  <a:lnTo>
+                    <a:pt x="1933808" y="1143324"/>
+                  </a:lnTo>
+                  <a:lnTo>
+                    <a:pt x="2005430" y="1175720"/>
+                  </a:lnTo>
+                  <a:lnTo>
+                    <a:pt x="2077053" y="1207525"/>
+                  </a:lnTo>
+                  <a:lnTo>
+                    <a:pt x="2148675" y="1238750"/>
+                  </a:lnTo>
+                  <a:lnTo>
+                    <a:pt x="2220298" y="1269406"/>
+                  </a:lnTo>
+                  <a:lnTo>
+                    <a:pt x="2291920" y="1299503"/>
+                  </a:lnTo>
+                  <a:lnTo>
+                    <a:pt x="2363543" y="1329052"/>
+                  </a:lnTo>
+                  <a:lnTo>
+                    <a:pt x="2435165" y="1358062"/>
+                  </a:lnTo>
+                  <a:lnTo>
+                    <a:pt x="2506788" y="1386543"/>
+                  </a:lnTo>
+                  <a:lnTo>
+                    <a:pt x="2578410" y="1414504"/>
+                  </a:lnTo>
+                  <a:lnTo>
+                    <a:pt x="2650033" y="1441956"/>
+                  </a:lnTo>
+                  <a:lnTo>
+                    <a:pt x="2721655" y="1468908"/>
+                  </a:lnTo>
+                  <a:lnTo>
+                    <a:pt x="2793278" y="1495368"/>
+                  </a:lnTo>
+                  <a:lnTo>
+                    <a:pt x="2864901" y="1521346"/>
+                  </a:lnTo>
+                  <a:lnTo>
+                    <a:pt x="2936523" y="1546850"/>
+                  </a:lnTo>
+                  <a:lnTo>
+                    <a:pt x="3008146" y="1571889"/>
+                  </a:lnTo>
+                  <a:lnTo>
+                    <a:pt x="3079768" y="1596472"/>
+                  </a:lnTo>
+                  <a:lnTo>
+                    <a:pt x="3151391" y="1620607"/>
+                  </a:lnTo>
+                  <a:lnTo>
+                    <a:pt x="3223013" y="1644301"/>
+                  </a:lnTo>
+                  <a:lnTo>
+                    <a:pt x="3294636" y="1667564"/>
+                  </a:lnTo>
+                  <a:lnTo>
+                    <a:pt x="3366258" y="1690402"/>
+                  </a:lnTo>
+                  <a:lnTo>
+                    <a:pt x="3437881" y="1712825"/>
+                  </a:lnTo>
+                  <a:lnTo>
+                    <a:pt x="3509503" y="1734838"/>
+                  </a:lnTo>
+                  <a:lnTo>
+                    <a:pt x="3581126" y="1756450"/>
+                  </a:lnTo>
+                  <a:lnTo>
+                    <a:pt x="3652748" y="1777668"/>
+                  </a:lnTo>
+                  <a:lnTo>
+                    <a:pt x="3724371" y="1798499"/>
+                  </a:lnTo>
+                  <a:lnTo>
+                    <a:pt x="3795993" y="1818951"/>
+                  </a:lnTo>
+                  <a:lnTo>
+                    <a:pt x="3867616" y="1839030"/>
+                  </a:lnTo>
+                  <a:lnTo>
+                    <a:pt x="3939238" y="1858742"/>
+                  </a:lnTo>
+                  <a:lnTo>
+                    <a:pt x="4010861" y="1878095"/>
+                  </a:lnTo>
+                  <a:lnTo>
+                    <a:pt x="4082483" y="1897096"/>
+                  </a:lnTo>
+                  <a:lnTo>
+                    <a:pt x="4154106" y="1915750"/>
+                  </a:lnTo>
+                  <a:lnTo>
+                    <a:pt x="4225729" y="1934064"/>
+                  </a:lnTo>
+                  <a:lnTo>
+                    <a:pt x="4297351" y="1952044"/>
+                  </a:lnTo>
+                  <a:lnTo>
+                    <a:pt x="4368974" y="1969696"/>
+                  </a:lnTo>
+                  <a:lnTo>
+                    <a:pt x="4440596" y="1987027"/>
+                  </a:lnTo>
+                  <a:lnTo>
+                    <a:pt x="4512219" y="2004041"/>
+                  </a:lnTo>
+                  <a:lnTo>
+                    <a:pt x="4583841" y="2020746"/>
+                  </a:lnTo>
+                  <a:lnTo>
+                    <a:pt x="4655464" y="2037145"/>
+                  </a:lnTo>
+                  <a:lnTo>
+                    <a:pt x="4727086" y="2053246"/>
+                  </a:lnTo>
+                  <a:lnTo>
+                    <a:pt x="4798709" y="2069054"/>
+                  </a:lnTo>
+                  <a:lnTo>
+                    <a:pt x="4870331" y="2084573"/>
+                  </a:lnTo>
+                  <a:lnTo>
+                    <a:pt x="4941954" y="2099809"/>
+                  </a:lnTo>
+                  <a:lnTo>
+                    <a:pt x="5013576" y="2114767"/>
+                  </a:lnTo>
+                  <a:lnTo>
+                    <a:pt x="5085199" y="2129453"/>
+                  </a:lnTo>
+                  <a:lnTo>
+                    <a:pt x="5156821" y="2143871"/>
+                  </a:lnTo>
+                  <a:lnTo>
+                    <a:pt x="5228444" y="2158026"/>
+                  </a:lnTo>
+                  <a:lnTo>
+                    <a:pt x="5300066" y="2171923"/>
+                  </a:lnTo>
+                  <a:lnTo>
+                    <a:pt x="5371689" y="2185567"/>
+                  </a:lnTo>
+                  <a:lnTo>
+                    <a:pt x="5443311" y="2198962"/>
+                  </a:lnTo>
+                  <a:lnTo>
+                    <a:pt x="5514934" y="2212113"/>
+                  </a:lnTo>
+                  <a:lnTo>
+                    <a:pt x="5586557" y="2225024"/>
+                  </a:lnTo>
+                  <a:lnTo>
+                    <a:pt x="5658179" y="2237700"/>
+                  </a:lnTo>
+                  <a:lnTo>
+                    <a:pt x="5729802" y="2250144"/>
+                  </a:lnTo>
+                  <a:lnTo>
+                    <a:pt x="5801424" y="2262362"/>
+                  </a:lnTo>
+                  <a:lnTo>
+                    <a:pt x="5873047" y="2274357"/>
+                  </a:lnTo>
+                  <a:lnTo>
+                    <a:pt x="5944669" y="2286133"/>
+                  </a:lnTo>
+                  <a:lnTo>
+                    <a:pt x="6016292" y="2297695"/>
+                  </a:lnTo>
+                  <a:lnTo>
+                    <a:pt x="6087914" y="2309046"/>
+                  </a:lnTo>
+                  <a:lnTo>
+                    <a:pt x="6159537" y="2320190"/>
+                  </a:lnTo>
+                  <a:lnTo>
+                    <a:pt x="6231159" y="2331131"/>
+                  </a:lnTo>
+                  <a:lnTo>
+                    <a:pt x="6302782" y="2341872"/>
+                  </a:lnTo>
+                  <a:lnTo>
+                    <a:pt x="6374404" y="2352417"/>
+                  </a:lnTo>
+                  <a:lnTo>
+                    <a:pt x="6446027" y="2362771"/>
+                  </a:lnTo>
+                  <a:lnTo>
+                    <a:pt x="6517649" y="2372935"/>
+                  </a:lnTo>
+                  <a:lnTo>
+                    <a:pt x="6589272" y="2382914"/>
+                  </a:lnTo>
+                  <a:lnTo>
+                    <a:pt x="6660894" y="2392712"/>
+                  </a:lnTo>
+                  <a:lnTo>
+                    <a:pt x="6732517" y="2402330"/>
+                  </a:lnTo>
+                  <a:lnTo>
+                    <a:pt x="6804139" y="2411773"/>
+                  </a:lnTo>
+                  <a:lnTo>
+                    <a:pt x="6875762" y="2421045"/>
+                  </a:lnTo>
+                  <a:lnTo>
+                    <a:pt x="6947385" y="2430147"/>
+                  </a:lnTo>
+                  <a:lnTo>
+                    <a:pt x="7019007" y="2439083"/>
+                  </a:lnTo>
+                  <a:lnTo>
+                    <a:pt x="7090630" y="2447856"/>
                   </a:lnTo>
                 </a:path>
               </a:pathLst>
@@ -5160,7 +5154,7 @@
                   <a:latin typeface="Helvetica"/>
                   <a:cs typeface="Helvetica"/>
                 </a:rPr>
-                <a:t>subHR per 1 mL/min: 0.98 (0.95-1.00)  |  per IQR (Δ = 18.2): 0.64 (0.43-0.96)  |  IQR: [-11.5, 6.7]</a:t>
+                <a:t>subHR per 1 mL/min: 0.98 (0.95-1.00)  |  per IQR (Δ = 18.2): 0.65 (0.42-1.00)  |  IQR: [-11.5, 6.7]</a:t>
               </a:r>
             </a:p>
           </p:txBody>

--- a/docs/plots/carbo/jx_carbo_linsubhr_egfrdisc_grade2.pptx
+++ b/docs/plots/carbo/jx_carbo_linsubhr_egfrdisc_grade2.pptx
@@ -3019,22 +3019,22 @@
                     <a:pt x="2220298" y="194677"/>
                   </a:lnTo>
                   <a:lnTo>
-                    <a:pt x="2291920" y="313589"/>
+                    <a:pt x="2291920" y="313590"/>
                   </a:lnTo>
                   <a:lnTo>
                     <a:pt x="2363543" y="428203"/>
                   </a:lnTo>
                   <a:lnTo>
-                    <a:pt x="2435165" y="538672"/>
+                    <a:pt x="2435165" y="538673"/>
                   </a:lnTo>
                   <a:lnTo>
                     <a:pt x="2506788" y="645148"/>
                   </a:lnTo>
                   <a:lnTo>
-                    <a:pt x="2578410" y="747774"/>
-                  </a:lnTo>
-                  <a:lnTo>
-                    <a:pt x="2650033" y="846690"/>
+                    <a:pt x="2578410" y="747775"/>
+                  </a:lnTo>
+                  <a:lnTo>
+                    <a:pt x="2650033" y="846691"/>
                   </a:lnTo>
                   <a:lnTo>
                     <a:pt x="2721655" y="942030"/>
@@ -3058,13 +3058,13 @@
                     <a:pt x="3151391" y="1445891"/>
                   </a:lnTo>
                   <a:lnTo>
-                    <a:pt x="3223013" y="1519567"/>
+                    <a:pt x="3223013" y="1519568"/>
                   </a:lnTo>
                   <a:lnTo>
                     <a:pt x="3294636" y="1590580"/>
                   </a:lnTo>
                   <a:lnTo>
-                    <a:pt x="3366258" y="1659025"/>
+                    <a:pt x="3366258" y="1659026"/>
                   </a:lnTo>
                   <a:lnTo>
                     <a:pt x="3437881" y="1724996"/>
@@ -3073,10 +3073,10 @@
                     <a:pt x="3509503" y="1788582"/>
                   </a:lnTo>
                   <a:lnTo>
-                    <a:pt x="3581126" y="1849868"/>
-                  </a:lnTo>
-                  <a:lnTo>
-                    <a:pt x="3652748" y="1908939"/>
+                    <a:pt x="3581126" y="1849869"/>
+                  </a:lnTo>
+                  <a:lnTo>
+                    <a:pt x="3652748" y="1908940"/>
                   </a:lnTo>
                   <a:lnTo>
                     <a:pt x="3724371" y="1965875"/>
@@ -3199,25 +3199,25 @@
                     <a:pt x="6517649" y="2653797"/>
                   </a:lnTo>
                   <a:lnTo>
-                    <a:pt x="6589272" y="2653776"/>
+                    <a:pt x="6589272" y="2653775"/>
                   </a:lnTo>
                   <a:lnTo>
                     <a:pt x="6660894" y="2653754"/>
                   </a:lnTo>
                   <a:lnTo>
-                    <a:pt x="6732517" y="2653733"/>
+                    <a:pt x="6732517" y="2653732"/>
                   </a:lnTo>
                   <a:lnTo>
                     <a:pt x="6804139" y="2653711"/>
                   </a:lnTo>
                   <a:lnTo>
-                    <a:pt x="6875762" y="2653690"/>
+                    <a:pt x="6875762" y="2653689"/>
                   </a:lnTo>
                   <a:lnTo>
                     <a:pt x="6947385" y="2653668"/>
                   </a:lnTo>
                   <a:lnTo>
-                    <a:pt x="7019007" y="2653647"/>
+                    <a:pt x="7019007" y="2653646"/>
                   </a:lnTo>
                   <a:lnTo>
                     <a:pt x="7090630" y="2653625"/>
@@ -3382,19 +3382,19 @@
                     <a:pt x="3366258" y="2654743"/>
                   </a:lnTo>
                   <a:lnTo>
-                    <a:pt x="3294636" y="2654764"/>
+                    <a:pt x="3294636" y="2654765"/>
                   </a:lnTo>
                   <a:lnTo>
                     <a:pt x="3223013" y="2654786"/>
                   </a:lnTo>
                   <a:lnTo>
-                    <a:pt x="3151391" y="2654807"/>
+                    <a:pt x="3151391" y="2654808"/>
                   </a:lnTo>
                   <a:lnTo>
                     <a:pt x="3079768" y="2654829"/>
                   </a:lnTo>
                   <a:lnTo>
-                    <a:pt x="3008146" y="2654850"/>
+                    <a:pt x="3008146" y="2654851"/>
                   </a:lnTo>
                   <a:lnTo>
                     <a:pt x="2936523" y="2654872"/>
@@ -3451,25 +3451,25 @@
                     <a:pt x="1718940" y="2655237"/>
                   </a:lnTo>
                   <a:lnTo>
-                    <a:pt x="1647318" y="2655258"/>
+                    <a:pt x="1647318" y="2655259"/>
                   </a:lnTo>
                   <a:lnTo>
                     <a:pt x="1575695" y="2655280"/>
                   </a:lnTo>
                   <a:lnTo>
-                    <a:pt x="1504073" y="2655301"/>
+                    <a:pt x="1504073" y="2655302"/>
                   </a:lnTo>
                   <a:lnTo>
                     <a:pt x="1432450" y="2655323"/>
                   </a:lnTo>
                   <a:lnTo>
-                    <a:pt x="1360827" y="2655344"/>
+                    <a:pt x="1360827" y="2655345"/>
                   </a:lnTo>
                   <a:lnTo>
                     <a:pt x="1289205" y="2655366"/>
                   </a:lnTo>
                   <a:lnTo>
-                    <a:pt x="1217582" y="2655387"/>
+                    <a:pt x="1217582" y="2655388"/>
                   </a:lnTo>
                   <a:lnTo>
                     <a:pt x="1145960" y="2655409"/>
@@ -3502,19 +3502,19 @@
                     <a:pt x="501357" y="2655602"/>
                   </a:lnTo>
                   <a:lnTo>
-                    <a:pt x="429735" y="2655623"/>
+                    <a:pt x="429735" y="2655624"/>
                   </a:lnTo>
                   <a:lnTo>
                     <a:pt x="358112" y="2655645"/>
                   </a:lnTo>
                   <a:lnTo>
-                    <a:pt x="286490" y="2655666"/>
+                    <a:pt x="286490" y="2655667"/>
                   </a:lnTo>
                   <a:lnTo>
                     <a:pt x="214867" y="2655688"/>
                   </a:lnTo>
                   <a:lnTo>
-                    <a:pt x="143245" y="2655709"/>
+                    <a:pt x="143245" y="2655710"/>
                   </a:lnTo>
                   <a:lnTo>
                     <a:pt x="71622" y="2655731"/>
@@ -3546,7 +3546,7 @@
           </p:nvSpPr>
           <p:spPr>
             <a:xfrm>
-              <a:off x="3280827" y="2073503"/>
+              <a:off x="3280826" y="2073503"/>
               <a:ext cx="4981852" cy="2654270"/>
             </a:xfrm>
             <a:custGeom>
@@ -3563,52 +3563,52 @@
                     <a:pt x="111520" y="194677"/>
                   </a:lnTo>
                   <a:lnTo>
-                    <a:pt x="183143" y="313589"/>
+                    <a:pt x="183143" y="313590"/>
                   </a:lnTo>
                   <a:lnTo>
                     <a:pt x="254765" y="428203"/>
                   </a:lnTo>
                   <a:lnTo>
-                    <a:pt x="326388" y="538672"/>
+                    <a:pt x="326388" y="538673"/>
                   </a:lnTo>
                   <a:lnTo>
                     <a:pt x="398010" y="645148"/>
                   </a:lnTo>
                   <a:lnTo>
-                    <a:pt x="469633" y="747774"/>
-                  </a:lnTo>
-                  <a:lnTo>
-                    <a:pt x="541255" y="846690"/>
+                    <a:pt x="469633" y="747775"/>
+                  </a:lnTo>
+                  <a:lnTo>
+                    <a:pt x="541256" y="846691"/>
                   </a:lnTo>
                   <a:lnTo>
                     <a:pt x="612878" y="942030"/>
                   </a:lnTo>
                   <a:lnTo>
-                    <a:pt x="684500" y="1033923"/>
+                    <a:pt x="684501" y="1033923"/>
                   </a:lnTo>
                   <a:lnTo>
                     <a:pt x="756123" y="1122494"/>
                   </a:lnTo>
                   <a:lnTo>
-                    <a:pt x="827745" y="1207862"/>
+                    <a:pt x="827746" y="1207862"/>
                   </a:lnTo>
                   <a:lnTo>
                     <a:pt x="899368" y="1290144"/>
                   </a:lnTo>
                   <a:lnTo>
-                    <a:pt x="970990" y="1369451"/>
+                    <a:pt x="970991" y="1369451"/>
                   </a:lnTo>
                   <a:lnTo>
                     <a:pt x="1042613" y="1445891"/>
                   </a:lnTo>
                   <a:lnTo>
-                    <a:pt x="1114235" y="1519567"/>
+                    <a:pt x="1114236" y="1519568"/>
                   </a:lnTo>
                   <a:lnTo>
                     <a:pt x="1185858" y="1590580"/>
                   </a:lnTo>
                   <a:lnTo>
-                    <a:pt x="1257480" y="1659025"/>
+                    <a:pt x="1257481" y="1659026"/>
                   </a:lnTo>
                   <a:lnTo>
                     <a:pt x="1329103" y="1724996"/>
@@ -3617,10 +3617,10 @@
                     <a:pt x="1400726" y="1788582"/>
                   </a:lnTo>
                   <a:lnTo>
-                    <a:pt x="1472348" y="1849868"/>
-                  </a:lnTo>
-                  <a:lnTo>
-                    <a:pt x="1543971" y="1908939"/>
+                    <a:pt x="1472348" y="1849869"/>
+                  </a:lnTo>
+                  <a:lnTo>
+                    <a:pt x="1543971" y="1908940"/>
                   </a:lnTo>
                   <a:lnTo>
                     <a:pt x="1615593" y="1965875"/>
@@ -3635,37 +3635,37 @@
                     <a:pt x="1830461" y="2124625"/>
                   </a:lnTo>
                   <a:lnTo>
-                    <a:pt x="1902083" y="2173763"/>
+                    <a:pt x="1902084" y="2173763"/>
                   </a:lnTo>
                   <a:lnTo>
                     <a:pt x="1973706" y="2221124"/>
                   </a:lnTo>
                   <a:lnTo>
-                    <a:pt x="2045328" y="2266772"/>
+                    <a:pt x="2045329" y="2266772"/>
                   </a:lnTo>
                   <a:lnTo>
                     <a:pt x="2116951" y="2310771"/>
                   </a:lnTo>
                   <a:lnTo>
-                    <a:pt x="2188573" y="2353178"/>
+                    <a:pt x="2188574" y="2353178"/>
                   </a:lnTo>
                   <a:lnTo>
                     <a:pt x="2260196" y="2394053"/>
                   </a:lnTo>
                   <a:lnTo>
-                    <a:pt x="2331818" y="2433449"/>
+                    <a:pt x="2331819" y="2433449"/>
                   </a:lnTo>
                   <a:lnTo>
                     <a:pt x="2403441" y="2471422"/>
                   </a:lnTo>
                   <a:lnTo>
-                    <a:pt x="2475063" y="2508021"/>
+                    <a:pt x="2475064" y="2508021"/>
                   </a:lnTo>
                   <a:lnTo>
                     <a:pt x="2546686" y="2543297"/>
                   </a:lnTo>
                   <a:lnTo>
-                    <a:pt x="2618308" y="2577298"/>
+                    <a:pt x="2618309" y="2577298"/>
                   </a:lnTo>
                   <a:lnTo>
                     <a:pt x="2689931" y="2610070"/>
@@ -3692,37 +3692,37 @@
                     <a:pt x="3191289" y="2654163"/>
                   </a:lnTo>
                   <a:lnTo>
-                    <a:pt x="3262911" y="2654141"/>
+                    <a:pt x="3262912" y="2654141"/>
                   </a:lnTo>
                   <a:lnTo>
                     <a:pt x="3334534" y="2654120"/>
                   </a:lnTo>
                   <a:lnTo>
-                    <a:pt x="3406156" y="2654098"/>
+                    <a:pt x="3406157" y="2654098"/>
                   </a:lnTo>
                   <a:lnTo>
                     <a:pt x="3477779" y="2654077"/>
                   </a:lnTo>
                   <a:lnTo>
-                    <a:pt x="3549401" y="2654055"/>
+                    <a:pt x="3549402" y="2654055"/>
                   </a:lnTo>
                   <a:lnTo>
                     <a:pt x="3621024" y="2654034"/>
                   </a:lnTo>
                   <a:lnTo>
-                    <a:pt x="3692646" y="2654012"/>
+                    <a:pt x="3692647" y="2654012"/>
                   </a:lnTo>
                   <a:lnTo>
                     <a:pt x="3764269" y="2653991"/>
                   </a:lnTo>
                   <a:lnTo>
-                    <a:pt x="3835891" y="2653969"/>
+                    <a:pt x="3835892" y="2653969"/>
                   </a:lnTo>
                   <a:lnTo>
                     <a:pt x="3907514" y="2653948"/>
                   </a:lnTo>
                   <a:lnTo>
-                    <a:pt x="3979136" y="2653926"/>
+                    <a:pt x="3979137" y="2653926"/>
                   </a:lnTo>
                   <a:lnTo>
                     <a:pt x="4050759" y="2653905"/>
@@ -3743,25 +3743,25 @@
                     <a:pt x="4408872" y="2653797"/>
                   </a:lnTo>
                   <a:lnTo>
-                    <a:pt x="4480494" y="2653776"/>
+                    <a:pt x="4480494" y="2653775"/>
                   </a:lnTo>
                   <a:lnTo>
                     <a:pt x="4552117" y="2653754"/>
                   </a:lnTo>
                   <a:lnTo>
-                    <a:pt x="4623739" y="2653733"/>
+                    <a:pt x="4623739" y="2653732"/>
                   </a:lnTo>
                   <a:lnTo>
                     <a:pt x="4695362" y="2653711"/>
                   </a:lnTo>
                   <a:lnTo>
-                    <a:pt x="4766984" y="2653690"/>
+                    <a:pt x="4766985" y="2653689"/>
                   </a:lnTo>
                   <a:lnTo>
                     <a:pt x="4838607" y="2653668"/>
                   </a:lnTo>
                   <a:lnTo>
-                    <a:pt x="4910229" y="2653647"/>
+                    <a:pt x="4910230" y="2653646"/>
                   </a:lnTo>
                   <a:lnTo>
                     <a:pt x="4981852" y="2653625"/>
@@ -3795,7 +3795,7 @@
                     <a:pt x="7090630" y="560550"/>
                   </a:moveTo>
                   <a:lnTo>
-                    <a:pt x="7019007" y="550464"/>
+                    <a:pt x="7019007" y="550463"/>
                   </a:lnTo>
                   <a:lnTo>
                     <a:pt x="6947385" y="539999"/>
@@ -3891,13 +3891,13 @@
                     <a:pt x="4798709" y="21"/>
                   </a:lnTo>
                   <a:lnTo>
-                    <a:pt x="4727086" y="42"/>
+                    <a:pt x="4727086" y="43"/>
                   </a:lnTo>
                   <a:lnTo>
                     <a:pt x="4655464" y="64"/>
                   </a:lnTo>
                   <a:lnTo>
-                    <a:pt x="4583841" y="85"/>
+                    <a:pt x="4583841" y="86"/>
                   </a:lnTo>
                   <a:lnTo>
                     <a:pt x="4512219" y="107"/>
@@ -4002,19 +4002,19 @@
                     <a:pt x="2148675" y="816"/>
                   </a:lnTo>
                   <a:lnTo>
-                    <a:pt x="2077053" y="837"/>
+                    <a:pt x="2077053" y="838"/>
                   </a:lnTo>
                   <a:lnTo>
                     <a:pt x="2005430" y="859"/>
                   </a:lnTo>
                   <a:lnTo>
-                    <a:pt x="1933808" y="880"/>
+                    <a:pt x="1933808" y="881"/>
                   </a:lnTo>
                   <a:lnTo>
                     <a:pt x="1862185" y="902"/>
                   </a:lnTo>
                   <a:lnTo>
-                    <a:pt x="1790563" y="923"/>
+                    <a:pt x="1790563" y="924"/>
                   </a:lnTo>
                   <a:lnTo>
                     <a:pt x="1718940" y="945"/>
@@ -4053,25 +4053,25 @@
                     <a:pt x="931092" y="1181"/>
                   </a:lnTo>
                   <a:lnTo>
-                    <a:pt x="859470" y="1202"/>
+                    <a:pt x="859470" y="1203"/>
                   </a:lnTo>
                   <a:lnTo>
                     <a:pt x="787847" y="1224"/>
                   </a:lnTo>
                   <a:lnTo>
-                    <a:pt x="716225" y="1245"/>
+                    <a:pt x="716225" y="1246"/>
                   </a:lnTo>
                   <a:lnTo>
                     <a:pt x="644602" y="1267"/>
                   </a:lnTo>
                   <a:lnTo>
-                    <a:pt x="572980" y="1288"/>
+                    <a:pt x="572980" y="1289"/>
                   </a:lnTo>
                   <a:lnTo>
                     <a:pt x="501357" y="1310"/>
                   </a:lnTo>
                   <a:lnTo>
-                    <a:pt x="429735" y="1331"/>
+                    <a:pt x="429735" y="1332"/>
                   </a:lnTo>
                   <a:lnTo>
                     <a:pt x="358112" y="1353"/>
@@ -4109,13 +4109,13 @@
           </p:nvSpPr>
           <p:spPr>
             <a:xfrm>
-              <a:off x="1172049" y="2636928"/>
-              <a:ext cx="7090630" cy="2447856"/>
+              <a:off x="1172049" y="2636929"/>
+              <a:ext cx="7090630" cy="2447855"/>
             </a:xfrm>
             <a:custGeom>
               <a:avLst/>
               <a:pathLst>
-                <a:path w="7090630" h="2447856">
+                <a:path w="7090630" h="2447855">
                   <a:moveTo>
                     <a:pt x="0" y="0"/>
                   </a:moveTo>
@@ -4129,7 +4129,7 @@
                     <a:pt x="214867" y="156823"/>
                   </a:lnTo>
                   <a:lnTo>
-                    <a:pt x="286490" y="207204"/>
+                    <a:pt x="286490" y="207203"/>
                   </a:lnTo>
                   <a:lnTo>
                     <a:pt x="358112" y="256665"/>
@@ -4153,10 +4153,10 @@
                     <a:pt x="787847" y="535065"/>
                   </a:lnTo>
                   <a:lnTo>
-                    <a:pt x="859470" y="578550"/>
-                  </a:lnTo>
-                  <a:lnTo>
-                    <a:pt x="931092" y="621242"/>
+                    <a:pt x="859470" y="578549"/>
+                  </a:lnTo>
+                  <a:lnTo>
+                    <a:pt x="931092" y="621241"/>
                   </a:lnTo>
                   <a:lnTo>
                     <a:pt x="1002715" y="663155"/>
@@ -4171,13 +4171,13 @@
                     <a:pt x="1217582" y="784367"/>
                   </a:lnTo>
                   <a:lnTo>
-                    <a:pt x="1289205" y="823307"/>
-                  </a:lnTo>
-                  <a:lnTo>
-                    <a:pt x="1360827" y="861537"/>
-                  </a:lnTo>
-                  <a:lnTo>
-                    <a:pt x="1432450" y="899070"/>
+                    <a:pt x="1289205" y="823306"/>
+                  </a:lnTo>
+                  <a:lnTo>
+                    <a:pt x="1360827" y="861536"/>
+                  </a:lnTo>
+                  <a:lnTo>
+                    <a:pt x="1432450" y="899069"/>
                   </a:lnTo>
                   <a:lnTo>
                     <a:pt x="1504073" y="935918"/>
@@ -4186,25 +4186,25 @@
                     <a:pt x="1575695" y="972095"/>
                   </a:lnTo>
                   <a:lnTo>
-                    <a:pt x="1647318" y="1007613"/>
+                    <a:pt x="1647318" y="1007612"/>
                   </a:lnTo>
                   <a:lnTo>
                     <a:pt x="1718940" y="1042482"/>
                   </a:lnTo>
                   <a:lnTo>
-                    <a:pt x="1790563" y="1076717"/>
-                  </a:lnTo>
-                  <a:lnTo>
-                    <a:pt x="1862185" y="1110327"/>
-                  </a:lnTo>
-                  <a:lnTo>
-                    <a:pt x="1933808" y="1143324"/>
-                  </a:lnTo>
-                  <a:lnTo>
-                    <a:pt x="2005430" y="1175720"/>
-                  </a:lnTo>
-                  <a:lnTo>
-                    <a:pt x="2077053" y="1207525"/>
+                    <a:pt x="1790563" y="1076716"/>
+                  </a:lnTo>
+                  <a:lnTo>
+                    <a:pt x="1862185" y="1110326"/>
+                  </a:lnTo>
+                  <a:lnTo>
+                    <a:pt x="1933808" y="1143323"/>
+                  </a:lnTo>
+                  <a:lnTo>
+                    <a:pt x="2005430" y="1175719"/>
+                  </a:lnTo>
+                  <a:lnTo>
+                    <a:pt x="2077053" y="1207524"/>
                   </a:lnTo>
                   <a:lnTo>
                     <a:pt x="2148675" y="1238750"/>
@@ -4216,13 +4216,13 @@
                     <a:pt x="2291920" y="1299503"/>
                   </a:lnTo>
                   <a:lnTo>
-                    <a:pt x="2363543" y="1329052"/>
-                  </a:lnTo>
-                  <a:lnTo>
-                    <a:pt x="2435165" y="1358062"/>
-                  </a:lnTo>
-                  <a:lnTo>
-                    <a:pt x="2506788" y="1386543"/>
+                    <a:pt x="2363543" y="1329051"/>
+                  </a:lnTo>
+                  <a:lnTo>
+                    <a:pt x="2435165" y="1358061"/>
+                  </a:lnTo>
+                  <a:lnTo>
+                    <a:pt x="2506788" y="1386542"/>
                   </a:lnTo>
                   <a:lnTo>
                     <a:pt x="2578410" y="1414504"/>
@@ -4231,190 +4231,190 @@
                     <a:pt x="2650033" y="1441956"/>
                   </a:lnTo>
                   <a:lnTo>
-                    <a:pt x="2721655" y="1468908"/>
-                  </a:lnTo>
-                  <a:lnTo>
-                    <a:pt x="2793278" y="1495368"/>
-                  </a:lnTo>
-                  <a:lnTo>
-                    <a:pt x="2864901" y="1521346"/>
-                  </a:lnTo>
-                  <a:lnTo>
-                    <a:pt x="2936523" y="1546850"/>
+                    <a:pt x="2721655" y="1468907"/>
+                  </a:lnTo>
+                  <a:lnTo>
+                    <a:pt x="2793278" y="1495367"/>
+                  </a:lnTo>
+                  <a:lnTo>
+                    <a:pt x="2864901" y="1521345"/>
+                  </a:lnTo>
+                  <a:lnTo>
+                    <a:pt x="2936523" y="1546849"/>
                   </a:lnTo>
                   <a:lnTo>
                     <a:pt x="3008146" y="1571889"/>
                   </a:lnTo>
                   <a:lnTo>
-                    <a:pt x="3079768" y="1596472"/>
-                  </a:lnTo>
-                  <a:lnTo>
-                    <a:pt x="3151391" y="1620607"/>
-                  </a:lnTo>
-                  <a:lnTo>
-                    <a:pt x="3223013" y="1644301"/>
-                  </a:lnTo>
-                  <a:lnTo>
-                    <a:pt x="3294636" y="1667564"/>
+                    <a:pt x="3079768" y="1596471"/>
+                  </a:lnTo>
+                  <a:lnTo>
+                    <a:pt x="3151391" y="1620606"/>
+                  </a:lnTo>
+                  <a:lnTo>
+                    <a:pt x="3223013" y="1644300"/>
+                  </a:lnTo>
+                  <a:lnTo>
+                    <a:pt x="3294636" y="1667563"/>
                   </a:lnTo>
                   <a:lnTo>
                     <a:pt x="3366258" y="1690402"/>
                   </a:lnTo>
                   <a:lnTo>
-                    <a:pt x="3437881" y="1712825"/>
-                  </a:lnTo>
-                  <a:lnTo>
-                    <a:pt x="3509503" y="1734838"/>
-                  </a:lnTo>
-                  <a:lnTo>
-                    <a:pt x="3581126" y="1756450"/>
-                  </a:lnTo>
-                  <a:lnTo>
-                    <a:pt x="3652748" y="1777668"/>
+                    <a:pt x="3437881" y="1712824"/>
+                  </a:lnTo>
+                  <a:lnTo>
+                    <a:pt x="3509503" y="1734837"/>
+                  </a:lnTo>
+                  <a:lnTo>
+                    <a:pt x="3581126" y="1756449"/>
+                  </a:lnTo>
+                  <a:lnTo>
+                    <a:pt x="3652748" y="1777667"/>
                   </a:lnTo>
                   <a:lnTo>
                     <a:pt x="3724371" y="1798499"/>
                   </a:lnTo>
                   <a:lnTo>
-                    <a:pt x="3795993" y="1818951"/>
-                  </a:lnTo>
-                  <a:lnTo>
-                    <a:pt x="3867616" y="1839030"/>
-                  </a:lnTo>
-                  <a:lnTo>
-                    <a:pt x="3939238" y="1858742"/>
+                    <a:pt x="3795993" y="1818950"/>
+                  </a:lnTo>
+                  <a:lnTo>
+                    <a:pt x="3867616" y="1839029"/>
+                  </a:lnTo>
+                  <a:lnTo>
+                    <a:pt x="3939238" y="1858741"/>
                   </a:lnTo>
                   <a:lnTo>
                     <a:pt x="4010861" y="1878095"/>
                   </a:lnTo>
                   <a:lnTo>
-                    <a:pt x="4082483" y="1897096"/>
-                  </a:lnTo>
-                  <a:lnTo>
-                    <a:pt x="4154106" y="1915750"/>
-                  </a:lnTo>
-                  <a:lnTo>
-                    <a:pt x="4225729" y="1934064"/>
-                  </a:lnTo>
-                  <a:lnTo>
-                    <a:pt x="4297351" y="1952044"/>
-                  </a:lnTo>
-                  <a:lnTo>
-                    <a:pt x="4368974" y="1969696"/>
-                  </a:lnTo>
-                  <a:lnTo>
-                    <a:pt x="4440596" y="1987027"/>
-                  </a:lnTo>
-                  <a:lnTo>
-                    <a:pt x="4512219" y="2004041"/>
-                  </a:lnTo>
-                  <a:lnTo>
-                    <a:pt x="4583841" y="2020746"/>
+                    <a:pt x="4082483" y="1897095"/>
+                  </a:lnTo>
+                  <a:lnTo>
+                    <a:pt x="4154106" y="1915749"/>
+                  </a:lnTo>
+                  <a:lnTo>
+                    <a:pt x="4225729" y="1934063"/>
+                  </a:lnTo>
+                  <a:lnTo>
+                    <a:pt x="4297351" y="1952043"/>
+                  </a:lnTo>
+                  <a:lnTo>
+                    <a:pt x="4368974" y="1969695"/>
+                  </a:lnTo>
+                  <a:lnTo>
+                    <a:pt x="4440596" y="1987026"/>
+                  </a:lnTo>
+                  <a:lnTo>
+                    <a:pt x="4512219" y="2004040"/>
+                  </a:lnTo>
+                  <a:lnTo>
+                    <a:pt x="4583841" y="2020745"/>
                   </a:lnTo>
                   <a:lnTo>
                     <a:pt x="4655464" y="2037145"/>
                   </a:lnTo>
                   <a:lnTo>
-                    <a:pt x="4727086" y="2053246"/>
-                  </a:lnTo>
-                  <a:lnTo>
-                    <a:pt x="4798709" y="2069054"/>
-                  </a:lnTo>
-                  <a:lnTo>
-                    <a:pt x="4870331" y="2084573"/>
-                  </a:lnTo>
-                  <a:lnTo>
-                    <a:pt x="4941954" y="2099809"/>
-                  </a:lnTo>
-                  <a:lnTo>
-                    <a:pt x="5013576" y="2114767"/>
-                  </a:lnTo>
-                  <a:lnTo>
-                    <a:pt x="5085199" y="2129453"/>
-                  </a:lnTo>
-                  <a:lnTo>
-                    <a:pt x="5156821" y="2143871"/>
-                  </a:lnTo>
-                  <a:lnTo>
-                    <a:pt x="5228444" y="2158026"/>
-                  </a:lnTo>
-                  <a:lnTo>
-                    <a:pt x="5300066" y="2171923"/>
-                  </a:lnTo>
-                  <a:lnTo>
-                    <a:pt x="5371689" y="2185567"/>
-                  </a:lnTo>
-                  <a:lnTo>
-                    <a:pt x="5443311" y="2198962"/>
-                  </a:lnTo>
-                  <a:lnTo>
-                    <a:pt x="5514934" y="2212113"/>
-                  </a:lnTo>
-                  <a:lnTo>
-                    <a:pt x="5586557" y="2225024"/>
-                  </a:lnTo>
-                  <a:lnTo>
-                    <a:pt x="5658179" y="2237700"/>
-                  </a:lnTo>
-                  <a:lnTo>
-                    <a:pt x="5729802" y="2250144"/>
-                  </a:lnTo>
-                  <a:lnTo>
-                    <a:pt x="5801424" y="2262362"/>
-                  </a:lnTo>
-                  <a:lnTo>
-                    <a:pt x="5873047" y="2274357"/>
-                  </a:lnTo>
-                  <a:lnTo>
-                    <a:pt x="5944669" y="2286133"/>
-                  </a:lnTo>
-                  <a:lnTo>
-                    <a:pt x="6016292" y="2297695"/>
-                  </a:lnTo>
-                  <a:lnTo>
-                    <a:pt x="6087914" y="2309046"/>
-                  </a:lnTo>
-                  <a:lnTo>
-                    <a:pt x="6159537" y="2320190"/>
-                  </a:lnTo>
-                  <a:lnTo>
-                    <a:pt x="6231159" y="2331131"/>
-                  </a:lnTo>
-                  <a:lnTo>
-                    <a:pt x="6302782" y="2341872"/>
-                  </a:lnTo>
-                  <a:lnTo>
-                    <a:pt x="6374404" y="2352417"/>
-                  </a:lnTo>
-                  <a:lnTo>
-                    <a:pt x="6446027" y="2362771"/>
-                  </a:lnTo>
-                  <a:lnTo>
-                    <a:pt x="6517649" y="2372935"/>
-                  </a:lnTo>
-                  <a:lnTo>
-                    <a:pt x="6589272" y="2382914"/>
-                  </a:lnTo>
-                  <a:lnTo>
-                    <a:pt x="6660894" y="2392712"/>
-                  </a:lnTo>
-                  <a:lnTo>
-                    <a:pt x="6732517" y="2402330"/>
+                    <a:pt x="4727086" y="2053245"/>
+                  </a:lnTo>
+                  <a:lnTo>
+                    <a:pt x="4798709" y="2069053"/>
+                  </a:lnTo>
+                  <a:lnTo>
+                    <a:pt x="4870331" y="2084572"/>
+                  </a:lnTo>
+                  <a:lnTo>
+                    <a:pt x="4941954" y="2099808"/>
+                  </a:lnTo>
+                  <a:lnTo>
+                    <a:pt x="5013576" y="2114766"/>
+                  </a:lnTo>
+                  <a:lnTo>
+                    <a:pt x="5085199" y="2129452"/>
+                  </a:lnTo>
+                  <a:lnTo>
+                    <a:pt x="5156821" y="2143870"/>
+                  </a:lnTo>
+                  <a:lnTo>
+                    <a:pt x="5228444" y="2158025"/>
+                  </a:lnTo>
+                  <a:lnTo>
+                    <a:pt x="5300066" y="2171922"/>
+                  </a:lnTo>
+                  <a:lnTo>
+                    <a:pt x="5371689" y="2185566"/>
+                  </a:lnTo>
+                  <a:lnTo>
+                    <a:pt x="5443311" y="2198961"/>
+                  </a:lnTo>
+                  <a:lnTo>
+                    <a:pt x="5514934" y="2212112"/>
+                  </a:lnTo>
+                  <a:lnTo>
+                    <a:pt x="5586557" y="2225023"/>
+                  </a:lnTo>
+                  <a:lnTo>
+                    <a:pt x="5658179" y="2237699"/>
+                  </a:lnTo>
+                  <a:lnTo>
+                    <a:pt x="5729802" y="2250143"/>
+                  </a:lnTo>
+                  <a:lnTo>
+                    <a:pt x="5801424" y="2262361"/>
+                  </a:lnTo>
+                  <a:lnTo>
+                    <a:pt x="5873047" y="2274356"/>
+                  </a:lnTo>
+                  <a:lnTo>
+                    <a:pt x="5944669" y="2286132"/>
+                  </a:lnTo>
+                  <a:lnTo>
+                    <a:pt x="6016292" y="2297694"/>
+                  </a:lnTo>
+                  <a:lnTo>
+                    <a:pt x="6087914" y="2309045"/>
+                  </a:lnTo>
+                  <a:lnTo>
+                    <a:pt x="6159537" y="2320189"/>
+                  </a:lnTo>
+                  <a:lnTo>
+                    <a:pt x="6231159" y="2331130"/>
+                  </a:lnTo>
+                  <a:lnTo>
+                    <a:pt x="6302782" y="2341871"/>
+                  </a:lnTo>
+                  <a:lnTo>
+                    <a:pt x="6374404" y="2352416"/>
+                  </a:lnTo>
+                  <a:lnTo>
+                    <a:pt x="6446027" y="2362770"/>
+                  </a:lnTo>
+                  <a:lnTo>
+                    <a:pt x="6517649" y="2372934"/>
+                  </a:lnTo>
+                  <a:lnTo>
+                    <a:pt x="6589272" y="2382913"/>
+                  </a:lnTo>
+                  <a:lnTo>
+                    <a:pt x="6660894" y="2392711"/>
+                  </a:lnTo>
+                  <a:lnTo>
+                    <a:pt x="6732517" y="2402329"/>
                   </a:lnTo>
                   <a:lnTo>
                     <a:pt x="6804139" y="2411773"/>
                   </a:lnTo>
                   <a:lnTo>
-                    <a:pt x="6875762" y="2421045"/>
-                  </a:lnTo>
-                  <a:lnTo>
-                    <a:pt x="6947385" y="2430147"/>
-                  </a:lnTo>
-                  <a:lnTo>
-                    <a:pt x="7019007" y="2439083"/>
-                  </a:lnTo>
-                  <a:lnTo>
-                    <a:pt x="7090630" y="2447856"/>
+                    <a:pt x="6875762" y="2421044"/>
+                  </a:lnTo>
+                  <a:lnTo>
+                    <a:pt x="6947385" y="2430146"/>
+                  </a:lnTo>
+                  <a:lnTo>
+                    <a:pt x="7019007" y="2439082"/>
+                  </a:lnTo>
+                  <a:lnTo>
+                    <a:pt x="7090630" y="2447855"/>
                   </a:lnTo>
                 </a:path>
               </a:pathLst>

--- a/docs/plots/carbo/jx_carbo_linsubhr_egfrdisc_grade2.pptx
+++ b/docs/plots/carbo/jx_carbo_linsubhr_egfrdisc_grade2.pptx
@@ -3003,524 +3003,572 @@
           <p:spPr>
             <a:xfrm>
               <a:off x="1172049" y="2073503"/>
-              <a:ext cx="7090630" cy="3214842"/>
+              <a:ext cx="7090630" cy="3121885"/>
             </a:xfrm>
             <a:custGeom>
               <a:avLst/>
               <a:pathLst>
-                <a:path w="7090630" h="3214842">
+                <a:path w="7090630" h="3121885">
                   <a:moveTo>
-                    <a:pt x="2108777" y="0"/>
+                    <a:pt x="962569" y="0"/>
                   </a:moveTo>
                   <a:lnTo>
-                    <a:pt x="2148675" y="71304"/>
-                  </a:lnTo>
-                  <a:lnTo>
-                    <a:pt x="2220298" y="194677"/>
-                  </a:lnTo>
-                  <a:lnTo>
-                    <a:pt x="2291920" y="313590"/>
-                  </a:lnTo>
-                  <a:lnTo>
-                    <a:pt x="2363543" y="428203"/>
-                  </a:lnTo>
-                  <a:lnTo>
-                    <a:pt x="2435165" y="538673"/>
-                  </a:lnTo>
-                  <a:lnTo>
-                    <a:pt x="2506788" y="645148"/>
-                  </a:lnTo>
-                  <a:lnTo>
-                    <a:pt x="2578410" y="747775"/>
-                  </a:lnTo>
-                  <a:lnTo>
-                    <a:pt x="2650033" y="846691"/>
-                  </a:lnTo>
-                  <a:lnTo>
-                    <a:pt x="2721655" y="942030"/>
-                  </a:lnTo>
-                  <a:lnTo>
-                    <a:pt x="2793278" y="1033923"/>
-                  </a:lnTo>
-                  <a:lnTo>
-                    <a:pt x="2864901" y="1122494"/>
-                  </a:lnTo>
-                  <a:lnTo>
-                    <a:pt x="2936523" y="1207862"/>
-                  </a:lnTo>
-                  <a:lnTo>
-                    <a:pt x="3008146" y="1290144"/>
-                  </a:lnTo>
-                  <a:lnTo>
-                    <a:pt x="3079768" y="1369451"/>
-                  </a:lnTo>
-                  <a:lnTo>
-                    <a:pt x="3151391" y="1445891"/>
-                  </a:lnTo>
-                  <a:lnTo>
-                    <a:pt x="3223013" y="1519568"/>
-                  </a:lnTo>
-                  <a:lnTo>
-                    <a:pt x="3294636" y="1590580"/>
-                  </a:lnTo>
-                  <a:lnTo>
-                    <a:pt x="3366258" y="1659026"/>
-                  </a:lnTo>
-                  <a:lnTo>
-                    <a:pt x="3437881" y="1724996"/>
-                  </a:lnTo>
-                  <a:lnTo>
-                    <a:pt x="3509503" y="1788582"/>
-                  </a:lnTo>
-                  <a:lnTo>
-                    <a:pt x="3581126" y="1849869"/>
-                  </a:lnTo>
-                  <a:lnTo>
-                    <a:pt x="3652748" y="1908940"/>
-                  </a:lnTo>
-                  <a:lnTo>
-                    <a:pt x="3724371" y="1965875"/>
-                  </a:lnTo>
-                  <a:lnTo>
-                    <a:pt x="3795993" y="2020752"/>
-                  </a:lnTo>
-                  <a:lnTo>
-                    <a:pt x="3867616" y="2073645"/>
-                  </a:lnTo>
-                  <a:lnTo>
-                    <a:pt x="3939238" y="2124625"/>
-                  </a:lnTo>
-                  <a:lnTo>
-                    <a:pt x="4010861" y="2173763"/>
-                  </a:lnTo>
-                  <a:lnTo>
-                    <a:pt x="4082483" y="2221124"/>
-                  </a:lnTo>
-                  <a:lnTo>
-                    <a:pt x="4154106" y="2266772"/>
-                  </a:lnTo>
-                  <a:lnTo>
-                    <a:pt x="4225729" y="2310771"/>
-                  </a:lnTo>
-                  <a:lnTo>
-                    <a:pt x="4297351" y="2353178"/>
-                  </a:lnTo>
-                  <a:lnTo>
-                    <a:pt x="4368974" y="2394053"/>
-                  </a:lnTo>
-                  <a:lnTo>
-                    <a:pt x="4440596" y="2433449"/>
-                  </a:lnTo>
-                  <a:lnTo>
-                    <a:pt x="4512219" y="2471422"/>
-                  </a:lnTo>
-                  <a:lnTo>
-                    <a:pt x="4583841" y="2508021"/>
-                  </a:lnTo>
-                  <a:lnTo>
-                    <a:pt x="4655464" y="2543297"/>
-                  </a:lnTo>
-                  <a:lnTo>
-                    <a:pt x="4727086" y="2577298"/>
-                  </a:lnTo>
-                  <a:lnTo>
-                    <a:pt x="4798709" y="2610070"/>
-                  </a:lnTo>
-                  <a:lnTo>
-                    <a:pt x="4870331" y="2641657"/>
-                  </a:lnTo>
-                  <a:lnTo>
-                    <a:pt x="4941954" y="2654270"/>
-                  </a:lnTo>
-                  <a:lnTo>
-                    <a:pt x="5013576" y="2654249"/>
-                  </a:lnTo>
-                  <a:lnTo>
-                    <a:pt x="5085199" y="2654227"/>
-                  </a:lnTo>
-                  <a:lnTo>
-                    <a:pt x="5156821" y="2654206"/>
-                  </a:lnTo>
-                  <a:lnTo>
-                    <a:pt x="5228444" y="2654184"/>
-                  </a:lnTo>
-                  <a:lnTo>
-                    <a:pt x="5300066" y="2654163"/>
-                  </a:lnTo>
-                  <a:lnTo>
-                    <a:pt x="5371689" y="2654141"/>
-                  </a:lnTo>
-                  <a:lnTo>
-                    <a:pt x="5443311" y="2654120"/>
-                  </a:lnTo>
-                  <a:lnTo>
-                    <a:pt x="5514934" y="2654098"/>
-                  </a:lnTo>
-                  <a:lnTo>
-                    <a:pt x="5586557" y="2654077"/>
-                  </a:lnTo>
-                  <a:lnTo>
-                    <a:pt x="5658179" y="2654055"/>
-                  </a:lnTo>
-                  <a:lnTo>
-                    <a:pt x="5729802" y="2654034"/>
-                  </a:lnTo>
-                  <a:lnTo>
-                    <a:pt x="5801424" y="2654012"/>
-                  </a:lnTo>
-                  <a:lnTo>
-                    <a:pt x="5873047" y="2653991"/>
-                  </a:lnTo>
-                  <a:lnTo>
-                    <a:pt x="5944669" y="2653969"/>
-                  </a:lnTo>
-                  <a:lnTo>
-                    <a:pt x="6016292" y="2653948"/>
-                  </a:lnTo>
-                  <a:lnTo>
-                    <a:pt x="6087914" y="2653926"/>
-                  </a:lnTo>
-                  <a:lnTo>
-                    <a:pt x="6159537" y="2653905"/>
-                  </a:lnTo>
-                  <a:lnTo>
-                    <a:pt x="6231159" y="2653883"/>
-                  </a:lnTo>
-                  <a:lnTo>
-                    <a:pt x="6302782" y="2653862"/>
-                  </a:lnTo>
-                  <a:lnTo>
-                    <a:pt x="6374404" y="2653840"/>
-                  </a:lnTo>
-                  <a:lnTo>
-                    <a:pt x="6446027" y="2653819"/>
-                  </a:lnTo>
-                  <a:lnTo>
-                    <a:pt x="6517649" y="2653797"/>
-                  </a:lnTo>
-                  <a:lnTo>
-                    <a:pt x="6589272" y="2653775"/>
-                  </a:lnTo>
-                  <a:lnTo>
-                    <a:pt x="6660894" y="2653754"/>
-                  </a:lnTo>
-                  <a:lnTo>
-                    <a:pt x="6732517" y="2653732"/>
-                  </a:lnTo>
-                  <a:lnTo>
-                    <a:pt x="6804139" y="2653711"/>
-                  </a:lnTo>
-                  <a:lnTo>
-                    <a:pt x="6875762" y="2653689"/>
-                  </a:lnTo>
-                  <a:lnTo>
-                    <a:pt x="6947385" y="2653668"/>
-                  </a:lnTo>
-                  <a:lnTo>
-                    <a:pt x="7019007" y="2653646"/>
-                  </a:lnTo>
-                  <a:lnTo>
-                    <a:pt x="7090630" y="2653625"/>
-                  </a:lnTo>
-                  <a:lnTo>
-                    <a:pt x="7090630" y="3214842"/>
-                  </a:lnTo>
-                  <a:lnTo>
-                    <a:pt x="7019007" y="3204756"/>
-                  </a:lnTo>
-                  <a:lnTo>
-                    <a:pt x="6947385" y="3194291"/>
-                  </a:lnTo>
-                  <a:lnTo>
-                    <a:pt x="6875762" y="3183433"/>
-                  </a:lnTo>
-                  <a:lnTo>
-                    <a:pt x="6804139" y="3172169"/>
-                  </a:lnTo>
-                  <a:lnTo>
-                    <a:pt x="6732517" y="3160481"/>
-                  </a:lnTo>
-                  <a:lnTo>
-                    <a:pt x="6660894" y="3148356"/>
-                  </a:lnTo>
-                  <a:lnTo>
-                    <a:pt x="6589272" y="3135775"/>
-                  </a:lnTo>
-                  <a:lnTo>
-                    <a:pt x="6517649" y="3122723"/>
-                  </a:lnTo>
-                  <a:lnTo>
-                    <a:pt x="6446027" y="3109181"/>
-                  </a:lnTo>
-                  <a:lnTo>
-                    <a:pt x="6374404" y="3095131"/>
-                  </a:lnTo>
-                  <a:lnTo>
-                    <a:pt x="6302782" y="3080554"/>
-                  </a:lnTo>
-                  <a:lnTo>
-                    <a:pt x="6231159" y="3065430"/>
-                  </a:lnTo>
-                  <a:lnTo>
-                    <a:pt x="6159537" y="3049739"/>
-                  </a:lnTo>
-                  <a:lnTo>
-                    <a:pt x="6087914" y="3033459"/>
-                  </a:lnTo>
-                  <a:lnTo>
-                    <a:pt x="6016292" y="3016569"/>
-                  </a:lnTo>
-                  <a:lnTo>
-                    <a:pt x="5944669" y="2999045"/>
-                  </a:lnTo>
-                  <a:lnTo>
-                    <a:pt x="5873047" y="2980864"/>
-                  </a:lnTo>
-                  <a:lnTo>
-                    <a:pt x="5801424" y="2962001"/>
-                  </a:lnTo>
-                  <a:lnTo>
-                    <a:pt x="5729802" y="2942430"/>
-                  </a:lnTo>
-                  <a:lnTo>
-                    <a:pt x="5658179" y="2922126"/>
-                  </a:lnTo>
-                  <a:lnTo>
-                    <a:pt x="5586557" y="2901059"/>
-                  </a:lnTo>
-                  <a:lnTo>
-                    <a:pt x="5514934" y="2879203"/>
-                  </a:lnTo>
-                  <a:lnTo>
-                    <a:pt x="5443311" y="2856526"/>
-                  </a:lnTo>
-                  <a:lnTo>
-                    <a:pt x="5371689" y="2832999"/>
-                  </a:lnTo>
-                  <a:lnTo>
-                    <a:pt x="5300066" y="2808590"/>
-                  </a:lnTo>
-                  <a:lnTo>
-                    <a:pt x="5228444" y="2783264"/>
-                  </a:lnTo>
-                  <a:lnTo>
-                    <a:pt x="5156821" y="2756989"/>
-                  </a:lnTo>
-                  <a:lnTo>
-                    <a:pt x="5085199" y="2729729"/>
-                  </a:lnTo>
-                  <a:lnTo>
-                    <a:pt x="5013576" y="2701446"/>
-                  </a:lnTo>
-                  <a:lnTo>
-                    <a:pt x="4941954" y="2672101"/>
-                  </a:lnTo>
-                  <a:lnTo>
-                    <a:pt x="4870331" y="2654292"/>
-                  </a:lnTo>
-                  <a:lnTo>
-                    <a:pt x="4798709" y="2654313"/>
-                  </a:lnTo>
-                  <a:lnTo>
-                    <a:pt x="4727086" y="2654335"/>
-                  </a:lnTo>
-                  <a:lnTo>
-                    <a:pt x="4655464" y="2654356"/>
-                  </a:lnTo>
-                  <a:lnTo>
-                    <a:pt x="4583841" y="2654378"/>
-                  </a:lnTo>
-                  <a:lnTo>
-                    <a:pt x="4512219" y="2654399"/>
-                  </a:lnTo>
-                  <a:lnTo>
-                    <a:pt x="4440596" y="2654421"/>
-                  </a:lnTo>
-                  <a:lnTo>
-                    <a:pt x="4368974" y="2654442"/>
-                  </a:lnTo>
-                  <a:lnTo>
-                    <a:pt x="4297351" y="2654464"/>
-                  </a:lnTo>
-                  <a:lnTo>
-                    <a:pt x="4225729" y="2654485"/>
-                  </a:lnTo>
-                  <a:lnTo>
-                    <a:pt x="4154106" y="2654507"/>
-                  </a:lnTo>
-                  <a:lnTo>
-                    <a:pt x="4082483" y="2654528"/>
-                  </a:lnTo>
-                  <a:lnTo>
-                    <a:pt x="4010861" y="2654550"/>
-                  </a:lnTo>
-                  <a:lnTo>
-                    <a:pt x="3939238" y="2654571"/>
-                  </a:lnTo>
-                  <a:lnTo>
-                    <a:pt x="3867616" y="2654593"/>
-                  </a:lnTo>
-                  <a:lnTo>
-                    <a:pt x="3795993" y="2654614"/>
-                  </a:lnTo>
-                  <a:lnTo>
-                    <a:pt x="3724371" y="2654636"/>
-                  </a:lnTo>
-                  <a:lnTo>
-                    <a:pt x="3652748" y="2654657"/>
-                  </a:lnTo>
-                  <a:lnTo>
-                    <a:pt x="3581126" y="2654679"/>
-                  </a:lnTo>
-                  <a:lnTo>
-                    <a:pt x="3509503" y="2654700"/>
-                  </a:lnTo>
-                  <a:lnTo>
-                    <a:pt x="3437881" y="2654722"/>
-                  </a:lnTo>
-                  <a:lnTo>
-                    <a:pt x="3366258" y="2654743"/>
-                  </a:lnTo>
-                  <a:lnTo>
-                    <a:pt x="3294636" y="2654765"/>
-                  </a:lnTo>
-                  <a:lnTo>
-                    <a:pt x="3223013" y="2654786"/>
-                  </a:lnTo>
-                  <a:lnTo>
-                    <a:pt x="3151391" y="2654808"/>
-                  </a:lnTo>
-                  <a:lnTo>
-                    <a:pt x="3079768" y="2654829"/>
-                  </a:lnTo>
-                  <a:lnTo>
-                    <a:pt x="3008146" y="2654851"/>
-                  </a:lnTo>
-                  <a:lnTo>
-                    <a:pt x="2936523" y="2654872"/>
-                  </a:lnTo>
-                  <a:lnTo>
-                    <a:pt x="2864901" y="2654893"/>
-                  </a:lnTo>
-                  <a:lnTo>
-                    <a:pt x="2793278" y="2654915"/>
-                  </a:lnTo>
-                  <a:lnTo>
-                    <a:pt x="2721655" y="2654936"/>
-                  </a:lnTo>
-                  <a:lnTo>
-                    <a:pt x="2650033" y="2654958"/>
-                  </a:lnTo>
-                  <a:lnTo>
-                    <a:pt x="2578410" y="2654979"/>
-                  </a:lnTo>
-                  <a:lnTo>
-                    <a:pt x="2506788" y="2655001"/>
-                  </a:lnTo>
-                  <a:lnTo>
-                    <a:pt x="2435165" y="2655022"/>
-                  </a:lnTo>
-                  <a:lnTo>
-                    <a:pt x="2363543" y="2655044"/>
-                  </a:lnTo>
-                  <a:lnTo>
-                    <a:pt x="2291920" y="2655065"/>
-                  </a:lnTo>
-                  <a:lnTo>
-                    <a:pt x="2220298" y="2655087"/>
-                  </a:lnTo>
-                  <a:lnTo>
-                    <a:pt x="2148675" y="2655108"/>
-                  </a:lnTo>
-                  <a:lnTo>
-                    <a:pt x="2077053" y="2655130"/>
-                  </a:lnTo>
-                  <a:lnTo>
-                    <a:pt x="2005430" y="2655151"/>
-                  </a:lnTo>
-                  <a:lnTo>
-                    <a:pt x="1933808" y="2655173"/>
-                  </a:lnTo>
-                  <a:lnTo>
-                    <a:pt x="1862185" y="2655194"/>
-                  </a:lnTo>
-                  <a:lnTo>
-                    <a:pt x="1790563" y="2655216"/>
-                  </a:lnTo>
-                  <a:lnTo>
-                    <a:pt x="1718940" y="2655237"/>
-                  </a:lnTo>
-                  <a:lnTo>
-                    <a:pt x="1647318" y="2655259"/>
-                  </a:lnTo>
-                  <a:lnTo>
-                    <a:pt x="1575695" y="2655280"/>
-                  </a:lnTo>
-                  <a:lnTo>
-                    <a:pt x="1504073" y="2655302"/>
-                  </a:lnTo>
-                  <a:lnTo>
-                    <a:pt x="1432450" y="2655323"/>
-                  </a:lnTo>
-                  <a:lnTo>
-                    <a:pt x="1360827" y="2655345"/>
-                  </a:lnTo>
-                  <a:lnTo>
-                    <a:pt x="1289205" y="2655366"/>
-                  </a:lnTo>
-                  <a:lnTo>
-                    <a:pt x="1217582" y="2655388"/>
-                  </a:lnTo>
-                  <a:lnTo>
-                    <a:pt x="1145960" y="2655409"/>
-                  </a:lnTo>
-                  <a:lnTo>
-                    <a:pt x="1074337" y="2655430"/>
-                  </a:lnTo>
-                  <a:lnTo>
-                    <a:pt x="1002715" y="2655452"/>
-                  </a:lnTo>
-                  <a:lnTo>
-                    <a:pt x="931092" y="2655473"/>
-                  </a:lnTo>
-                  <a:lnTo>
-                    <a:pt x="859470" y="2655495"/>
-                  </a:lnTo>
-                  <a:lnTo>
-                    <a:pt x="787847" y="2655516"/>
-                  </a:lnTo>
-                  <a:lnTo>
-                    <a:pt x="716225" y="2655538"/>
-                  </a:lnTo>
-                  <a:lnTo>
-                    <a:pt x="644602" y="2655559"/>
-                  </a:lnTo>
-                  <a:lnTo>
-                    <a:pt x="572980" y="2655581"/>
-                  </a:lnTo>
-                  <a:lnTo>
-                    <a:pt x="501357" y="2655602"/>
-                  </a:lnTo>
-                  <a:lnTo>
-                    <a:pt x="429735" y="2655624"/>
-                  </a:lnTo>
-                  <a:lnTo>
-                    <a:pt x="358112" y="2655645"/>
-                  </a:lnTo>
-                  <a:lnTo>
-                    <a:pt x="286490" y="2655667"/>
-                  </a:lnTo>
-                  <a:lnTo>
-                    <a:pt x="214867" y="2655688"/>
-                  </a:lnTo>
-                  <a:lnTo>
-                    <a:pt x="143245" y="2655710"/>
-                  </a:lnTo>
-                  <a:lnTo>
-                    <a:pt x="71622" y="2655731"/>
-                  </a:lnTo>
-                  <a:lnTo>
-                    <a:pt x="0" y="2655752"/>
+                    <a:pt x="1002715" y="50892"/>
+                  </a:lnTo>
+                  <a:lnTo>
+                    <a:pt x="1074337" y="139346"/>
+                  </a:lnTo>
+                  <a:lnTo>
+                    <a:pt x="1145960" y="225521"/>
+                  </a:lnTo>
+                  <a:lnTo>
+                    <a:pt x="1217582" y="309476"/>
+                  </a:lnTo>
+                  <a:lnTo>
+                    <a:pt x="1289205" y="391267"/>
+                  </a:lnTo>
+                  <a:lnTo>
+                    <a:pt x="1360827" y="470951"/>
+                  </a:lnTo>
+                  <a:lnTo>
+                    <a:pt x="1432450" y="548582"/>
+                  </a:lnTo>
+                  <a:lnTo>
+                    <a:pt x="1504073" y="624212"/>
+                  </a:lnTo>
+                  <a:lnTo>
+                    <a:pt x="1575695" y="697894"/>
+                  </a:lnTo>
+                  <a:lnTo>
+                    <a:pt x="1647318" y="769677"/>
+                  </a:lnTo>
+                  <a:lnTo>
+                    <a:pt x="1718940" y="839610"/>
+                  </a:lnTo>
+                  <a:lnTo>
+                    <a:pt x="1790563" y="907742"/>
+                  </a:lnTo>
+                  <a:lnTo>
+                    <a:pt x="1862185" y="974118"/>
+                  </a:lnTo>
+                  <a:lnTo>
+                    <a:pt x="1933808" y="1038783"/>
+                  </a:lnTo>
+                  <a:lnTo>
+                    <a:pt x="2005430" y="1101783"/>
+                  </a:lnTo>
+                  <a:lnTo>
+                    <a:pt x="2077053" y="1163159"/>
+                  </a:lnTo>
+                  <a:lnTo>
+                    <a:pt x="2148675" y="1222953"/>
+                  </a:lnTo>
+                  <a:lnTo>
+                    <a:pt x="2220298" y="1281207"/>
+                  </a:lnTo>
+                  <a:lnTo>
+                    <a:pt x="2291920" y="1337960"/>
+                  </a:lnTo>
+                  <a:lnTo>
+                    <a:pt x="2363543" y="1393251"/>
+                  </a:lnTo>
+                  <a:lnTo>
+                    <a:pt x="2435165" y="1447116"/>
+                  </a:lnTo>
+                  <a:lnTo>
+                    <a:pt x="2506788" y="1499594"/>
+                  </a:lnTo>
+                  <a:lnTo>
+                    <a:pt x="2578410" y="1550720"/>
+                  </a:lnTo>
+                  <a:lnTo>
+                    <a:pt x="2650033" y="1600528"/>
+                  </a:lnTo>
+                  <a:lnTo>
+                    <a:pt x="2721655" y="1649053"/>
+                  </a:lnTo>
+                  <a:lnTo>
+                    <a:pt x="2793278" y="1696328"/>
+                  </a:lnTo>
+                  <a:lnTo>
+                    <a:pt x="2864901" y="1742384"/>
+                  </a:lnTo>
+                  <a:lnTo>
+                    <a:pt x="2936523" y="1787254"/>
+                  </a:lnTo>
+                  <a:lnTo>
+                    <a:pt x="3008146" y="1830967"/>
+                  </a:lnTo>
+                  <a:lnTo>
+                    <a:pt x="3079768" y="1873554"/>
+                  </a:lnTo>
+                  <a:lnTo>
+                    <a:pt x="3151391" y="1915044"/>
+                  </a:lnTo>
+                  <a:lnTo>
+                    <a:pt x="3223013" y="1955465"/>
+                  </a:lnTo>
+                  <a:lnTo>
+                    <a:pt x="3294636" y="1994844"/>
+                  </a:lnTo>
+                  <a:lnTo>
+                    <a:pt x="3366258" y="2033209"/>
+                  </a:lnTo>
+                  <a:lnTo>
+                    <a:pt x="3437881" y="2070585"/>
+                  </a:lnTo>
+                  <a:lnTo>
+                    <a:pt x="3509503" y="2106998"/>
+                  </a:lnTo>
+                  <a:lnTo>
+                    <a:pt x="3581126" y="2142472"/>
+                  </a:lnTo>
+                  <a:lnTo>
+                    <a:pt x="3652748" y="2177033"/>
+                  </a:lnTo>
+                  <a:lnTo>
+                    <a:pt x="3724371" y="2210703"/>
+                  </a:lnTo>
+                  <a:lnTo>
+                    <a:pt x="3795993" y="2243506"/>
+                  </a:lnTo>
+                  <a:lnTo>
+                    <a:pt x="3867616" y="2275463"/>
+                  </a:lnTo>
+                  <a:lnTo>
+                    <a:pt x="3939238" y="2306597"/>
+                  </a:lnTo>
+                  <a:lnTo>
+                    <a:pt x="4010861" y="2336928"/>
+                  </a:lnTo>
+                  <a:lnTo>
+                    <a:pt x="4082483" y="2366478"/>
+                  </a:lnTo>
+                  <a:lnTo>
+                    <a:pt x="4154106" y="2395267"/>
+                  </a:lnTo>
+                  <a:lnTo>
+                    <a:pt x="4225729" y="2423314"/>
+                  </a:lnTo>
+                  <a:lnTo>
+                    <a:pt x="4297351" y="2450638"/>
+                  </a:lnTo>
+                  <a:lnTo>
+                    <a:pt x="4368974" y="2477258"/>
+                  </a:lnTo>
+                  <a:lnTo>
+                    <a:pt x="4440596" y="2503192"/>
+                  </a:lnTo>
+                  <a:lnTo>
+                    <a:pt x="4512219" y="2528458"/>
+                  </a:lnTo>
+                  <a:lnTo>
+                    <a:pt x="4583841" y="2553073"/>
+                  </a:lnTo>
+                  <a:lnTo>
+                    <a:pt x="4655464" y="2577054"/>
+                  </a:lnTo>
+                  <a:lnTo>
+                    <a:pt x="4727086" y="2600417"/>
+                  </a:lnTo>
+                  <a:lnTo>
+                    <a:pt x="4798709" y="2623177"/>
+                  </a:lnTo>
+                  <a:lnTo>
+                    <a:pt x="4870331" y="2645352"/>
+                  </a:lnTo>
+                  <a:lnTo>
+                    <a:pt x="4941954" y="2648330"/>
+                  </a:lnTo>
+                  <a:lnTo>
+                    <a:pt x="5013576" y="2638139"/>
+                  </a:lnTo>
+                  <a:lnTo>
+                    <a:pt x="5085199" y="2627823"/>
+                  </a:lnTo>
+                  <a:lnTo>
+                    <a:pt x="5156821" y="2617381"/>
+                  </a:lnTo>
+                  <a:lnTo>
+                    <a:pt x="5228444" y="2606812"/>
+                  </a:lnTo>
+                  <a:lnTo>
+                    <a:pt x="5300066" y="2596113"/>
+                  </a:lnTo>
+                  <a:lnTo>
+                    <a:pt x="5371689" y="2585285"/>
+                  </a:lnTo>
+                  <a:lnTo>
+                    <a:pt x="5443311" y="2574324"/>
+                  </a:lnTo>
+                  <a:lnTo>
+                    <a:pt x="5514934" y="2563230"/>
+                  </a:lnTo>
+                  <a:lnTo>
+                    <a:pt x="5586557" y="2552000"/>
+                  </a:lnTo>
+                  <a:lnTo>
+                    <a:pt x="5658179" y="2540633"/>
+                  </a:lnTo>
+                  <a:lnTo>
+                    <a:pt x="5729802" y="2529128"/>
+                  </a:lnTo>
+                  <a:lnTo>
+                    <a:pt x="5801424" y="2517482"/>
+                  </a:lnTo>
+                  <a:lnTo>
+                    <a:pt x="5873047" y="2505694"/>
+                  </a:lnTo>
+                  <a:lnTo>
+                    <a:pt x="5944669" y="2493762"/>
+                  </a:lnTo>
+                  <a:lnTo>
+                    <a:pt x="6016292" y="2481685"/>
+                  </a:lnTo>
+                  <a:lnTo>
+                    <a:pt x="6087914" y="2469460"/>
+                  </a:lnTo>
+                  <a:lnTo>
+                    <a:pt x="6159537" y="2457086"/>
+                  </a:lnTo>
+                  <a:lnTo>
+                    <a:pt x="6231159" y="2444562"/>
+                  </a:lnTo>
+                  <a:lnTo>
+                    <a:pt x="6302782" y="2431884"/>
+                  </a:lnTo>
+                  <a:lnTo>
+                    <a:pt x="6374404" y="2419052"/>
+                  </a:lnTo>
+                  <a:lnTo>
+                    <a:pt x="6446027" y="2406063"/>
+                  </a:lnTo>
+                  <a:lnTo>
+                    <a:pt x="6517649" y="2392916"/>
+                  </a:lnTo>
+                  <a:lnTo>
+                    <a:pt x="6589272" y="2379609"/>
+                  </a:lnTo>
+                  <a:lnTo>
+                    <a:pt x="6660894" y="2366139"/>
+                  </a:lnTo>
+                  <a:lnTo>
+                    <a:pt x="6732517" y="2352505"/>
+                  </a:lnTo>
+                  <a:lnTo>
+                    <a:pt x="6804139" y="2338704"/>
+                  </a:lnTo>
+                  <a:lnTo>
+                    <a:pt x="6875762" y="2324735"/>
+                  </a:lnTo>
+                  <a:lnTo>
+                    <a:pt x="6947385" y="2310596"/>
+                  </a:lnTo>
+                  <a:lnTo>
+                    <a:pt x="7019007" y="2296284"/>
+                  </a:lnTo>
+                  <a:lnTo>
+                    <a:pt x="7090630" y="2281798"/>
+                  </a:lnTo>
+                  <a:lnTo>
+                    <a:pt x="7090630" y="3110499"/>
+                  </a:lnTo>
+                  <a:lnTo>
+                    <a:pt x="7019007" y="3100627"/>
+                  </a:lnTo>
+                  <a:lnTo>
+                    <a:pt x="6947385" y="3090495"/>
+                  </a:lnTo>
+                  <a:lnTo>
+                    <a:pt x="6875762" y="3080094"/>
+                  </a:lnTo>
+                  <a:lnTo>
+                    <a:pt x="6804139" y="3069418"/>
+                  </a:lnTo>
+                  <a:lnTo>
+                    <a:pt x="6732517" y="3058459"/>
+                  </a:lnTo>
+                  <a:lnTo>
+                    <a:pt x="6660894" y="3047211"/>
+                  </a:lnTo>
+                  <a:lnTo>
+                    <a:pt x="6589272" y="3035665"/>
+                  </a:lnTo>
+                  <a:lnTo>
+                    <a:pt x="6517649" y="3023814"/>
+                  </a:lnTo>
+                  <a:lnTo>
+                    <a:pt x="6446027" y="3011650"/>
+                  </a:lnTo>
+                  <a:lnTo>
+                    <a:pt x="6374404" y="2999163"/>
+                  </a:lnTo>
+                  <a:lnTo>
+                    <a:pt x="6302782" y="2986347"/>
+                  </a:lnTo>
+                  <a:lnTo>
+                    <a:pt x="6231159" y="2973192"/>
+                  </a:lnTo>
+                  <a:lnTo>
+                    <a:pt x="6159537" y="2959688"/>
+                  </a:lnTo>
+                  <a:lnTo>
+                    <a:pt x="6087914" y="2945828"/>
+                  </a:lnTo>
+                  <a:lnTo>
+                    <a:pt x="6016292" y="2931600"/>
+                  </a:lnTo>
+                  <a:lnTo>
+                    <a:pt x="5944669" y="2916997"/>
+                  </a:lnTo>
+                  <a:lnTo>
+                    <a:pt x="5873047" y="2902007"/>
+                  </a:lnTo>
+                  <a:lnTo>
+                    <a:pt x="5801424" y="2886621"/>
+                  </a:lnTo>
+                  <a:lnTo>
+                    <a:pt x="5729802" y="2870828"/>
+                  </a:lnTo>
+                  <a:lnTo>
+                    <a:pt x="5658179" y="2854617"/>
+                  </a:lnTo>
+                  <a:lnTo>
+                    <a:pt x="5586557" y="2837978"/>
+                  </a:lnTo>
+                  <a:lnTo>
+                    <a:pt x="5514934" y="2820898"/>
+                  </a:lnTo>
+                  <a:lnTo>
+                    <a:pt x="5443311" y="2803367"/>
+                  </a:lnTo>
+                  <a:lnTo>
+                    <a:pt x="5371689" y="2785372"/>
+                  </a:lnTo>
+                  <a:lnTo>
+                    <a:pt x="5300066" y="2766901"/>
+                  </a:lnTo>
+                  <a:lnTo>
+                    <a:pt x="5228444" y="2747941"/>
+                  </a:lnTo>
+                  <a:lnTo>
+                    <a:pt x="5156821" y="2728480"/>
+                  </a:lnTo>
+                  <a:lnTo>
+                    <a:pt x="5085199" y="2708505"/>
+                  </a:lnTo>
+                  <a:lnTo>
+                    <a:pt x="5013576" y="2688001"/>
+                  </a:lnTo>
+                  <a:lnTo>
+                    <a:pt x="4941954" y="2666955"/>
+                  </a:lnTo>
+                  <a:lnTo>
+                    <a:pt x="4870331" y="2658399"/>
+                  </a:lnTo>
+                  <a:lnTo>
+                    <a:pt x="4798709" y="2668346"/>
+                  </a:lnTo>
+                  <a:lnTo>
+                    <a:pt x="4727086" y="2678174"/>
+                  </a:lnTo>
+                  <a:lnTo>
+                    <a:pt x="4655464" y="2687883"/>
+                  </a:lnTo>
+                  <a:lnTo>
+                    <a:pt x="4583841" y="2697475"/>
+                  </a:lnTo>
+                  <a:lnTo>
+                    <a:pt x="4512219" y="2706952"/>
+                  </a:lnTo>
+                  <a:lnTo>
+                    <a:pt x="4440596" y="2716314"/>
+                  </a:lnTo>
+                  <a:lnTo>
+                    <a:pt x="4368974" y="2725563"/>
+                  </a:lnTo>
+                  <a:lnTo>
+                    <a:pt x="4297351" y="2734701"/>
+                  </a:lnTo>
+                  <a:lnTo>
+                    <a:pt x="4225729" y="2743729"/>
+                  </a:lnTo>
+                  <a:lnTo>
+                    <a:pt x="4154106" y="2752648"/>
+                  </a:lnTo>
+                  <a:lnTo>
+                    <a:pt x="4082483" y="2761460"/>
+                  </a:lnTo>
+                  <a:lnTo>
+                    <a:pt x="4010861" y="2770165"/>
+                  </a:lnTo>
+                  <a:lnTo>
+                    <a:pt x="3939238" y="2778765"/>
+                  </a:lnTo>
+                  <a:lnTo>
+                    <a:pt x="3867616" y="2787262"/>
+                  </a:lnTo>
+                  <a:lnTo>
+                    <a:pt x="3795993" y="2795656"/>
+                  </a:lnTo>
+                  <a:lnTo>
+                    <a:pt x="3724371" y="2803950"/>
+                  </a:lnTo>
+                  <a:lnTo>
+                    <a:pt x="3652748" y="2812143"/>
+                  </a:lnTo>
+                  <a:lnTo>
+                    <a:pt x="3581126" y="2820237"/>
+                  </a:lnTo>
+                  <a:lnTo>
+                    <a:pt x="3509503" y="2828234"/>
+                  </a:lnTo>
+                  <a:lnTo>
+                    <a:pt x="3437881" y="2836135"/>
+                  </a:lnTo>
+                  <a:lnTo>
+                    <a:pt x="3366258" y="2843940"/>
+                  </a:lnTo>
+                  <a:lnTo>
+                    <a:pt x="3294636" y="2851651"/>
+                  </a:lnTo>
+                  <a:lnTo>
+                    <a:pt x="3223013" y="2859269"/>
+                  </a:lnTo>
+                  <a:lnTo>
+                    <a:pt x="3151391" y="2866796"/>
+                  </a:lnTo>
+                  <a:lnTo>
+                    <a:pt x="3079768" y="2874232"/>
+                  </a:lnTo>
+                  <a:lnTo>
+                    <a:pt x="3008146" y="2881578"/>
+                  </a:lnTo>
+                  <a:lnTo>
+                    <a:pt x="2936523" y="2888835"/>
+                  </a:lnTo>
+                  <a:lnTo>
+                    <a:pt x="2864901" y="2896005"/>
+                  </a:lnTo>
+                  <a:lnTo>
+                    <a:pt x="2793278" y="2903089"/>
+                  </a:lnTo>
+                  <a:lnTo>
+                    <a:pt x="2721655" y="2910088"/>
+                  </a:lnTo>
+                  <a:lnTo>
+                    <a:pt x="2650033" y="2917001"/>
+                  </a:lnTo>
+                  <a:lnTo>
+                    <a:pt x="2578410" y="2923832"/>
+                  </a:lnTo>
+                  <a:lnTo>
+                    <a:pt x="2506788" y="2930580"/>
+                  </a:lnTo>
+                  <a:lnTo>
+                    <a:pt x="2435165" y="2937247"/>
+                  </a:lnTo>
+                  <a:lnTo>
+                    <a:pt x="2363543" y="2943834"/>
+                  </a:lnTo>
+                  <a:lnTo>
+                    <a:pt x="2291920" y="2950341"/>
+                  </a:lnTo>
+                  <a:lnTo>
+                    <a:pt x="2220298" y="2956770"/>
+                  </a:lnTo>
+                  <a:lnTo>
+                    <a:pt x="2148675" y="2963122"/>
+                  </a:lnTo>
+                  <a:lnTo>
+                    <a:pt x="2077053" y="2969396"/>
+                  </a:lnTo>
+                  <a:lnTo>
+                    <a:pt x="2005430" y="2975595"/>
+                  </a:lnTo>
+                  <a:lnTo>
+                    <a:pt x="1933808" y="2981720"/>
+                  </a:lnTo>
+                  <a:lnTo>
+                    <a:pt x="1862185" y="2987771"/>
+                  </a:lnTo>
+                  <a:lnTo>
+                    <a:pt x="1790563" y="2993748"/>
+                  </a:lnTo>
+                  <a:lnTo>
+                    <a:pt x="1718940" y="2999654"/>
+                  </a:lnTo>
+                  <a:lnTo>
+                    <a:pt x="1647318" y="3005488"/>
+                  </a:lnTo>
+                  <a:lnTo>
+                    <a:pt x="1575695" y="3011253"/>
+                  </a:lnTo>
+                  <a:lnTo>
+                    <a:pt x="1504073" y="3016947"/>
+                  </a:lnTo>
+                  <a:lnTo>
+                    <a:pt x="1432450" y="3022573"/>
+                  </a:lnTo>
+                  <a:lnTo>
+                    <a:pt x="1360827" y="3028132"/>
+                  </a:lnTo>
+                  <a:lnTo>
+                    <a:pt x="1289205" y="3033623"/>
+                  </a:lnTo>
+                  <a:lnTo>
+                    <a:pt x="1217582" y="3039048"/>
+                  </a:lnTo>
+                  <a:lnTo>
+                    <a:pt x="1145960" y="3044408"/>
+                  </a:lnTo>
+                  <a:lnTo>
+                    <a:pt x="1074337" y="3049703"/>
+                  </a:lnTo>
+                  <a:lnTo>
+                    <a:pt x="1002715" y="3054934"/>
+                  </a:lnTo>
+                  <a:lnTo>
+                    <a:pt x="931092" y="3060102"/>
+                  </a:lnTo>
+                  <a:lnTo>
+                    <a:pt x="859470" y="3065208"/>
+                  </a:lnTo>
+                  <a:lnTo>
+                    <a:pt x="787847" y="3070253"/>
+                  </a:lnTo>
+                  <a:lnTo>
+                    <a:pt x="716225" y="3075236"/>
+                  </a:lnTo>
+                  <a:lnTo>
+                    <a:pt x="644602" y="3080160"/>
+                  </a:lnTo>
+                  <a:lnTo>
+                    <a:pt x="572980" y="3085024"/>
+                  </a:lnTo>
+                  <a:lnTo>
+                    <a:pt x="501357" y="3089830"/>
+                  </a:lnTo>
+                  <a:lnTo>
+                    <a:pt x="429735" y="3094577"/>
+                  </a:lnTo>
+                  <a:lnTo>
+                    <a:pt x="358112" y="3099268"/>
+                  </a:lnTo>
+                  <a:lnTo>
+                    <a:pt x="286490" y="3103902"/>
+                  </a:lnTo>
+                  <a:lnTo>
+                    <a:pt x="214867" y="3108480"/>
+                  </a:lnTo>
+                  <a:lnTo>
+                    <a:pt x="143245" y="3113002"/>
+                  </a:lnTo>
+                  <a:lnTo>
+                    <a:pt x="71622" y="3117471"/>
+                  </a:lnTo>
+                  <a:lnTo>
+                    <a:pt x="0" y="3121885"/>
                   </a:lnTo>
                   <a:close/>
                 </a:path>
@@ -3546,225 +3594,273 @@
           </p:nvSpPr>
           <p:spPr>
             <a:xfrm>
-              <a:off x="3280826" y="2073503"/>
-              <a:ext cx="4981852" cy="2654270"/>
+              <a:off x="2134618" y="2073503"/>
+              <a:ext cx="6128060" cy="2648330"/>
             </a:xfrm>
             <a:custGeom>
               <a:avLst/>
               <a:pathLst>
-                <a:path w="4981852" h="2654270">
+                <a:path w="6128060" h="2648330">
                   <a:moveTo>
                     <a:pt x="0" y="0"/>
                   </a:moveTo>
                   <a:lnTo>
-                    <a:pt x="39898" y="71304"/>
-                  </a:lnTo>
-                  <a:lnTo>
-                    <a:pt x="111520" y="194677"/>
-                  </a:lnTo>
-                  <a:lnTo>
-                    <a:pt x="183143" y="313590"/>
-                  </a:lnTo>
-                  <a:lnTo>
-                    <a:pt x="254765" y="428203"/>
-                  </a:lnTo>
-                  <a:lnTo>
-                    <a:pt x="326388" y="538673"/>
-                  </a:lnTo>
-                  <a:lnTo>
-                    <a:pt x="398010" y="645148"/>
-                  </a:lnTo>
-                  <a:lnTo>
-                    <a:pt x="469633" y="747775"/>
-                  </a:lnTo>
-                  <a:lnTo>
-                    <a:pt x="541256" y="846691"/>
-                  </a:lnTo>
-                  <a:lnTo>
-                    <a:pt x="612878" y="942030"/>
-                  </a:lnTo>
-                  <a:lnTo>
-                    <a:pt x="684501" y="1033923"/>
-                  </a:lnTo>
-                  <a:lnTo>
-                    <a:pt x="756123" y="1122494"/>
-                  </a:lnTo>
-                  <a:lnTo>
-                    <a:pt x="827746" y="1207862"/>
-                  </a:lnTo>
-                  <a:lnTo>
-                    <a:pt x="899368" y="1290144"/>
-                  </a:lnTo>
-                  <a:lnTo>
-                    <a:pt x="970991" y="1369451"/>
-                  </a:lnTo>
-                  <a:lnTo>
-                    <a:pt x="1042613" y="1445891"/>
-                  </a:lnTo>
-                  <a:lnTo>
-                    <a:pt x="1114236" y="1519568"/>
-                  </a:lnTo>
-                  <a:lnTo>
-                    <a:pt x="1185858" y="1590580"/>
-                  </a:lnTo>
-                  <a:lnTo>
-                    <a:pt x="1257481" y="1659026"/>
-                  </a:lnTo>
-                  <a:lnTo>
-                    <a:pt x="1329103" y="1724996"/>
-                  </a:lnTo>
-                  <a:lnTo>
-                    <a:pt x="1400726" y="1788582"/>
-                  </a:lnTo>
-                  <a:lnTo>
-                    <a:pt x="1472348" y="1849869"/>
-                  </a:lnTo>
-                  <a:lnTo>
-                    <a:pt x="1543971" y="1908940"/>
-                  </a:lnTo>
-                  <a:lnTo>
-                    <a:pt x="1615593" y="1965875"/>
-                  </a:lnTo>
-                  <a:lnTo>
-                    <a:pt x="1687216" y="2020752"/>
-                  </a:lnTo>
-                  <a:lnTo>
-                    <a:pt x="1758838" y="2073645"/>
-                  </a:lnTo>
-                  <a:lnTo>
-                    <a:pt x="1830461" y="2124625"/>
-                  </a:lnTo>
-                  <a:lnTo>
-                    <a:pt x="1902084" y="2173763"/>
-                  </a:lnTo>
-                  <a:lnTo>
-                    <a:pt x="1973706" y="2221124"/>
-                  </a:lnTo>
-                  <a:lnTo>
-                    <a:pt x="2045329" y="2266772"/>
-                  </a:lnTo>
-                  <a:lnTo>
-                    <a:pt x="2116951" y="2310771"/>
-                  </a:lnTo>
-                  <a:lnTo>
-                    <a:pt x="2188574" y="2353178"/>
-                  </a:lnTo>
-                  <a:lnTo>
-                    <a:pt x="2260196" y="2394053"/>
-                  </a:lnTo>
-                  <a:lnTo>
-                    <a:pt x="2331819" y="2433449"/>
-                  </a:lnTo>
-                  <a:lnTo>
-                    <a:pt x="2403441" y="2471422"/>
-                  </a:lnTo>
-                  <a:lnTo>
-                    <a:pt x="2475064" y="2508021"/>
-                  </a:lnTo>
-                  <a:lnTo>
-                    <a:pt x="2546686" y="2543297"/>
-                  </a:lnTo>
-                  <a:lnTo>
-                    <a:pt x="2618309" y="2577298"/>
-                  </a:lnTo>
-                  <a:lnTo>
-                    <a:pt x="2689931" y="2610070"/>
-                  </a:lnTo>
-                  <a:lnTo>
-                    <a:pt x="2761554" y="2641657"/>
-                  </a:lnTo>
-                  <a:lnTo>
-                    <a:pt x="2833176" y="2654270"/>
-                  </a:lnTo>
-                  <a:lnTo>
-                    <a:pt x="2904799" y="2654249"/>
-                  </a:lnTo>
-                  <a:lnTo>
-                    <a:pt x="2976421" y="2654227"/>
-                  </a:lnTo>
-                  <a:lnTo>
-                    <a:pt x="3048044" y="2654206"/>
-                  </a:lnTo>
-                  <a:lnTo>
-                    <a:pt x="3119666" y="2654184"/>
-                  </a:lnTo>
-                  <a:lnTo>
-                    <a:pt x="3191289" y="2654163"/>
-                  </a:lnTo>
-                  <a:lnTo>
-                    <a:pt x="3262912" y="2654141"/>
-                  </a:lnTo>
-                  <a:lnTo>
-                    <a:pt x="3334534" y="2654120"/>
-                  </a:lnTo>
-                  <a:lnTo>
-                    <a:pt x="3406157" y="2654098"/>
-                  </a:lnTo>
-                  <a:lnTo>
-                    <a:pt x="3477779" y="2654077"/>
-                  </a:lnTo>
-                  <a:lnTo>
-                    <a:pt x="3549402" y="2654055"/>
-                  </a:lnTo>
-                  <a:lnTo>
-                    <a:pt x="3621024" y="2654034"/>
-                  </a:lnTo>
-                  <a:lnTo>
-                    <a:pt x="3692647" y="2654012"/>
-                  </a:lnTo>
-                  <a:lnTo>
-                    <a:pt x="3764269" y="2653991"/>
-                  </a:lnTo>
-                  <a:lnTo>
-                    <a:pt x="3835892" y="2653969"/>
-                  </a:lnTo>
-                  <a:lnTo>
-                    <a:pt x="3907514" y="2653948"/>
-                  </a:lnTo>
-                  <a:lnTo>
-                    <a:pt x="3979137" y="2653926"/>
-                  </a:lnTo>
-                  <a:lnTo>
-                    <a:pt x="4050759" y="2653905"/>
-                  </a:lnTo>
-                  <a:lnTo>
-                    <a:pt x="4122382" y="2653883"/>
-                  </a:lnTo>
-                  <a:lnTo>
-                    <a:pt x="4194004" y="2653862"/>
-                  </a:lnTo>
-                  <a:lnTo>
-                    <a:pt x="4265627" y="2653840"/>
-                  </a:lnTo>
-                  <a:lnTo>
-                    <a:pt x="4337249" y="2653819"/>
-                  </a:lnTo>
-                  <a:lnTo>
-                    <a:pt x="4408872" y="2653797"/>
-                  </a:lnTo>
-                  <a:lnTo>
-                    <a:pt x="4480494" y="2653775"/>
-                  </a:lnTo>
-                  <a:lnTo>
-                    <a:pt x="4552117" y="2653754"/>
-                  </a:lnTo>
-                  <a:lnTo>
-                    <a:pt x="4623739" y="2653732"/>
-                  </a:lnTo>
-                  <a:lnTo>
-                    <a:pt x="4695362" y="2653711"/>
-                  </a:lnTo>
-                  <a:lnTo>
-                    <a:pt x="4766985" y="2653689"/>
-                  </a:lnTo>
-                  <a:lnTo>
-                    <a:pt x="4838607" y="2653668"/>
-                  </a:lnTo>
-                  <a:lnTo>
-                    <a:pt x="4910230" y="2653646"/>
-                  </a:lnTo>
-                  <a:lnTo>
-                    <a:pt x="4981852" y="2653625"/>
+                    <a:pt x="40146" y="50892"/>
+                  </a:lnTo>
+                  <a:lnTo>
+                    <a:pt x="111768" y="139346"/>
+                  </a:lnTo>
+                  <a:lnTo>
+                    <a:pt x="183391" y="225521"/>
+                  </a:lnTo>
+                  <a:lnTo>
+                    <a:pt x="255013" y="309476"/>
+                  </a:lnTo>
+                  <a:lnTo>
+                    <a:pt x="326636" y="391267"/>
+                  </a:lnTo>
+                  <a:lnTo>
+                    <a:pt x="398258" y="470951"/>
+                  </a:lnTo>
+                  <a:lnTo>
+                    <a:pt x="469881" y="548582"/>
+                  </a:lnTo>
+                  <a:lnTo>
+                    <a:pt x="541503" y="624212"/>
+                  </a:lnTo>
+                  <a:lnTo>
+                    <a:pt x="613126" y="697894"/>
+                  </a:lnTo>
+                  <a:lnTo>
+                    <a:pt x="684748" y="769677"/>
+                  </a:lnTo>
+                  <a:lnTo>
+                    <a:pt x="756371" y="839610"/>
+                  </a:lnTo>
+                  <a:lnTo>
+                    <a:pt x="827993" y="907742"/>
+                  </a:lnTo>
+                  <a:lnTo>
+                    <a:pt x="899616" y="974118"/>
+                  </a:lnTo>
+                  <a:lnTo>
+                    <a:pt x="971238" y="1038783"/>
+                  </a:lnTo>
+                  <a:lnTo>
+                    <a:pt x="1042861" y="1101783"/>
+                  </a:lnTo>
+                  <a:lnTo>
+                    <a:pt x="1114483" y="1163159"/>
+                  </a:lnTo>
+                  <a:lnTo>
+                    <a:pt x="1186106" y="1222953"/>
+                  </a:lnTo>
+                  <a:lnTo>
+                    <a:pt x="1257729" y="1281207"/>
+                  </a:lnTo>
+                  <a:lnTo>
+                    <a:pt x="1329351" y="1337960"/>
+                  </a:lnTo>
+                  <a:lnTo>
+                    <a:pt x="1400974" y="1393251"/>
+                  </a:lnTo>
+                  <a:lnTo>
+                    <a:pt x="1472596" y="1447116"/>
+                  </a:lnTo>
+                  <a:lnTo>
+                    <a:pt x="1544219" y="1499594"/>
+                  </a:lnTo>
+                  <a:lnTo>
+                    <a:pt x="1615841" y="1550720"/>
+                  </a:lnTo>
+                  <a:lnTo>
+                    <a:pt x="1687464" y="1600528"/>
+                  </a:lnTo>
+                  <a:lnTo>
+                    <a:pt x="1759086" y="1649053"/>
+                  </a:lnTo>
+                  <a:lnTo>
+                    <a:pt x="1830709" y="1696328"/>
+                  </a:lnTo>
+                  <a:lnTo>
+                    <a:pt x="1902331" y="1742384"/>
+                  </a:lnTo>
+                  <a:lnTo>
+                    <a:pt x="1973954" y="1787254"/>
+                  </a:lnTo>
+                  <a:lnTo>
+                    <a:pt x="2045576" y="1830967"/>
+                  </a:lnTo>
+                  <a:lnTo>
+                    <a:pt x="2117199" y="1873554"/>
+                  </a:lnTo>
+                  <a:lnTo>
+                    <a:pt x="2188821" y="1915044"/>
+                  </a:lnTo>
+                  <a:lnTo>
+                    <a:pt x="2260444" y="1955465"/>
+                  </a:lnTo>
+                  <a:lnTo>
+                    <a:pt x="2332066" y="1994844"/>
+                  </a:lnTo>
+                  <a:lnTo>
+                    <a:pt x="2403689" y="2033209"/>
+                  </a:lnTo>
+                  <a:lnTo>
+                    <a:pt x="2475311" y="2070585"/>
+                  </a:lnTo>
+                  <a:lnTo>
+                    <a:pt x="2546934" y="2106998"/>
+                  </a:lnTo>
+                  <a:lnTo>
+                    <a:pt x="2618557" y="2142472"/>
+                  </a:lnTo>
+                  <a:lnTo>
+                    <a:pt x="2690179" y="2177033"/>
+                  </a:lnTo>
+                  <a:lnTo>
+                    <a:pt x="2761802" y="2210703"/>
+                  </a:lnTo>
+                  <a:lnTo>
+                    <a:pt x="2833424" y="2243506"/>
+                  </a:lnTo>
+                  <a:lnTo>
+                    <a:pt x="2905047" y="2275463"/>
+                  </a:lnTo>
+                  <a:lnTo>
+                    <a:pt x="2976669" y="2306597"/>
+                  </a:lnTo>
+                  <a:lnTo>
+                    <a:pt x="3048292" y="2336928"/>
+                  </a:lnTo>
+                  <a:lnTo>
+                    <a:pt x="3119914" y="2366478"/>
+                  </a:lnTo>
+                  <a:lnTo>
+                    <a:pt x="3191537" y="2395267"/>
+                  </a:lnTo>
+                  <a:lnTo>
+                    <a:pt x="3263159" y="2423314"/>
+                  </a:lnTo>
+                  <a:lnTo>
+                    <a:pt x="3334782" y="2450638"/>
+                  </a:lnTo>
+                  <a:lnTo>
+                    <a:pt x="3406404" y="2477258"/>
+                  </a:lnTo>
+                  <a:lnTo>
+                    <a:pt x="3478027" y="2503192"/>
+                  </a:lnTo>
+                  <a:lnTo>
+                    <a:pt x="3549649" y="2528458"/>
+                  </a:lnTo>
+                  <a:lnTo>
+                    <a:pt x="3621272" y="2553073"/>
+                  </a:lnTo>
+                  <a:lnTo>
+                    <a:pt x="3692894" y="2577054"/>
+                  </a:lnTo>
+                  <a:lnTo>
+                    <a:pt x="3764517" y="2600417"/>
+                  </a:lnTo>
+                  <a:lnTo>
+                    <a:pt x="3836139" y="2623177"/>
+                  </a:lnTo>
+                  <a:lnTo>
+                    <a:pt x="3907762" y="2645352"/>
+                  </a:lnTo>
+                  <a:lnTo>
+                    <a:pt x="3979385" y="2648330"/>
+                  </a:lnTo>
+                  <a:lnTo>
+                    <a:pt x="4051007" y="2638139"/>
+                  </a:lnTo>
+                  <a:lnTo>
+                    <a:pt x="4122630" y="2627823"/>
+                  </a:lnTo>
+                  <a:lnTo>
+                    <a:pt x="4194252" y="2617381"/>
+                  </a:lnTo>
+                  <a:lnTo>
+                    <a:pt x="4265875" y="2606812"/>
+                  </a:lnTo>
+                  <a:lnTo>
+                    <a:pt x="4337497" y="2596113"/>
+                  </a:lnTo>
+                  <a:lnTo>
+                    <a:pt x="4409120" y="2585285"/>
+                  </a:lnTo>
+                  <a:lnTo>
+                    <a:pt x="4480742" y="2574324"/>
+                  </a:lnTo>
+                  <a:lnTo>
+                    <a:pt x="4552365" y="2563230"/>
+                  </a:lnTo>
+                  <a:lnTo>
+                    <a:pt x="4623987" y="2552000"/>
+                  </a:lnTo>
+                  <a:lnTo>
+                    <a:pt x="4695610" y="2540633"/>
+                  </a:lnTo>
+                  <a:lnTo>
+                    <a:pt x="4767232" y="2529128"/>
+                  </a:lnTo>
+                  <a:lnTo>
+                    <a:pt x="4838855" y="2517482"/>
+                  </a:lnTo>
+                  <a:lnTo>
+                    <a:pt x="4910477" y="2505694"/>
+                  </a:lnTo>
+                  <a:lnTo>
+                    <a:pt x="4982100" y="2493762"/>
+                  </a:lnTo>
+                  <a:lnTo>
+                    <a:pt x="5053722" y="2481685"/>
+                  </a:lnTo>
+                  <a:lnTo>
+                    <a:pt x="5125345" y="2469460"/>
+                  </a:lnTo>
+                  <a:lnTo>
+                    <a:pt x="5196967" y="2457086"/>
+                  </a:lnTo>
+                  <a:lnTo>
+                    <a:pt x="5268590" y="2444562"/>
+                  </a:lnTo>
+                  <a:lnTo>
+                    <a:pt x="5340213" y="2431884"/>
+                  </a:lnTo>
+                  <a:lnTo>
+                    <a:pt x="5411835" y="2419052"/>
+                  </a:lnTo>
+                  <a:lnTo>
+                    <a:pt x="5483458" y="2406063"/>
+                  </a:lnTo>
+                  <a:lnTo>
+                    <a:pt x="5555080" y="2392916"/>
+                  </a:lnTo>
+                  <a:lnTo>
+                    <a:pt x="5626703" y="2379609"/>
+                  </a:lnTo>
+                  <a:lnTo>
+                    <a:pt x="5698325" y="2366139"/>
+                  </a:lnTo>
+                  <a:lnTo>
+                    <a:pt x="5769948" y="2352505"/>
+                  </a:lnTo>
+                  <a:lnTo>
+                    <a:pt x="5841570" y="2338704"/>
+                  </a:lnTo>
+                  <a:lnTo>
+                    <a:pt x="5913193" y="2324735"/>
+                  </a:lnTo>
+                  <a:lnTo>
+                    <a:pt x="5984815" y="2310596"/>
+                  </a:lnTo>
+                  <a:lnTo>
+                    <a:pt x="6056438" y="2296284"/>
+                  </a:lnTo>
+                  <a:lnTo>
+                    <a:pt x="6128060" y="2281798"/>
                   </a:lnTo>
                 </a:path>
               </a:pathLst>
@@ -3784,312 +3880,312 @@
           </p:nvSpPr>
           <p:spPr>
             <a:xfrm>
-              <a:off x="1172049" y="4727795"/>
-              <a:ext cx="7090630" cy="560550"/>
+              <a:off x="1172049" y="4731902"/>
+              <a:ext cx="7090630" cy="463486"/>
             </a:xfrm>
             <a:custGeom>
               <a:avLst/>
               <a:pathLst>
-                <a:path w="7090630" h="560550">
+                <a:path w="7090630" h="463486">
                   <a:moveTo>
-                    <a:pt x="7090630" y="560550"/>
+                    <a:pt x="7090630" y="452100"/>
                   </a:moveTo>
                   <a:lnTo>
-                    <a:pt x="7019007" y="550463"/>
-                  </a:lnTo>
-                  <a:lnTo>
-                    <a:pt x="6947385" y="539999"/>
-                  </a:lnTo>
-                  <a:lnTo>
-                    <a:pt x="6875762" y="529141"/>
-                  </a:lnTo>
-                  <a:lnTo>
-                    <a:pt x="6804139" y="517876"/>
-                  </a:lnTo>
-                  <a:lnTo>
-                    <a:pt x="6732517" y="506189"/>
-                  </a:lnTo>
-                  <a:lnTo>
-                    <a:pt x="6660894" y="494063"/>
-                  </a:lnTo>
-                  <a:lnTo>
-                    <a:pt x="6589272" y="481483"/>
-                  </a:lnTo>
-                  <a:lnTo>
-                    <a:pt x="6517649" y="468430"/>
-                  </a:lnTo>
-                  <a:lnTo>
-                    <a:pt x="6446027" y="454888"/>
-                  </a:lnTo>
-                  <a:lnTo>
-                    <a:pt x="6374404" y="440839"/>
-                  </a:lnTo>
-                  <a:lnTo>
-                    <a:pt x="6302782" y="426262"/>
-                  </a:lnTo>
-                  <a:lnTo>
-                    <a:pt x="6231159" y="411138"/>
-                  </a:lnTo>
-                  <a:lnTo>
-                    <a:pt x="6159537" y="395447"/>
-                  </a:lnTo>
-                  <a:lnTo>
-                    <a:pt x="6087914" y="379167"/>
-                  </a:lnTo>
-                  <a:lnTo>
-                    <a:pt x="6016292" y="362277"/>
-                  </a:lnTo>
-                  <a:lnTo>
-                    <a:pt x="5944669" y="344753"/>
-                  </a:lnTo>
-                  <a:lnTo>
-                    <a:pt x="5873047" y="326572"/>
-                  </a:lnTo>
-                  <a:lnTo>
-                    <a:pt x="5801424" y="307709"/>
-                  </a:lnTo>
-                  <a:lnTo>
-                    <a:pt x="5729802" y="288138"/>
-                  </a:lnTo>
-                  <a:lnTo>
-                    <a:pt x="5658179" y="267833"/>
-                  </a:lnTo>
-                  <a:lnTo>
-                    <a:pt x="5586557" y="246767"/>
-                  </a:lnTo>
-                  <a:lnTo>
-                    <a:pt x="5514934" y="224910"/>
-                  </a:lnTo>
-                  <a:lnTo>
-                    <a:pt x="5443311" y="202234"/>
-                  </a:lnTo>
-                  <a:lnTo>
-                    <a:pt x="5371689" y="178707"/>
-                  </a:lnTo>
-                  <a:lnTo>
-                    <a:pt x="5300066" y="154297"/>
-                  </a:lnTo>
-                  <a:lnTo>
-                    <a:pt x="5228444" y="128972"/>
-                  </a:lnTo>
-                  <a:lnTo>
-                    <a:pt x="5156821" y="102697"/>
-                  </a:lnTo>
-                  <a:lnTo>
-                    <a:pt x="5085199" y="75437"/>
-                  </a:lnTo>
-                  <a:lnTo>
-                    <a:pt x="5013576" y="47153"/>
-                  </a:lnTo>
-                  <a:lnTo>
-                    <a:pt x="4941954" y="17809"/>
+                    <a:pt x="7019007" y="442228"/>
+                  </a:lnTo>
+                  <a:lnTo>
+                    <a:pt x="6947385" y="432095"/>
+                  </a:lnTo>
+                  <a:lnTo>
+                    <a:pt x="6875762" y="421694"/>
+                  </a:lnTo>
+                  <a:lnTo>
+                    <a:pt x="6804139" y="411018"/>
+                  </a:lnTo>
+                  <a:lnTo>
+                    <a:pt x="6732517" y="400060"/>
+                  </a:lnTo>
+                  <a:lnTo>
+                    <a:pt x="6660894" y="388812"/>
+                  </a:lnTo>
+                  <a:lnTo>
+                    <a:pt x="6589272" y="377266"/>
+                  </a:lnTo>
+                  <a:lnTo>
+                    <a:pt x="6517649" y="365415"/>
+                  </a:lnTo>
+                  <a:lnTo>
+                    <a:pt x="6446027" y="353250"/>
+                  </a:lnTo>
+                  <a:lnTo>
+                    <a:pt x="6374404" y="340764"/>
+                  </a:lnTo>
+                  <a:lnTo>
+                    <a:pt x="6302782" y="327948"/>
+                  </a:lnTo>
+                  <a:lnTo>
+                    <a:pt x="6231159" y="314792"/>
+                  </a:lnTo>
+                  <a:lnTo>
+                    <a:pt x="6159537" y="301289"/>
+                  </a:lnTo>
+                  <a:lnTo>
+                    <a:pt x="6087914" y="287428"/>
+                  </a:lnTo>
+                  <a:lnTo>
+                    <a:pt x="6016292" y="273201"/>
+                  </a:lnTo>
+                  <a:lnTo>
+                    <a:pt x="5944669" y="258597"/>
+                  </a:lnTo>
+                  <a:lnTo>
+                    <a:pt x="5873047" y="243608"/>
+                  </a:lnTo>
+                  <a:lnTo>
+                    <a:pt x="5801424" y="228222"/>
+                  </a:lnTo>
+                  <a:lnTo>
+                    <a:pt x="5729802" y="212429"/>
+                  </a:lnTo>
+                  <a:lnTo>
+                    <a:pt x="5658179" y="196218"/>
+                  </a:lnTo>
+                  <a:lnTo>
+                    <a:pt x="5586557" y="179578"/>
+                  </a:lnTo>
+                  <a:lnTo>
+                    <a:pt x="5514934" y="162499"/>
+                  </a:lnTo>
+                  <a:lnTo>
+                    <a:pt x="5443311" y="144967"/>
+                  </a:lnTo>
+                  <a:lnTo>
+                    <a:pt x="5371689" y="126972"/>
+                  </a:lnTo>
+                  <a:lnTo>
+                    <a:pt x="5300066" y="108501"/>
+                  </a:lnTo>
+                  <a:lnTo>
+                    <a:pt x="5228444" y="89542"/>
+                  </a:lnTo>
+                  <a:lnTo>
+                    <a:pt x="5156821" y="70081"/>
+                  </a:lnTo>
+                  <a:lnTo>
+                    <a:pt x="5085199" y="50105"/>
+                  </a:lnTo>
+                  <a:lnTo>
+                    <a:pt x="5013576" y="29601"/>
+                  </a:lnTo>
+                  <a:lnTo>
+                    <a:pt x="4941954" y="8555"/>
                   </a:lnTo>
                   <a:lnTo>
                     <a:pt x="4870331" y="0"/>
                   </a:lnTo>
                   <a:lnTo>
-                    <a:pt x="4798709" y="21"/>
-                  </a:lnTo>
-                  <a:lnTo>
-                    <a:pt x="4727086" y="43"/>
-                  </a:lnTo>
-                  <a:lnTo>
-                    <a:pt x="4655464" y="64"/>
-                  </a:lnTo>
-                  <a:lnTo>
-                    <a:pt x="4583841" y="86"/>
-                  </a:lnTo>
-                  <a:lnTo>
-                    <a:pt x="4512219" y="107"/>
-                  </a:lnTo>
-                  <a:lnTo>
-                    <a:pt x="4440596" y="128"/>
-                  </a:lnTo>
-                  <a:lnTo>
-                    <a:pt x="4368974" y="150"/>
-                  </a:lnTo>
-                  <a:lnTo>
-                    <a:pt x="4297351" y="171"/>
-                  </a:lnTo>
-                  <a:lnTo>
-                    <a:pt x="4225729" y="193"/>
-                  </a:lnTo>
-                  <a:lnTo>
-                    <a:pt x="4154106" y="214"/>
-                  </a:lnTo>
-                  <a:lnTo>
-                    <a:pt x="4082483" y="236"/>
-                  </a:lnTo>
-                  <a:lnTo>
-                    <a:pt x="4010861" y="257"/>
-                  </a:lnTo>
-                  <a:lnTo>
-                    <a:pt x="3939238" y="279"/>
-                  </a:lnTo>
-                  <a:lnTo>
-                    <a:pt x="3867616" y="300"/>
-                  </a:lnTo>
-                  <a:lnTo>
-                    <a:pt x="3795993" y="322"/>
-                  </a:lnTo>
-                  <a:lnTo>
-                    <a:pt x="3724371" y="343"/>
-                  </a:lnTo>
-                  <a:lnTo>
-                    <a:pt x="3652748" y="365"/>
-                  </a:lnTo>
-                  <a:lnTo>
-                    <a:pt x="3581126" y="386"/>
-                  </a:lnTo>
-                  <a:lnTo>
-                    <a:pt x="3509503" y="408"/>
-                  </a:lnTo>
-                  <a:lnTo>
-                    <a:pt x="3437881" y="429"/>
-                  </a:lnTo>
-                  <a:lnTo>
-                    <a:pt x="3366258" y="451"/>
-                  </a:lnTo>
-                  <a:lnTo>
-                    <a:pt x="3294636" y="472"/>
-                  </a:lnTo>
-                  <a:lnTo>
-                    <a:pt x="3223013" y="494"/>
-                  </a:lnTo>
-                  <a:lnTo>
-                    <a:pt x="3151391" y="515"/>
-                  </a:lnTo>
-                  <a:lnTo>
-                    <a:pt x="3079768" y="537"/>
-                  </a:lnTo>
-                  <a:lnTo>
-                    <a:pt x="3008146" y="558"/>
-                  </a:lnTo>
-                  <a:lnTo>
-                    <a:pt x="2936523" y="580"/>
-                  </a:lnTo>
-                  <a:lnTo>
-                    <a:pt x="2864901" y="601"/>
-                  </a:lnTo>
-                  <a:lnTo>
-                    <a:pt x="2793278" y="623"/>
-                  </a:lnTo>
-                  <a:lnTo>
-                    <a:pt x="2721655" y="644"/>
-                  </a:lnTo>
-                  <a:lnTo>
-                    <a:pt x="2650033" y="666"/>
-                  </a:lnTo>
-                  <a:lnTo>
-                    <a:pt x="2578410" y="687"/>
-                  </a:lnTo>
-                  <a:lnTo>
-                    <a:pt x="2506788" y="709"/>
-                  </a:lnTo>
-                  <a:lnTo>
-                    <a:pt x="2435165" y="730"/>
-                  </a:lnTo>
-                  <a:lnTo>
-                    <a:pt x="2363543" y="752"/>
-                  </a:lnTo>
-                  <a:lnTo>
-                    <a:pt x="2291920" y="773"/>
-                  </a:lnTo>
-                  <a:lnTo>
-                    <a:pt x="2220298" y="795"/>
-                  </a:lnTo>
-                  <a:lnTo>
-                    <a:pt x="2148675" y="816"/>
-                  </a:lnTo>
-                  <a:lnTo>
-                    <a:pt x="2077053" y="838"/>
-                  </a:lnTo>
-                  <a:lnTo>
-                    <a:pt x="2005430" y="859"/>
-                  </a:lnTo>
-                  <a:lnTo>
-                    <a:pt x="1933808" y="881"/>
-                  </a:lnTo>
-                  <a:lnTo>
-                    <a:pt x="1862185" y="902"/>
-                  </a:lnTo>
-                  <a:lnTo>
-                    <a:pt x="1790563" y="924"/>
-                  </a:lnTo>
-                  <a:lnTo>
-                    <a:pt x="1718940" y="945"/>
-                  </a:lnTo>
-                  <a:lnTo>
-                    <a:pt x="1647318" y="966"/>
-                  </a:lnTo>
-                  <a:lnTo>
-                    <a:pt x="1575695" y="988"/>
-                  </a:lnTo>
-                  <a:lnTo>
-                    <a:pt x="1504073" y="1009"/>
-                  </a:lnTo>
-                  <a:lnTo>
-                    <a:pt x="1432450" y="1031"/>
-                  </a:lnTo>
-                  <a:lnTo>
-                    <a:pt x="1360827" y="1052"/>
-                  </a:lnTo>
-                  <a:lnTo>
-                    <a:pt x="1289205" y="1074"/>
-                  </a:lnTo>
-                  <a:lnTo>
-                    <a:pt x="1217582" y="1095"/>
-                  </a:lnTo>
-                  <a:lnTo>
-                    <a:pt x="1145960" y="1117"/>
-                  </a:lnTo>
-                  <a:lnTo>
-                    <a:pt x="1074337" y="1138"/>
-                  </a:lnTo>
-                  <a:lnTo>
-                    <a:pt x="1002715" y="1160"/>
-                  </a:lnTo>
-                  <a:lnTo>
-                    <a:pt x="931092" y="1181"/>
-                  </a:lnTo>
-                  <a:lnTo>
-                    <a:pt x="859470" y="1203"/>
-                  </a:lnTo>
-                  <a:lnTo>
-                    <a:pt x="787847" y="1224"/>
-                  </a:lnTo>
-                  <a:lnTo>
-                    <a:pt x="716225" y="1246"/>
-                  </a:lnTo>
-                  <a:lnTo>
-                    <a:pt x="644602" y="1267"/>
-                  </a:lnTo>
-                  <a:lnTo>
-                    <a:pt x="572980" y="1289"/>
-                  </a:lnTo>
-                  <a:lnTo>
-                    <a:pt x="501357" y="1310"/>
-                  </a:lnTo>
-                  <a:lnTo>
-                    <a:pt x="429735" y="1332"/>
-                  </a:lnTo>
-                  <a:lnTo>
-                    <a:pt x="358112" y="1353"/>
-                  </a:lnTo>
-                  <a:lnTo>
-                    <a:pt x="286490" y="1374"/>
-                  </a:lnTo>
-                  <a:lnTo>
-                    <a:pt x="214867" y="1396"/>
-                  </a:lnTo>
-                  <a:lnTo>
-                    <a:pt x="143245" y="1417"/>
-                  </a:lnTo>
-                  <a:lnTo>
-                    <a:pt x="71622" y="1439"/>
-                  </a:lnTo>
-                  <a:lnTo>
-                    <a:pt x="0" y="1460"/>
+                    <a:pt x="4798709" y="9947"/>
+                  </a:lnTo>
+                  <a:lnTo>
+                    <a:pt x="4727086" y="19774"/>
+                  </a:lnTo>
+                  <a:lnTo>
+                    <a:pt x="4655464" y="29484"/>
+                  </a:lnTo>
+                  <a:lnTo>
+                    <a:pt x="4583841" y="39076"/>
+                  </a:lnTo>
+                  <a:lnTo>
+                    <a:pt x="4512219" y="48552"/>
+                  </a:lnTo>
+                  <a:lnTo>
+                    <a:pt x="4440596" y="57914"/>
+                  </a:lnTo>
+                  <a:lnTo>
+                    <a:pt x="4368974" y="67164"/>
+                  </a:lnTo>
+                  <a:lnTo>
+                    <a:pt x="4297351" y="76302"/>
+                  </a:lnTo>
+                  <a:lnTo>
+                    <a:pt x="4225729" y="85330"/>
+                  </a:lnTo>
+                  <a:lnTo>
+                    <a:pt x="4154106" y="94249"/>
+                  </a:lnTo>
+                  <a:lnTo>
+                    <a:pt x="4082483" y="103060"/>
+                  </a:lnTo>
+                  <a:lnTo>
+                    <a:pt x="4010861" y="111765"/>
+                  </a:lnTo>
+                  <a:lnTo>
+                    <a:pt x="3939238" y="120366"/>
+                  </a:lnTo>
+                  <a:lnTo>
+                    <a:pt x="3867616" y="128863"/>
+                  </a:lnTo>
+                  <a:lnTo>
+                    <a:pt x="3795993" y="137257"/>
+                  </a:lnTo>
+                  <a:lnTo>
+                    <a:pt x="3724371" y="145550"/>
+                  </a:lnTo>
+                  <a:lnTo>
+                    <a:pt x="3652748" y="153743"/>
+                  </a:lnTo>
+                  <a:lnTo>
+                    <a:pt x="3581126" y="161838"/>
+                  </a:lnTo>
+                  <a:lnTo>
+                    <a:pt x="3509503" y="169835"/>
+                  </a:lnTo>
+                  <a:lnTo>
+                    <a:pt x="3437881" y="177735"/>
+                  </a:lnTo>
+                  <a:lnTo>
+                    <a:pt x="3366258" y="185540"/>
+                  </a:lnTo>
+                  <a:lnTo>
+                    <a:pt x="3294636" y="193252"/>
+                  </a:lnTo>
+                  <a:lnTo>
+                    <a:pt x="3223013" y="200870"/>
+                  </a:lnTo>
+                  <a:lnTo>
+                    <a:pt x="3151391" y="208396"/>
+                  </a:lnTo>
+                  <a:lnTo>
+                    <a:pt x="3079768" y="215832"/>
+                  </a:lnTo>
+                  <a:lnTo>
+                    <a:pt x="3008146" y="223178"/>
+                  </a:lnTo>
+                  <a:lnTo>
+                    <a:pt x="2936523" y="230436"/>
+                  </a:lnTo>
+                  <a:lnTo>
+                    <a:pt x="2864901" y="237606"/>
+                  </a:lnTo>
+                  <a:lnTo>
+                    <a:pt x="2793278" y="244690"/>
+                  </a:lnTo>
+                  <a:lnTo>
+                    <a:pt x="2721655" y="251688"/>
+                  </a:lnTo>
+                  <a:lnTo>
+                    <a:pt x="2650033" y="258602"/>
+                  </a:lnTo>
+                  <a:lnTo>
+                    <a:pt x="2578410" y="265433"/>
+                  </a:lnTo>
+                  <a:lnTo>
+                    <a:pt x="2506788" y="272181"/>
+                  </a:lnTo>
+                  <a:lnTo>
+                    <a:pt x="2435165" y="278848"/>
+                  </a:lnTo>
+                  <a:lnTo>
+                    <a:pt x="2363543" y="285435"/>
+                  </a:lnTo>
+                  <a:lnTo>
+                    <a:pt x="2291920" y="291942"/>
+                  </a:lnTo>
+                  <a:lnTo>
+                    <a:pt x="2220298" y="298371"/>
+                  </a:lnTo>
+                  <a:lnTo>
+                    <a:pt x="2148675" y="304722"/>
+                  </a:lnTo>
+                  <a:lnTo>
+                    <a:pt x="2077053" y="310997"/>
+                  </a:lnTo>
+                  <a:lnTo>
+                    <a:pt x="2005430" y="317196"/>
+                  </a:lnTo>
+                  <a:lnTo>
+                    <a:pt x="1933808" y="323320"/>
+                  </a:lnTo>
+                  <a:lnTo>
+                    <a:pt x="1862185" y="329371"/>
+                  </a:lnTo>
+                  <a:lnTo>
+                    <a:pt x="1790563" y="335349"/>
+                  </a:lnTo>
+                  <a:lnTo>
+                    <a:pt x="1718940" y="341254"/>
+                  </a:lnTo>
+                  <a:lnTo>
+                    <a:pt x="1647318" y="347089"/>
+                  </a:lnTo>
+                  <a:lnTo>
+                    <a:pt x="1575695" y="352853"/>
+                  </a:lnTo>
+                  <a:lnTo>
+                    <a:pt x="1504073" y="358548"/>
+                  </a:lnTo>
+                  <a:lnTo>
+                    <a:pt x="1432450" y="364174"/>
+                  </a:lnTo>
+                  <a:lnTo>
+                    <a:pt x="1360827" y="369732"/>
+                  </a:lnTo>
+                  <a:lnTo>
+                    <a:pt x="1289205" y="375223"/>
+                  </a:lnTo>
+                  <a:lnTo>
+                    <a:pt x="1217582" y="380649"/>
+                  </a:lnTo>
+                  <a:lnTo>
+                    <a:pt x="1145960" y="386008"/>
+                  </a:lnTo>
+                  <a:lnTo>
+                    <a:pt x="1074337" y="391303"/>
+                  </a:lnTo>
+                  <a:lnTo>
+                    <a:pt x="1002715" y="396535"/>
+                  </a:lnTo>
+                  <a:lnTo>
+                    <a:pt x="931092" y="401703"/>
+                  </a:lnTo>
+                  <a:lnTo>
+                    <a:pt x="859470" y="406809"/>
+                  </a:lnTo>
+                  <a:lnTo>
+                    <a:pt x="787847" y="411853"/>
+                  </a:lnTo>
+                  <a:lnTo>
+                    <a:pt x="716225" y="416837"/>
+                  </a:lnTo>
+                  <a:lnTo>
+                    <a:pt x="644602" y="421760"/>
+                  </a:lnTo>
+                  <a:lnTo>
+                    <a:pt x="572980" y="426624"/>
+                  </a:lnTo>
+                  <a:lnTo>
+                    <a:pt x="501357" y="431430"/>
+                  </a:lnTo>
+                  <a:lnTo>
+                    <a:pt x="429735" y="436178"/>
+                  </a:lnTo>
+                  <a:lnTo>
+                    <a:pt x="358112" y="440868"/>
+                  </a:lnTo>
+                  <a:lnTo>
+                    <a:pt x="286490" y="445502"/>
+                  </a:lnTo>
+                  <a:lnTo>
+                    <a:pt x="214867" y="450080"/>
+                  </a:lnTo>
+                  <a:lnTo>
+                    <a:pt x="143245" y="454603"/>
+                  </a:lnTo>
+                  <a:lnTo>
+                    <a:pt x="71622" y="459071"/>
+                  </a:lnTo>
+                  <a:lnTo>
+                    <a:pt x="0" y="463486"/>
                   </a:lnTo>
                 </a:path>
               </a:pathLst>
@@ -4109,312 +4205,312 @@
           </p:nvSpPr>
           <p:spPr>
             <a:xfrm>
-              <a:off x="1172049" y="2636929"/>
-              <a:ext cx="7090630" cy="2447855"/>
+              <a:off x="1172049" y="4219241"/>
+              <a:ext cx="7090630" cy="668214"/>
             </a:xfrm>
             <a:custGeom>
               <a:avLst/>
               <a:pathLst>
-                <a:path w="7090630" h="2447855">
+                <a:path w="7090630" h="668214">
                   <a:moveTo>
                     <a:pt x="0" y="0"/>
                   </a:moveTo>
                   <a:lnTo>
-                    <a:pt x="71622" y="53239"/>
-                  </a:lnTo>
-                  <a:lnTo>
-                    <a:pt x="143245" y="105507"/>
-                  </a:lnTo>
-                  <a:lnTo>
-                    <a:pt x="214867" y="156823"/>
-                  </a:lnTo>
-                  <a:lnTo>
-                    <a:pt x="286490" y="207203"/>
-                  </a:lnTo>
-                  <a:lnTo>
-                    <a:pt x="358112" y="256665"/>
-                  </a:lnTo>
-                  <a:lnTo>
-                    <a:pt x="429735" y="305225"/>
-                  </a:lnTo>
-                  <a:lnTo>
-                    <a:pt x="501357" y="352900"/>
-                  </a:lnTo>
-                  <a:lnTo>
-                    <a:pt x="572980" y="399706"/>
-                  </a:lnTo>
-                  <a:lnTo>
-                    <a:pt x="644602" y="445658"/>
-                  </a:lnTo>
-                  <a:lnTo>
-                    <a:pt x="716225" y="490773"/>
-                  </a:lnTo>
-                  <a:lnTo>
-                    <a:pt x="787847" y="535065"/>
-                  </a:lnTo>
-                  <a:lnTo>
-                    <a:pt x="859470" y="578549"/>
-                  </a:lnTo>
-                  <a:lnTo>
-                    <a:pt x="931092" y="621241"/>
-                  </a:lnTo>
-                  <a:lnTo>
-                    <a:pt x="1002715" y="663155"/>
-                  </a:lnTo>
-                  <a:lnTo>
-                    <a:pt x="1074337" y="704305"/>
-                  </a:lnTo>
-                  <a:lnTo>
-                    <a:pt x="1145960" y="744704"/>
-                  </a:lnTo>
-                  <a:lnTo>
-                    <a:pt x="1217582" y="784367"/>
-                  </a:lnTo>
-                  <a:lnTo>
-                    <a:pt x="1289205" y="823306"/>
-                  </a:lnTo>
-                  <a:lnTo>
-                    <a:pt x="1360827" y="861536"/>
-                  </a:lnTo>
-                  <a:lnTo>
-                    <a:pt x="1432450" y="899069"/>
-                  </a:lnTo>
-                  <a:lnTo>
-                    <a:pt x="1504073" y="935918"/>
-                  </a:lnTo>
-                  <a:lnTo>
-                    <a:pt x="1575695" y="972095"/>
-                  </a:lnTo>
-                  <a:lnTo>
-                    <a:pt x="1647318" y="1007612"/>
-                  </a:lnTo>
-                  <a:lnTo>
-                    <a:pt x="1718940" y="1042482"/>
-                  </a:lnTo>
-                  <a:lnTo>
-                    <a:pt x="1790563" y="1076716"/>
-                  </a:lnTo>
-                  <a:lnTo>
-                    <a:pt x="1862185" y="1110326"/>
-                  </a:lnTo>
-                  <a:lnTo>
-                    <a:pt x="1933808" y="1143323"/>
-                  </a:lnTo>
-                  <a:lnTo>
-                    <a:pt x="2005430" y="1175719"/>
-                  </a:lnTo>
-                  <a:lnTo>
-                    <a:pt x="2077053" y="1207524"/>
-                  </a:lnTo>
-                  <a:lnTo>
-                    <a:pt x="2148675" y="1238750"/>
-                  </a:lnTo>
-                  <a:lnTo>
-                    <a:pt x="2220298" y="1269406"/>
-                  </a:lnTo>
-                  <a:lnTo>
-                    <a:pt x="2291920" y="1299503"/>
-                  </a:lnTo>
-                  <a:lnTo>
-                    <a:pt x="2363543" y="1329051"/>
-                  </a:lnTo>
-                  <a:lnTo>
-                    <a:pt x="2435165" y="1358061"/>
-                  </a:lnTo>
-                  <a:lnTo>
-                    <a:pt x="2506788" y="1386542"/>
-                  </a:lnTo>
-                  <a:lnTo>
-                    <a:pt x="2578410" y="1414504"/>
-                  </a:lnTo>
-                  <a:lnTo>
-                    <a:pt x="2650033" y="1441956"/>
-                  </a:lnTo>
-                  <a:lnTo>
-                    <a:pt x="2721655" y="1468907"/>
-                  </a:lnTo>
-                  <a:lnTo>
-                    <a:pt x="2793278" y="1495367"/>
-                  </a:lnTo>
-                  <a:lnTo>
-                    <a:pt x="2864901" y="1521345"/>
-                  </a:lnTo>
-                  <a:lnTo>
-                    <a:pt x="2936523" y="1546849"/>
-                  </a:lnTo>
-                  <a:lnTo>
-                    <a:pt x="3008146" y="1571889"/>
-                  </a:lnTo>
-                  <a:lnTo>
-                    <a:pt x="3079768" y="1596471"/>
-                  </a:lnTo>
-                  <a:lnTo>
-                    <a:pt x="3151391" y="1620606"/>
-                  </a:lnTo>
-                  <a:lnTo>
-                    <a:pt x="3223013" y="1644300"/>
-                  </a:lnTo>
-                  <a:lnTo>
-                    <a:pt x="3294636" y="1667563"/>
-                  </a:lnTo>
-                  <a:lnTo>
-                    <a:pt x="3366258" y="1690402"/>
-                  </a:lnTo>
-                  <a:lnTo>
-                    <a:pt x="3437881" y="1712824"/>
-                  </a:lnTo>
-                  <a:lnTo>
-                    <a:pt x="3509503" y="1734837"/>
-                  </a:lnTo>
-                  <a:lnTo>
-                    <a:pt x="3581126" y="1756449"/>
-                  </a:lnTo>
-                  <a:lnTo>
-                    <a:pt x="3652748" y="1777667"/>
-                  </a:lnTo>
-                  <a:lnTo>
-                    <a:pt x="3724371" y="1798499"/>
-                  </a:lnTo>
-                  <a:lnTo>
-                    <a:pt x="3795993" y="1818950"/>
-                  </a:lnTo>
-                  <a:lnTo>
-                    <a:pt x="3867616" y="1839029"/>
-                  </a:lnTo>
-                  <a:lnTo>
-                    <a:pt x="3939238" y="1858741"/>
-                  </a:lnTo>
-                  <a:lnTo>
-                    <a:pt x="4010861" y="1878095"/>
-                  </a:lnTo>
-                  <a:lnTo>
-                    <a:pt x="4082483" y="1897095"/>
-                  </a:lnTo>
-                  <a:lnTo>
-                    <a:pt x="4154106" y="1915749"/>
-                  </a:lnTo>
-                  <a:lnTo>
-                    <a:pt x="4225729" y="1934063"/>
-                  </a:lnTo>
-                  <a:lnTo>
-                    <a:pt x="4297351" y="1952043"/>
-                  </a:lnTo>
-                  <a:lnTo>
-                    <a:pt x="4368974" y="1969695"/>
-                  </a:lnTo>
-                  <a:lnTo>
-                    <a:pt x="4440596" y="1987026"/>
-                  </a:lnTo>
-                  <a:lnTo>
-                    <a:pt x="4512219" y="2004040"/>
-                  </a:lnTo>
-                  <a:lnTo>
-                    <a:pt x="4583841" y="2020745"/>
-                  </a:lnTo>
-                  <a:lnTo>
-                    <a:pt x="4655464" y="2037145"/>
-                  </a:lnTo>
-                  <a:lnTo>
-                    <a:pt x="4727086" y="2053245"/>
-                  </a:lnTo>
-                  <a:lnTo>
-                    <a:pt x="4798709" y="2069053"/>
-                  </a:lnTo>
-                  <a:lnTo>
-                    <a:pt x="4870331" y="2084572"/>
-                  </a:lnTo>
-                  <a:lnTo>
-                    <a:pt x="4941954" y="2099808"/>
-                  </a:lnTo>
-                  <a:lnTo>
-                    <a:pt x="5013576" y="2114766"/>
-                  </a:lnTo>
-                  <a:lnTo>
-                    <a:pt x="5085199" y="2129452"/>
-                  </a:lnTo>
-                  <a:lnTo>
-                    <a:pt x="5156821" y="2143870"/>
-                  </a:lnTo>
-                  <a:lnTo>
-                    <a:pt x="5228444" y="2158025"/>
-                  </a:lnTo>
-                  <a:lnTo>
-                    <a:pt x="5300066" y="2171922"/>
-                  </a:lnTo>
-                  <a:lnTo>
-                    <a:pt x="5371689" y="2185566"/>
-                  </a:lnTo>
-                  <a:lnTo>
-                    <a:pt x="5443311" y="2198961"/>
-                  </a:lnTo>
-                  <a:lnTo>
-                    <a:pt x="5514934" y="2212112"/>
-                  </a:lnTo>
-                  <a:lnTo>
-                    <a:pt x="5586557" y="2225023"/>
-                  </a:lnTo>
-                  <a:lnTo>
-                    <a:pt x="5658179" y="2237699"/>
-                  </a:lnTo>
-                  <a:lnTo>
-                    <a:pt x="5729802" y="2250143"/>
-                  </a:lnTo>
-                  <a:lnTo>
-                    <a:pt x="5801424" y="2262361"/>
-                  </a:lnTo>
-                  <a:lnTo>
-                    <a:pt x="5873047" y="2274356"/>
-                  </a:lnTo>
-                  <a:lnTo>
-                    <a:pt x="5944669" y="2286132"/>
-                  </a:lnTo>
-                  <a:lnTo>
-                    <a:pt x="6016292" y="2297694"/>
-                  </a:lnTo>
-                  <a:lnTo>
-                    <a:pt x="6087914" y="2309045"/>
-                  </a:lnTo>
-                  <a:lnTo>
-                    <a:pt x="6159537" y="2320189"/>
-                  </a:lnTo>
-                  <a:lnTo>
-                    <a:pt x="6231159" y="2331130"/>
-                  </a:lnTo>
-                  <a:lnTo>
-                    <a:pt x="6302782" y="2341871"/>
-                  </a:lnTo>
-                  <a:lnTo>
-                    <a:pt x="6374404" y="2352416"/>
-                  </a:lnTo>
-                  <a:lnTo>
-                    <a:pt x="6446027" y="2362770"/>
-                  </a:lnTo>
-                  <a:lnTo>
-                    <a:pt x="6517649" y="2372934"/>
-                  </a:lnTo>
-                  <a:lnTo>
-                    <a:pt x="6589272" y="2382913"/>
-                  </a:lnTo>
-                  <a:lnTo>
-                    <a:pt x="6660894" y="2392711"/>
-                  </a:lnTo>
-                  <a:lnTo>
-                    <a:pt x="6732517" y="2402329"/>
-                  </a:lnTo>
-                  <a:lnTo>
-                    <a:pt x="6804139" y="2411773"/>
-                  </a:lnTo>
-                  <a:lnTo>
-                    <a:pt x="6875762" y="2421044"/>
-                  </a:lnTo>
-                  <a:lnTo>
-                    <a:pt x="6947385" y="2430146"/>
-                  </a:lnTo>
-                  <a:lnTo>
-                    <a:pt x="7019007" y="2439082"/>
-                  </a:lnTo>
-                  <a:lnTo>
-                    <a:pt x="7090630" y="2447855"/>
+                    <a:pt x="71622" y="9319"/>
+                  </a:lnTo>
+                  <a:lnTo>
+                    <a:pt x="143245" y="18574"/>
+                  </a:lnTo>
+                  <a:lnTo>
+                    <a:pt x="214867" y="27764"/>
+                  </a:lnTo>
+                  <a:lnTo>
+                    <a:pt x="286490" y="36890"/>
+                  </a:lnTo>
+                  <a:lnTo>
+                    <a:pt x="358112" y="45952"/>
+                  </a:lnTo>
+                  <a:lnTo>
+                    <a:pt x="429735" y="54952"/>
+                  </a:lnTo>
+                  <a:lnTo>
+                    <a:pt x="501357" y="63889"/>
+                  </a:lnTo>
+                  <a:lnTo>
+                    <a:pt x="572980" y="72763"/>
+                  </a:lnTo>
+                  <a:lnTo>
+                    <a:pt x="644602" y="81576"/>
+                  </a:lnTo>
+                  <a:lnTo>
+                    <a:pt x="716225" y="90327"/>
+                  </a:lnTo>
+                  <a:lnTo>
+                    <a:pt x="787847" y="99017"/>
+                  </a:lnTo>
+                  <a:lnTo>
+                    <a:pt x="859470" y="107647"/>
+                  </a:lnTo>
+                  <a:lnTo>
+                    <a:pt x="931092" y="116217"/>
+                  </a:lnTo>
+                  <a:lnTo>
+                    <a:pt x="1002715" y="124727"/>
+                  </a:lnTo>
+                  <a:lnTo>
+                    <a:pt x="1074337" y="133178"/>
+                  </a:lnTo>
+                  <a:lnTo>
+                    <a:pt x="1145960" y="141569"/>
+                  </a:lnTo>
+                  <a:lnTo>
+                    <a:pt x="1217582" y="149903"/>
+                  </a:lnTo>
+                  <a:lnTo>
+                    <a:pt x="1289205" y="158178"/>
+                  </a:lnTo>
+                  <a:lnTo>
+                    <a:pt x="1360827" y="166396"/>
+                  </a:lnTo>
+                  <a:lnTo>
+                    <a:pt x="1432450" y="174557"/>
+                  </a:lnTo>
+                  <a:lnTo>
+                    <a:pt x="1504073" y="182660"/>
+                  </a:lnTo>
+                  <a:lnTo>
+                    <a:pt x="1575695" y="190707"/>
+                  </a:lnTo>
+                  <a:lnTo>
+                    <a:pt x="1647318" y="198699"/>
+                  </a:lnTo>
+                  <a:lnTo>
+                    <a:pt x="1718940" y="206634"/>
+                  </a:lnTo>
+                  <a:lnTo>
+                    <a:pt x="1790563" y="214514"/>
+                  </a:lnTo>
+                  <a:lnTo>
+                    <a:pt x="1862185" y="222340"/>
+                  </a:lnTo>
+                  <a:lnTo>
+                    <a:pt x="1933808" y="230111"/>
+                  </a:lnTo>
+                  <a:lnTo>
+                    <a:pt x="2005430" y="237827"/>
+                  </a:lnTo>
+                  <a:lnTo>
+                    <a:pt x="2077053" y="245490"/>
+                  </a:lnTo>
+                  <a:lnTo>
+                    <a:pt x="2148675" y="253100"/>
+                  </a:lnTo>
+                  <a:lnTo>
+                    <a:pt x="2220298" y="260656"/>
+                  </a:lnTo>
+                  <a:lnTo>
+                    <a:pt x="2291920" y="268160"/>
+                  </a:lnTo>
+                  <a:lnTo>
+                    <a:pt x="2363543" y="275612"/>
+                  </a:lnTo>
+                  <a:lnTo>
+                    <a:pt x="2435165" y="283012"/>
+                  </a:lnTo>
+                  <a:lnTo>
+                    <a:pt x="2506788" y="290360"/>
+                  </a:lnTo>
+                  <a:lnTo>
+                    <a:pt x="2578410" y="297657"/>
+                  </a:lnTo>
+                  <a:lnTo>
+                    <a:pt x="2650033" y="304904"/>
+                  </a:lnTo>
+                  <a:lnTo>
+                    <a:pt x="2721655" y="312099"/>
+                  </a:lnTo>
+                  <a:lnTo>
+                    <a:pt x="2793278" y="319245"/>
+                  </a:lnTo>
+                  <a:lnTo>
+                    <a:pt x="2864901" y="326341"/>
+                  </a:lnTo>
+                  <a:lnTo>
+                    <a:pt x="2936523" y="333387"/>
+                  </a:lnTo>
+                  <a:lnTo>
+                    <a:pt x="3008146" y="340385"/>
+                  </a:lnTo>
+                  <a:lnTo>
+                    <a:pt x="3079768" y="347333"/>
+                  </a:lnTo>
+                  <a:lnTo>
+                    <a:pt x="3151391" y="354234"/>
+                  </a:lnTo>
+                  <a:lnTo>
+                    <a:pt x="3223013" y="361086"/>
+                  </a:lnTo>
+                  <a:lnTo>
+                    <a:pt x="3294636" y="367890"/>
+                  </a:lnTo>
+                  <a:lnTo>
+                    <a:pt x="3366258" y="374647"/>
+                  </a:lnTo>
+                  <a:lnTo>
+                    <a:pt x="3437881" y="381357"/>
+                  </a:lnTo>
+                  <a:lnTo>
+                    <a:pt x="3509503" y="388021"/>
+                  </a:lnTo>
+                  <a:lnTo>
+                    <a:pt x="3581126" y="394637"/>
+                  </a:lnTo>
+                  <a:lnTo>
+                    <a:pt x="3652748" y="401208"/>
+                  </a:lnTo>
+                  <a:lnTo>
+                    <a:pt x="3724371" y="407733"/>
+                  </a:lnTo>
+                  <a:lnTo>
+                    <a:pt x="3795993" y="414213"/>
+                  </a:lnTo>
+                  <a:lnTo>
+                    <a:pt x="3867616" y="420647"/>
+                  </a:lnTo>
+                  <a:lnTo>
+                    <a:pt x="3939238" y="427037"/>
+                  </a:lnTo>
+                  <a:lnTo>
+                    <a:pt x="4010861" y="433382"/>
+                  </a:lnTo>
+                  <a:lnTo>
+                    <a:pt x="4082483" y="439683"/>
+                  </a:lnTo>
+                  <a:lnTo>
+                    <a:pt x="4154106" y="445940"/>
+                  </a:lnTo>
+                  <a:lnTo>
+                    <a:pt x="4225729" y="452153"/>
+                  </a:lnTo>
+                  <a:lnTo>
+                    <a:pt x="4297351" y="458323"/>
+                  </a:lnTo>
+                  <a:lnTo>
+                    <a:pt x="4368974" y="464450"/>
+                  </a:lnTo>
+                  <a:lnTo>
+                    <a:pt x="4440596" y="470535"/>
+                  </a:lnTo>
+                  <a:lnTo>
+                    <a:pt x="4512219" y="476577"/>
+                  </a:lnTo>
+                  <a:lnTo>
+                    <a:pt x="4583841" y="482577"/>
+                  </a:lnTo>
+                  <a:lnTo>
+                    <a:pt x="4655464" y="488535"/>
+                  </a:lnTo>
+                  <a:lnTo>
+                    <a:pt x="4727086" y="494452"/>
+                  </a:lnTo>
+                  <a:lnTo>
+                    <a:pt x="4798709" y="500328"/>
+                  </a:lnTo>
+                  <a:lnTo>
+                    <a:pt x="4870331" y="506162"/>
+                  </a:lnTo>
+                  <a:lnTo>
+                    <a:pt x="4941954" y="511956"/>
+                  </a:lnTo>
+                  <a:lnTo>
+                    <a:pt x="5013576" y="517710"/>
+                  </a:lnTo>
+                  <a:lnTo>
+                    <a:pt x="5085199" y="523423"/>
+                  </a:lnTo>
+                  <a:lnTo>
+                    <a:pt x="5156821" y="529097"/>
+                  </a:lnTo>
+                  <a:lnTo>
+                    <a:pt x="5228444" y="534731"/>
+                  </a:lnTo>
+                  <a:lnTo>
+                    <a:pt x="5300066" y="540326"/>
+                  </a:lnTo>
+                  <a:lnTo>
+                    <a:pt x="5371689" y="545882"/>
+                  </a:lnTo>
+                  <a:lnTo>
+                    <a:pt x="5443311" y="551400"/>
+                  </a:lnTo>
+                  <a:lnTo>
+                    <a:pt x="5514934" y="556879"/>
+                  </a:lnTo>
+                  <a:lnTo>
+                    <a:pt x="5586557" y="562319"/>
+                  </a:lnTo>
+                  <a:lnTo>
+                    <a:pt x="5658179" y="567722"/>
+                  </a:lnTo>
+                  <a:lnTo>
+                    <a:pt x="5729802" y="573087"/>
+                  </a:lnTo>
+                  <a:lnTo>
+                    <a:pt x="5801424" y="578415"/>
+                  </a:lnTo>
+                  <a:lnTo>
+                    <a:pt x="5873047" y="583706"/>
+                  </a:lnTo>
+                  <a:lnTo>
+                    <a:pt x="5944669" y="588960"/>
+                  </a:lnTo>
+                  <a:lnTo>
+                    <a:pt x="6016292" y="594177"/>
+                  </a:lnTo>
+                  <a:lnTo>
+                    <a:pt x="6087914" y="599358"/>
+                  </a:lnTo>
+                  <a:lnTo>
+                    <a:pt x="6159537" y="604503"/>
+                  </a:lnTo>
+                  <a:lnTo>
+                    <a:pt x="6231159" y="609612"/>
+                  </a:lnTo>
+                  <a:lnTo>
+                    <a:pt x="6302782" y="614685"/>
+                  </a:lnTo>
+                  <a:lnTo>
+                    <a:pt x="6374404" y="619723"/>
+                  </a:lnTo>
+                  <a:lnTo>
+                    <a:pt x="6446027" y="624726"/>
+                  </a:lnTo>
+                  <a:lnTo>
+                    <a:pt x="6517649" y="629694"/>
+                  </a:lnTo>
+                  <a:lnTo>
+                    <a:pt x="6589272" y="634628"/>
+                  </a:lnTo>
+                  <a:lnTo>
+                    <a:pt x="6660894" y="639527"/>
+                  </a:lnTo>
+                  <a:lnTo>
+                    <a:pt x="6732517" y="644392"/>
+                  </a:lnTo>
+                  <a:lnTo>
+                    <a:pt x="6804139" y="649223"/>
+                  </a:lnTo>
+                  <a:lnTo>
+                    <a:pt x="6875762" y="654021"/>
+                  </a:lnTo>
+                  <a:lnTo>
+                    <a:pt x="6947385" y="658785"/>
+                  </a:lnTo>
+                  <a:lnTo>
+                    <a:pt x="7019007" y="663516"/>
+                  </a:lnTo>
+                  <a:lnTo>
+                    <a:pt x="7090630" y="668214"/>
                   </a:lnTo>
                 </a:path>
               </a:pathLst>
@@ -5154,7 +5250,7 @@
                   <a:latin typeface="Helvetica"/>
                   <a:cs typeface="Helvetica"/>
                 </a:rPr>
-                <a:t>subHR per 1 mL/min: 0.98 (0.95-1.00)  |  per IQR (Δ = 18.2): 0.65 (0.42-1.00)  |  IQR: [-11.5, 6.7]</a:t>
+                <a:t>subHR per 1 mL/min: 0.99 (0.97-1.02)  |  per IQR (Δ = 18.2): 0.85 (0.54-1.33)  |  IQR: [-11.5, 6.7]</a:t>
               </a:r>
             </a:p>
           </p:txBody>

--- a/docs/plots/carbo/jx_carbo_linsubhr_egfrdisc_grade2.pptx
+++ b/docs/plots/carbo/jx_carbo_linsubhr_egfrdisc_grade2.pptx
@@ -5218,7 +5218,7 @@
           <p:spPr>
             <a:xfrm>
               <a:off x="817517" y="1896563"/>
-              <a:ext cx="4869911" cy="82021"/>
+              <a:ext cx="5413065" cy="82021"/>
             </a:xfrm>
             <a:prstGeom prst="rect">
               <a:avLst/>
@@ -5250,7 +5250,7 @@
                   <a:latin typeface="Helvetica"/>
                   <a:cs typeface="Helvetica"/>
                 </a:rPr>
-                <a:t>subHR per 1 mL/min: 0.99 (0.97-1.02)  |  per IQR (Δ = 18.2): 0.85 (0.54-1.33)  |  IQR: [-11.5, 6.7]</a:t>
+                <a:t>subHR per 1 mL/min: 0.99 (0.97-1.02), p = 0.474  |  per IQR (Δ = 18.2): 0.85 (0.54-1.33)  |  IQR: [-11.5, 6.7]</a:t>
               </a:r>
             </a:p>
           </p:txBody>

--- a/docs/plots/carbo/jx_carbo_linsubhr_egfrdisc_grade2.pptx
+++ b/docs/plots/carbo/jx_carbo_linsubhr_egfrdisc_grade2.pptx
@@ -2271,26 +2271,26 @@
           </p:nvSpPr>
           <p:spPr>
             <a:xfrm>
-              <a:off x="817517" y="5142518"/>
-              <a:ext cx="7799693" cy="0"/>
+              <a:off x="915645" y="5071743"/>
+              <a:ext cx="7682587" cy="0"/>
             </a:xfrm>
             <a:custGeom>
               <a:avLst/>
               <a:pathLst>
-                <a:path w="7799693" h="0">
+                <a:path w="7682587" h="0">
                   <a:moveTo>
                     <a:pt x="0" y="0"/>
                   </a:moveTo>
                   <a:lnTo>
-                    <a:pt x="7799693" y="0"/>
-                  </a:lnTo>
-                  <a:lnTo>
-                    <a:pt x="7799693" y="0"/>
+                    <a:pt x="7682587" y="0"/>
+                  </a:lnTo>
+                  <a:lnTo>
+                    <a:pt x="7682587" y="0"/>
                   </a:lnTo>
                 </a:path>
               </a:pathLst>
             </a:custGeom>
-            <a:ln w="6775" cap="flat">
+            <a:ln w="8623" cap="flat">
               <a:solidFill>
                 <a:srgbClr val="EBEBEB">
                   <a:alpha val="100000"/>
@@ -2314,26 +2314,26 @@
           </p:nvSpPr>
           <p:spPr>
             <a:xfrm>
-              <a:off x="817517" y="4313054"/>
-              <a:ext cx="7799693" cy="0"/>
+              <a:off x="915645" y="4298074"/>
+              <a:ext cx="7682587" cy="0"/>
             </a:xfrm>
             <a:custGeom>
               <a:avLst/>
               <a:pathLst>
-                <a:path w="7799693" h="0">
+                <a:path w="7682587" h="0">
                   <a:moveTo>
                     <a:pt x="0" y="0"/>
                   </a:moveTo>
                   <a:lnTo>
-                    <a:pt x="7799693" y="0"/>
-                  </a:lnTo>
-                  <a:lnTo>
-                    <a:pt x="7799693" y="0"/>
+                    <a:pt x="7682587" y="0"/>
+                  </a:lnTo>
+                  <a:lnTo>
+                    <a:pt x="7682587" y="0"/>
                   </a:lnTo>
                 </a:path>
               </a:pathLst>
             </a:custGeom>
-            <a:ln w="6775" cap="flat">
+            <a:ln w="8623" cap="flat">
               <a:solidFill>
                 <a:srgbClr val="EBEBEB">
                   <a:alpha val="100000"/>
@@ -2357,26 +2357,26 @@
           </p:nvSpPr>
           <p:spPr>
             <a:xfrm>
-              <a:off x="817517" y="3483591"/>
-              <a:ext cx="7799693" cy="0"/>
+              <a:off x="915645" y="3524405"/>
+              <a:ext cx="7682587" cy="0"/>
             </a:xfrm>
             <a:custGeom>
               <a:avLst/>
               <a:pathLst>
-                <a:path w="7799693" h="0">
+                <a:path w="7682587" h="0">
                   <a:moveTo>
                     <a:pt x="0" y="0"/>
                   </a:moveTo>
                   <a:lnTo>
-                    <a:pt x="7799693" y="0"/>
-                  </a:lnTo>
-                  <a:lnTo>
-                    <a:pt x="7799693" y="0"/>
+                    <a:pt x="7682587" y="0"/>
+                  </a:lnTo>
+                  <a:lnTo>
+                    <a:pt x="7682587" y="0"/>
                   </a:lnTo>
                 </a:path>
               </a:pathLst>
             </a:custGeom>
-            <a:ln w="6775" cap="flat">
+            <a:ln w="8623" cap="flat">
               <a:solidFill>
                 <a:srgbClr val="EBEBEB">
                   <a:alpha val="100000"/>
@@ -2400,26 +2400,26 @@
           </p:nvSpPr>
           <p:spPr>
             <a:xfrm>
-              <a:off x="817517" y="2654127"/>
-              <a:ext cx="7799693" cy="0"/>
+              <a:off x="915645" y="2750737"/>
+              <a:ext cx="7682587" cy="0"/>
             </a:xfrm>
             <a:custGeom>
               <a:avLst/>
               <a:pathLst>
-                <a:path w="7799693" h="0">
+                <a:path w="7682587" h="0">
                   <a:moveTo>
                     <a:pt x="0" y="0"/>
                   </a:moveTo>
                   <a:lnTo>
-                    <a:pt x="7799693" y="0"/>
-                  </a:lnTo>
-                  <a:lnTo>
-                    <a:pt x="7799693" y="0"/>
+                    <a:pt x="7682587" y="0"/>
+                  </a:lnTo>
+                  <a:lnTo>
+                    <a:pt x="7682587" y="0"/>
                   </a:lnTo>
                 </a:path>
               </a:pathLst>
             </a:custGeom>
-            <a:ln w="6775" cap="flat">
+            <a:ln w="8623" cap="flat">
               <a:solidFill>
                 <a:srgbClr val="EBEBEB">
                   <a:alpha val="100000"/>
@@ -2443,15 +2443,15 @@
           </p:nvSpPr>
           <p:spPr>
             <a:xfrm>
-              <a:off x="1487487" y="2073503"/>
-              <a:ext cx="0" cy="3649639"/>
+              <a:off x="1575555" y="2209169"/>
+              <a:ext cx="0" cy="3404141"/>
             </a:xfrm>
             <a:custGeom>
               <a:avLst/>
               <a:pathLst>
-                <a:path w="0" h="3649639">
+                <a:path w="0" h="3404141">
                   <a:moveTo>
-                    <a:pt x="0" y="3649639"/>
+                    <a:pt x="0" y="3404141"/>
                   </a:moveTo>
                   <a:lnTo>
                     <a:pt x="0" y="0"/>
@@ -2462,7 +2462,7 @@
                 </a:path>
               </a:pathLst>
             </a:custGeom>
-            <a:ln w="6775" cap="flat">
+            <a:ln w="8623" cap="flat">
               <a:solidFill>
                 <a:srgbClr val="EBEBEB">
                   <a:alpha val="100000"/>
@@ -2486,15 +2486,15 @@
           </p:nvSpPr>
           <p:spPr>
             <a:xfrm>
-              <a:off x="3337360" y="2073503"/>
-              <a:ext cx="0" cy="3649639"/>
+              <a:off x="3397654" y="2209169"/>
+              <a:ext cx="0" cy="3404141"/>
             </a:xfrm>
             <a:custGeom>
               <a:avLst/>
               <a:pathLst>
-                <a:path w="0" h="3649639">
+                <a:path w="0" h="3404141">
                   <a:moveTo>
-                    <a:pt x="0" y="3649639"/>
+                    <a:pt x="0" y="3404141"/>
                   </a:moveTo>
                   <a:lnTo>
                     <a:pt x="0" y="0"/>
@@ -2505,7 +2505,7 @@
                 </a:path>
               </a:pathLst>
             </a:custGeom>
-            <a:ln w="6775" cap="flat">
+            <a:ln w="8623" cap="flat">
               <a:solidFill>
                 <a:srgbClr val="EBEBEB">
                   <a:alpha val="100000"/>
@@ -2529,15 +2529,15 @@
           </p:nvSpPr>
           <p:spPr>
             <a:xfrm>
-              <a:off x="5187233" y="2073503"/>
-              <a:ext cx="0" cy="3649639"/>
+              <a:off x="5219752" y="2209169"/>
+              <a:ext cx="0" cy="3404141"/>
             </a:xfrm>
             <a:custGeom>
               <a:avLst/>
               <a:pathLst>
-                <a:path w="0" h="3649639">
+                <a:path w="0" h="3404141">
                   <a:moveTo>
-                    <a:pt x="0" y="3649639"/>
+                    <a:pt x="0" y="3404141"/>
                   </a:moveTo>
                   <a:lnTo>
                     <a:pt x="0" y="0"/>
@@ -2548,7 +2548,7 @@
                 </a:path>
               </a:pathLst>
             </a:custGeom>
-            <a:ln w="6775" cap="flat">
+            <a:ln w="8623" cap="flat">
               <a:solidFill>
                 <a:srgbClr val="EBEBEB">
                   <a:alpha val="100000"/>
@@ -2572,15 +2572,15 @@
           </p:nvSpPr>
           <p:spPr>
             <a:xfrm>
-              <a:off x="7037106" y="2073503"/>
-              <a:ext cx="0" cy="3649639"/>
+              <a:off x="7041851" y="2209169"/>
+              <a:ext cx="0" cy="3404141"/>
             </a:xfrm>
             <a:custGeom>
               <a:avLst/>
               <a:pathLst>
-                <a:path w="0" h="3649639">
+                <a:path w="0" h="3404141">
                   <a:moveTo>
-                    <a:pt x="0" y="3649639"/>
+                    <a:pt x="0" y="3404141"/>
                   </a:moveTo>
                   <a:lnTo>
                     <a:pt x="0" y="0"/>
@@ -2591,7 +2591,7 @@
                 </a:path>
               </a:pathLst>
             </a:custGeom>
-            <a:ln w="6775" cap="flat">
+            <a:ln w="8623" cap="flat">
               <a:solidFill>
                 <a:srgbClr val="EBEBEB">
                   <a:alpha val="100000"/>
@@ -2615,26 +2615,26 @@
           </p:nvSpPr>
           <p:spPr>
             <a:xfrm>
-              <a:off x="817517" y="5557249"/>
-              <a:ext cx="7799693" cy="0"/>
+              <a:off x="915645" y="5458577"/>
+              <a:ext cx="7682587" cy="0"/>
             </a:xfrm>
             <a:custGeom>
               <a:avLst/>
               <a:pathLst>
-                <a:path w="7799693" h="0">
+                <a:path w="7682587" h="0">
                   <a:moveTo>
                     <a:pt x="0" y="0"/>
                   </a:moveTo>
                   <a:lnTo>
-                    <a:pt x="7799693" y="0"/>
-                  </a:lnTo>
-                  <a:lnTo>
-                    <a:pt x="7799693" y="0"/>
+                    <a:pt x="7682587" y="0"/>
+                  </a:lnTo>
+                  <a:lnTo>
+                    <a:pt x="7682587" y="0"/>
                   </a:lnTo>
                 </a:path>
               </a:pathLst>
             </a:custGeom>
-            <a:ln w="13550" cap="flat">
+            <a:ln w="17246" cap="flat">
               <a:solidFill>
                 <a:srgbClr val="EBEBEB">
                   <a:alpha val="100000"/>
@@ -2658,26 +2658,26 @@
           </p:nvSpPr>
           <p:spPr>
             <a:xfrm>
-              <a:off x="817517" y="4727786"/>
-              <a:ext cx="7799693" cy="0"/>
+              <a:off x="915645" y="4684908"/>
+              <a:ext cx="7682587" cy="0"/>
             </a:xfrm>
             <a:custGeom>
               <a:avLst/>
               <a:pathLst>
-                <a:path w="7799693" h="0">
+                <a:path w="7682587" h="0">
                   <a:moveTo>
                     <a:pt x="0" y="0"/>
                   </a:moveTo>
                   <a:lnTo>
-                    <a:pt x="7799693" y="0"/>
-                  </a:lnTo>
-                  <a:lnTo>
-                    <a:pt x="7799693" y="0"/>
+                    <a:pt x="7682587" y="0"/>
+                  </a:lnTo>
+                  <a:lnTo>
+                    <a:pt x="7682587" y="0"/>
                   </a:lnTo>
                 </a:path>
               </a:pathLst>
             </a:custGeom>
-            <a:ln w="13550" cap="flat">
+            <a:ln w="17246" cap="flat">
               <a:solidFill>
                 <a:srgbClr val="EBEBEB">
                   <a:alpha val="100000"/>
@@ -2701,26 +2701,26 @@
           </p:nvSpPr>
           <p:spPr>
             <a:xfrm>
-              <a:off x="817517" y="3898322"/>
-              <a:ext cx="7799693" cy="0"/>
+              <a:off x="915645" y="3911240"/>
+              <a:ext cx="7682587" cy="0"/>
             </a:xfrm>
             <a:custGeom>
               <a:avLst/>
               <a:pathLst>
-                <a:path w="7799693" h="0">
+                <a:path w="7682587" h="0">
                   <a:moveTo>
                     <a:pt x="0" y="0"/>
                   </a:moveTo>
                   <a:lnTo>
-                    <a:pt x="7799693" y="0"/>
-                  </a:lnTo>
-                  <a:lnTo>
-                    <a:pt x="7799693" y="0"/>
+                    <a:pt x="7682587" y="0"/>
+                  </a:lnTo>
+                  <a:lnTo>
+                    <a:pt x="7682587" y="0"/>
                   </a:lnTo>
                 </a:path>
               </a:pathLst>
             </a:custGeom>
-            <a:ln w="13550" cap="flat">
+            <a:ln w="17246" cap="flat">
               <a:solidFill>
                 <a:srgbClr val="EBEBEB">
                   <a:alpha val="100000"/>
@@ -2744,26 +2744,26 @@
           </p:nvSpPr>
           <p:spPr>
             <a:xfrm>
-              <a:off x="817517" y="3068859"/>
-              <a:ext cx="7799693" cy="0"/>
+              <a:off x="915645" y="3137571"/>
+              <a:ext cx="7682587" cy="0"/>
             </a:xfrm>
             <a:custGeom>
               <a:avLst/>
               <a:pathLst>
-                <a:path w="7799693" h="0">
+                <a:path w="7682587" h="0">
                   <a:moveTo>
                     <a:pt x="0" y="0"/>
                   </a:moveTo>
                   <a:lnTo>
-                    <a:pt x="7799693" y="0"/>
-                  </a:lnTo>
-                  <a:lnTo>
-                    <a:pt x="7799693" y="0"/>
+                    <a:pt x="7682587" y="0"/>
+                  </a:lnTo>
+                  <a:lnTo>
+                    <a:pt x="7682587" y="0"/>
                   </a:lnTo>
                 </a:path>
               </a:pathLst>
             </a:custGeom>
-            <a:ln w="13550" cap="flat">
+            <a:ln w="17246" cap="flat">
               <a:solidFill>
                 <a:srgbClr val="EBEBEB">
                   <a:alpha val="100000"/>
@@ -2787,26 +2787,26 @@
           </p:nvSpPr>
           <p:spPr>
             <a:xfrm>
-              <a:off x="817517" y="2239395"/>
-              <a:ext cx="7799693" cy="0"/>
+              <a:off x="915645" y="2363903"/>
+              <a:ext cx="7682587" cy="0"/>
             </a:xfrm>
             <a:custGeom>
               <a:avLst/>
               <a:pathLst>
-                <a:path w="7799693" h="0">
+                <a:path w="7682587" h="0">
                   <a:moveTo>
                     <a:pt x="0" y="0"/>
                   </a:moveTo>
                   <a:lnTo>
-                    <a:pt x="7799693" y="0"/>
-                  </a:lnTo>
-                  <a:lnTo>
-                    <a:pt x="7799693" y="0"/>
+                    <a:pt x="7682587" y="0"/>
+                  </a:lnTo>
+                  <a:lnTo>
+                    <a:pt x="7682587" y="0"/>
                   </a:lnTo>
                 </a:path>
               </a:pathLst>
             </a:custGeom>
-            <a:ln w="13550" cap="flat">
+            <a:ln w="17246" cap="flat">
               <a:solidFill>
                 <a:srgbClr val="EBEBEB">
                   <a:alpha val="100000"/>
@@ -2830,15 +2830,15 @@
           </p:nvSpPr>
           <p:spPr>
             <a:xfrm>
-              <a:off x="2412424" y="2073503"/>
-              <a:ext cx="0" cy="3649639"/>
+              <a:off x="2486605" y="2209169"/>
+              <a:ext cx="0" cy="3404141"/>
             </a:xfrm>
             <a:custGeom>
               <a:avLst/>
               <a:pathLst>
-                <a:path w="0" h="3649639">
+                <a:path w="0" h="3404141">
                   <a:moveTo>
-                    <a:pt x="0" y="3649639"/>
+                    <a:pt x="0" y="3404141"/>
                   </a:moveTo>
                   <a:lnTo>
                     <a:pt x="0" y="0"/>
@@ -2849,7 +2849,7 @@
                 </a:path>
               </a:pathLst>
             </a:custGeom>
-            <a:ln w="13550" cap="flat">
+            <a:ln w="17246" cap="flat">
               <a:solidFill>
                 <a:srgbClr val="EBEBEB">
                   <a:alpha val="100000"/>
@@ -2873,15 +2873,15 @@
           </p:nvSpPr>
           <p:spPr>
             <a:xfrm>
-              <a:off x="4262297" y="2073503"/>
-              <a:ext cx="0" cy="3649639"/>
+              <a:off x="4308703" y="2209169"/>
+              <a:ext cx="0" cy="3404141"/>
             </a:xfrm>
             <a:custGeom>
               <a:avLst/>
               <a:pathLst>
-                <a:path w="0" h="3649639">
+                <a:path w="0" h="3404141">
                   <a:moveTo>
-                    <a:pt x="0" y="3649639"/>
+                    <a:pt x="0" y="3404141"/>
                   </a:moveTo>
                   <a:lnTo>
                     <a:pt x="0" y="0"/>
@@ -2892,7 +2892,7 @@
                 </a:path>
               </a:pathLst>
             </a:custGeom>
-            <a:ln w="13550" cap="flat">
+            <a:ln w="17246" cap="flat">
               <a:solidFill>
                 <a:srgbClr val="EBEBEB">
                   <a:alpha val="100000"/>
@@ -2916,15 +2916,15 @@
           </p:nvSpPr>
           <p:spPr>
             <a:xfrm>
-              <a:off x="6112169" y="2073503"/>
-              <a:ext cx="0" cy="3649639"/>
+              <a:off x="6130802" y="2209169"/>
+              <a:ext cx="0" cy="3404141"/>
             </a:xfrm>
             <a:custGeom>
               <a:avLst/>
               <a:pathLst>
-                <a:path w="0" h="3649639">
+                <a:path w="0" h="3404141">
                   <a:moveTo>
-                    <a:pt x="0" y="3649639"/>
+                    <a:pt x="0" y="3404141"/>
                   </a:moveTo>
                   <a:lnTo>
                     <a:pt x="0" y="0"/>
@@ -2935,7 +2935,7 @@
                 </a:path>
               </a:pathLst>
             </a:custGeom>
-            <a:ln w="13550" cap="flat">
+            <a:ln w="17246" cap="flat">
               <a:solidFill>
                 <a:srgbClr val="EBEBEB">
                   <a:alpha val="100000"/>
@@ -2959,15 +2959,15 @@
           </p:nvSpPr>
           <p:spPr>
             <a:xfrm>
-              <a:off x="7962042" y="2073503"/>
-              <a:ext cx="0" cy="3649639"/>
+              <a:off x="7952900" y="2209169"/>
+              <a:ext cx="0" cy="3404141"/>
             </a:xfrm>
             <a:custGeom>
               <a:avLst/>
               <a:pathLst>
-                <a:path w="0" h="3649639">
+                <a:path w="0" h="3404141">
                   <a:moveTo>
-                    <a:pt x="0" y="3649639"/>
+                    <a:pt x="0" y="3404141"/>
                   </a:moveTo>
                   <a:lnTo>
                     <a:pt x="0" y="0"/>
@@ -2978,7 +2978,7 @@
                 </a:path>
               </a:pathLst>
             </a:custGeom>
-            <a:ln w="13550" cap="flat">
+            <a:ln w="17246" cap="flat">
               <a:solidFill>
                 <a:srgbClr val="EBEBEB">
                   <a:alpha val="100000"/>
@@ -3002,573 +3002,573 @@
           </p:nvSpPr>
           <p:spPr>
             <a:xfrm>
-              <a:off x="1172049" y="2073503"/>
-              <a:ext cx="7090630" cy="3121885"/>
+              <a:off x="1264853" y="2209169"/>
+              <a:ext cx="6984170" cy="2911888"/>
             </a:xfrm>
             <a:custGeom>
               <a:avLst/>
               <a:pathLst>
-                <a:path w="7090630" h="3121885">
+                <a:path w="6984170" h="2911888">
                   <a:moveTo>
-                    <a:pt x="962569" y="0"/>
+                    <a:pt x="948117" y="0"/>
                   </a:moveTo>
                   <a:lnTo>
-                    <a:pt x="1002715" y="50892"/>
-                  </a:lnTo>
-                  <a:lnTo>
-                    <a:pt x="1074337" y="139346"/>
-                  </a:lnTo>
-                  <a:lnTo>
-                    <a:pt x="1145960" y="225521"/>
-                  </a:lnTo>
-                  <a:lnTo>
-                    <a:pt x="1217582" y="309476"/>
-                  </a:lnTo>
-                  <a:lnTo>
-                    <a:pt x="1289205" y="391267"/>
-                  </a:lnTo>
-                  <a:lnTo>
-                    <a:pt x="1360827" y="470951"/>
-                  </a:lnTo>
-                  <a:lnTo>
-                    <a:pt x="1432450" y="548582"/>
-                  </a:lnTo>
-                  <a:lnTo>
-                    <a:pt x="1504073" y="624212"/>
-                  </a:lnTo>
-                  <a:lnTo>
-                    <a:pt x="1575695" y="697894"/>
-                  </a:lnTo>
-                  <a:lnTo>
-                    <a:pt x="1647318" y="769677"/>
-                  </a:lnTo>
-                  <a:lnTo>
-                    <a:pt x="1718940" y="839610"/>
-                  </a:lnTo>
-                  <a:lnTo>
-                    <a:pt x="1790563" y="907742"/>
-                  </a:lnTo>
-                  <a:lnTo>
-                    <a:pt x="1862185" y="974118"/>
-                  </a:lnTo>
-                  <a:lnTo>
-                    <a:pt x="1933808" y="1038783"/>
-                  </a:lnTo>
-                  <a:lnTo>
-                    <a:pt x="2005430" y="1101783"/>
-                  </a:lnTo>
-                  <a:lnTo>
-                    <a:pt x="2077053" y="1163159"/>
-                  </a:lnTo>
-                  <a:lnTo>
-                    <a:pt x="2148675" y="1222953"/>
-                  </a:lnTo>
-                  <a:lnTo>
-                    <a:pt x="2220298" y="1281207"/>
-                  </a:lnTo>
-                  <a:lnTo>
-                    <a:pt x="2291920" y="1337960"/>
-                  </a:lnTo>
-                  <a:lnTo>
-                    <a:pt x="2363543" y="1393251"/>
-                  </a:lnTo>
-                  <a:lnTo>
-                    <a:pt x="2435165" y="1447116"/>
-                  </a:lnTo>
-                  <a:lnTo>
-                    <a:pt x="2506788" y="1499594"/>
-                  </a:lnTo>
-                  <a:lnTo>
-                    <a:pt x="2578410" y="1550720"/>
-                  </a:lnTo>
-                  <a:lnTo>
-                    <a:pt x="2650033" y="1600528"/>
-                  </a:lnTo>
-                  <a:lnTo>
-                    <a:pt x="2721655" y="1649053"/>
-                  </a:lnTo>
-                  <a:lnTo>
-                    <a:pt x="2793278" y="1696328"/>
-                  </a:lnTo>
-                  <a:lnTo>
-                    <a:pt x="2864901" y="1742384"/>
-                  </a:lnTo>
-                  <a:lnTo>
-                    <a:pt x="2936523" y="1787254"/>
-                  </a:lnTo>
-                  <a:lnTo>
-                    <a:pt x="3008146" y="1830967"/>
-                  </a:lnTo>
-                  <a:lnTo>
-                    <a:pt x="3079768" y="1873554"/>
-                  </a:lnTo>
-                  <a:lnTo>
-                    <a:pt x="3151391" y="1915044"/>
-                  </a:lnTo>
-                  <a:lnTo>
-                    <a:pt x="3223013" y="1955465"/>
-                  </a:lnTo>
-                  <a:lnTo>
-                    <a:pt x="3294636" y="1994844"/>
-                  </a:lnTo>
-                  <a:lnTo>
-                    <a:pt x="3366258" y="2033209"/>
-                  </a:lnTo>
-                  <a:lnTo>
-                    <a:pt x="3437881" y="2070585"/>
-                  </a:lnTo>
-                  <a:lnTo>
-                    <a:pt x="3509503" y="2106998"/>
-                  </a:lnTo>
-                  <a:lnTo>
-                    <a:pt x="3581126" y="2142472"/>
-                  </a:lnTo>
-                  <a:lnTo>
-                    <a:pt x="3652748" y="2177033"/>
-                  </a:lnTo>
-                  <a:lnTo>
-                    <a:pt x="3724371" y="2210703"/>
-                  </a:lnTo>
-                  <a:lnTo>
-                    <a:pt x="3795993" y="2243506"/>
-                  </a:lnTo>
-                  <a:lnTo>
-                    <a:pt x="3867616" y="2275463"/>
-                  </a:lnTo>
-                  <a:lnTo>
-                    <a:pt x="3939238" y="2306597"/>
-                  </a:lnTo>
-                  <a:lnTo>
-                    <a:pt x="4010861" y="2336928"/>
-                  </a:lnTo>
-                  <a:lnTo>
-                    <a:pt x="4082483" y="2366478"/>
-                  </a:lnTo>
-                  <a:lnTo>
-                    <a:pt x="4154106" y="2395267"/>
-                  </a:lnTo>
-                  <a:lnTo>
-                    <a:pt x="4225729" y="2423314"/>
-                  </a:lnTo>
-                  <a:lnTo>
-                    <a:pt x="4297351" y="2450638"/>
-                  </a:lnTo>
-                  <a:lnTo>
-                    <a:pt x="4368974" y="2477258"/>
-                  </a:lnTo>
-                  <a:lnTo>
-                    <a:pt x="4440596" y="2503192"/>
-                  </a:lnTo>
-                  <a:lnTo>
-                    <a:pt x="4512219" y="2528458"/>
-                  </a:lnTo>
-                  <a:lnTo>
-                    <a:pt x="4583841" y="2553073"/>
-                  </a:lnTo>
-                  <a:lnTo>
-                    <a:pt x="4655464" y="2577054"/>
-                  </a:lnTo>
-                  <a:lnTo>
-                    <a:pt x="4727086" y="2600417"/>
-                  </a:lnTo>
-                  <a:lnTo>
-                    <a:pt x="4798709" y="2623177"/>
-                  </a:lnTo>
-                  <a:lnTo>
-                    <a:pt x="4870331" y="2645352"/>
-                  </a:lnTo>
-                  <a:lnTo>
-                    <a:pt x="4941954" y="2648330"/>
-                  </a:lnTo>
-                  <a:lnTo>
-                    <a:pt x="5013576" y="2638139"/>
-                  </a:lnTo>
-                  <a:lnTo>
-                    <a:pt x="5085199" y="2627823"/>
-                  </a:lnTo>
-                  <a:lnTo>
-                    <a:pt x="5156821" y="2617381"/>
-                  </a:lnTo>
-                  <a:lnTo>
-                    <a:pt x="5228444" y="2606812"/>
-                  </a:lnTo>
-                  <a:lnTo>
-                    <a:pt x="5300066" y="2596113"/>
-                  </a:lnTo>
-                  <a:lnTo>
-                    <a:pt x="5371689" y="2585285"/>
-                  </a:lnTo>
-                  <a:lnTo>
-                    <a:pt x="5443311" y="2574324"/>
-                  </a:lnTo>
-                  <a:lnTo>
-                    <a:pt x="5514934" y="2563230"/>
-                  </a:lnTo>
-                  <a:lnTo>
-                    <a:pt x="5586557" y="2552000"/>
-                  </a:lnTo>
-                  <a:lnTo>
-                    <a:pt x="5658179" y="2540633"/>
-                  </a:lnTo>
-                  <a:lnTo>
-                    <a:pt x="5729802" y="2529128"/>
-                  </a:lnTo>
-                  <a:lnTo>
-                    <a:pt x="5801424" y="2517482"/>
-                  </a:lnTo>
-                  <a:lnTo>
-                    <a:pt x="5873047" y="2505694"/>
-                  </a:lnTo>
-                  <a:lnTo>
-                    <a:pt x="5944669" y="2493762"/>
-                  </a:lnTo>
-                  <a:lnTo>
-                    <a:pt x="6016292" y="2481685"/>
-                  </a:lnTo>
-                  <a:lnTo>
-                    <a:pt x="6087914" y="2469460"/>
-                  </a:lnTo>
-                  <a:lnTo>
-                    <a:pt x="6159537" y="2457086"/>
-                  </a:lnTo>
-                  <a:lnTo>
-                    <a:pt x="6231159" y="2444562"/>
-                  </a:lnTo>
-                  <a:lnTo>
-                    <a:pt x="6302782" y="2431884"/>
-                  </a:lnTo>
-                  <a:lnTo>
-                    <a:pt x="6374404" y="2419052"/>
-                  </a:lnTo>
-                  <a:lnTo>
-                    <a:pt x="6446027" y="2406063"/>
-                  </a:lnTo>
-                  <a:lnTo>
-                    <a:pt x="6517649" y="2392916"/>
-                  </a:lnTo>
-                  <a:lnTo>
-                    <a:pt x="6589272" y="2379609"/>
-                  </a:lnTo>
-                  <a:lnTo>
-                    <a:pt x="6660894" y="2366139"/>
-                  </a:lnTo>
-                  <a:lnTo>
-                    <a:pt x="6732517" y="2352505"/>
-                  </a:lnTo>
-                  <a:lnTo>
-                    <a:pt x="6804139" y="2338704"/>
-                  </a:lnTo>
-                  <a:lnTo>
-                    <a:pt x="6875762" y="2324735"/>
-                  </a:lnTo>
-                  <a:lnTo>
-                    <a:pt x="6947385" y="2310596"/>
-                  </a:lnTo>
-                  <a:lnTo>
-                    <a:pt x="7019007" y="2296284"/>
-                  </a:lnTo>
-                  <a:lnTo>
-                    <a:pt x="7090630" y="2281798"/>
-                  </a:lnTo>
-                  <a:lnTo>
-                    <a:pt x="7090630" y="3110499"/>
-                  </a:lnTo>
-                  <a:lnTo>
-                    <a:pt x="7019007" y="3100627"/>
-                  </a:lnTo>
-                  <a:lnTo>
-                    <a:pt x="6947385" y="3090495"/>
-                  </a:lnTo>
-                  <a:lnTo>
-                    <a:pt x="6875762" y="3080094"/>
-                  </a:lnTo>
-                  <a:lnTo>
-                    <a:pt x="6804139" y="3069418"/>
-                  </a:lnTo>
-                  <a:lnTo>
-                    <a:pt x="6732517" y="3058459"/>
-                  </a:lnTo>
-                  <a:lnTo>
-                    <a:pt x="6660894" y="3047211"/>
-                  </a:lnTo>
-                  <a:lnTo>
-                    <a:pt x="6589272" y="3035665"/>
-                  </a:lnTo>
-                  <a:lnTo>
-                    <a:pt x="6517649" y="3023814"/>
-                  </a:lnTo>
-                  <a:lnTo>
-                    <a:pt x="6446027" y="3011650"/>
-                  </a:lnTo>
-                  <a:lnTo>
-                    <a:pt x="6374404" y="2999163"/>
-                  </a:lnTo>
-                  <a:lnTo>
-                    <a:pt x="6302782" y="2986347"/>
-                  </a:lnTo>
-                  <a:lnTo>
-                    <a:pt x="6231159" y="2973192"/>
-                  </a:lnTo>
-                  <a:lnTo>
-                    <a:pt x="6159537" y="2959688"/>
-                  </a:lnTo>
-                  <a:lnTo>
-                    <a:pt x="6087914" y="2945828"/>
-                  </a:lnTo>
-                  <a:lnTo>
-                    <a:pt x="6016292" y="2931600"/>
-                  </a:lnTo>
-                  <a:lnTo>
-                    <a:pt x="5944669" y="2916997"/>
-                  </a:lnTo>
-                  <a:lnTo>
-                    <a:pt x="5873047" y="2902007"/>
-                  </a:lnTo>
-                  <a:lnTo>
-                    <a:pt x="5801424" y="2886621"/>
-                  </a:lnTo>
-                  <a:lnTo>
-                    <a:pt x="5729802" y="2870828"/>
-                  </a:lnTo>
-                  <a:lnTo>
-                    <a:pt x="5658179" y="2854617"/>
-                  </a:lnTo>
-                  <a:lnTo>
-                    <a:pt x="5586557" y="2837978"/>
-                  </a:lnTo>
-                  <a:lnTo>
-                    <a:pt x="5514934" y="2820898"/>
-                  </a:lnTo>
-                  <a:lnTo>
-                    <a:pt x="5443311" y="2803367"/>
-                  </a:lnTo>
-                  <a:lnTo>
-                    <a:pt x="5371689" y="2785372"/>
-                  </a:lnTo>
-                  <a:lnTo>
-                    <a:pt x="5300066" y="2766901"/>
-                  </a:lnTo>
-                  <a:lnTo>
-                    <a:pt x="5228444" y="2747941"/>
-                  </a:lnTo>
-                  <a:lnTo>
-                    <a:pt x="5156821" y="2728480"/>
-                  </a:lnTo>
-                  <a:lnTo>
-                    <a:pt x="5085199" y="2708505"/>
-                  </a:lnTo>
-                  <a:lnTo>
-                    <a:pt x="5013576" y="2688001"/>
-                  </a:lnTo>
-                  <a:lnTo>
-                    <a:pt x="4941954" y="2666955"/>
-                  </a:lnTo>
-                  <a:lnTo>
-                    <a:pt x="4870331" y="2658399"/>
-                  </a:lnTo>
-                  <a:lnTo>
-                    <a:pt x="4798709" y="2668346"/>
-                  </a:lnTo>
-                  <a:lnTo>
-                    <a:pt x="4727086" y="2678174"/>
-                  </a:lnTo>
-                  <a:lnTo>
-                    <a:pt x="4655464" y="2687883"/>
-                  </a:lnTo>
-                  <a:lnTo>
-                    <a:pt x="4583841" y="2697475"/>
-                  </a:lnTo>
-                  <a:lnTo>
-                    <a:pt x="4512219" y="2706952"/>
-                  </a:lnTo>
-                  <a:lnTo>
-                    <a:pt x="4440596" y="2716314"/>
-                  </a:lnTo>
-                  <a:lnTo>
-                    <a:pt x="4368974" y="2725563"/>
-                  </a:lnTo>
-                  <a:lnTo>
-                    <a:pt x="4297351" y="2734701"/>
-                  </a:lnTo>
-                  <a:lnTo>
-                    <a:pt x="4225729" y="2743729"/>
-                  </a:lnTo>
-                  <a:lnTo>
-                    <a:pt x="4154106" y="2752648"/>
-                  </a:lnTo>
-                  <a:lnTo>
-                    <a:pt x="4082483" y="2761460"/>
-                  </a:lnTo>
-                  <a:lnTo>
-                    <a:pt x="4010861" y="2770165"/>
-                  </a:lnTo>
-                  <a:lnTo>
-                    <a:pt x="3939238" y="2778765"/>
-                  </a:lnTo>
-                  <a:lnTo>
-                    <a:pt x="3867616" y="2787262"/>
-                  </a:lnTo>
-                  <a:lnTo>
-                    <a:pt x="3795993" y="2795656"/>
-                  </a:lnTo>
-                  <a:lnTo>
-                    <a:pt x="3724371" y="2803950"/>
-                  </a:lnTo>
-                  <a:lnTo>
-                    <a:pt x="3652748" y="2812143"/>
-                  </a:lnTo>
-                  <a:lnTo>
-                    <a:pt x="3581126" y="2820237"/>
-                  </a:lnTo>
-                  <a:lnTo>
-                    <a:pt x="3509503" y="2828234"/>
-                  </a:lnTo>
-                  <a:lnTo>
-                    <a:pt x="3437881" y="2836135"/>
-                  </a:lnTo>
-                  <a:lnTo>
-                    <a:pt x="3366258" y="2843940"/>
-                  </a:lnTo>
-                  <a:lnTo>
-                    <a:pt x="3294636" y="2851651"/>
-                  </a:lnTo>
-                  <a:lnTo>
-                    <a:pt x="3223013" y="2859269"/>
-                  </a:lnTo>
-                  <a:lnTo>
-                    <a:pt x="3151391" y="2866796"/>
-                  </a:lnTo>
-                  <a:lnTo>
-                    <a:pt x="3079768" y="2874232"/>
-                  </a:lnTo>
-                  <a:lnTo>
-                    <a:pt x="3008146" y="2881578"/>
-                  </a:lnTo>
-                  <a:lnTo>
-                    <a:pt x="2936523" y="2888835"/>
-                  </a:lnTo>
-                  <a:lnTo>
-                    <a:pt x="2864901" y="2896005"/>
-                  </a:lnTo>
-                  <a:lnTo>
-                    <a:pt x="2793278" y="2903089"/>
-                  </a:lnTo>
-                  <a:lnTo>
-                    <a:pt x="2721655" y="2910088"/>
-                  </a:lnTo>
-                  <a:lnTo>
-                    <a:pt x="2650033" y="2917001"/>
-                  </a:lnTo>
-                  <a:lnTo>
-                    <a:pt x="2578410" y="2923832"/>
-                  </a:lnTo>
-                  <a:lnTo>
-                    <a:pt x="2506788" y="2930580"/>
-                  </a:lnTo>
-                  <a:lnTo>
-                    <a:pt x="2435165" y="2937247"/>
-                  </a:lnTo>
-                  <a:lnTo>
-                    <a:pt x="2363543" y="2943834"/>
-                  </a:lnTo>
-                  <a:lnTo>
-                    <a:pt x="2291920" y="2950341"/>
-                  </a:lnTo>
-                  <a:lnTo>
-                    <a:pt x="2220298" y="2956770"/>
-                  </a:lnTo>
-                  <a:lnTo>
-                    <a:pt x="2148675" y="2963122"/>
-                  </a:lnTo>
-                  <a:lnTo>
-                    <a:pt x="2077053" y="2969396"/>
-                  </a:lnTo>
-                  <a:lnTo>
-                    <a:pt x="2005430" y="2975595"/>
-                  </a:lnTo>
-                  <a:lnTo>
-                    <a:pt x="1933808" y="2981720"/>
-                  </a:lnTo>
-                  <a:lnTo>
-                    <a:pt x="1862185" y="2987771"/>
-                  </a:lnTo>
-                  <a:lnTo>
-                    <a:pt x="1790563" y="2993748"/>
-                  </a:lnTo>
-                  <a:lnTo>
-                    <a:pt x="1718940" y="2999654"/>
-                  </a:lnTo>
-                  <a:lnTo>
-                    <a:pt x="1647318" y="3005488"/>
-                  </a:lnTo>
-                  <a:lnTo>
-                    <a:pt x="1575695" y="3011253"/>
-                  </a:lnTo>
-                  <a:lnTo>
-                    <a:pt x="1504073" y="3016947"/>
-                  </a:lnTo>
-                  <a:lnTo>
-                    <a:pt x="1432450" y="3022573"/>
-                  </a:lnTo>
-                  <a:lnTo>
-                    <a:pt x="1360827" y="3028132"/>
-                  </a:lnTo>
-                  <a:lnTo>
-                    <a:pt x="1289205" y="3033623"/>
-                  </a:lnTo>
-                  <a:lnTo>
-                    <a:pt x="1217582" y="3039048"/>
-                  </a:lnTo>
-                  <a:lnTo>
-                    <a:pt x="1145960" y="3044408"/>
-                  </a:lnTo>
-                  <a:lnTo>
-                    <a:pt x="1074337" y="3049703"/>
-                  </a:lnTo>
-                  <a:lnTo>
-                    <a:pt x="1002715" y="3054934"/>
-                  </a:lnTo>
-                  <a:lnTo>
-                    <a:pt x="931092" y="3060102"/>
-                  </a:lnTo>
-                  <a:lnTo>
-                    <a:pt x="859470" y="3065208"/>
-                  </a:lnTo>
-                  <a:lnTo>
-                    <a:pt x="787847" y="3070253"/>
-                  </a:lnTo>
-                  <a:lnTo>
-                    <a:pt x="716225" y="3075236"/>
-                  </a:lnTo>
-                  <a:lnTo>
-                    <a:pt x="644602" y="3080160"/>
-                  </a:lnTo>
-                  <a:lnTo>
-                    <a:pt x="572980" y="3085024"/>
-                  </a:lnTo>
-                  <a:lnTo>
-                    <a:pt x="501357" y="3089830"/>
-                  </a:lnTo>
-                  <a:lnTo>
-                    <a:pt x="429735" y="3094577"/>
-                  </a:lnTo>
-                  <a:lnTo>
-                    <a:pt x="358112" y="3099268"/>
-                  </a:lnTo>
-                  <a:lnTo>
-                    <a:pt x="286490" y="3103902"/>
-                  </a:lnTo>
-                  <a:lnTo>
-                    <a:pt x="214867" y="3108480"/>
-                  </a:lnTo>
-                  <a:lnTo>
-                    <a:pt x="143245" y="3113002"/>
-                  </a:lnTo>
-                  <a:lnTo>
-                    <a:pt x="71622" y="3117471"/>
-                  </a:lnTo>
-                  <a:lnTo>
-                    <a:pt x="0" y="3121885"/>
+                    <a:pt x="987660" y="47468"/>
+                  </a:lnTo>
+                  <a:lnTo>
+                    <a:pt x="1058207" y="129973"/>
+                  </a:lnTo>
+                  <a:lnTo>
+                    <a:pt x="1128754" y="210351"/>
+                  </a:lnTo>
+                  <a:lnTo>
+                    <a:pt x="1199301" y="288658"/>
+                  </a:lnTo>
+                  <a:lnTo>
+                    <a:pt x="1269849" y="364948"/>
+                  </a:lnTo>
+                  <a:lnTo>
+                    <a:pt x="1340396" y="439272"/>
+                  </a:lnTo>
+                  <a:lnTo>
+                    <a:pt x="1410943" y="511681"/>
+                  </a:lnTo>
+                  <a:lnTo>
+                    <a:pt x="1481490" y="582224"/>
+                  </a:lnTo>
+                  <a:lnTo>
+                    <a:pt x="1552037" y="650949"/>
+                  </a:lnTo>
+                  <a:lnTo>
+                    <a:pt x="1622584" y="717904"/>
+                  </a:lnTo>
+                  <a:lnTo>
+                    <a:pt x="1693132" y="783133"/>
+                  </a:lnTo>
+                  <a:lnTo>
+                    <a:pt x="1763679" y="846681"/>
+                  </a:lnTo>
+                  <a:lnTo>
+                    <a:pt x="1834226" y="908592"/>
+                  </a:lnTo>
+                  <a:lnTo>
+                    <a:pt x="1904773" y="968908"/>
+                  </a:lnTo>
+                  <a:lnTo>
+                    <a:pt x="1975320" y="1027670"/>
+                  </a:lnTo>
+                  <a:lnTo>
+                    <a:pt x="2045868" y="1084917"/>
+                  </a:lnTo>
+                  <a:lnTo>
+                    <a:pt x="2116415" y="1140690"/>
+                  </a:lnTo>
+                  <a:lnTo>
+                    <a:pt x="2186962" y="1195025"/>
+                  </a:lnTo>
+                  <a:lnTo>
+                    <a:pt x="2257509" y="1247960"/>
+                  </a:lnTo>
+                  <a:lnTo>
+                    <a:pt x="2328056" y="1299532"/>
+                  </a:lnTo>
+                  <a:lnTo>
+                    <a:pt x="2398603" y="1349774"/>
+                  </a:lnTo>
+                  <a:lnTo>
+                    <a:pt x="2469151" y="1398722"/>
+                  </a:lnTo>
+                  <a:lnTo>
+                    <a:pt x="2539698" y="1446409"/>
+                  </a:lnTo>
+                  <a:lnTo>
+                    <a:pt x="2610245" y="1492866"/>
+                  </a:lnTo>
+                  <a:lnTo>
+                    <a:pt x="2680792" y="1538127"/>
+                  </a:lnTo>
+                  <a:lnTo>
+                    <a:pt x="2751339" y="1582222"/>
+                  </a:lnTo>
+                  <a:lnTo>
+                    <a:pt x="2821886" y="1625180"/>
+                  </a:lnTo>
+                  <a:lnTo>
+                    <a:pt x="2892434" y="1667032"/>
+                  </a:lnTo>
+                  <a:lnTo>
+                    <a:pt x="2962981" y="1707805"/>
+                  </a:lnTo>
+                  <a:lnTo>
+                    <a:pt x="3033528" y="1747527"/>
+                  </a:lnTo>
+                  <a:lnTo>
+                    <a:pt x="3104075" y="1786226"/>
+                  </a:lnTo>
+                  <a:lnTo>
+                    <a:pt x="3174622" y="1823928"/>
+                  </a:lnTo>
+                  <a:lnTo>
+                    <a:pt x="3245169" y="1860658"/>
+                  </a:lnTo>
+                  <a:lnTo>
+                    <a:pt x="3315717" y="1896442"/>
+                  </a:lnTo>
+                  <a:lnTo>
+                    <a:pt x="3386264" y="1931304"/>
+                  </a:lnTo>
+                  <a:lnTo>
+                    <a:pt x="3456811" y="1965268"/>
+                  </a:lnTo>
+                  <a:lnTo>
+                    <a:pt x="3527358" y="1998356"/>
+                  </a:lnTo>
+                  <a:lnTo>
+                    <a:pt x="3597905" y="2030592"/>
+                  </a:lnTo>
+                  <a:lnTo>
+                    <a:pt x="3668452" y="2061997"/>
+                  </a:lnTo>
+                  <a:lnTo>
+                    <a:pt x="3739000" y="2092593"/>
+                  </a:lnTo>
+                  <a:lnTo>
+                    <a:pt x="3809547" y="2122401"/>
+                  </a:lnTo>
+                  <a:lnTo>
+                    <a:pt x="3880094" y="2151440"/>
+                  </a:lnTo>
+                  <a:lnTo>
+                    <a:pt x="3950641" y="2179732"/>
+                  </a:lnTo>
+                  <a:lnTo>
+                    <a:pt x="4021188" y="2207294"/>
+                  </a:lnTo>
+                  <a:lnTo>
+                    <a:pt x="4091736" y="2234146"/>
+                  </a:lnTo>
+                  <a:lnTo>
+                    <a:pt x="4162283" y="2260306"/>
+                  </a:lnTo>
+                  <a:lnTo>
+                    <a:pt x="4232830" y="2285793"/>
+                  </a:lnTo>
+                  <a:lnTo>
+                    <a:pt x="4303377" y="2310622"/>
+                  </a:lnTo>
+                  <a:lnTo>
+                    <a:pt x="4373924" y="2334812"/>
+                  </a:lnTo>
+                  <a:lnTo>
+                    <a:pt x="4444471" y="2358378"/>
+                  </a:lnTo>
+                  <a:lnTo>
+                    <a:pt x="4515019" y="2381337"/>
+                  </a:lnTo>
+                  <a:lnTo>
+                    <a:pt x="4585566" y="2403705"/>
+                  </a:lnTo>
+                  <a:lnTo>
+                    <a:pt x="4656113" y="2425496"/>
+                  </a:lnTo>
+                  <a:lnTo>
+                    <a:pt x="4726660" y="2446726"/>
+                  </a:lnTo>
+                  <a:lnTo>
+                    <a:pt x="4797207" y="2467409"/>
+                  </a:lnTo>
+                  <a:lnTo>
+                    <a:pt x="4867754" y="2470187"/>
+                  </a:lnTo>
+                  <a:lnTo>
+                    <a:pt x="4938302" y="2460681"/>
+                  </a:lnTo>
+                  <a:lnTo>
+                    <a:pt x="5008849" y="2451059"/>
+                  </a:lnTo>
+                  <a:lnTo>
+                    <a:pt x="5079396" y="2441319"/>
+                  </a:lnTo>
+                  <a:lnTo>
+                    <a:pt x="5149943" y="2431461"/>
+                  </a:lnTo>
+                  <a:lnTo>
+                    <a:pt x="5220490" y="2421482"/>
+                  </a:lnTo>
+                  <a:lnTo>
+                    <a:pt x="5291037" y="2411382"/>
+                  </a:lnTo>
+                  <a:lnTo>
+                    <a:pt x="5361585" y="2401159"/>
+                  </a:lnTo>
+                  <a:lnTo>
+                    <a:pt x="5432132" y="2390811"/>
+                  </a:lnTo>
+                  <a:lnTo>
+                    <a:pt x="5502679" y="2380336"/>
+                  </a:lnTo>
+                  <a:lnTo>
+                    <a:pt x="5573226" y="2369734"/>
+                  </a:lnTo>
+                  <a:lnTo>
+                    <a:pt x="5643773" y="2359002"/>
+                  </a:lnTo>
+                  <a:lnTo>
+                    <a:pt x="5714320" y="2348140"/>
+                  </a:lnTo>
+                  <a:lnTo>
+                    <a:pt x="5784868" y="2337145"/>
+                  </a:lnTo>
+                  <a:lnTo>
+                    <a:pt x="5855415" y="2326016"/>
+                  </a:lnTo>
+                  <a:lnTo>
+                    <a:pt x="5925962" y="2314751"/>
+                  </a:lnTo>
+                  <a:lnTo>
+                    <a:pt x="5996509" y="2303349"/>
+                  </a:lnTo>
+                  <a:lnTo>
+                    <a:pt x="6067056" y="2291807"/>
+                  </a:lnTo>
+                  <a:lnTo>
+                    <a:pt x="6137604" y="2280125"/>
+                  </a:lnTo>
+                  <a:lnTo>
+                    <a:pt x="6208151" y="2268300"/>
+                  </a:lnTo>
+                  <a:lnTo>
+                    <a:pt x="6278698" y="2256331"/>
+                  </a:lnTo>
+                  <a:lnTo>
+                    <a:pt x="6349245" y="2244216"/>
+                  </a:lnTo>
+                  <a:lnTo>
+                    <a:pt x="6419792" y="2231954"/>
+                  </a:lnTo>
+                  <a:lnTo>
+                    <a:pt x="6490339" y="2219541"/>
+                  </a:lnTo>
+                  <a:lnTo>
+                    <a:pt x="6560887" y="2206977"/>
+                  </a:lnTo>
+                  <a:lnTo>
+                    <a:pt x="6631434" y="2194260"/>
+                  </a:lnTo>
+                  <a:lnTo>
+                    <a:pt x="6701981" y="2181388"/>
+                  </a:lnTo>
+                  <a:lnTo>
+                    <a:pt x="6772528" y="2168359"/>
+                  </a:lnTo>
+                  <a:lnTo>
+                    <a:pt x="6843075" y="2155170"/>
+                  </a:lnTo>
+                  <a:lnTo>
+                    <a:pt x="6913622" y="2141821"/>
+                  </a:lnTo>
+                  <a:lnTo>
+                    <a:pt x="6984170" y="2128309"/>
+                  </a:lnTo>
+                  <a:lnTo>
+                    <a:pt x="6984170" y="2901267"/>
+                  </a:lnTo>
+                  <a:lnTo>
+                    <a:pt x="6913622" y="2892060"/>
+                  </a:lnTo>
+                  <a:lnTo>
+                    <a:pt x="6843075" y="2882608"/>
+                  </a:lnTo>
+                  <a:lnTo>
+                    <a:pt x="6772528" y="2872907"/>
+                  </a:lnTo>
+                  <a:lnTo>
+                    <a:pt x="6701981" y="2862949"/>
+                  </a:lnTo>
+                  <a:lnTo>
+                    <a:pt x="6631434" y="2852728"/>
+                  </a:lnTo>
+                  <a:lnTo>
+                    <a:pt x="6560887" y="2842236"/>
+                  </a:lnTo>
+                  <a:lnTo>
+                    <a:pt x="6490339" y="2831467"/>
+                  </a:lnTo>
+                  <a:lnTo>
+                    <a:pt x="6419792" y="2820413"/>
+                  </a:lnTo>
+                  <a:lnTo>
+                    <a:pt x="6349245" y="2809067"/>
+                  </a:lnTo>
+                  <a:lnTo>
+                    <a:pt x="6278698" y="2797421"/>
+                  </a:lnTo>
+                  <a:lnTo>
+                    <a:pt x="6208151" y="2785466"/>
+                  </a:lnTo>
+                  <a:lnTo>
+                    <a:pt x="6137604" y="2773196"/>
+                  </a:lnTo>
+                  <a:lnTo>
+                    <a:pt x="6067056" y="2760601"/>
+                  </a:lnTo>
+                  <a:lnTo>
+                    <a:pt x="5996509" y="2747673"/>
+                  </a:lnTo>
+                  <a:lnTo>
+                    <a:pt x="5925962" y="2734402"/>
+                  </a:lnTo>
+                  <a:lnTo>
+                    <a:pt x="5855415" y="2720781"/>
+                  </a:lnTo>
+                  <a:lnTo>
+                    <a:pt x="5784868" y="2706800"/>
+                  </a:lnTo>
+                  <a:lnTo>
+                    <a:pt x="5714320" y="2692449"/>
+                  </a:lnTo>
+                  <a:lnTo>
+                    <a:pt x="5643773" y="2677718"/>
+                  </a:lnTo>
+                  <a:lnTo>
+                    <a:pt x="5573226" y="2662598"/>
+                  </a:lnTo>
+                  <a:lnTo>
+                    <a:pt x="5502679" y="2647077"/>
+                  </a:lnTo>
+                  <a:lnTo>
+                    <a:pt x="5432132" y="2631147"/>
+                  </a:lnTo>
+                  <a:lnTo>
+                    <a:pt x="5361585" y="2614795"/>
+                  </a:lnTo>
+                  <a:lnTo>
+                    <a:pt x="5291037" y="2598010"/>
+                  </a:lnTo>
+                  <a:lnTo>
+                    <a:pt x="5220490" y="2580782"/>
+                  </a:lnTo>
+                  <a:lnTo>
+                    <a:pt x="5149943" y="2563097"/>
+                  </a:lnTo>
+                  <a:lnTo>
+                    <a:pt x="5079396" y="2544946"/>
+                  </a:lnTo>
+                  <a:lnTo>
+                    <a:pt x="5008849" y="2526314"/>
+                  </a:lnTo>
+                  <a:lnTo>
+                    <a:pt x="4938302" y="2507189"/>
+                  </a:lnTo>
+                  <a:lnTo>
+                    <a:pt x="4867754" y="2487558"/>
+                  </a:lnTo>
+                  <a:lnTo>
+                    <a:pt x="4797207" y="2479578"/>
+                  </a:lnTo>
+                  <a:lnTo>
+                    <a:pt x="4726660" y="2488857"/>
+                  </a:lnTo>
+                  <a:lnTo>
+                    <a:pt x="4656113" y="2498023"/>
+                  </a:lnTo>
+                  <a:lnTo>
+                    <a:pt x="4585566" y="2507079"/>
+                  </a:lnTo>
+                  <a:lnTo>
+                    <a:pt x="4515019" y="2516026"/>
+                  </a:lnTo>
+                  <a:lnTo>
+                    <a:pt x="4444471" y="2524865"/>
+                  </a:lnTo>
+                  <a:lnTo>
+                    <a:pt x="4373924" y="2533597"/>
+                  </a:lnTo>
+                  <a:lnTo>
+                    <a:pt x="4303377" y="2542225"/>
+                  </a:lnTo>
+                  <a:lnTo>
+                    <a:pt x="4232830" y="2550748"/>
+                  </a:lnTo>
+                  <a:lnTo>
+                    <a:pt x="4162283" y="2559168"/>
+                  </a:lnTo>
+                  <a:lnTo>
+                    <a:pt x="4091736" y="2567488"/>
+                  </a:lnTo>
+                  <a:lnTo>
+                    <a:pt x="4021188" y="2575706"/>
+                  </a:lnTo>
+                  <a:lnTo>
+                    <a:pt x="3950641" y="2583826"/>
+                  </a:lnTo>
+                  <a:lnTo>
+                    <a:pt x="3880094" y="2591848"/>
+                  </a:lnTo>
+                  <a:lnTo>
+                    <a:pt x="3809547" y="2599773"/>
+                  </a:lnTo>
+                  <a:lnTo>
+                    <a:pt x="3739000" y="2607603"/>
+                  </a:lnTo>
+                  <a:lnTo>
+                    <a:pt x="3668452" y="2615338"/>
+                  </a:lnTo>
+                  <a:lnTo>
+                    <a:pt x="3597905" y="2622980"/>
+                  </a:lnTo>
+                  <a:lnTo>
+                    <a:pt x="3527358" y="2630530"/>
+                  </a:lnTo>
+                  <a:lnTo>
+                    <a:pt x="3456811" y="2637989"/>
+                  </a:lnTo>
+                  <a:lnTo>
+                    <a:pt x="3386264" y="2645358"/>
+                  </a:lnTo>
+                  <a:lnTo>
+                    <a:pt x="3315717" y="2652638"/>
+                  </a:lnTo>
+                  <a:lnTo>
+                    <a:pt x="3245169" y="2659831"/>
+                  </a:lnTo>
+                  <a:lnTo>
+                    <a:pt x="3174622" y="2666937"/>
+                  </a:lnTo>
+                  <a:lnTo>
+                    <a:pt x="3104075" y="2673957"/>
+                  </a:lnTo>
+                  <a:lnTo>
+                    <a:pt x="3033528" y="2680893"/>
+                  </a:lnTo>
+                  <a:lnTo>
+                    <a:pt x="2962981" y="2687745"/>
+                  </a:lnTo>
+                  <a:lnTo>
+                    <a:pt x="2892434" y="2694514"/>
+                  </a:lnTo>
+                  <a:lnTo>
+                    <a:pt x="2821886" y="2701202"/>
+                  </a:lnTo>
+                  <a:lnTo>
+                    <a:pt x="2751339" y="2707809"/>
+                  </a:lnTo>
+                  <a:lnTo>
+                    <a:pt x="2680792" y="2714337"/>
+                  </a:lnTo>
+                  <a:lnTo>
+                    <a:pt x="2610245" y="2720785"/>
+                  </a:lnTo>
+                  <a:lnTo>
+                    <a:pt x="2539698" y="2727157"/>
+                  </a:lnTo>
+                  <a:lnTo>
+                    <a:pt x="2469151" y="2733451"/>
+                  </a:lnTo>
+                  <a:lnTo>
+                    <a:pt x="2398603" y="2739670"/>
+                  </a:lnTo>
+                  <a:lnTo>
+                    <a:pt x="2328056" y="2745813"/>
+                  </a:lnTo>
+                  <a:lnTo>
+                    <a:pt x="2257509" y="2751883"/>
+                  </a:lnTo>
+                  <a:lnTo>
+                    <a:pt x="2186962" y="2757879"/>
+                  </a:lnTo>
+                  <a:lnTo>
+                    <a:pt x="2116415" y="2763803"/>
+                  </a:lnTo>
+                  <a:lnTo>
+                    <a:pt x="2045868" y="2769656"/>
+                  </a:lnTo>
+                  <a:lnTo>
+                    <a:pt x="1975320" y="2775438"/>
+                  </a:lnTo>
+                  <a:lnTo>
+                    <a:pt x="1904773" y="2781151"/>
+                  </a:lnTo>
+                  <a:lnTo>
+                    <a:pt x="1834226" y="2786794"/>
+                  </a:lnTo>
+                  <a:lnTo>
+                    <a:pt x="1763679" y="2792370"/>
+                  </a:lnTo>
+                  <a:lnTo>
+                    <a:pt x="1693132" y="2797878"/>
+                  </a:lnTo>
+                  <a:lnTo>
+                    <a:pt x="1622584" y="2803320"/>
+                  </a:lnTo>
+                  <a:lnTo>
+                    <a:pt x="1552037" y="2808697"/>
+                  </a:lnTo>
+                  <a:lnTo>
+                    <a:pt x="1481490" y="2814008"/>
+                  </a:lnTo>
+                  <a:lnTo>
+                    <a:pt x="1410943" y="2819256"/>
+                  </a:lnTo>
+                  <a:lnTo>
+                    <a:pt x="1340396" y="2824440"/>
+                  </a:lnTo>
+                  <a:lnTo>
+                    <a:pt x="1269849" y="2829562"/>
+                  </a:lnTo>
+                  <a:lnTo>
+                    <a:pt x="1199301" y="2834622"/>
+                  </a:lnTo>
+                  <a:lnTo>
+                    <a:pt x="1128754" y="2839622"/>
+                  </a:lnTo>
+                  <a:lnTo>
+                    <a:pt x="1058207" y="2844560"/>
+                  </a:lnTo>
+                  <a:lnTo>
+                    <a:pt x="987660" y="2849440"/>
+                  </a:lnTo>
+                  <a:lnTo>
+                    <a:pt x="917113" y="2854260"/>
+                  </a:lnTo>
+                  <a:lnTo>
+                    <a:pt x="846566" y="2859023"/>
+                  </a:lnTo>
+                  <a:lnTo>
+                    <a:pt x="776018" y="2863728"/>
+                  </a:lnTo>
+                  <a:lnTo>
+                    <a:pt x="705471" y="2868376"/>
+                  </a:lnTo>
+                  <a:lnTo>
+                    <a:pt x="634924" y="2872969"/>
+                  </a:lnTo>
+                  <a:lnTo>
+                    <a:pt x="564377" y="2877506"/>
+                  </a:lnTo>
+                  <a:lnTo>
+                    <a:pt x="493830" y="2881988"/>
+                  </a:lnTo>
+                  <a:lnTo>
+                    <a:pt x="423283" y="2886416"/>
+                  </a:lnTo>
+                  <a:lnTo>
+                    <a:pt x="352735" y="2890791"/>
+                  </a:lnTo>
+                  <a:lnTo>
+                    <a:pt x="282188" y="2895113"/>
+                  </a:lnTo>
+                  <a:lnTo>
+                    <a:pt x="211641" y="2899384"/>
+                  </a:lnTo>
+                  <a:lnTo>
+                    <a:pt x="141094" y="2903602"/>
+                  </a:lnTo>
+                  <a:lnTo>
+                    <a:pt x="70547" y="2907770"/>
+                  </a:lnTo>
+                  <a:lnTo>
+                    <a:pt x="0" y="2911888"/>
                   </a:lnTo>
                   <a:close/>
                 </a:path>
@@ -3594,273 +3594,273 @@
           </p:nvSpPr>
           <p:spPr>
             <a:xfrm>
-              <a:off x="2134618" y="2073503"/>
-              <a:ext cx="6128060" cy="2648330"/>
+              <a:off x="2212970" y="2209169"/>
+              <a:ext cx="6036052" cy="2470187"/>
             </a:xfrm>
             <a:custGeom>
               <a:avLst/>
               <a:pathLst>
-                <a:path w="6128060" h="2648330">
+                <a:path w="6036052" h="2470187">
                   <a:moveTo>
                     <a:pt x="0" y="0"/>
                   </a:moveTo>
                   <a:lnTo>
-                    <a:pt x="40146" y="50892"/>
-                  </a:lnTo>
-                  <a:lnTo>
-                    <a:pt x="111768" y="139346"/>
-                  </a:lnTo>
-                  <a:lnTo>
-                    <a:pt x="183391" y="225521"/>
-                  </a:lnTo>
-                  <a:lnTo>
-                    <a:pt x="255013" y="309476"/>
-                  </a:lnTo>
-                  <a:lnTo>
-                    <a:pt x="326636" y="391267"/>
-                  </a:lnTo>
-                  <a:lnTo>
-                    <a:pt x="398258" y="470951"/>
-                  </a:lnTo>
-                  <a:lnTo>
-                    <a:pt x="469881" y="548582"/>
-                  </a:lnTo>
-                  <a:lnTo>
-                    <a:pt x="541503" y="624212"/>
-                  </a:lnTo>
-                  <a:lnTo>
-                    <a:pt x="613126" y="697894"/>
-                  </a:lnTo>
-                  <a:lnTo>
-                    <a:pt x="684748" y="769677"/>
-                  </a:lnTo>
-                  <a:lnTo>
-                    <a:pt x="756371" y="839610"/>
-                  </a:lnTo>
-                  <a:lnTo>
-                    <a:pt x="827993" y="907742"/>
-                  </a:lnTo>
-                  <a:lnTo>
-                    <a:pt x="899616" y="974118"/>
-                  </a:lnTo>
-                  <a:lnTo>
-                    <a:pt x="971238" y="1038783"/>
-                  </a:lnTo>
-                  <a:lnTo>
-                    <a:pt x="1042861" y="1101783"/>
-                  </a:lnTo>
-                  <a:lnTo>
-                    <a:pt x="1114483" y="1163159"/>
-                  </a:lnTo>
-                  <a:lnTo>
-                    <a:pt x="1186106" y="1222953"/>
-                  </a:lnTo>
-                  <a:lnTo>
-                    <a:pt x="1257729" y="1281207"/>
-                  </a:lnTo>
-                  <a:lnTo>
-                    <a:pt x="1329351" y="1337960"/>
-                  </a:lnTo>
-                  <a:lnTo>
-                    <a:pt x="1400974" y="1393251"/>
-                  </a:lnTo>
-                  <a:lnTo>
-                    <a:pt x="1472596" y="1447116"/>
-                  </a:lnTo>
-                  <a:lnTo>
-                    <a:pt x="1544219" y="1499594"/>
-                  </a:lnTo>
-                  <a:lnTo>
-                    <a:pt x="1615841" y="1550720"/>
-                  </a:lnTo>
-                  <a:lnTo>
-                    <a:pt x="1687464" y="1600528"/>
-                  </a:lnTo>
-                  <a:lnTo>
-                    <a:pt x="1759086" y="1649053"/>
-                  </a:lnTo>
-                  <a:lnTo>
-                    <a:pt x="1830709" y="1696328"/>
-                  </a:lnTo>
-                  <a:lnTo>
-                    <a:pt x="1902331" y="1742384"/>
-                  </a:lnTo>
-                  <a:lnTo>
-                    <a:pt x="1973954" y="1787254"/>
-                  </a:lnTo>
-                  <a:lnTo>
-                    <a:pt x="2045576" y="1830967"/>
-                  </a:lnTo>
-                  <a:lnTo>
-                    <a:pt x="2117199" y="1873554"/>
-                  </a:lnTo>
-                  <a:lnTo>
-                    <a:pt x="2188821" y="1915044"/>
-                  </a:lnTo>
-                  <a:lnTo>
-                    <a:pt x="2260444" y="1955465"/>
-                  </a:lnTo>
-                  <a:lnTo>
-                    <a:pt x="2332066" y="1994844"/>
-                  </a:lnTo>
-                  <a:lnTo>
-                    <a:pt x="2403689" y="2033209"/>
-                  </a:lnTo>
-                  <a:lnTo>
-                    <a:pt x="2475311" y="2070585"/>
-                  </a:lnTo>
-                  <a:lnTo>
-                    <a:pt x="2546934" y="2106998"/>
-                  </a:lnTo>
-                  <a:lnTo>
-                    <a:pt x="2618557" y="2142472"/>
-                  </a:lnTo>
-                  <a:lnTo>
-                    <a:pt x="2690179" y="2177033"/>
-                  </a:lnTo>
-                  <a:lnTo>
-                    <a:pt x="2761802" y="2210703"/>
-                  </a:lnTo>
-                  <a:lnTo>
-                    <a:pt x="2833424" y="2243506"/>
-                  </a:lnTo>
-                  <a:lnTo>
-                    <a:pt x="2905047" y="2275463"/>
-                  </a:lnTo>
-                  <a:lnTo>
-                    <a:pt x="2976669" y="2306597"/>
-                  </a:lnTo>
-                  <a:lnTo>
-                    <a:pt x="3048292" y="2336928"/>
-                  </a:lnTo>
-                  <a:lnTo>
-                    <a:pt x="3119914" y="2366478"/>
-                  </a:lnTo>
-                  <a:lnTo>
-                    <a:pt x="3191537" y="2395267"/>
-                  </a:lnTo>
-                  <a:lnTo>
-                    <a:pt x="3263159" y="2423314"/>
-                  </a:lnTo>
-                  <a:lnTo>
-                    <a:pt x="3334782" y="2450638"/>
-                  </a:lnTo>
-                  <a:lnTo>
-                    <a:pt x="3406404" y="2477258"/>
-                  </a:lnTo>
-                  <a:lnTo>
-                    <a:pt x="3478027" y="2503192"/>
-                  </a:lnTo>
-                  <a:lnTo>
-                    <a:pt x="3549649" y="2528458"/>
-                  </a:lnTo>
-                  <a:lnTo>
-                    <a:pt x="3621272" y="2553073"/>
-                  </a:lnTo>
-                  <a:lnTo>
-                    <a:pt x="3692894" y="2577054"/>
-                  </a:lnTo>
-                  <a:lnTo>
-                    <a:pt x="3764517" y="2600417"/>
-                  </a:lnTo>
-                  <a:lnTo>
-                    <a:pt x="3836139" y="2623177"/>
-                  </a:lnTo>
-                  <a:lnTo>
-                    <a:pt x="3907762" y="2645352"/>
-                  </a:lnTo>
-                  <a:lnTo>
-                    <a:pt x="3979385" y="2648330"/>
-                  </a:lnTo>
-                  <a:lnTo>
-                    <a:pt x="4051007" y="2638139"/>
-                  </a:lnTo>
-                  <a:lnTo>
-                    <a:pt x="4122630" y="2627823"/>
-                  </a:lnTo>
-                  <a:lnTo>
-                    <a:pt x="4194252" y="2617381"/>
-                  </a:lnTo>
-                  <a:lnTo>
-                    <a:pt x="4265875" y="2606812"/>
-                  </a:lnTo>
-                  <a:lnTo>
-                    <a:pt x="4337497" y="2596113"/>
-                  </a:lnTo>
-                  <a:lnTo>
-                    <a:pt x="4409120" y="2585285"/>
-                  </a:lnTo>
-                  <a:lnTo>
-                    <a:pt x="4480742" y="2574324"/>
-                  </a:lnTo>
-                  <a:lnTo>
-                    <a:pt x="4552365" y="2563230"/>
-                  </a:lnTo>
-                  <a:lnTo>
-                    <a:pt x="4623987" y="2552000"/>
-                  </a:lnTo>
-                  <a:lnTo>
-                    <a:pt x="4695610" y="2540633"/>
-                  </a:lnTo>
-                  <a:lnTo>
-                    <a:pt x="4767232" y="2529128"/>
-                  </a:lnTo>
-                  <a:lnTo>
-                    <a:pt x="4838855" y="2517482"/>
-                  </a:lnTo>
-                  <a:lnTo>
-                    <a:pt x="4910477" y="2505694"/>
-                  </a:lnTo>
-                  <a:lnTo>
-                    <a:pt x="4982100" y="2493762"/>
-                  </a:lnTo>
-                  <a:lnTo>
-                    <a:pt x="5053722" y="2481685"/>
-                  </a:lnTo>
-                  <a:lnTo>
-                    <a:pt x="5125345" y="2469460"/>
-                  </a:lnTo>
-                  <a:lnTo>
-                    <a:pt x="5196967" y="2457086"/>
-                  </a:lnTo>
-                  <a:lnTo>
-                    <a:pt x="5268590" y="2444562"/>
-                  </a:lnTo>
-                  <a:lnTo>
-                    <a:pt x="5340213" y="2431884"/>
-                  </a:lnTo>
-                  <a:lnTo>
-                    <a:pt x="5411835" y="2419052"/>
-                  </a:lnTo>
-                  <a:lnTo>
-                    <a:pt x="5483458" y="2406063"/>
-                  </a:lnTo>
-                  <a:lnTo>
-                    <a:pt x="5555080" y="2392916"/>
-                  </a:lnTo>
-                  <a:lnTo>
-                    <a:pt x="5626703" y="2379609"/>
-                  </a:lnTo>
-                  <a:lnTo>
-                    <a:pt x="5698325" y="2366139"/>
-                  </a:lnTo>
-                  <a:lnTo>
-                    <a:pt x="5769948" y="2352505"/>
-                  </a:lnTo>
-                  <a:lnTo>
-                    <a:pt x="5841570" y="2338704"/>
-                  </a:lnTo>
-                  <a:lnTo>
-                    <a:pt x="5913193" y="2324735"/>
-                  </a:lnTo>
-                  <a:lnTo>
-                    <a:pt x="5984815" y="2310596"/>
-                  </a:lnTo>
-                  <a:lnTo>
-                    <a:pt x="6056438" y="2296284"/>
-                  </a:lnTo>
-                  <a:lnTo>
-                    <a:pt x="6128060" y="2281798"/>
+                    <a:pt x="39543" y="47468"/>
+                  </a:lnTo>
+                  <a:lnTo>
+                    <a:pt x="110090" y="129973"/>
+                  </a:lnTo>
+                  <a:lnTo>
+                    <a:pt x="180637" y="210351"/>
+                  </a:lnTo>
+                  <a:lnTo>
+                    <a:pt x="251184" y="288658"/>
+                  </a:lnTo>
+                  <a:lnTo>
+                    <a:pt x="321732" y="364948"/>
+                  </a:lnTo>
+                  <a:lnTo>
+                    <a:pt x="392279" y="439272"/>
+                  </a:lnTo>
+                  <a:lnTo>
+                    <a:pt x="462826" y="511681"/>
+                  </a:lnTo>
+                  <a:lnTo>
+                    <a:pt x="533373" y="582224"/>
+                  </a:lnTo>
+                  <a:lnTo>
+                    <a:pt x="603920" y="650949"/>
+                  </a:lnTo>
+                  <a:lnTo>
+                    <a:pt x="674467" y="717904"/>
+                  </a:lnTo>
+                  <a:lnTo>
+                    <a:pt x="745015" y="783133"/>
+                  </a:lnTo>
+                  <a:lnTo>
+                    <a:pt x="815562" y="846681"/>
+                  </a:lnTo>
+                  <a:lnTo>
+                    <a:pt x="886109" y="908592"/>
+                  </a:lnTo>
+                  <a:lnTo>
+                    <a:pt x="956656" y="968908"/>
+                  </a:lnTo>
+                  <a:lnTo>
+                    <a:pt x="1027203" y="1027670"/>
+                  </a:lnTo>
+                  <a:lnTo>
+                    <a:pt x="1097750" y="1084917"/>
+                  </a:lnTo>
+                  <a:lnTo>
+                    <a:pt x="1168298" y="1140690"/>
+                  </a:lnTo>
+                  <a:lnTo>
+                    <a:pt x="1238845" y="1195025"/>
+                  </a:lnTo>
+                  <a:lnTo>
+                    <a:pt x="1309392" y="1247960"/>
+                  </a:lnTo>
+                  <a:lnTo>
+                    <a:pt x="1379939" y="1299532"/>
+                  </a:lnTo>
+                  <a:lnTo>
+                    <a:pt x="1450486" y="1349774"/>
+                  </a:lnTo>
+                  <a:lnTo>
+                    <a:pt x="1521033" y="1398722"/>
+                  </a:lnTo>
+                  <a:lnTo>
+                    <a:pt x="1591581" y="1446409"/>
+                  </a:lnTo>
+                  <a:lnTo>
+                    <a:pt x="1662128" y="1492866"/>
+                  </a:lnTo>
+                  <a:lnTo>
+                    <a:pt x="1732675" y="1538127"/>
+                  </a:lnTo>
+                  <a:lnTo>
+                    <a:pt x="1803222" y="1582222"/>
+                  </a:lnTo>
+                  <a:lnTo>
+                    <a:pt x="1873769" y="1625180"/>
+                  </a:lnTo>
+                  <a:lnTo>
+                    <a:pt x="1944316" y="1667032"/>
+                  </a:lnTo>
+                  <a:lnTo>
+                    <a:pt x="2014864" y="1707805"/>
+                  </a:lnTo>
+                  <a:lnTo>
+                    <a:pt x="2085411" y="1747527"/>
+                  </a:lnTo>
+                  <a:lnTo>
+                    <a:pt x="2155958" y="1786226"/>
+                  </a:lnTo>
+                  <a:lnTo>
+                    <a:pt x="2226505" y="1823928"/>
+                  </a:lnTo>
+                  <a:lnTo>
+                    <a:pt x="2297052" y="1860658"/>
+                  </a:lnTo>
+                  <a:lnTo>
+                    <a:pt x="2367600" y="1896442"/>
+                  </a:lnTo>
+                  <a:lnTo>
+                    <a:pt x="2438147" y="1931304"/>
+                  </a:lnTo>
+                  <a:lnTo>
+                    <a:pt x="2508694" y="1965268"/>
+                  </a:lnTo>
+                  <a:lnTo>
+                    <a:pt x="2579241" y="1998356"/>
+                  </a:lnTo>
+                  <a:lnTo>
+                    <a:pt x="2649788" y="2030592"/>
+                  </a:lnTo>
+                  <a:lnTo>
+                    <a:pt x="2720335" y="2061997"/>
+                  </a:lnTo>
+                  <a:lnTo>
+                    <a:pt x="2790883" y="2092593"/>
+                  </a:lnTo>
+                  <a:lnTo>
+                    <a:pt x="2861430" y="2122401"/>
+                  </a:lnTo>
+                  <a:lnTo>
+                    <a:pt x="2931977" y="2151440"/>
+                  </a:lnTo>
+                  <a:lnTo>
+                    <a:pt x="3002524" y="2179732"/>
+                  </a:lnTo>
+                  <a:lnTo>
+                    <a:pt x="3073071" y="2207294"/>
+                  </a:lnTo>
+                  <a:lnTo>
+                    <a:pt x="3143618" y="2234146"/>
+                  </a:lnTo>
+                  <a:lnTo>
+                    <a:pt x="3214166" y="2260306"/>
+                  </a:lnTo>
+                  <a:lnTo>
+                    <a:pt x="3284713" y="2285793"/>
+                  </a:lnTo>
+                  <a:lnTo>
+                    <a:pt x="3355260" y="2310622"/>
+                  </a:lnTo>
+                  <a:lnTo>
+                    <a:pt x="3425807" y="2334812"/>
+                  </a:lnTo>
+                  <a:lnTo>
+                    <a:pt x="3496354" y="2358378"/>
+                  </a:lnTo>
+                  <a:lnTo>
+                    <a:pt x="3566901" y="2381337"/>
+                  </a:lnTo>
+                  <a:lnTo>
+                    <a:pt x="3637449" y="2403705"/>
+                  </a:lnTo>
+                  <a:lnTo>
+                    <a:pt x="3707996" y="2425496"/>
+                  </a:lnTo>
+                  <a:lnTo>
+                    <a:pt x="3778543" y="2446726"/>
+                  </a:lnTo>
+                  <a:lnTo>
+                    <a:pt x="3849090" y="2467409"/>
+                  </a:lnTo>
+                  <a:lnTo>
+                    <a:pt x="3919637" y="2470187"/>
+                  </a:lnTo>
+                  <a:lnTo>
+                    <a:pt x="3990184" y="2460681"/>
+                  </a:lnTo>
+                  <a:lnTo>
+                    <a:pt x="4060732" y="2451059"/>
+                  </a:lnTo>
+                  <a:lnTo>
+                    <a:pt x="4131279" y="2441319"/>
+                  </a:lnTo>
+                  <a:lnTo>
+                    <a:pt x="4201826" y="2431461"/>
+                  </a:lnTo>
+                  <a:lnTo>
+                    <a:pt x="4272373" y="2421482"/>
+                  </a:lnTo>
+                  <a:lnTo>
+                    <a:pt x="4342920" y="2411382"/>
+                  </a:lnTo>
+                  <a:lnTo>
+                    <a:pt x="4413468" y="2401159"/>
+                  </a:lnTo>
+                  <a:lnTo>
+                    <a:pt x="4484015" y="2390811"/>
+                  </a:lnTo>
+                  <a:lnTo>
+                    <a:pt x="4554562" y="2380336"/>
+                  </a:lnTo>
+                  <a:lnTo>
+                    <a:pt x="4625109" y="2369734"/>
+                  </a:lnTo>
+                  <a:lnTo>
+                    <a:pt x="4695656" y="2359002"/>
+                  </a:lnTo>
+                  <a:lnTo>
+                    <a:pt x="4766203" y="2348140"/>
+                  </a:lnTo>
+                  <a:lnTo>
+                    <a:pt x="4836751" y="2337145"/>
+                  </a:lnTo>
+                  <a:lnTo>
+                    <a:pt x="4907298" y="2326016"/>
+                  </a:lnTo>
+                  <a:lnTo>
+                    <a:pt x="4977845" y="2314751"/>
+                  </a:lnTo>
+                  <a:lnTo>
+                    <a:pt x="5048392" y="2303349"/>
+                  </a:lnTo>
+                  <a:lnTo>
+                    <a:pt x="5118939" y="2291807"/>
+                  </a:lnTo>
+                  <a:lnTo>
+                    <a:pt x="5189486" y="2280125"/>
+                  </a:lnTo>
+                  <a:lnTo>
+                    <a:pt x="5260034" y="2268300"/>
+                  </a:lnTo>
+                  <a:lnTo>
+                    <a:pt x="5330581" y="2256331"/>
+                  </a:lnTo>
+                  <a:lnTo>
+                    <a:pt x="5401128" y="2244216"/>
+                  </a:lnTo>
+                  <a:lnTo>
+                    <a:pt x="5471675" y="2231954"/>
+                  </a:lnTo>
+                  <a:lnTo>
+                    <a:pt x="5542222" y="2219541"/>
+                  </a:lnTo>
+                  <a:lnTo>
+                    <a:pt x="5612769" y="2206977"/>
+                  </a:lnTo>
+                  <a:lnTo>
+                    <a:pt x="5683317" y="2194260"/>
+                  </a:lnTo>
+                  <a:lnTo>
+                    <a:pt x="5753864" y="2181388"/>
+                  </a:lnTo>
+                  <a:lnTo>
+                    <a:pt x="5824411" y="2168359"/>
+                  </a:lnTo>
+                  <a:lnTo>
+                    <a:pt x="5894958" y="2155170"/>
+                  </a:lnTo>
+                  <a:lnTo>
+                    <a:pt x="5965505" y="2141821"/>
+                  </a:lnTo>
+                  <a:lnTo>
+                    <a:pt x="6036052" y="2128309"/>
                   </a:lnTo>
                 </a:path>
               </a:pathLst>
@@ -3880,312 +3880,312 @@
           </p:nvSpPr>
           <p:spPr>
             <a:xfrm>
-              <a:off x="1172049" y="4731902"/>
-              <a:ext cx="7090630" cy="463486"/>
+              <a:off x="1264853" y="4688748"/>
+              <a:ext cx="6984170" cy="432309"/>
             </a:xfrm>
             <a:custGeom>
               <a:avLst/>
               <a:pathLst>
-                <a:path w="7090630" h="463486">
+                <a:path w="6984170" h="432309">
                   <a:moveTo>
-                    <a:pt x="7090630" y="452100"/>
+                    <a:pt x="6984170" y="421689"/>
                   </a:moveTo>
                   <a:lnTo>
-                    <a:pt x="7019007" y="442228"/>
-                  </a:lnTo>
-                  <a:lnTo>
-                    <a:pt x="6947385" y="432095"/>
-                  </a:lnTo>
-                  <a:lnTo>
-                    <a:pt x="6875762" y="421694"/>
-                  </a:lnTo>
-                  <a:lnTo>
-                    <a:pt x="6804139" y="411018"/>
-                  </a:lnTo>
-                  <a:lnTo>
-                    <a:pt x="6732517" y="400060"/>
-                  </a:lnTo>
-                  <a:lnTo>
-                    <a:pt x="6660894" y="388812"/>
-                  </a:lnTo>
-                  <a:lnTo>
-                    <a:pt x="6589272" y="377266"/>
-                  </a:lnTo>
-                  <a:lnTo>
-                    <a:pt x="6517649" y="365415"/>
-                  </a:lnTo>
-                  <a:lnTo>
-                    <a:pt x="6446027" y="353250"/>
-                  </a:lnTo>
-                  <a:lnTo>
-                    <a:pt x="6374404" y="340764"/>
-                  </a:lnTo>
-                  <a:lnTo>
-                    <a:pt x="6302782" y="327948"/>
-                  </a:lnTo>
-                  <a:lnTo>
-                    <a:pt x="6231159" y="314792"/>
-                  </a:lnTo>
-                  <a:lnTo>
-                    <a:pt x="6159537" y="301289"/>
-                  </a:lnTo>
-                  <a:lnTo>
-                    <a:pt x="6087914" y="287428"/>
-                  </a:lnTo>
-                  <a:lnTo>
-                    <a:pt x="6016292" y="273201"/>
-                  </a:lnTo>
-                  <a:lnTo>
-                    <a:pt x="5944669" y="258597"/>
-                  </a:lnTo>
-                  <a:lnTo>
-                    <a:pt x="5873047" y="243608"/>
-                  </a:lnTo>
-                  <a:lnTo>
-                    <a:pt x="5801424" y="228222"/>
-                  </a:lnTo>
-                  <a:lnTo>
-                    <a:pt x="5729802" y="212429"/>
-                  </a:lnTo>
-                  <a:lnTo>
-                    <a:pt x="5658179" y="196218"/>
-                  </a:lnTo>
-                  <a:lnTo>
-                    <a:pt x="5586557" y="179578"/>
-                  </a:lnTo>
-                  <a:lnTo>
-                    <a:pt x="5514934" y="162499"/>
-                  </a:lnTo>
-                  <a:lnTo>
-                    <a:pt x="5443311" y="144967"/>
-                  </a:lnTo>
-                  <a:lnTo>
-                    <a:pt x="5371689" y="126972"/>
-                  </a:lnTo>
-                  <a:lnTo>
-                    <a:pt x="5300066" y="108501"/>
-                  </a:lnTo>
-                  <a:lnTo>
-                    <a:pt x="5228444" y="89542"/>
-                  </a:lnTo>
-                  <a:lnTo>
-                    <a:pt x="5156821" y="70081"/>
-                  </a:lnTo>
-                  <a:lnTo>
-                    <a:pt x="5085199" y="50105"/>
-                  </a:lnTo>
-                  <a:lnTo>
-                    <a:pt x="5013576" y="29601"/>
-                  </a:lnTo>
-                  <a:lnTo>
-                    <a:pt x="4941954" y="8555"/>
-                  </a:lnTo>
-                  <a:lnTo>
-                    <a:pt x="4870331" y="0"/>
-                  </a:lnTo>
-                  <a:lnTo>
-                    <a:pt x="4798709" y="9947"/>
-                  </a:lnTo>
-                  <a:lnTo>
-                    <a:pt x="4727086" y="19774"/>
-                  </a:lnTo>
-                  <a:lnTo>
-                    <a:pt x="4655464" y="29484"/>
-                  </a:lnTo>
-                  <a:lnTo>
-                    <a:pt x="4583841" y="39076"/>
-                  </a:lnTo>
-                  <a:lnTo>
-                    <a:pt x="4512219" y="48552"/>
-                  </a:lnTo>
-                  <a:lnTo>
-                    <a:pt x="4440596" y="57914"/>
-                  </a:lnTo>
-                  <a:lnTo>
-                    <a:pt x="4368974" y="67164"/>
-                  </a:lnTo>
-                  <a:lnTo>
-                    <a:pt x="4297351" y="76302"/>
-                  </a:lnTo>
-                  <a:lnTo>
-                    <a:pt x="4225729" y="85330"/>
-                  </a:lnTo>
-                  <a:lnTo>
-                    <a:pt x="4154106" y="94249"/>
-                  </a:lnTo>
-                  <a:lnTo>
-                    <a:pt x="4082483" y="103060"/>
-                  </a:lnTo>
-                  <a:lnTo>
-                    <a:pt x="4010861" y="111765"/>
-                  </a:lnTo>
-                  <a:lnTo>
-                    <a:pt x="3939238" y="120366"/>
-                  </a:lnTo>
-                  <a:lnTo>
-                    <a:pt x="3867616" y="128863"/>
-                  </a:lnTo>
-                  <a:lnTo>
-                    <a:pt x="3795993" y="137257"/>
-                  </a:lnTo>
-                  <a:lnTo>
-                    <a:pt x="3724371" y="145550"/>
-                  </a:lnTo>
-                  <a:lnTo>
-                    <a:pt x="3652748" y="153743"/>
-                  </a:lnTo>
-                  <a:lnTo>
-                    <a:pt x="3581126" y="161838"/>
-                  </a:lnTo>
-                  <a:lnTo>
-                    <a:pt x="3509503" y="169835"/>
-                  </a:lnTo>
-                  <a:lnTo>
-                    <a:pt x="3437881" y="177735"/>
-                  </a:lnTo>
-                  <a:lnTo>
-                    <a:pt x="3366258" y="185540"/>
-                  </a:lnTo>
-                  <a:lnTo>
-                    <a:pt x="3294636" y="193252"/>
-                  </a:lnTo>
-                  <a:lnTo>
-                    <a:pt x="3223013" y="200870"/>
-                  </a:lnTo>
-                  <a:lnTo>
-                    <a:pt x="3151391" y="208396"/>
-                  </a:lnTo>
-                  <a:lnTo>
-                    <a:pt x="3079768" y="215832"/>
-                  </a:lnTo>
-                  <a:lnTo>
-                    <a:pt x="3008146" y="223178"/>
-                  </a:lnTo>
-                  <a:lnTo>
-                    <a:pt x="2936523" y="230436"/>
-                  </a:lnTo>
-                  <a:lnTo>
-                    <a:pt x="2864901" y="237606"/>
-                  </a:lnTo>
-                  <a:lnTo>
-                    <a:pt x="2793278" y="244690"/>
-                  </a:lnTo>
-                  <a:lnTo>
-                    <a:pt x="2721655" y="251688"/>
-                  </a:lnTo>
-                  <a:lnTo>
-                    <a:pt x="2650033" y="258602"/>
-                  </a:lnTo>
-                  <a:lnTo>
-                    <a:pt x="2578410" y="265433"/>
-                  </a:lnTo>
-                  <a:lnTo>
-                    <a:pt x="2506788" y="272181"/>
-                  </a:lnTo>
-                  <a:lnTo>
-                    <a:pt x="2435165" y="278848"/>
-                  </a:lnTo>
-                  <a:lnTo>
-                    <a:pt x="2363543" y="285435"/>
-                  </a:lnTo>
-                  <a:lnTo>
-                    <a:pt x="2291920" y="291942"/>
-                  </a:lnTo>
-                  <a:lnTo>
-                    <a:pt x="2220298" y="298371"/>
-                  </a:lnTo>
-                  <a:lnTo>
-                    <a:pt x="2148675" y="304722"/>
-                  </a:lnTo>
-                  <a:lnTo>
-                    <a:pt x="2077053" y="310997"/>
-                  </a:lnTo>
-                  <a:lnTo>
-                    <a:pt x="2005430" y="317196"/>
-                  </a:lnTo>
-                  <a:lnTo>
-                    <a:pt x="1933808" y="323320"/>
-                  </a:lnTo>
-                  <a:lnTo>
-                    <a:pt x="1862185" y="329371"/>
-                  </a:lnTo>
-                  <a:lnTo>
-                    <a:pt x="1790563" y="335349"/>
-                  </a:lnTo>
-                  <a:lnTo>
-                    <a:pt x="1718940" y="341254"/>
-                  </a:lnTo>
-                  <a:lnTo>
-                    <a:pt x="1647318" y="347089"/>
-                  </a:lnTo>
-                  <a:lnTo>
-                    <a:pt x="1575695" y="352853"/>
-                  </a:lnTo>
-                  <a:lnTo>
-                    <a:pt x="1504073" y="358548"/>
-                  </a:lnTo>
-                  <a:lnTo>
-                    <a:pt x="1432450" y="364174"/>
-                  </a:lnTo>
-                  <a:lnTo>
-                    <a:pt x="1360827" y="369732"/>
-                  </a:lnTo>
-                  <a:lnTo>
-                    <a:pt x="1289205" y="375223"/>
-                  </a:lnTo>
-                  <a:lnTo>
-                    <a:pt x="1217582" y="380649"/>
-                  </a:lnTo>
-                  <a:lnTo>
-                    <a:pt x="1145960" y="386008"/>
-                  </a:lnTo>
-                  <a:lnTo>
-                    <a:pt x="1074337" y="391303"/>
-                  </a:lnTo>
-                  <a:lnTo>
-                    <a:pt x="1002715" y="396535"/>
-                  </a:lnTo>
-                  <a:lnTo>
-                    <a:pt x="931092" y="401703"/>
-                  </a:lnTo>
-                  <a:lnTo>
-                    <a:pt x="859470" y="406809"/>
-                  </a:lnTo>
-                  <a:lnTo>
-                    <a:pt x="787847" y="411853"/>
-                  </a:lnTo>
-                  <a:lnTo>
-                    <a:pt x="716225" y="416837"/>
-                  </a:lnTo>
-                  <a:lnTo>
-                    <a:pt x="644602" y="421760"/>
-                  </a:lnTo>
-                  <a:lnTo>
-                    <a:pt x="572980" y="426624"/>
-                  </a:lnTo>
-                  <a:lnTo>
-                    <a:pt x="501357" y="431430"/>
-                  </a:lnTo>
-                  <a:lnTo>
-                    <a:pt x="429735" y="436178"/>
-                  </a:lnTo>
-                  <a:lnTo>
-                    <a:pt x="358112" y="440868"/>
-                  </a:lnTo>
-                  <a:lnTo>
-                    <a:pt x="286490" y="445502"/>
-                  </a:lnTo>
-                  <a:lnTo>
-                    <a:pt x="214867" y="450080"/>
-                  </a:lnTo>
-                  <a:lnTo>
-                    <a:pt x="143245" y="454603"/>
-                  </a:lnTo>
-                  <a:lnTo>
-                    <a:pt x="71622" y="459071"/>
-                  </a:lnTo>
-                  <a:lnTo>
-                    <a:pt x="0" y="463486"/>
+                    <a:pt x="6913622" y="412481"/>
+                  </a:lnTo>
+                  <a:lnTo>
+                    <a:pt x="6843075" y="403030"/>
+                  </a:lnTo>
+                  <a:lnTo>
+                    <a:pt x="6772528" y="393328"/>
+                  </a:lnTo>
+                  <a:lnTo>
+                    <a:pt x="6701981" y="383370"/>
+                  </a:lnTo>
+                  <a:lnTo>
+                    <a:pt x="6631434" y="373149"/>
+                  </a:lnTo>
+                  <a:lnTo>
+                    <a:pt x="6560887" y="362658"/>
+                  </a:lnTo>
+                  <a:lnTo>
+                    <a:pt x="6490339" y="351889"/>
+                  </a:lnTo>
+                  <a:lnTo>
+                    <a:pt x="6419792" y="340835"/>
+                  </a:lnTo>
+                  <a:lnTo>
+                    <a:pt x="6349245" y="329488"/>
+                  </a:lnTo>
+                  <a:lnTo>
+                    <a:pt x="6278698" y="317842"/>
+                  </a:lnTo>
+                  <a:lnTo>
+                    <a:pt x="6208151" y="305888"/>
+                  </a:lnTo>
+                  <a:lnTo>
+                    <a:pt x="6137604" y="293617"/>
+                  </a:lnTo>
+                  <a:lnTo>
+                    <a:pt x="6067056" y="281022"/>
+                  </a:lnTo>
+                  <a:lnTo>
+                    <a:pt x="5996509" y="268094"/>
+                  </a:lnTo>
+                  <a:lnTo>
+                    <a:pt x="5925962" y="254824"/>
+                  </a:lnTo>
+                  <a:lnTo>
+                    <a:pt x="5855415" y="241203"/>
+                  </a:lnTo>
+                  <a:lnTo>
+                    <a:pt x="5784868" y="227221"/>
+                  </a:lnTo>
+                  <a:lnTo>
+                    <a:pt x="5714320" y="212870"/>
+                  </a:lnTo>
+                  <a:lnTo>
+                    <a:pt x="5643773" y="198139"/>
+                  </a:lnTo>
+                  <a:lnTo>
+                    <a:pt x="5573226" y="183019"/>
+                  </a:lnTo>
+                  <a:lnTo>
+                    <a:pt x="5502679" y="167499"/>
+                  </a:lnTo>
+                  <a:lnTo>
+                    <a:pt x="5432132" y="151568"/>
+                  </a:lnTo>
+                  <a:lnTo>
+                    <a:pt x="5361585" y="135216"/>
+                  </a:lnTo>
+                  <a:lnTo>
+                    <a:pt x="5291037" y="118431"/>
+                  </a:lnTo>
+                  <a:lnTo>
+                    <a:pt x="5220490" y="101203"/>
+                  </a:lnTo>
+                  <a:lnTo>
+                    <a:pt x="5149943" y="83519"/>
+                  </a:lnTo>
+                  <a:lnTo>
+                    <a:pt x="5079396" y="65367"/>
+                  </a:lnTo>
+                  <a:lnTo>
+                    <a:pt x="5008849" y="46735"/>
+                  </a:lnTo>
+                  <a:lnTo>
+                    <a:pt x="4938302" y="27610"/>
+                  </a:lnTo>
+                  <a:lnTo>
+                    <a:pt x="4867754" y="7980"/>
+                  </a:lnTo>
+                  <a:lnTo>
+                    <a:pt x="4797207" y="0"/>
+                  </a:lnTo>
+                  <a:lnTo>
+                    <a:pt x="4726660" y="9278"/>
+                  </a:lnTo>
+                  <a:lnTo>
+                    <a:pt x="4656113" y="18444"/>
+                  </a:lnTo>
+                  <a:lnTo>
+                    <a:pt x="4585566" y="27500"/>
+                  </a:lnTo>
+                  <a:lnTo>
+                    <a:pt x="4515019" y="36447"/>
+                  </a:lnTo>
+                  <a:lnTo>
+                    <a:pt x="4444471" y="45286"/>
+                  </a:lnTo>
+                  <a:lnTo>
+                    <a:pt x="4373924" y="54019"/>
+                  </a:lnTo>
+                  <a:lnTo>
+                    <a:pt x="4303377" y="62646"/>
+                  </a:lnTo>
+                  <a:lnTo>
+                    <a:pt x="4232830" y="71169"/>
+                  </a:lnTo>
+                  <a:lnTo>
+                    <a:pt x="4162283" y="79590"/>
+                  </a:lnTo>
+                  <a:lnTo>
+                    <a:pt x="4091736" y="87909"/>
+                  </a:lnTo>
+                  <a:lnTo>
+                    <a:pt x="4021188" y="96128"/>
+                  </a:lnTo>
+                  <a:lnTo>
+                    <a:pt x="3950641" y="104247"/>
+                  </a:lnTo>
+                  <a:lnTo>
+                    <a:pt x="3880094" y="112269"/>
+                  </a:lnTo>
+                  <a:lnTo>
+                    <a:pt x="3809547" y="120194"/>
+                  </a:lnTo>
+                  <a:lnTo>
+                    <a:pt x="3739000" y="128024"/>
+                  </a:lnTo>
+                  <a:lnTo>
+                    <a:pt x="3668452" y="135759"/>
+                  </a:lnTo>
+                  <a:lnTo>
+                    <a:pt x="3597905" y="143401"/>
+                  </a:lnTo>
+                  <a:lnTo>
+                    <a:pt x="3527358" y="150951"/>
+                  </a:lnTo>
+                  <a:lnTo>
+                    <a:pt x="3456811" y="158410"/>
+                  </a:lnTo>
+                  <a:lnTo>
+                    <a:pt x="3386264" y="165779"/>
+                  </a:lnTo>
+                  <a:lnTo>
+                    <a:pt x="3315717" y="173060"/>
+                  </a:lnTo>
+                  <a:lnTo>
+                    <a:pt x="3245169" y="180252"/>
+                  </a:lnTo>
+                  <a:lnTo>
+                    <a:pt x="3174622" y="187358"/>
+                  </a:lnTo>
+                  <a:lnTo>
+                    <a:pt x="3104075" y="194378"/>
+                  </a:lnTo>
+                  <a:lnTo>
+                    <a:pt x="3033528" y="201314"/>
+                  </a:lnTo>
+                  <a:lnTo>
+                    <a:pt x="2962981" y="208166"/>
+                  </a:lnTo>
+                  <a:lnTo>
+                    <a:pt x="2892434" y="214935"/>
+                  </a:lnTo>
+                  <a:lnTo>
+                    <a:pt x="2821886" y="221623"/>
+                  </a:lnTo>
+                  <a:lnTo>
+                    <a:pt x="2751339" y="228230"/>
+                  </a:lnTo>
+                  <a:lnTo>
+                    <a:pt x="2680792" y="234758"/>
+                  </a:lnTo>
+                  <a:lnTo>
+                    <a:pt x="2610245" y="241207"/>
+                  </a:lnTo>
+                  <a:lnTo>
+                    <a:pt x="2539698" y="247578"/>
+                  </a:lnTo>
+                  <a:lnTo>
+                    <a:pt x="2469151" y="253872"/>
+                  </a:lnTo>
+                  <a:lnTo>
+                    <a:pt x="2398603" y="260091"/>
+                  </a:lnTo>
+                  <a:lnTo>
+                    <a:pt x="2328056" y="266234"/>
+                  </a:lnTo>
+                  <a:lnTo>
+                    <a:pt x="2257509" y="272304"/>
+                  </a:lnTo>
+                  <a:lnTo>
+                    <a:pt x="2186962" y="278300"/>
+                  </a:lnTo>
+                  <a:lnTo>
+                    <a:pt x="2116415" y="284224"/>
+                  </a:lnTo>
+                  <a:lnTo>
+                    <a:pt x="2045868" y="290077"/>
+                  </a:lnTo>
+                  <a:lnTo>
+                    <a:pt x="1975320" y="295859"/>
+                  </a:lnTo>
+                  <a:lnTo>
+                    <a:pt x="1904773" y="301572"/>
+                  </a:lnTo>
+                  <a:lnTo>
+                    <a:pt x="1834226" y="307215"/>
+                  </a:lnTo>
+                  <a:lnTo>
+                    <a:pt x="1763679" y="312791"/>
+                  </a:lnTo>
+                  <a:lnTo>
+                    <a:pt x="1693132" y="318300"/>
+                  </a:lnTo>
+                  <a:lnTo>
+                    <a:pt x="1622584" y="323742"/>
+                  </a:lnTo>
+                  <a:lnTo>
+                    <a:pt x="1552037" y="329118"/>
+                  </a:lnTo>
+                  <a:lnTo>
+                    <a:pt x="1481490" y="334430"/>
+                  </a:lnTo>
+                  <a:lnTo>
+                    <a:pt x="1410943" y="339677"/>
+                  </a:lnTo>
+                  <a:lnTo>
+                    <a:pt x="1340396" y="344862"/>
+                  </a:lnTo>
+                  <a:lnTo>
+                    <a:pt x="1269849" y="349983"/>
+                  </a:lnTo>
+                  <a:lnTo>
+                    <a:pt x="1199301" y="355044"/>
+                  </a:lnTo>
+                  <a:lnTo>
+                    <a:pt x="1128754" y="360043"/>
+                  </a:lnTo>
+                  <a:lnTo>
+                    <a:pt x="1058207" y="364982"/>
+                  </a:lnTo>
+                  <a:lnTo>
+                    <a:pt x="987660" y="369861"/>
+                  </a:lnTo>
+                  <a:lnTo>
+                    <a:pt x="917113" y="374682"/>
+                  </a:lnTo>
+                  <a:lnTo>
+                    <a:pt x="846566" y="379444"/>
+                  </a:lnTo>
+                  <a:lnTo>
+                    <a:pt x="776018" y="384149"/>
+                  </a:lnTo>
+                  <a:lnTo>
+                    <a:pt x="705471" y="388798"/>
+                  </a:lnTo>
+                  <a:lnTo>
+                    <a:pt x="634924" y="393390"/>
+                  </a:lnTo>
+                  <a:lnTo>
+                    <a:pt x="564377" y="397927"/>
+                  </a:lnTo>
+                  <a:lnTo>
+                    <a:pt x="493830" y="402409"/>
+                  </a:lnTo>
+                  <a:lnTo>
+                    <a:pt x="423283" y="406838"/>
+                  </a:lnTo>
+                  <a:lnTo>
+                    <a:pt x="352735" y="411213"/>
+                  </a:lnTo>
+                  <a:lnTo>
+                    <a:pt x="282188" y="415535"/>
+                  </a:lnTo>
+                  <a:lnTo>
+                    <a:pt x="211641" y="419805"/>
+                  </a:lnTo>
+                  <a:lnTo>
+                    <a:pt x="141094" y="424023"/>
+                  </a:lnTo>
+                  <a:lnTo>
+                    <a:pt x="70547" y="428191"/>
+                  </a:lnTo>
+                  <a:lnTo>
+                    <a:pt x="0" y="432309"/>
                   </a:lnTo>
                 </a:path>
               </a:pathLst>
@@ -4205,312 +4205,312 @@
           </p:nvSpPr>
           <p:spPr>
             <a:xfrm>
-              <a:off x="1172049" y="4219241"/>
-              <a:ext cx="7090630" cy="668214"/>
+              <a:off x="1264853" y="4210572"/>
+              <a:ext cx="6984170" cy="623265"/>
             </a:xfrm>
             <a:custGeom>
               <a:avLst/>
               <a:pathLst>
-                <a:path w="7090630" h="668214">
+                <a:path w="6984170" h="623265">
                   <a:moveTo>
                     <a:pt x="0" y="0"/>
                   </a:moveTo>
                   <a:lnTo>
-                    <a:pt x="71622" y="9319"/>
-                  </a:lnTo>
-                  <a:lnTo>
-                    <a:pt x="143245" y="18574"/>
-                  </a:lnTo>
-                  <a:lnTo>
-                    <a:pt x="214867" y="27764"/>
-                  </a:lnTo>
-                  <a:lnTo>
-                    <a:pt x="286490" y="36890"/>
-                  </a:lnTo>
-                  <a:lnTo>
-                    <a:pt x="358112" y="45952"/>
-                  </a:lnTo>
-                  <a:lnTo>
-                    <a:pt x="429735" y="54952"/>
-                  </a:lnTo>
-                  <a:lnTo>
-                    <a:pt x="501357" y="63889"/>
-                  </a:lnTo>
-                  <a:lnTo>
-                    <a:pt x="572980" y="72763"/>
-                  </a:lnTo>
-                  <a:lnTo>
-                    <a:pt x="644602" y="81576"/>
-                  </a:lnTo>
-                  <a:lnTo>
-                    <a:pt x="716225" y="90327"/>
-                  </a:lnTo>
-                  <a:lnTo>
-                    <a:pt x="787847" y="99017"/>
-                  </a:lnTo>
-                  <a:lnTo>
-                    <a:pt x="859470" y="107647"/>
-                  </a:lnTo>
-                  <a:lnTo>
-                    <a:pt x="931092" y="116217"/>
-                  </a:lnTo>
-                  <a:lnTo>
-                    <a:pt x="1002715" y="124727"/>
-                  </a:lnTo>
-                  <a:lnTo>
-                    <a:pt x="1074337" y="133178"/>
-                  </a:lnTo>
-                  <a:lnTo>
-                    <a:pt x="1145960" y="141569"/>
-                  </a:lnTo>
-                  <a:lnTo>
-                    <a:pt x="1217582" y="149903"/>
-                  </a:lnTo>
-                  <a:lnTo>
-                    <a:pt x="1289205" y="158178"/>
-                  </a:lnTo>
-                  <a:lnTo>
-                    <a:pt x="1360827" y="166396"/>
-                  </a:lnTo>
-                  <a:lnTo>
-                    <a:pt x="1432450" y="174557"/>
-                  </a:lnTo>
-                  <a:lnTo>
-                    <a:pt x="1504073" y="182660"/>
-                  </a:lnTo>
-                  <a:lnTo>
-                    <a:pt x="1575695" y="190707"/>
-                  </a:lnTo>
-                  <a:lnTo>
-                    <a:pt x="1647318" y="198699"/>
-                  </a:lnTo>
-                  <a:lnTo>
-                    <a:pt x="1718940" y="206634"/>
-                  </a:lnTo>
-                  <a:lnTo>
-                    <a:pt x="1790563" y="214514"/>
-                  </a:lnTo>
-                  <a:lnTo>
-                    <a:pt x="1862185" y="222340"/>
-                  </a:lnTo>
-                  <a:lnTo>
-                    <a:pt x="1933808" y="230111"/>
-                  </a:lnTo>
-                  <a:lnTo>
-                    <a:pt x="2005430" y="237827"/>
-                  </a:lnTo>
-                  <a:lnTo>
-                    <a:pt x="2077053" y="245490"/>
-                  </a:lnTo>
-                  <a:lnTo>
-                    <a:pt x="2148675" y="253100"/>
-                  </a:lnTo>
-                  <a:lnTo>
-                    <a:pt x="2220298" y="260656"/>
-                  </a:lnTo>
-                  <a:lnTo>
-                    <a:pt x="2291920" y="268160"/>
-                  </a:lnTo>
-                  <a:lnTo>
-                    <a:pt x="2363543" y="275612"/>
-                  </a:lnTo>
-                  <a:lnTo>
-                    <a:pt x="2435165" y="283012"/>
-                  </a:lnTo>
-                  <a:lnTo>
-                    <a:pt x="2506788" y="290360"/>
-                  </a:lnTo>
-                  <a:lnTo>
-                    <a:pt x="2578410" y="297657"/>
-                  </a:lnTo>
-                  <a:lnTo>
-                    <a:pt x="2650033" y="304904"/>
-                  </a:lnTo>
-                  <a:lnTo>
-                    <a:pt x="2721655" y="312099"/>
-                  </a:lnTo>
-                  <a:lnTo>
-                    <a:pt x="2793278" y="319245"/>
-                  </a:lnTo>
-                  <a:lnTo>
-                    <a:pt x="2864901" y="326341"/>
-                  </a:lnTo>
-                  <a:lnTo>
-                    <a:pt x="2936523" y="333387"/>
-                  </a:lnTo>
-                  <a:lnTo>
-                    <a:pt x="3008146" y="340385"/>
-                  </a:lnTo>
-                  <a:lnTo>
-                    <a:pt x="3079768" y="347333"/>
-                  </a:lnTo>
-                  <a:lnTo>
-                    <a:pt x="3151391" y="354234"/>
-                  </a:lnTo>
-                  <a:lnTo>
-                    <a:pt x="3223013" y="361086"/>
-                  </a:lnTo>
-                  <a:lnTo>
-                    <a:pt x="3294636" y="367890"/>
-                  </a:lnTo>
-                  <a:lnTo>
-                    <a:pt x="3366258" y="374647"/>
-                  </a:lnTo>
-                  <a:lnTo>
-                    <a:pt x="3437881" y="381357"/>
-                  </a:lnTo>
-                  <a:lnTo>
-                    <a:pt x="3509503" y="388021"/>
-                  </a:lnTo>
-                  <a:lnTo>
-                    <a:pt x="3581126" y="394637"/>
-                  </a:lnTo>
-                  <a:lnTo>
-                    <a:pt x="3652748" y="401208"/>
-                  </a:lnTo>
-                  <a:lnTo>
-                    <a:pt x="3724371" y="407733"/>
-                  </a:lnTo>
-                  <a:lnTo>
-                    <a:pt x="3795993" y="414213"/>
-                  </a:lnTo>
-                  <a:lnTo>
-                    <a:pt x="3867616" y="420647"/>
-                  </a:lnTo>
-                  <a:lnTo>
-                    <a:pt x="3939238" y="427037"/>
-                  </a:lnTo>
-                  <a:lnTo>
-                    <a:pt x="4010861" y="433382"/>
-                  </a:lnTo>
-                  <a:lnTo>
-                    <a:pt x="4082483" y="439683"/>
-                  </a:lnTo>
-                  <a:lnTo>
-                    <a:pt x="4154106" y="445940"/>
-                  </a:lnTo>
-                  <a:lnTo>
-                    <a:pt x="4225729" y="452153"/>
-                  </a:lnTo>
-                  <a:lnTo>
-                    <a:pt x="4297351" y="458323"/>
-                  </a:lnTo>
-                  <a:lnTo>
-                    <a:pt x="4368974" y="464450"/>
-                  </a:lnTo>
-                  <a:lnTo>
-                    <a:pt x="4440596" y="470535"/>
-                  </a:lnTo>
-                  <a:lnTo>
-                    <a:pt x="4512219" y="476577"/>
-                  </a:lnTo>
-                  <a:lnTo>
-                    <a:pt x="4583841" y="482577"/>
-                  </a:lnTo>
-                  <a:lnTo>
-                    <a:pt x="4655464" y="488535"/>
-                  </a:lnTo>
-                  <a:lnTo>
-                    <a:pt x="4727086" y="494452"/>
-                  </a:lnTo>
-                  <a:lnTo>
-                    <a:pt x="4798709" y="500328"/>
-                  </a:lnTo>
-                  <a:lnTo>
-                    <a:pt x="4870331" y="506162"/>
-                  </a:lnTo>
-                  <a:lnTo>
-                    <a:pt x="4941954" y="511956"/>
-                  </a:lnTo>
-                  <a:lnTo>
-                    <a:pt x="5013576" y="517710"/>
-                  </a:lnTo>
-                  <a:lnTo>
-                    <a:pt x="5085199" y="523423"/>
-                  </a:lnTo>
-                  <a:lnTo>
-                    <a:pt x="5156821" y="529097"/>
-                  </a:lnTo>
-                  <a:lnTo>
-                    <a:pt x="5228444" y="534731"/>
-                  </a:lnTo>
-                  <a:lnTo>
-                    <a:pt x="5300066" y="540326"/>
-                  </a:lnTo>
-                  <a:lnTo>
-                    <a:pt x="5371689" y="545882"/>
-                  </a:lnTo>
-                  <a:lnTo>
-                    <a:pt x="5443311" y="551400"/>
-                  </a:lnTo>
-                  <a:lnTo>
-                    <a:pt x="5514934" y="556879"/>
-                  </a:lnTo>
-                  <a:lnTo>
-                    <a:pt x="5586557" y="562319"/>
-                  </a:lnTo>
-                  <a:lnTo>
-                    <a:pt x="5658179" y="567722"/>
-                  </a:lnTo>
-                  <a:lnTo>
-                    <a:pt x="5729802" y="573087"/>
-                  </a:lnTo>
-                  <a:lnTo>
-                    <a:pt x="5801424" y="578415"/>
-                  </a:lnTo>
-                  <a:lnTo>
-                    <a:pt x="5873047" y="583706"/>
-                  </a:lnTo>
-                  <a:lnTo>
-                    <a:pt x="5944669" y="588960"/>
-                  </a:lnTo>
-                  <a:lnTo>
-                    <a:pt x="6016292" y="594177"/>
-                  </a:lnTo>
-                  <a:lnTo>
-                    <a:pt x="6087914" y="599358"/>
-                  </a:lnTo>
-                  <a:lnTo>
-                    <a:pt x="6159537" y="604503"/>
-                  </a:lnTo>
-                  <a:lnTo>
-                    <a:pt x="6231159" y="609612"/>
-                  </a:lnTo>
-                  <a:lnTo>
-                    <a:pt x="6302782" y="614685"/>
-                  </a:lnTo>
-                  <a:lnTo>
-                    <a:pt x="6374404" y="619723"/>
-                  </a:lnTo>
-                  <a:lnTo>
-                    <a:pt x="6446027" y="624726"/>
-                  </a:lnTo>
-                  <a:lnTo>
-                    <a:pt x="6517649" y="629694"/>
-                  </a:lnTo>
-                  <a:lnTo>
-                    <a:pt x="6589272" y="634628"/>
-                  </a:lnTo>
-                  <a:lnTo>
-                    <a:pt x="6660894" y="639527"/>
-                  </a:lnTo>
-                  <a:lnTo>
-                    <a:pt x="6732517" y="644392"/>
-                  </a:lnTo>
-                  <a:lnTo>
-                    <a:pt x="6804139" y="649223"/>
-                  </a:lnTo>
-                  <a:lnTo>
-                    <a:pt x="6875762" y="654021"/>
-                  </a:lnTo>
-                  <a:lnTo>
-                    <a:pt x="6947385" y="658785"/>
-                  </a:lnTo>
-                  <a:lnTo>
-                    <a:pt x="7019007" y="663516"/>
-                  </a:lnTo>
-                  <a:lnTo>
-                    <a:pt x="7090630" y="668214"/>
+                    <a:pt x="70547" y="8692"/>
+                  </a:lnTo>
+                  <a:lnTo>
+                    <a:pt x="141094" y="17324"/>
+                  </a:lnTo>
+                  <a:lnTo>
+                    <a:pt x="211641" y="25896"/>
+                  </a:lnTo>
+                  <a:lnTo>
+                    <a:pt x="282188" y="34408"/>
+                  </a:lnTo>
+                  <a:lnTo>
+                    <a:pt x="352735" y="42861"/>
+                  </a:lnTo>
+                  <a:lnTo>
+                    <a:pt x="423283" y="51255"/>
+                  </a:lnTo>
+                  <a:lnTo>
+                    <a:pt x="493830" y="59591"/>
+                  </a:lnTo>
+                  <a:lnTo>
+                    <a:pt x="564377" y="67868"/>
+                  </a:lnTo>
+                  <a:lnTo>
+                    <a:pt x="634924" y="76088"/>
+                  </a:lnTo>
+                  <a:lnTo>
+                    <a:pt x="705471" y="84251"/>
+                  </a:lnTo>
+                  <a:lnTo>
+                    <a:pt x="776018" y="92357"/>
+                  </a:lnTo>
+                  <a:lnTo>
+                    <a:pt x="846566" y="100406"/>
+                  </a:lnTo>
+                  <a:lnTo>
+                    <a:pt x="917113" y="108399"/>
+                  </a:lnTo>
+                  <a:lnTo>
+                    <a:pt x="987660" y="116337"/>
+                  </a:lnTo>
+                  <a:lnTo>
+                    <a:pt x="1058207" y="124219"/>
+                  </a:lnTo>
+                  <a:lnTo>
+                    <a:pt x="1128754" y="132047"/>
+                  </a:lnTo>
+                  <a:lnTo>
+                    <a:pt x="1199301" y="139819"/>
+                  </a:lnTo>
+                  <a:lnTo>
+                    <a:pt x="1269849" y="147538"/>
+                  </a:lnTo>
+                  <a:lnTo>
+                    <a:pt x="1340396" y="155203"/>
+                  </a:lnTo>
+                  <a:lnTo>
+                    <a:pt x="1410943" y="162815"/>
+                  </a:lnTo>
+                  <a:lnTo>
+                    <a:pt x="1481490" y="170373"/>
+                  </a:lnTo>
+                  <a:lnTo>
+                    <a:pt x="1552037" y="177879"/>
+                  </a:lnTo>
+                  <a:lnTo>
+                    <a:pt x="1622584" y="185333"/>
+                  </a:lnTo>
+                  <a:lnTo>
+                    <a:pt x="1693132" y="192735"/>
+                  </a:lnTo>
+                  <a:lnTo>
+                    <a:pt x="1763679" y="200085"/>
+                  </a:lnTo>
+                  <a:lnTo>
+                    <a:pt x="1834226" y="207384"/>
+                  </a:lnTo>
+                  <a:lnTo>
+                    <a:pt x="1904773" y="214632"/>
+                  </a:lnTo>
+                  <a:lnTo>
+                    <a:pt x="1975320" y="221830"/>
+                  </a:lnTo>
+                  <a:lnTo>
+                    <a:pt x="2045868" y="228977"/>
+                  </a:lnTo>
+                  <a:lnTo>
+                    <a:pt x="2116415" y="236075"/>
+                  </a:lnTo>
+                  <a:lnTo>
+                    <a:pt x="2186962" y="243123"/>
+                  </a:lnTo>
+                  <a:lnTo>
+                    <a:pt x="2257509" y="250122"/>
+                  </a:lnTo>
+                  <a:lnTo>
+                    <a:pt x="2328056" y="257073"/>
+                  </a:lnTo>
+                  <a:lnTo>
+                    <a:pt x="2398603" y="263975"/>
+                  </a:lnTo>
+                  <a:lnTo>
+                    <a:pt x="2469151" y="270829"/>
+                  </a:lnTo>
+                  <a:lnTo>
+                    <a:pt x="2539698" y="277635"/>
+                  </a:lnTo>
+                  <a:lnTo>
+                    <a:pt x="2610245" y="284394"/>
+                  </a:lnTo>
+                  <a:lnTo>
+                    <a:pt x="2680792" y="291105"/>
+                  </a:lnTo>
+                  <a:lnTo>
+                    <a:pt x="2751339" y="297770"/>
+                  </a:lnTo>
+                  <a:lnTo>
+                    <a:pt x="2821886" y="304389"/>
+                  </a:lnTo>
+                  <a:lnTo>
+                    <a:pt x="2892434" y="310962"/>
+                  </a:lnTo>
+                  <a:lnTo>
+                    <a:pt x="2962981" y="317488"/>
+                  </a:lnTo>
+                  <a:lnTo>
+                    <a:pt x="3033528" y="323969"/>
+                  </a:lnTo>
+                  <a:lnTo>
+                    <a:pt x="3104075" y="330406"/>
+                  </a:lnTo>
+                  <a:lnTo>
+                    <a:pt x="3174622" y="336797"/>
+                  </a:lnTo>
+                  <a:lnTo>
+                    <a:pt x="3245169" y="343144"/>
+                  </a:lnTo>
+                  <a:lnTo>
+                    <a:pt x="3315717" y="349446"/>
+                  </a:lnTo>
+                  <a:lnTo>
+                    <a:pt x="3386264" y="355705"/>
+                  </a:lnTo>
+                  <a:lnTo>
+                    <a:pt x="3456811" y="361920"/>
+                  </a:lnTo>
+                  <a:lnTo>
+                    <a:pt x="3527358" y="368092"/>
+                  </a:lnTo>
+                  <a:lnTo>
+                    <a:pt x="3597905" y="374220"/>
+                  </a:lnTo>
+                  <a:lnTo>
+                    <a:pt x="3668452" y="380306"/>
+                  </a:lnTo>
+                  <a:lnTo>
+                    <a:pt x="3739000" y="386350"/>
+                  </a:lnTo>
+                  <a:lnTo>
+                    <a:pt x="3809547" y="392352"/>
+                  </a:lnTo>
+                  <a:lnTo>
+                    <a:pt x="3880094" y="398311"/>
+                  </a:lnTo>
+                  <a:lnTo>
+                    <a:pt x="3950641" y="404230"/>
+                  </a:lnTo>
+                  <a:lnTo>
+                    <a:pt x="4021188" y="410107"/>
+                  </a:lnTo>
+                  <a:lnTo>
+                    <a:pt x="4091736" y="415943"/>
+                  </a:lnTo>
+                  <a:lnTo>
+                    <a:pt x="4162283" y="421738"/>
+                  </a:lnTo>
+                  <a:lnTo>
+                    <a:pt x="4232830" y="427494"/>
+                  </a:lnTo>
+                  <a:lnTo>
+                    <a:pt x="4303377" y="433209"/>
+                  </a:lnTo>
+                  <a:lnTo>
+                    <a:pt x="4373924" y="438884"/>
+                  </a:lnTo>
+                  <a:lnTo>
+                    <a:pt x="4444471" y="444519"/>
+                  </a:lnTo>
+                  <a:lnTo>
+                    <a:pt x="4515019" y="450116"/>
+                  </a:lnTo>
+                  <a:lnTo>
+                    <a:pt x="4585566" y="455673"/>
+                  </a:lnTo>
+                  <a:lnTo>
+                    <a:pt x="4656113" y="461192"/>
+                  </a:lnTo>
+                  <a:lnTo>
+                    <a:pt x="4726660" y="466672"/>
+                  </a:lnTo>
+                  <a:lnTo>
+                    <a:pt x="4797207" y="472115"/>
+                  </a:lnTo>
+                  <a:lnTo>
+                    <a:pt x="4867754" y="477519"/>
+                  </a:lnTo>
+                  <a:lnTo>
+                    <a:pt x="4938302" y="482885"/>
+                  </a:lnTo>
+                  <a:lnTo>
+                    <a:pt x="5008849" y="488215"/>
+                  </a:lnTo>
+                  <a:lnTo>
+                    <a:pt x="5079396" y="493507"/>
+                  </a:lnTo>
+                  <a:lnTo>
+                    <a:pt x="5149943" y="498762"/>
+                  </a:lnTo>
+                  <a:lnTo>
+                    <a:pt x="5220490" y="503981"/>
+                  </a:lnTo>
+                  <a:lnTo>
+                    <a:pt x="5291037" y="509163"/>
+                  </a:lnTo>
+                  <a:lnTo>
+                    <a:pt x="5361585" y="514309"/>
+                  </a:lnTo>
+                  <a:lnTo>
+                    <a:pt x="5432132" y="519419"/>
+                  </a:lnTo>
+                  <a:lnTo>
+                    <a:pt x="5502679" y="524494"/>
+                  </a:lnTo>
+                  <a:lnTo>
+                    <a:pt x="5573226" y="529533"/>
+                  </a:lnTo>
+                  <a:lnTo>
+                    <a:pt x="5643773" y="534538"/>
+                  </a:lnTo>
+                  <a:lnTo>
+                    <a:pt x="5714320" y="539507"/>
+                  </a:lnTo>
+                  <a:lnTo>
+                    <a:pt x="5784868" y="544442"/>
+                  </a:lnTo>
+                  <a:lnTo>
+                    <a:pt x="5855415" y="549342"/>
+                  </a:lnTo>
+                  <a:lnTo>
+                    <a:pt x="5925962" y="554209"/>
+                  </a:lnTo>
+                  <a:lnTo>
+                    <a:pt x="5996509" y="559041"/>
+                  </a:lnTo>
+                  <a:lnTo>
+                    <a:pt x="6067056" y="563840"/>
+                  </a:lnTo>
+                  <a:lnTo>
+                    <a:pt x="6137604" y="568605"/>
+                  </a:lnTo>
+                  <a:lnTo>
+                    <a:pt x="6208151" y="573337"/>
+                  </a:lnTo>
+                  <a:lnTo>
+                    <a:pt x="6278698" y="578037"/>
+                  </a:lnTo>
+                  <a:lnTo>
+                    <a:pt x="6349245" y="582703"/>
+                  </a:lnTo>
+                  <a:lnTo>
+                    <a:pt x="6419792" y="587337"/>
+                  </a:lnTo>
+                  <a:lnTo>
+                    <a:pt x="6490339" y="591939"/>
+                  </a:lnTo>
+                  <a:lnTo>
+                    <a:pt x="6560887" y="596508"/>
+                  </a:lnTo>
+                  <a:lnTo>
+                    <a:pt x="6631434" y="601046"/>
+                  </a:lnTo>
+                  <a:lnTo>
+                    <a:pt x="6701981" y="605552"/>
+                  </a:lnTo>
+                  <a:lnTo>
+                    <a:pt x="6772528" y="610027"/>
+                  </a:lnTo>
+                  <a:lnTo>
+                    <a:pt x="6843075" y="614471"/>
+                  </a:lnTo>
+                  <a:lnTo>
+                    <a:pt x="6913622" y="618884"/>
+                  </a:lnTo>
+                  <a:lnTo>
+                    <a:pt x="6984170" y="623265"/>
                   </a:lnTo>
                 </a:path>
               </a:pathLst>
@@ -4539,21 +4539,21 @@
           </p:nvSpPr>
           <p:spPr>
             <a:xfrm>
-              <a:off x="817517" y="4727786"/>
-              <a:ext cx="7799693" cy="0"/>
+              <a:off x="915645" y="4684908"/>
+              <a:ext cx="7682587" cy="0"/>
             </a:xfrm>
             <a:custGeom>
               <a:avLst/>
               <a:pathLst>
-                <a:path w="7799693" h="0">
+                <a:path w="7682587" h="0">
                   <a:moveTo>
                     <a:pt x="0" y="0"/>
                   </a:moveTo>
                   <a:lnTo>
-                    <a:pt x="7799693" y="0"/>
-                  </a:lnTo>
-                  <a:lnTo>
-                    <a:pt x="7799693" y="0"/>
+                    <a:pt x="7682587" y="0"/>
+                  </a:lnTo>
+                  <a:lnTo>
+                    <a:pt x="7682587" y="0"/>
                   </a:lnTo>
                 </a:path>
               </a:pathLst>
@@ -4582,15 +4582,15 @@
           </p:nvSpPr>
           <p:spPr>
             <a:xfrm>
-              <a:off x="6071765" y="2073503"/>
-              <a:ext cx="0" cy="3649639"/>
+              <a:off x="6091004" y="2209169"/>
+              <a:ext cx="0" cy="3404141"/>
             </a:xfrm>
             <a:custGeom>
               <a:avLst/>
               <a:pathLst>
-                <a:path w="0" h="3649639">
+                <a:path w="0" h="3404141">
                   <a:moveTo>
-                    <a:pt x="0" y="3649639"/>
+                    <a:pt x="0" y="3404141"/>
                   </a:moveTo>
                   <a:lnTo>
                     <a:pt x="0" y="0"/>
@@ -4625,15 +4625,15 @@
           </p:nvSpPr>
           <p:spPr>
             <a:xfrm>
-              <a:off x="5051213" y="2073503"/>
-              <a:ext cx="0" cy="3649639"/>
+              <a:off x="5085775" y="2209169"/>
+              <a:ext cx="0" cy="3404141"/>
             </a:xfrm>
             <a:custGeom>
               <a:avLst/>
               <a:pathLst>
-                <a:path w="0" h="3649639">
+                <a:path w="0" h="3404141">
                   <a:moveTo>
-                    <a:pt x="0" y="3649639"/>
+                    <a:pt x="0" y="3404141"/>
                   </a:moveTo>
                   <a:lnTo>
                     <a:pt x="0" y="0"/>
@@ -4668,15 +4668,15 @@
           </p:nvSpPr>
           <p:spPr>
             <a:xfrm>
-              <a:off x="6733531" y="2073503"/>
-              <a:ext cx="0" cy="3649639"/>
+              <a:off x="6742834" y="2209169"/>
+              <a:ext cx="0" cy="3404141"/>
             </a:xfrm>
             <a:custGeom>
               <a:avLst/>
               <a:pathLst>
-                <a:path w="0" h="3649639">
+                <a:path w="0" h="3404141">
                   <a:moveTo>
-                    <a:pt x="0" y="3649639"/>
+                    <a:pt x="0" y="3404141"/>
                   </a:moveTo>
                   <a:lnTo>
                     <a:pt x="0" y="0"/>
@@ -4711,8 +4711,8 @@
           </p:nvSpPr>
           <p:spPr>
             <a:xfrm>
-              <a:off x="692708" y="5517199"/>
-              <a:ext cx="62179" cy="80101"/>
+              <a:off x="756929" y="5407599"/>
+              <a:ext cx="79004" cy="101955"/>
             </a:xfrm>
             <a:prstGeom prst="rect">
               <a:avLst/>
@@ -4725,7 +4725,7 @@
             <a:p>
               <a:pPr algn="l" marL="0" marR="0" indent="0">
                 <a:lnSpc>
-                  <a:spcPts val="880"/>
+                  <a:spcPts val="1120"/>
                 </a:lnSpc>
                 <a:spcBef>
                   <a:spcPts val="0"/>
@@ -4735,7 +4735,7 @@
                 </a:spcAft>
               </a:pPr>
               <a:r>
-                <a:rPr sz="880">
+                <a:rPr sz="1120">
                   <a:solidFill>
                     <a:srgbClr val="4D4D4D">
                       <a:alpha val="100000"/>
@@ -4757,8 +4757,8 @@
           </p:nvSpPr>
           <p:spPr>
             <a:xfrm>
-              <a:off x="692708" y="4687735"/>
-              <a:ext cx="62179" cy="80101"/>
+              <a:off x="756929" y="4633931"/>
+              <a:ext cx="79004" cy="101955"/>
             </a:xfrm>
             <a:prstGeom prst="rect">
               <a:avLst/>
@@ -4771,7 +4771,7 @@
             <a:p>
               <a:pPr algn="l" marL="0" marR="0" indent="0">
                 <a:lnSpc>
-                  <a:spcPts val="880"/>
+                  <a:spcPts val="1120"/>
                 </a:lnSpc>
                 <a:spcBef>
                   <a:spcPts val="0"/>
@@ -4781,7 +4781,7 @@
                 </a:spcAft>
               </a:pPr>
               <a:r>
-                <a:rPr sz="880">
+                <a:rPr sz="1120">
                   <a:solidFill>
                     <a:srgbClr val="4D4D4D">
                       <a:alpha val="100000"/>
@@ -4803,8 +4803,8 @@
           </p:nvSpPr>
           <p:spPr>
             <a:xfrm>
-              <a:off x="692708" y="3858272"/>
-              <a:ext cx="62179" cy="80101"/>
+              <a:off x="756929" y="3860262"/>
+              <a:ext cx="79004" cy="101955"/>
             </a:xfrm>
             <a:prstGeom prst="rect">
               <a:avLst/>
@@ -4817,7 +4817,7 @@
             <a:p>
               <a:pPr algn="l" marL="0" marR="0" indent="0">
                 <a:lnSpc>
-                  <a:spcPts val="880"/>
+                  <a:spcPts val="1120"/>
                 </a:lnSpc>
                 <a:spcBef>
                   <a:spcPts val="0"/>
@@ -4827,7 +4827,7 @@
                 </a:spcAft>
               </a:pPr>
               <a:r>
-                <a:rPr sz="880">
+                <a:rPr sz="1120">
                   <a:solidFill>
                     <a:srgbClr val="4D4D4D">
                       <a:alpha val="100000"/>
@@ -4849,8 +4849,8 @@
           </p:nvSpPr>
           <p:spPr>
             <a:xfrm>
-              <a:off x="692708" y="3028808"/>
-              <a:ext cx="62179" cy="80101"/>
+              <a:off x="756929" y="3086593"/>
+              <a:ext cx="79004" cy="101955"/>
             </a:xfrm>
             <a:prstGeom prst="rect">
               <a:avLst/>
@@ -4863,7 +4863,7 @@
             <a:p>
               <a:pPr algn="l" marL="0" marR="0" indent="0">
                 <a:lnSpc>
-                  <a:spcPts val="880"/>
+                  <a:spcPts val="1120"/>
                 </a:lnSpc>
                 <a:spcBef>
                   <a:spcPts val="0"/>
@@ -4873,7 +4873,7 @@
                 </a:spcAft>
               </a:pPr>
               <a:r>
-                <a:rPr sz="880">
+                <a:rPr sz="1120">
                   <a:solidFill>
                     <a:srgbClr val="4D4D4D">
                       <a:alpha val="100000"/>
@@ -4895,8 +4895,8 @@
           </p:nvSpPr>
           <p:spPr>
             <a:xfrm>
-              <a:off x="692708" y="2199345"/>
-              <a:ext cx="62179" cy="80101"/>
+              <a:off x="756929" y="2312925"/>
+              <a:ext cx="79004" cy="101955"/>
             </a:xfrm>
             <a:prstGeom prst="rect">
               <a:avLst/>
@@ -4909,7 +4909,7 @@
             <a:p>
               <a:pPr algn="l" marL="0" marR="0" indent="0">
                 <a:lnSpc>
-                  <a:spcPts val="880"/>
+                  <a:spcPts val="1120"/>
                 </a:lnSpc>
                 <a:spcBef>
                   <a:spcPts val="0"/>
@@ -4919,7 +4919,7 @@
                 </a:spcAft>
               </a:pPr>
               <a:r>
-                <a:rPr sz="880">
+                <a:rPr sz="1120">
                   <a:solidFill>
                     <a:srgbClr val="4D4D4D">
                       <a:alpha val="100000"/>
@@ -4941,8 +4941,8 @@
           </p:nvSpPr>
           <p:spPr>
             <a:xfrm>
-              <a:off x="2331636" y="5785772"/>
-              <a:ext cx="161574" cy="80101"/>
+              <a:off x="2383963" y="5693022"/>
+              <a:ext cx="205282" cy="101955"/>
             </a:xfrm>
             <a:prstGeom prst="rect">
               <a:avLst/>
@@ -4955,7 +4955,7 @@
             <a:p>
               <a:pPr algn="l" marL="0" marR="0" indent="0">
                 <a:lnSpc>
-                  <a:spcPts val="880"/>
+                  <a:spcPts val="1120"/>
                 </a:lnSpc>
                 <a:spcBef>
                   <a:spcPts val="0"/>
@@ -4965,7 +4965,7 @@
                 </a:spcAft>
               </a:pPr>
               <a:r>
-                <a:rPr sz="880">
+                <a:rPr sz="1120">
                   <a:solidFill>
                     <a:srgbClr val="4D4D4D">
                       <a:alpha val="100000"/>
@@ -4987,8 +4987,8 @@
           </p:nvSpPr>
           <p:spPr>
             <a:xfrm>
-              <a:off x="4181509" y="5785772"/>
-              <a:ext cx="161574" cy="80101"/>
+              <a:off x="4206062" y="5693022"/>
+              <a:ext cx="205282" cy="101955"/>
             </a:xfrm>
             <a:prstGeom prst="rect">
               <a:avLst/>
@@ -5001,7 +5001,7 @@
             <a:p>
               <a:pPr algn="l" marL="0" marR="0" indent="0">
                 <a:lnSpc>
-                  <a:spcPts val="880"/>
+                  <a:spcPts val="1120"/>
                 </a:lnSpc>
                 <a:spcBef>
                   <a:spcPts val="0"/>
@@ -5011,7 +5011,7 @@
                 </a:spcAft>
               </a:pPr>
               <a:r>
-                <a:rPr sz="880">
+                <a:rPr sz="1120">
                   <a:solidFill>
                     <a:srgbClr val="4D4D4D">
                       <a:alpha val="100000"/>
@@ -5033,8 +5033,8 @@
           </p:nvSpPr>
           <p:spPr>
             <a:xfrm>
-              <a:off x="6081080" y="5785772"/>
-              <a:ext cx="62179" cy="80101"/>
+              <a:off x="6091300" y="5693022"/>
+              <a:ext cx="79004" cy="101955"/>
             </a:xfrm>
             <a:prstGeom prst="rect">
               <a:avLst/>
@@ -5047,7 +5047,7 @@
             <a:p>
               <a:pPr algn="l" marL="0" marR="0" indent="0">
                 <a:lnSpc>
-                  <a:spcPts val="880"/>
+                  <a:spcPts val="1120"/>
                 </a:lnSpc>
                 <a:spcBef>
                   <a:spcPts val="0"/>
@@ -5057,7 +5057,7 @@
                 </a:spcAft>
               </a:pPr>
               <a:r>
-                <a:rPr sz="880">
+                <a:rPr sz="1120">
                   <a:solidFill>
                     <a:srgbClr val="4D4D4D">
                       <a:alpha val="100000"/>
@@ -5079,8 +5079,8 @@
           </p:nvSpPr>
           <p:spPr>
             <a:xfrm>
-              <a:off x="7899863" y="5785772"/>
-              <a:ext cx="124358" cy="80101"/>
+              <a:off x="7873896" y="5693022"/>
+              <a:ext cx="158008" cy="101955"/>
             </a:xfrm>
             <a:prstGeom prst="rect">
               <a:avLst/>
@@ -5093,7 +5093,7 @@
             <a:p>
               <a:pPr algn="l" marL="0" marR="0" indent="0">
                 <a:lnSpc>
-                  <a:spcPts val="880"/>
+                  <a:spcPts val="1120"/>
                 </a:lnSpc>
                 <a:spcBef>
                   <a:spcPts val="0"/>
@@ -5103,7 +5103,7 @@
                 </a:spcAft>
               </a:pPr>
               <a:r>
-                <a:rPr sz="880">
+                <a:rPr sz="1120">
                   <a:solidFill>
                     <a:srgbClr val="4D4D4D">
                       <a:alpha val="100000"/>
@@ -5125,8 +5125,8 @@
           </p:nvSpPr>
           <p:spPr>
             <a:xfrm>
-              <a:off x="3832408" y="5925448"/>
-              <a:ext cx="1769912" cy="100218"/>
+              <a:off x="3630809" y="5870717"/>
+              <a:ext cx="2252258" cy="127558"/>
             </a:xfrm>
             <a:prstGeom prst="rect">
               <a:avLst/>
@@ -5139,7 +5139,7 @@
             <a:p>
               <a:pPr algn="l" marL="0" marR="0" indent="0">
                 <a:lnSpc>
-                  <a:spcPts val="1100"/>
+                  <a:spcPts val="1400"/>
                 </a:lnSpc>
                 <a:spcBef>
                   <a:spcPts val="0"/>
@@ -5149,7 +5149,7 @@
                 </a:spcAft>
               </a:pPr>
               <a:r>
-                <a:rPr sz="1100">
+                <a:rPr sz="1400">
                   <a:solidFill>
                     <a:srgbClr val="000000">
                       <a:alpha val="100000"/>
@@ -5171,8 +5171,8 @@
           </p:nvSpPr>
           <p:spPr>
             <a:xfrm rot="-5400000">
-              <a:off x="68446" y="3848213"/>
-              <a:ext cx="1016904" cy="100218"/>
+              <a:off x="-37527" y="3847460"/>
+              <a:ext cx="1294150" cy="127558"/>
             </a:xfrm>
             <a:prstGeom prst="rect">
               <a:avLst/>
@@ -5185,7 +5185,7 @@
             <a:p>
               <a:pPr algn="l" marL="0" marR="0" indent="0">
                 <a:lnSpc>
-                  <a:spcPts val="1100"/>
+                  <a:spcPts val="1400"/>
                 </a:lnSpc>
                 <a:spcBef>
                   <a:spcPts val="0"/>
@@ -5195,7 +5195,7 @@
                 </a:spcAft>
               </a:pPr>
               <a:r>
-                <a:rPr sz="1100">
+                <a:rPr sz="1400">
                   <a:solidFill>
                     <a:srgbClr val="000000">
                       <a:alpha val="100000"/>
@@ -5217,8 +5217,8 @@
           </p:nvSpPr>
           <p:spPr>
             <a:xfrm>
-              <a:off x="817517" y="1896563"/>
-              <a:ext cx="5413065" cy="82021"/>
+              <a:off x="915645" y="1977589"/>
+              <a:ext cx="7220102" cy="109362"/>
             </a:xfrm>
             <a:prstGeom prst="rect">
               <a:avLst/>
@@ -5231,7 +5231,7 @@
             <a:p>
               <a:pPr algn="l" marL="0" marR="0" indent="0">
                 <a:lnSpc>
-                  <a:spcPts val="900"/>
+                  <a:spcPts val="1200"/>
                 </a:lnSpc>
                 <a:spcBef>
                   <a:spcPts val="0"/>
@@ -5241,7 +5241,7 @@
                 </a:spcAft>
               </a:pPr>
               <a:r>
-                <a:rPr sz="900">
+                <a:rPr sz="1200">
                   <a:solidFill>
                     <a:srgbClr val="404040">
                       <a:alpha val="100000"/>
@@ -5263,8 +5263,8 @@
           </p:nvSpPr>
           <p:spPr>
             <a:xfrm>
-              <a:off x="817517" y="1669789"/>
-              <a:ext cx="2821289" cy="120152"/>
+              <a:off x="915645" y="1688767"/>
+              <a:ext cx="3591763" cy="153070"/>
             </a:xfrm>
             <a:prstGeom prst="rect">
               <a:avLst/>
@@ -5277,7 +5277,7 @@
             <a:p>
               <a:pPr algn="l" marL="0" marR="0" indent="0">
                 <a:lnSpc>
-                  <a:spcPts val="1320"/>
+                  <a:spcPts val="1680"/>
                 </a:lnSpc>
                 <a:spcBef>
                   <a:spcPts val="0"/>
@@ -5287,7 +5287,7 @@
                 </a:spcAft>
               </a:pPr>
               <a:r>
-                <a:rPr sz="1320">
+                <a:rPr sz="1680">
                   <a:solidFill>
                     <a:srgbClr val="000000">
                       <a:alpha val="100000"/>
